--- a/Lessons/03_regression/Slides/regression_slides.pptx
+++ b/Lessons/03_regression/Slides/regression_slides.pptx
@@ -2221,7 +2221,41 @@
             </a:pPr>
             <a:r>
               <a:rPr/>
-              <a:t>Two penalties, one difference: squares or absolute values. Alpha sets the exchange rate between fitting the data and keeping coefficients small; at alpha = 0 both are ordinary least squares.</a:t>
+              <a:t>Two penalties, one difference: squares or absolute values. MSE here is the mean squared error from the first half of the lesson. Lambda sets the exchange rate between fitting the data and keeping coefficients small; at lambda = 0 both are ordinary least squares.</a:t>
+            </a:r>
+          </a:p>
+          <a:p>
+            <a:pPr lvl="0" indent="0" marL="0">
+              <a:buNone/>
+            </a:pPr>
+          </a:p>
+          <a:p>
+            <a:pPr lvl="0" indent="0" marL="0">
+              <a:buNone/>
+            </a:pPr>
+            <a:r>
+              <a:rPr/>
+              <a:t>Say the naming trap out loud, because they will hit it in five minutes: we write the penalty strength as lambda, and reserve alpha for the learning rate. scikit-learn calls the penalty </a:t>
+            </a:r>
+            <a:r>
+              <a:rPr>
+                <a:latin typeface="Courier"/>
+              </a:rPr>
+              <a:t>alpha</a:t>
+            </a:r>
+            <a:r>
+              <a:rPr/>
+              <a:t>. So </a:t>
+            </a:r>
+            <a:r>
+              <a:rPr>
+                <a:latin typeface="Courier"/>
+              </a:rPr>
+              <a:t>Ridge(alpha=0.01)</a:t>
+            </a:r>
+            <a:r>
+              <a:rPr/>
+              <a:t> in code is lambda = 0.01 on this slide.</a:t>
             </a:r>
           </a:p>
           <a:p>
@@ -2359,21 +2393,21 @@
             </a:pPr>
             <a:r>
               <a:rPr/>
-              <a:t>And it stops paying. At alpha 100 the test error is 228, worse than no penalty at all, because the model is now too rigid to follow the curve.</a:t>
-            </a:r>
-          </a:p>
-          <a:p>
-            <a:pPr lvl="0" indent="0" marL="0">
-              <a:buNone/>
-            </a:pPr>
-          </a:p>
-          <a:p>
-            <a:pPr lvl="0" indent="0" marL="0">
-              <a:buNone/>
-            </a:pPr>
-            <a:r>
-              <a:rPr/>
-              <a:t>The useful range spans four orders of magnitude, which is why alpha cannot be guessed.</a:t>
+              <a:t>And it stops paying. At lambda 100 the test error is 228, worse than no penalty at all, because the model is now too rigid to follow the curve.</a:t>
+            </a:r>
+          </a:p>
+          <a:p>
+            <a:pPr lvl="0" indent="0" marL="0">
+              <a:buNone/>
+            </a:pPr>
+          </a:p>
+          <a:p>
+            <a:pPr lvl="0" indent="0" marL="0">
+              <a:buNone/>
+            </a:pPr>
+            <a:r>
+              <a:rPr/>
+              <a:t>The useful range spans four orders of magnitude, which is why lambda cannot be guessed.</a:t>
             </a:r>
           </a:p>
         </p:txBody>
@@ -2483,7 +2517,7 @@
             </a:pPr>
             <a:r>
               <a:rPr/>
-              <a:t>If someone asks how to choose alpha: not by looking at this test curve, because that would be selecting on the test set. Cross-validation, lesson 5.</a:t>
+              <a:t>If someone asks how to choose lambda: not by looking at this test curve, because that would be selecting on the test set. Cross-validation, lesson 5.</a:t>
             </a:r>
           </a:p>
         </p:txBody>
@@ -2703,21 +2737,21 @@
             </a:pPr>
             <a:r>
               <a:rPr/>
-              <a:t>From notebook 3. Left: ridge coefficients approach zero smoothly and never arrive. Right: lasso coefficients hit zero at a finite alpha and stay.</a:t>
-            </a:r>
-          </a:p>
-          <a:p>
-            <a:pPr lvl="0" indent="0" marL="0">
-              <a:buNone/>
-            </a:pPr>
-          </a:p>
-          <a:p>
-            <a:pPr lvl="0" indent="0" marL="0">
-              <a:buNone/>
-            </a:pPr>
-            <a:r>
-              <a:rPr/>
-              <a:t>Give the order in which lasso drops features on the housing data, because it is not arbitrary: garage first at alpha 10,000 — the smallest effect once everything is on a common scale — then distance and age, and by 40,000 only area survives.</a:t>
+              <a:t>From notebook 3. Left: ridge coefficients approach zero smoothly and never arrive. Right: lasso coefficients hit zero at a finite lambda and stay.</a:t>
+            </a:r>
+          </a:p>
+          <a:p>
+            <a:pPr lvl="0" indent="0" marL="0">
+              <a:buNone/>
+            </a:pPr>
+          </a:p>
+          <a:p>
+            <a:pPr lvl="0" indent="0" marL="0">
+              <a:buNone/>
+            </a:pPr>
+            <a:r>
+              <a:rPr/>
+              <a:t>Give the order in which lasso drops features on the housing data, because it is not arbitrary: garage first at lambda 10,000 — the smallest effect once everything is on a common scale — then distance and age, and by 40,000 only area survives.</a:t>
             </a:r>
           </a:p>
           <a:p>
@@ -2745,7 +2779,7 @@
             </a:pPr>
             <a:r>
               <a:rPr/>
-              <a:t>The warning: the selection depends entirely on alpha, so “Lasso chose these features” is never a complete statement.</a:t>
+              <a:t>The warning: the selection depends entirely on lambda, so “Lasso chose these features” is never a complete statement.</a:t>
             </a:r>
           </a:p>
         </p:txBody>
@@ -2965,7 +2999,7 @@
             </a:pPr>
             <a:r>
               <a:rPr/>
-              <a:t>Anyone reading these coefficients to learn what drives house prices would draw nonsense, confidently. With ridge at alpha 10 the same four splits give 38,000 to 41,000 on both columns, split evenly, because two moderate coefficients cost less under a squared penalty than one huge positive and one huge negative.</a:t>
+              <a:t>Anyone reading these coefficients to learn what drives house prices would draw nonsense, confidently. With ridge at lambda 10 the same four splits give 38,000 to 41,000 on both columns, split evenly, because two moderate coefficients cost less under a squared penalty than one huge positive and one huge negative.</a:t>
             </a:r>
           </a:p>
           <a:p>
@@ -3515,7 +3549,7 @@
             </a:pPr>
             <a:r>
               <a:rPr/>
-              <a:t>Flag the two tasks that carry the most marks. Task 4 asks them to justify a choice of alpha without looking at the test set, which is genuinely awkward before lesson 5 and is meant to be: the point is to feel the need for cross-validation before being handed it. Task 6 asks which coefficients they trust and why, which is section 7 of the handout applied.</a:t>
+              <a:t>Flag the two tasks that carry the most marks. Task 4 asks them to justify a choice of lambda without looking at the test set, which is genuinely awkward before lesson 5 and is meant to be: the point is to feel the need for cross-validation before being handed it. Task 6 asks which coefficients they trust and why, which is section 7 of the handout applied.</a:t>
             </a:r>
           </a:p>
           <a:p>
@@ -3941,7 +3975,7 @@
             </a:pPr>
             <a:r>
               <a:rPr/>
-              <a:t>Name the parts: m examples, the half for convenience when we differentiate, the square doing the work discussed.</a:t>
+              <a:t>Name the parts: m examples, the half for convenience when we differentiate, the square doing the work discussed. This is the mean squared error, MSE from here on, and the name is worth saying aloud because every later slide uses the abbreviation.</a:t>
             </a:r>
           </a:p>
           <a:p>
@@ -8442,8 +8476,8 @@
         </p:nvSpPr>
         <p:spPr>
           <a:xfrm>
-            <a:off x="457200" y="205979"/>
-            <a:ext cx="8229600" cy="857250"/>
+            <a:off x="457200" y="205740"/>
+            <a:ext cx="8229600" cy="874395"/>
           </a:xfrm>
         </p:spPr>
         <p:txBody>
@@ -8456,6 +8490,36 @@
             <a:r>
               <a:rPr/>
               <a:t>The table that matters</a:t>
+            </a:r>
+          </a:p>
+        </p:txBody>
+      </p:sp>
+      <p:sp>
+        <p:nvSpPr>
+          <p:cNvPr id="4" name="Text Placeholder 3"/>
+          <p:cNvSpPr>
+            <a:spLocks noGrp="1"/>
+          </p:cNvSpPr>
+          <p:nvPr>
+            <p:ph idx="2" sz="half" type="body"/>
+          </p:nvPr>
+        </p:nvSpPr>
+        <p:spPr>
+          <a:xfrm>
+            <a:off x="457200" y="1234440"/>
+            <a:ext cx="8229600" cy="822960"/>
+          </a:xfrm>
+        </p:spPr>
+        <p:txBody>
+          <a:bodyPr/>
+          <a:lstStyle/>
+          <a:p>
+            <a:pPr lvl="0" indent="0" marL="0">
+              <a:buNone/>
+            </a:pPr>
+            <a:r>
+              <a:rPr/>
+              <a:t>Root mean squared error (RMSE) — the square root of the MSE, so it reads in the units of the target:</a:t>
             </a:r>
           </a:p>
         </p:txBody>
@@ -8471,8 +8535,8 @@
           </p:nvPr>
         </p:nvGraphicFramePr>
         <p:xfrm>
-          <a:off x="457200" y="1193800"/>
-          <a:ext cx="8229600" cy="3390900"/>
+          <a:off x="3568700" y="203200"/>
+          <a:ext cx="5105400" cy="4381500"/>
         </p:xfrm>
         <a:graphic>
           <a:graphicData uri="http://schemas.openxmlformats.org/drawingml/2006/table">
@@ -8481,9 +8545,9 @@
                 <a:tableStyleId>{5C22544A-7EE6-4342-B048-85BDC9FD1C3A}</a:tableStyleId>
               </a:tblPr>
               <a:tblGrid>
-                <a:gridCol w="2743200"/>
-                <a:gridCol w="2743200"/>
-                <a:gridCol w="2743200"/>
+                <a:gridCol w="1701800"/>
+                <a:gridCol w="1701800"/>
+                <a:gridCol w="1701800"/>
               </a:tblGrid>
               <a:tr h="0">
                 <a:tc>
@@ -8880,7 +8944,7 @@
       </p:sp>
       <p:pic>
         <p:nvPicPr>
-          <p:cNvPr descr="eq_9ab055cc39.png" id="0" name="Picture 1"/>
+          <p:cNvPr descr="eq_9b7318ca49.png" id="0" name="Picture 1"/>
           <p:cNvPicPr>
             <a:picLocks noGrp="1" noChangeAspect="1"/>
           </p:cNvPicPr>
@@ -9125,7 +9189,7 @@
                       </a:pPr>
                       <a:r>
                         <a:rPr/>
-                        <a:t>α = 0.01</a:t>
+                        <a:t>λ = 0.01</a:t>
                       </a:r>
                     </a:p>
                   </a:txBody>
@@ -9187,7 +9251,7 @@
                       </a:pPr>
                       <a:r>
                         <a:rPr/>
-                        <a:t>α = 1</a:t>
+                        <a:t>λ = 1</a:t>
                       </a:r>
                     </a:p>
                   </a:txBody>
@@ -9249,7 +9313,7 @@
                       </a:pPr>
                       <a:r>
                         <a:rPr/>
-                        <a:t>α = 100</a:t>
+                        <a:t>λ = 100</a:t>
                       </a:r>
                     </a:p>
                   </a:txBody>
@@ -10896,7 +10960,7 @@
             </a:pPr>
             <a:r>
               <a:rPr/>
-              <a:t>The cost function</a:t>
+              <a:t>The cost function — mean squared error</a:t>
             </a:r>
           </a:p>
         </p:txBody>

--- a/Lessons/03_regression/Slides/regression_slides.pptx
+++ b/Lessons/03_regression/Slides/regression_slides.pptx
@@ -5,7 +5,7 @@
     <p:sldMasterId id="2147483648" r:id="rId1"/>
   </p:sldMasterIdLst>
   <p:notesMasterIdLst>
-    <p:notesMasterId r:id="rId36"/>
+    <p:notesMasterId r:id="rId53"/>
   </p:notesMasterIdLst>
   <p:sldIdLst>
     <p:sldId id="256" r:id="rId2"/>
@@ -42,6 +42,23 @@
     <p:sldId id="287" r:id="rId33"/>
     <p:sldId id="288" r:id="rId34"/>
     <p:sldId id="289" r:id="rId35"/>
+    <p:sldId id="290" r:id="rId36"/>
+    <p:sldId id="291" r:id="rId37"/>
+    <p:sldId id="292" r:id="rId38"/>
+    <p:sldId id="293" r:id="rId39"/>
+    <p:sldId id="294" r:id="rId40"/>
+    <p:sldId id="295" r:id="rId41"/>
+    <p:sldId id="296" r:id="rId42"/>
+    <p:sldId id="297" r:id="rId43"/>
+    <p:sldId id="298" r:id="rId44"/>
+    <p:sldId id="299" r:id="rId45"/>
+    <p:sldId id="300" r:id="rId46"/>
+    <p:sldId id="301" r:id="rId47"/>
+    <p:sldId id="302" r:id="rId48"/>
+    <p:sldId id="303" r:id="rId49"/>
+    <p:sldId id="304" r:id="rId50"/>
+    <p:sldId id="305" r:id="rId51"/>
+    <p:sldId id="306" r:id="rId52"/>
   </p:sldIdLst>
   <p:sldSz cx="9144000" cy="5143500" type="screen16x9"/>
   <p:notesSz cx="6858000" cy="9144000"/>
@@ -653,35 +670,79 @@
             </a:pPr>
             <a:r>
               <a:rPr/>
-              <a:t>Four lines of NumPy, and notebook 1 shows it agreeing with scikit-learn to 1.8e-12 euros per square metre.</a:t>
-            </a:r>
-          </a:p>
-          <a:p>
-            <a:pPr lvl="0" indent="0" marL="0">
-              <a:buNone/>
-            </a:pPr>
-          </a:p>
-          <a:p>
-            <a:pPr lvl="0" indent="0" marL="0">
-              <a:buNone/>
-            </a:pPr>
-            <a:r>
-              <a:rPr/>
-              <a:t>Handout section 3.1 derives it properly and section 3.2 does it by hand on three houses: X transpose X, determinant 22,400, the inverse, and out comes 2,480 euros per square metre against a true 2,400. Three data points, two parameters, 4% error. Worth doing on the board if the room is engaged.</a:t>
-            </a:r>
-          </a:p>
-          <a:p>
-            <a:pPr lvl="0" indent="0" marL="0">
-              <a:buNone/>
-            </a:pPr>
-          </a:p>
-          <a:p>
-            <a:pPr lvl="0" indent="0" marL="0">
-              <a:buNone/>
-            </a:pPr>
-            <a:r>
-              <a:rPr/>
-              <a:t>Also mention the second derivative is X transpose X, which is positive semi-definite, so the cost is convex and any stationary point is global. That is the formal version of “the bowl has one bottom”.</a:t>
+              <a:t>This is the point of the worked example, and it is a design decision rather than a fact of nature.</a:t>
+            </a:r>
+          </a:p>
+          <a:p>
+            <a:pPr lvl="0" indent="0" marL="0">
+              <a:buNone/>
+            </a:pPr>
+          </a:p>
+          <a:p>
+            <a:pPr lvl="0" indent="0" marL="0">
+              <a:buNone/>
+            </a:pPr>
+            <a:r>
+              <a:rPr/>
+              <a:t>Put the third bullet against its opposite, because the contrast is the whole lesson: halving the </a:t>
+            </a:r>
+            <a:r>
+              <a:rPr i="1"/>
+              <a:t>worst</a:t>
+            </a:r>
+            <a:r>
+              <a:rPr/>
+              <a:t> error cuts the cost by 42%, while halving the </a:t>
+            </a:r>
+            <a:r>
+              <a:rPr i="1"/>
+              <a:t>best</a:t>
+            </a:r>
+            <a:r>
+              <a:rPr/>
+              <a:t> one cuts it by 1.7%. Same effort, twenty-five times the reward — so that is where the fit will go.</a:t>
+            </a:r>
+          </a:p>
+          <a:p>
+            <a:pPr lvl="0" indent="0" marL="0">
+              <a:buNone/>
+            </a:pPr>
+          </a:p>
+          <a:p>
+            <a:pPr lvl="0" indent="0" marL="0">
+              <a:buNone/>
+            </a:pPr>
+            <a:r>
+              <a:rPr/>
+              <a:t>Squaring means the fit will bend itself towards its worst predictions and largely ignore the ones it already gets nearly right. Most of the time that is what you want — a model wrong by 40,000 on one house is worse than one wrong by 10,000 on four.</a:t>
+            </a:r>
+          </a:p>
+          <a:p>
+            <a:pPr lvl="0" indent="0" marL="0">
+              <a:buNone/>
+            </a:pPr>
+          </a:p>
+          <a:p>
+            <a:pPr lvl="0" indent="0" marL="0">
+              <a:buNone/>
+            </a:pPr>
+            <a:r>
+              <a:rPr/>
+              <a:t>But say the flip side plainly, because it is lesson 2 arriving from a new direction: one absurd outlier contributes its error squared, so it can drag the entire fit towards itself. If you did not clean the data, least squares will faithfully optimise for the mistake.</a:t>
+            </a:r>
+          </a:p>
+          <a:p>
+            <a:pPr lvl="0" indent="0" marL="0">
+              <a:buNone/>
+            </a:pPr>
+          </a:p>
+          <a:p>
+            <a:pPr lvl="0" indent="0" marL="0">
+              <a:buNone/>
+            </a:pPr>
+            <a:r>
+              <a:rPr/>
+              <a:t>Ask what would change if we minimised absolute error instead. Answer: the fit would follow the bulk of the data and shrug at the outlier — which is what robust regression does, and why it exists.</a:t>
             </a:r>
           </a:p>
         </p:txBody>
@@ -763,49 +824,21 @@
             </a:pPr>
             <a:r>
               <a:rPr/>
-              <a:t>Three failure modes, and the third is the dangerous one because nothing visibly breaks.</a:t>
-            </a:r>
-          </a:p>
-          <a:p>
-            <a:pPr lvl="0" indent="0" marL="0">
-              <a:buNone/>
-            </a:pPr>
-          </a:p>
-          <a:p>
-            <a:pPr lvl="0" indent="0" marL="0">
-              <a:buNone/>
-            </a:pPr>
-            <a:r>
-              <a:rPr/>
-              <a:t>At a thousand features the cube is a billion operations; at a hundred thousand it is out of reach. Every large model in this course is trained iteratively.</a:t>
-            </a:r>
-          </a:p>
-          <a:p>
-            <a:pPr lvl="0" indent="0" marL="0">
-              <a:buNone/>
-            </a:pPr>
-          </a:p>
-          <a:p>
-            <a:pPr lvl="0" indent="0" marL="0">
-              <a:buNone/>
-            </a:pPr>
-            <a:r>
-              <a:rPr/>
-              <a:t>For the second: notebook 3 constructs exactly this, an area column in metres and the same in feet.</a:t>
-            </a:r>
-          </a:p>
-          <a:p>
-            <a:pPr lvl="0" indent="0" marL="0">
-              <a:buNone/>
-            </a:pPr>
-          </a:p>
-          <a:p>
-            <a:pPr lvl="0" indent="0" marL="0">
-              <a:buNone/>
-            </a:pPr>
-            <a:r>
-              <a:rPr/>
-              <a:t>For the third, give the number from notebook 3: a coefficient that moves from 9,261 to 45,307 across four random splits of the same dataset. The matrix was invertible every time. The answer was garbage every time.</a:t>
+              <a:t>From notebook 1. Two parameters, so the cost is a surface over the plane of (slope, intercept), and fitting means finding its lowest point.</a:t>
+            </a:r>
+          </a:p>
+          <a:p>
+            <a:pPr lvl="0" indent="0" marL="0">
+              <a:buNone/>
+            </a:pPr>
+          </a:p>
+          <a:p>
+            <a:pPr lvl="0" indent="0" marL="0">
+              <a:buNone/>
+            </a:pPr>
+            <a:r>
+              <a:rPr/>
+              <a:t>The important structural fact: this bowl is convex. There is one minimum and no local traps. Say that explicitly, because it is a property most methods later in the course do NOT have — lesson 9’s networks have cost surfaces full of local minima, and a great deal of the difficulty of training them comes from exactly that.</a:t>
             </a:r>
           </a:p>
         </p:txBody>
@@ -887,35 +920,49 @@
             </a:pPr>
             <a:r>
               <a:rPr/>
-              <a:t>The intuition before any notation. Take a step downhill, feel again, repeat. That is the entire algorithm.</a:t>
-            </a:r>
-          </a:p>
-          <a:p>
-            <a:pPr lvl="0" indent="0" marL="0">
-              <a:buNone/>
-            </a:pPr>
-          </a:p>
-          <a:p>
-            <a:pPr lvl="0" indent="0" marL="0">
-              <a:buNone/>
-            </a:pPr>
-            <a:r>
-              <a:rPr/>
-              <a:t>The gradient is the direction of steepest ascent, so we walk against it. The learning rate is the length of the stride.</a:t>
-            </a:r>
-          </a:p>
-          <a:p>
-            <a:pPr lvl="0" indent="0" marL="0">
-              <a:buNone/>
-            </a:pPr>
-          </a:p>
-          <a:p>
-            <a:pPr lvl="0" indent="0" marL="0">
-              <a:buNone/>
-            </a:pPr>
-            <a:r>
-              <a:rPr/>
-              <a:t>And the danger is equally intuitive, which is the point of using this picture: stride too far and you cross the valley and end up higher on the far slope. Everyone has done that walking down a steep hill.</a:t>
+              <a:t>Spend a full minute here. This is the intuition; the algebra follows.</a:t>
+            </a:r>
+          </a:p>
+          <a:p>
+            <a:pPr lvl="0" indent="0" marL="0">
+              <a:buNone/>
+            </a:pPr>
+          </a:p>
+          <a:p>
+            <a:pPr lvl="0" indent="0" marL="0">
+              <a:buNone/>
+            </a:pPr>
+            <a:r>
+              <a:rPr/>
+              <a:t>Each feature is a direction the model can move in. Everything the model can predict lies on the flat surface those directions span. The true prices are a point that almost certainly does NOT lie on it — no combination of area and age reproduces them exactly.</a:t>
+            </a:r>
+          </a:p>
+          <a:p>
+            <a:pPr lvl="0" indent="0" marL="0">
+              <a:buNone/>
+            </a:pPr>
+          </a:p>
+          <a:p>
+            <a:pPr lvl="0" indent="0" marL="0">
+              <a:buNone/>
+            </a:pPr>
+            <a:r>
+              <a:rPr/>
+              <a:t>So the best you can do is the closest point on the surface: the shadow, the perpendicular projection.</a:t>
+            </a:r>
+          </a:p>
+          <a:p>
+            <a:pPr lvl="0" indent="0" marL="0">
+              <a:buNone/>
+            </a:pPr>
+          </a:p>
+          <a:p>
+            <a:pPr lvl="0" indent="0" marL="0">
+              <a:buNone/>
+            </a:pPr>
+            <a:r>
+              <a:rPr/>
+              <a:t>Then the punchline, which is the whole method: why perpendicular? Because if the leftover error had any component lying ALONG the surface, you could have moved that way and done better. At the optimum the error must be at right angles to every feature. That is what the normal equations say, and it is where the name comes from.</a:t>
             </a:r>
           </a:p>
         </p:txBody>
@@ -997,49 +1044,35 @@
             </a:pPr>
             <a:r>
               <a:rPr/>
-              <a:t>Read the gradient aloud as a sentence, because its shape carries a lesson: each example pulls the coefficient in proportion to two things — how wrong the prediction was, AND how large that feature was for that example.</a:t>
-            </a:r>
-          </a:p>
-          <a:p>
-            <a:pPr lvl="0" indent="0" marL="0">
-              <a:buNone/>
-            </a:pPr>
-          </a:p>
-          <a:p>
-            <a:pPr lvl="0" indent="0" marL="0">
-              <a:buNone/>
-            </a:pPr>
-            <a:r>
-              <a:rPr/>
-              <a:t>So a 200 square metre house that is badly mispriced moves the area coefficient much more than a 40 square metre one with the same error. The gradient is a weighted vote and the weights are the feature values.</a:t>
-            </a:r>
-          </a:p>
-          <a:p>
-            <a:pPr lvl="0" indent="0" marL="0">
-              <a:buNone/>
-            </a:pPr>
-          </a:p>
-          <a:p>
-            <a:pPr lvl="0" indent="0" marL="0">
-              <a:buNone/>
-            </a:pPr>
-            <a:r>
-              <a:rPr/>
-              <a:t>That is precisely why unscaled features cause trouble, and it is lesson 2’s argument arriving from a different direction. The intercept gradient has no x in it — every example gets an equal vote there.</a:t>
-            </a:r>
-          </a:p>
-          <a:p>
-            <a:pPr lvl="0" indent="0" marL="0">
-              <a:buNone/>
-            </a:pPr>
-          </a:p>
-          <a:p>
-            <a:pPr lvl="0" indent="0" marL="0">
-              <a:buNone/>
-            </a:pPr>
-            <a:r>
-              <a:rPr/>
-              <a:t>Handout 4.2 works one step by hand: after a single update the slope has moved 163 times further than the intercept.</a:t>
+              <a:t>Four lines of NumPy, and notebook 1 shows it agreeing with scikit-learn to 1.8e-12 euros per square metre.</a:t>
+            </a:r>
+          </a:p>
+          <a:p>
+            <a:pPr lvl="0" indent="0" marL="0">
+              <a:buNone/>
+            </a:pPr>
+          </a:p>
+          <a:p>
+            <a:pPr lvl="0" indent="0" marL="0">
+              <a:buNone/>
+            </a:pPr>
+            <a:r>
+              <a:rPr/>
+              <a:t>Handout section 3.1 derives it properly and section 3.2 does it by hand on three houses: X transpose X, determinant 22,400, the inverse, and out comes 2,480 euros per square metre against a true 2,400. Three data points, two parameters, 4% error. Worth doing on the board if the room is engaged.</a:t>
+            </a:r>
+          </a:p>
+          <a:p>
+            <a:pPr lvl="0" indent="0" marL="0">
+              <a:buNone/>
+            </a:pPr>
+          </a:p>
+          <a:p>
+            <a:pPr lvl="0" indent="0" marL="0">
+              <a:buNone/>
+            </a:pPr>
+            <a:r>
+              <a:rPr/>
+              <a:t>Also mention the second derivative is X transpose X, which is positive semi-definite, so the cost is convex and any stationary point is global. That is the formal version of “the bowl has one bottom”.</a:t>
             </a:r>
           </a:p>
         </p:txBody>
@@ -1121,49 +1154,49 @@
             </a:pPr>
             <a:r>
               <a:rPr/>
-              <a:t>Left: too small, correct but slow — the cost falls every iteration and simply takes too many of them. Middle: about right. Right: too large, and it climbs out of the valley.</a:t>
-            </a:r>
-          </a:p>
-          <a:p>
-            <a:pPr lvl="0" indent="0" marL="0">
-              <a:buNone/>
-            </a:pPr>
-          </a:p>
-          <a:p>
-            <a:pPr lvl="0" indent="0" marL="0">
-              <a:buNone/>
-            </a:pPr>
-            <a:r>
-              <a:rPr/>
-              <a:t>The threshold is not folklore. Lesson 2 derived it: for a bowl of curvature c, convergence requires alpha below 2/c, and with several features the binding constraint is the largest curvature — the largest feature variance.</a:t>
-            </a:r>
-          </a:p>
-          <a:p>
-            <a:pPr lvl="0" indent="0" marL="0">
-              <a:buNone/>
-            </a:pPr>
-          </a:p>
-          <a:p>
-            <a:pPr lvl="0" indent="0" marL="0">
-              <a:buNone/>
-            </a:pPr>
-            <a:r>
-              <a:rPr/>
-              <a:t>So the safe learning rate is set by your worst-scaled feature, which is another argument for scaling everything.</a:t>
-            </a:r>
-          </a:p>
-          <a:p>
-            <a:pPr lvl="0" indent="0" marL="0">
-              <a:buNone/>
-            </a:pPr>
-          </a:p>
-          <a:p>
-            <a:pPr lvl="0" indent="0" marL="0">
-              <a:buNone/>
-            </a:pPr>
-            <a:r>
-              <a:rPr/>
-              <a:t>Practical recipe to give them: start at 0.01 on scaled features, watch the cost, divide by three if it rises. Lesson 5 replaces the recipe with a search.</a:t>
+              <a:t>Worth doing on the board if the room is awake — it takes four minutes and it turns the formula into something they have touched.</a:t>
+            </a:r>
+          </a:p>
+          <a:p>
+            <a:pPr lvl="0" indent="0" marL="0">
+              <a:buNone/>
+            </a:pPr>
+          </a:p>
+          <a:p>
+            <a:pPr lvl="0" indent="0" marL="0">
+              <a:buNone/>
+            </a:pPr>
+            <a:r>
+              <a:rPr/>
+              <a:t>The whole method on three data points: build the two-by-two matrix, take its determinant, invert it, multiply. Out comes a slope within 4% of the value that generated the data, from three houses and two parameters.</a:t>
+            </a:r>
+          </a:p>
+          <a:p>
+            <a:pPr lvl="0" indent="0" marL="0">
+              <a:buNone/>
+            </a:pPr>
+          </a:p>
+          <a:p>
+            <a:pPr lvl="0" indent="0" marL="0">
+              <a:buNone/>
+            </a:pPr>
+            <a:r>
+              <a:rPr/>
+              <a:t>Then the honest caveat: three points is nothing, and 4% here is luck as much as method. Notebook 1 does the same on 450 houses and gets 2,410. The point is not the accuracy, it is that the formula is arithmetic you could do by hand.</a:t>
+            </a:r>
+          </a:p>
+          <a:p>
+            <a:pPr lvl="0" indent="0" marL="0">
+              <a:buNone/>
+            </a:pPr>
+          </a:p>
+          <a:p>
+            <a:pPr lvl="0" indent="0" marL="0">
+              <a:buNone/>
+            </a:pPr>
+            <a:r>
+              <a:rPr/>
+              <a:t>Handout section 3.2 carries every intermediate step.</a:t>
             </a:r>
           </a:p>
         </p:txBody>
@@ -1245,35 +1278,49 @@
             </a:pPr>
             <a:r>
               <a:rPr/>
-              <a:t>30 minutes. Let them drive.</a:t>
-            </a:r>
-          </a:p>
-          <a:p>
-            <a:pPr lvl="0" indent="0" marL="0">
-              <a:buNone/>
-            </a:pPr>
-          </a:p>
-          <a:p>
-            <a:pPr lvl="0" indent="0" marL="0">
-              <a:buNone/>
-            </a:pPr>
-            <a:r>
-              <a:rPr/>
-              <a:t>The two moments worth pausing on together. First, the agreement between their four-line normal equation and scikit-learn to twelve decimal places — it lands better than any assurance from the front. Second, the coefficient table at the end, which is the setup for the last section of the lesson.</a:t>
-            </a:r>
-          </a:p>
-          <a:p>
-            <a:pPr lvl="0" indent="0" marL="0">
-              <a:buNone/>
-            </a:pPr>
-          </a:p>
-          <a:p>
-            <a:pPr lvl="0" indent="0" marL="0">
-              <a:buNone/>
-            </a:pPr>
-            <a:r>
-              <a:rPr/>
-              <a:t>Watch for anyone whose gradient descent diverges. That is the “try this” at the end of the notebook and it is a good thing to have happen.</a:t>
+              <a:t>Short slide, big consequence. Setting a gradient to zero finds a flat spot; it does not by itself tell you the flat spot is the lowest point rather than a ridge or a local dip.</a:t>
+            </a:r>
+          </a:p>
+          <a:p>
+            <a:pPr lvl="0" indent="0" marL="0">
+              <a:buNone/>
+            </a:pPr>
+          </a:p>
+          <a:p>
+            <a:pPr lvl="0" indent="0" marL="0">
+              <a:buNone/>
+            </a:pPr>
+            <a:r>
+              <a:rPr/>
+              <a:t>Here it does, because the cost is convex. Give the one-line reason without the algebra: Xᵀ X can never be negative in any direction, since asking for its value in direction v gives the squared length of Xv, and a squared length is never negative.</a:t>
+            </a:r>
+          </a:p>
+          <a:p>
+            <a:pPr lvl="0" indent="0" marL="0">
+              <a:buNone/>
+            </a:pPr>
+          </a:p>
+          <a:p>
+            <a:pPr lvl="0" indent="0" marL="0">
+              <a:buNone/>
+            </a:pPr>
+            <a:r>
+              <a:rPr/>
+              <a:t>Now flag it forward, because this is the slide they should remember in lesson 9: this property is a luxury. Neural network cost surfaces are full of local minima, and a large part of the difficulty of training them is that nobody can promise the point you reached is the point you wanted. Today we can.</a:t>
+            </a:r>
+          </a:p>
+          <a:p>
+            <a:pPr lvl="0" indent="0" marL="0">
+              <a:buNone/>
+            </a:pPr>
+          </a:p>
+          <a:p>
+            <a:pPr lvl="0" indent="0" marL="0">
+              <a:buNone/>
+            </a:pPr>
+            <a:r>
+              <a:rPr/>
+              <a:t>Handout section 3.1, the paragraph headed “Is this really a minimum?”.</a:t>
             </a:r>
           </a:p>
         </p:txBody>
@@ -1355,21 +1402,49 @@
             </a:pPr>
             <a:r>
               <a:rPr/>
-              <a:t>15 minutes. Back for curves, overfitting and regularisation.</a:t>
-            </a:r>
-          </a:p>
-          <a:p>
-            <a:pPr lvl="0" indent="0" marL="0">
-              <a:buNone/>
-            </a:pPr>
-          </a:p>
-          <a:p>
-            <a:pPr lvl="0" indent="0" marL="0">
-              <a:buNone/>
-            </a:pPr>
-            <a:r>
-              <a:rPr/>
-              <a:t>Check who is stuck in notebook 1 — the second half assumes everyone got the coefficient table out, and it is much cheaper to fix now.</a:t>
+              <a:t>Three failure modes, and the third is the dangerous one because nothing visibly breaks.</a:t>
+            </a:r>
+          </a:p>
+          <a:p>
+            <a:pPr lvl="0" indent="0" marL="0">
+              <a:buNone/>
+            </a:pPr>
+          </a:p>
+          <a:p>
+            <a:pPr lvl="0" indent="0" marL="0">
+              <a:buNone/>
+            </a:pPr>
+            <a:r>
+              <a:rPr/>
+              <a:t>At a thousand features the cube is a billion operations; at a hundred thousand it is out of reach. Every large model in this course is trained iteratively.</a:t>
+            </a:r>
+          </a:p>
+          <a:p>
+            <a:pPr lvl="0" indent="0" marL="0">
+              <a:buNone/>
+            </a:pPr>
+          </a:p>
+          <a:p>
+            <a:pPr lvl="0" indent="0" marL="0">
+              <a:buNone/>
+            </a:pPr>
+            <a:r>
+              <a:rPr/>
+              <a:t>For the second: notebook 3 constructs exactly this, an area column in metres and the same in feet.</a:t>
+            </a:r>
+          </a:p>
+          <a:p>
+            <a:pPr lvl="0" indent="0" marL="0">
+              <a:buNone/>
+            </a:pPr>
+          </a:p>
+          <a:p>
+            <a:pPr lvl="0" indent="0" marL="0">
+              <a:buNone/>
+            </a:pPr>
+            <a:r>
+              <a:rPr/>
+              <a:t>For the third, give the number from notebook 3: a coefficient that moves from 9,261 to 45,307 across four random splits of the same dataset. The matrix was invertible every time. The answer was garbage every time.</a:t>
             </a:r>
           </a:p>
         </p:txBody>
@@ -1451,35 +1526,49 @@
             </a:pPr>
             <a:r>
               <a:rPr/>
-              <a:t>Set the problem before the solution. Draw the U shape in the air: consumption high at both ends, minimum somewhere around 18 degrees.</a:t>
-            </a:r>
-          </a:p>
-          <a:p>
-            <a:pPr lvl="0" indent="0" marL="0">
-              <a:buNone/>
-            </a:pPr>
-          </a:p>
-          <a:p>
-            <a:pPr lvl="0" indent="0" marL="0">
-              <a:buNone/>
-            </a:pPr>
-            <a:r>
-              <a:rPr/>
-              <a:t>Ask what a straight line would do here. Someone will say it averages through the middle — right, and it will be too high in the centre and too low at both ends, wrong in a structural way rather than slightly imprecise.</a:t>
-            </a:r>
-          </a:p>
-          <a:p>
-            <a:pPr lvl="0" indent="0" marL="0">
-              <a:buNone/>
-            </a:pPr>
-          </a:p>
-          <a:p>
-            <a:pPr lvl="0" indent="0" marL="0">
-              <a:buNone/>
-            </a:pPr>
-            <a:r>
-              <a:rPr/>
-              <a:t>Notebook 2 has this dataset: 30 days of measurements, which is deliberately few.</a:t>
+              <a:t>This is the number behind “nearly redundant”, and it is the most transferable idea in the first half of the lesson.</a:t>
+            </a:r>
+          </a:p>
+          <a:p>
+            <a:pPr lvl="0" indent="0" marL="0">
+              <a:buNone/>
+            </a:pPr>
+          </a:p>
+          <a:p>
+            <a:pPr lvl="0" indent="0" marL="0">
+              <a:buNone/>
+            </a:pPr>
+            <a:r>
+              <a:rPr/>
+              <a:t>The picture: a round bowl is easy to walk down because every direction behaves the same. Two nearly-identical columns produce a ravine instead — steep across, almost flat along. The flat direction is the one where moving one coefficient up and the other down changes the predictions barely at all, which is precisely why the fit cannot decide between them.</a:t>
+            </a:r>
+          </a:p>
+          <a:p>
+            <a:pPr lvl="0" indent="0" marL="0">
+              <a:buNone/>
+            </a:pPr>
+          </a:p>
+          <a:p>
+            <a:pPr lvl="0" indent="0" marL="0">
+              <a:buNone/>
+            </a:pPr>
+            <a:r>
+              <a:rPr/>
+              <a:t>Then the payoff, which lands twice. For the exact solution, a stretched valley is what makes the inverse enormous and the answer unstable. For gradient descent — next section — one step size has to serve every direction at once, so the steep direction sets the limit and the shallow one crawls. The condition number is, near enough, what sets the iteration count.</a:t>
+            </a:r>
+          </a:p>
+          <a:p>
+            <a:pPr lvl="0" indent="0" marL="0">
+              <a:buNone/>
+            </a:pPr>
+          </a:p>
+          <a:p>
+            <a:pPr lvl="0" indent="0" marL="0">
+              <a:buNone/>
+            </a:pPr>
+            <a:r>
+              <a:rPr/>
+              <a:t>Lesson 2 introduced this for scaling; unscaled features stretch the valley for exactly the same reason. Handout section 4.4.</a:t>
             </a:r>
           </a:p>
         </p:txBody>
@@ -1561,35 +1650,35 @@
             </a:pPr>
             <a:r>
               <a:rPr/>
-              <a:t>The trick, and it surprises people. Nothing in the derivation required the inputs to be straight — only that the model is linear in w, which it still is.</a:t>
-            </a:r>
-          </a:p>
-          <a:p>
-            <a:pPr lvl="0" indent="0" marL="0">
-              <a:buNone/>
-            </a:pPr>
-          </a:p>
-          <a:p>
-            <a:pPr lvl="0" indent="0" marL="0">
-              <a:buNone/>
-            </a:pPr>
-            <a:r>
-              <a:rPr/>
-              <a:t>So this is the same least squares, the same normal equation, the same code, on a design matrix with one extra column. PolynomialFeatures builds those columns.</a:t>
-            </a:r>
-          </a:p>
-          <a:p>
-            <a:pPr lvl="0" indent="0" marL="0">
-              <a:buNone/>
-            </a:pPr>
-          </a:p>
-          <a:p>
-            <a:pPr lvl="0" indent="0" marL="0">
-              <a:buNone/>
-            </a:pPr>
-            <a:r>
-              <a:rPr/>
-              <a:t>The same trick covers interactions like x1 times x2, logarithms, anything you can compute. It is why linear models remain useful on relationships that are not lines.</a:t>
+              <a:t>The intuition before any notation. Take a step downhill, feel again, repeat. That is the entire algorithm.</a:t>
+            </a:r>
+          </a:p>
+          <a:p>
+            <a:pPr lvl="0" indent="0" marL="0">
+              <a:buNone/>
+            </a:pPr>
+          </a:p>
+          <a:p>
+            <a:pPr lvl="0" indent="0" marL="0">
+              <a:buNone/>
+            </a:pPr>
+            <a:r>
+              <a:rPr/>
+              <a:t>The gradient is the direction of steepest ascent, so we walk against it. The learning rate is the length of the stride.</a:t>
+            </a:r>
+          </a:p>
+          <a:p>
+            <a:pPr lvl="0" indent="0" marL="0">
+              <a:buNone/>
+            </a:pPr>
+          </a:p>
+          <a:p>
+            <a:pPr lvl="0" indent="0" marL="0">
+              <a:buNone/>
+            </a:pPr>
+            <a:r>
+              <a:rPr/>
+              <a:t>And the danger is equally intuitive, which is the point of using this picture: stride too far and you cross the valley and end up higher on the far slope. Everyone has done that walking down a steep hill.</a:t>
             </a:r>
           </a:p>
         </p:txBody>
@@ -1671,35 +1760,49 @@
             </a:pPr>
             <a:r>
               <a:rPr/>
-              <a:t>This is the diagnostic to teach. The U in the residuals says: there is structure here the model did not take.</a:t>
-            </a:r>
-          </a:p>
-          <a:p>
-            <a:pPr lvl="0" indent="0" marL="0">
-              <a:buNone/>
-            </a:pPr>
-          </a:p>
-          <a:p>
-            <a:pPr lvl="0" indent="0" marL="0">
-              <a:buNone/>
-            </a:pPr>
-            <a:r>
-              <a:rPr/>
-              <a:t>Contrast with notebook 1, where the residuals were a formless cloud with a spread matching the known noise. That is what “the model got everything” looks like.</a:t>
-            </a:r>
-          </a:p>
-          <a:p>
-            <a:pPr lvl="0" indent="0" marL="0">
-              <a:buNone/>
-            </a:pPr>
-          </a:p>
-          <a:p>
-            <a:pPr lvl="0" indent="0" marL="0">
-              <a:buNone/>
-            </a:pPr>
-            <a:r>
-              <a:rPr/>
-              <a:t>Give them the habit: after fitting anything, plot the residuals against each feature. A pattern is a message.</a:t>
+              <a:t>Read the gradient aloud as a sentence, because its shape carries a lesson: each example pulls the coefficient in proportion to two things — how wrong the prediction was, AND how large that feature was for that example.</a:t>
+            </a:r>
+          </a:p>
+          <a:p>
+            <a:pPr lvl="0" indent="0" marL="0">
+              <a:buNone/>
+            </a:pPr>
+          </a:p>
+          <a:p>
+            <a:pPr lvl="0" indent="0" marL="0">
+              <a:buNone/>
+            </a:pPr>
+            <a:r>
+              <a:rPr/>
+              <a:t>So a 200 square metre house that is badly mispriced moves the area coefficient much more than a 40 square metre one with the same error. The gradient is a weighted vote and the weights are the feature values.</a:t>
+            </a:r>
+          </a:p>
+          <a:p>
+            <a:pPr lvl="0" indent="0" marL="0">
+              <a:buNone/>
+            </a:pPr>
+          </a:p>
+          <a:p>
+            <a:pPr lvl="0" indent="0" marL="0">
+              <a:buNone/>
+            </a:pPr>
+            <a:r>
+              <a:rPr/>
+              <a:t>That is precisely why unscaled features cause trouble, and it is lesson 2’s argument arriving from a different direction. The intercept gradient has no x in it — every example gets an equal vote there.</a:t>
+            </a:r>
+          </a:p>
+          <a:p>
+            <a:pPr lvl="0" indent="0" marL="0">
+              <a:buNone/>
+            </a:pPr>
+          </a:p>
+          <a:p>
+            <a:pPr lvl="0" indent="0" marL="0">
+              <a:buNone/>
+            </a:pPr>
+            <a:r>
+              <a:rPr/>
+              <a:t>Handout 4.2 works one step by hand: after a single update the slope has moved 163 times further than the intercept.</a:t>
             </a:r>
           </a:p>
         </p:txBody>
@@ -1877,35 +1980,57 @@
             </a:pPr>
             <a:r>
               <a:rPr/>
-              <a:t>Degree 1 too rigid, degree 2 right, degree 12 wild.</a:t>
-            </a:r>
-          </a:p>
-          <a:p>
-            <a:pPr lvl="0" indent="0" marL="0">
-              <a:buNone/>
-            </a:pPr>
-          </a:p>
-          <a:p>
-            <a:pPr lvl="0" indent="0" marL="0">
-              <a:buNone/>
-            </a:pPr>
-            <a:r>
-              <a:rPr/>
-              <a:t>Ask them which they would pick if the dashed true curve were not drawn — because that is the real situation. The only thing you ever see is the points.</a:t>
-            </a:r>
-          </a:p>
-          <a:p>
-            <a:pPr lvl="0" indent="0" marL="0">
-              <a:buNone/>
-            </a:pPr>
-          </a:p>
-          <a:p>
-            <a:pPr lvl="0" indent="0" marL="0">
-              <a:buNone/>
-            </a:pPr>
-            <a:r>
-              <a:rPr/>
-              <a:t>Then note the trap in the right-hand panel: it passes closest to the training points of the three. If you selected by training error you would pick it every time.</a:t>
+              <a:t>Both gradients are negative — the model predicts zero for everything, so every prediction is far too low — and both parameters therefore increase. So far, so unremarkable.</a:t>
+            </a:r>
+          </a:p>
+          <a:p>
+            <a:pPr lvl="0" indent="0" marL="0">
+              <a:buNone/>
+            </a:pPr>
+          </a:p>
+          <a:p>
+            <a:pPr lvl="0" indent="0" marL="0">
+              <a:buNone/>
+            </a:pPr>
+            <a:r>
+              <a:rPr/>
+              <a:t>Now the thing to notice, and give the room a moment to spot it: after one identical step the slope has moved </a:t>
+            </a:r>
+            <a:r>
+              <a:rPr b="1"/>
+              <a:t>163 times further</a:t>
+            </a:r>
+            <a:r>
+              <a:rPr/>
+              <a:t> than the intercept.</a:t>
+            </a:r>
+          </a:p>
+          <a:p>
+            <a:pPr lvl="0" indent="0" marL="0">
+              <a:buNone/>
+            </a:pPr>
+          </a:p>
+          <a:p>
+            <a:pPr lvl="0" indent="0" marL="0">
+              <a:buNone/>
+            </a:pPr>
+            <a:r>
+              <a:rPr/>
+              <a:t>Nothing clever caused that. Areas are around 140, and the intercept’s “feature” is always 1, so the slope’s gradient is roughly 140 times larger before anything else happens. With one shared learning rate, the intercept crawls towards its value long after the slope has arrived — which is exactly what notebook 1 shows after 4,000 iterations.</a:t>
+            </a:r>
+          </a:p>
+          <a:p>
+            <a:pPr lvl="0" indent="0" marL="0">
+              <a:buNone/>
+            </a:pPr>
+          </a:p>
+          <a:p>
+            <a:pPr lvl="0" indent="0" marL="0">
+              <a:buNone/>
+            </a:pPr>
+            <a:r>
+              <a:rPr/>
+              <a:t>That is the concrete cost of unscaled features, and the cure is lesson 2’s. Handout section 4.2.</a:t>
             </a:r>
           </a:p>
         </p:txBody>
@@ -1987,49 +2112,63 @@
             </a:pPr>
             <a:r>
               <a:rPr/>
-              <a:t>Read the columns against each other, slowly.</a:t>
-            </a:r>
-          </a:p>
-          <a:p>
-            <a:pPr lvl="0" indent="0" marL="0">
-              <a:buNone/>
-            </a:pPr>
-          </a:p>
-          <a:p>
-            <a:pPr lvl="0" indent="0" marL="0">
-              <a:buNone/>
-            </a:pPr>
-            <a:r>
-              <a:rPr/>
-              <a:t>Training error falls at every single step, 113 down to 16, monotonically, never once suggesting anything is wrong. Test error bottoms out at degree 3 and then climbs: 118 at degree 9, 182 at degree 12.</a:t>
-            </a:r>
-          </a:p>
-          <a:p>
-            <a:pPr lvl="0" indent="0" marL="0">
-              <a:buNone/>
-            </a:pPr>
-          </a:p>
-          <a:p>
-            <a:pPr lvl="0" indent="0" marL="0">
-              <a:buNone/>
-            </a:pPr>
-            <a:r>
-              <a:rPr/>
-              <a:t>So the model that fits the training data best is ten times worse on data it has not seen — and the training error congratulated us the whole way.</a:t>
-            </a:r>
-          </a:p>
-          <a:p>
-            <a:pPr lvl="0" indent="0" marL="0">
-              <a:buNone/>
-            </a:pPr>
-          </a:p>
-          <a:p>
-            <a:pPr lvl="0" indent="0" marL="0">
-              <a:buNone/>
-            </a:pPr>
-            <a:r>
-              <a:rPr/>
-              <a:t>This is lesson 1’s empirical-versus-expected risk with numbers in it. And note how little it took: 21 training points, and by degree 9 the model has nearly as many coefficients as data.</a:t>
+              <a:t>Both panels are from notebook 1, and they are the same run seen two ways.</a:t>
+            </a:r>
+          </a:p>
+          <a:p>
+            <a:pPr lvl="0" indent="0" marL="0">
+              <a:buNone/>
+            </a:pPr>
+          </a:p>
+          <a:p>
+            <a:pPr lvl="0" indent="0" marL="0">
+              <a:buNone/>
+            </a:pPr>
+            <a:r>
+              <a:rPr/>
+              <a:t>Left: the cost against iteration. It drops off a cliff in the first few dozen steps and then flattens into a long tail that is still creeping at 4,000. Point at the flat part and say what it means — the model was essentially fitted very early, and almost all the iterations bought almost nothing.</a:t>
+            </a:r>
+          </a:p>
+          <a:p>
+            <a:pPr lvl="0" indent="0" marL="0">
+              <a:buNone/>
+            </a:pPr>
+          </a:p>
+          <a:p>
+            <a:pPr lvl="0" indent="0" marL="0">
+              <a:buNone/>
+            </a:pPr>
+            <a:r>
+              <a:rPr/>
+              <a:t>Right: the same run drawn on the contours, with the star marking the exact solution from the normal equation. The path arrives quickly in the steep direction and then crawls along the floor of the valley towards the star. That crawl is the previous slide’s 163-to-1 asymmetry, and it is the condition number made visible.</a:t>
+            </a:r>
+          </a:p>
+          <a:p>
+            <a:pPr lvl="0" indent="0" marL="0">
+              <a:buNone/>
+            </a:pPr>
+          </a:p>
+          <a:p>
+            <a:pPr lvl="0" indent="0" marL="0">
+              <a:buNone/>
+            </a:pPr>
+            <a:r>
+              <a:rPr/>
+              <a:t>The two panels are one point: progress stalls because one stride length has to serve a direction that is steep and a direction that is nearly flat.</a:t>
+            </a:r>
+          </a:p>
+          <a:p>
+            <a:pPr lvl="0" indent="0" marL="0">
+              <a:buNone/>
+            </a:pPr>
+          </a:p>
+          <a:p>
+            <a:pPr lvl="0" indent="0" marL="0">
+              <a:buNone/>
+            </a:pPr>
+            <a:r>
+              <a:rPr/>
+              <a:t>Ask what would happen with a much larger stride. Answer on the next slide.</a:t>
             </a:r>
           </a:p>
         </p:txBody>
@@ -2111,35 +2250,49 @@
             </a:pPr>
             <a:r>
               <a:rPr/>
-              <a:t>Here is the mechanism, and it is the setup for everything after the break.</a:t>
-            </a:r>
-          </a:p>
-          <a:p>
-            <a:pPr lvl="0" indent="0" marL="0">
-              <a:buNone/>
-            </a:pPr>
-          </a:p>
-          <a:p>
-            <a:pPr lvl="0" indent="0" marL="0">
-              <a:buNone/>
-            </a:pPr>
-            <a:r>
-              <a:rPr/>
-              <a:t>The huge coefficients work in OPPOSITION. With 21 points and 12 coefficients there are many ways to pass close to every point, and the one least squares finds has terms that nearly cancel — one pushing the curve up where the next pushes it down, the cancellation failing exactly where a training point sits. Between the points, nothing constrains the swing.</a:t>
-            </a:r>
-          </a:p>
-          <a:p>
-            <a:pPr lvl="0" indent="0" marL="0">
-              <a:buNone/>
-            </a:pPr>
-          </a:p>
-          <a:p>
-            <a:pPr lvl="0" indent="0" marL="0">
-              <a:buNone/>
-            </a:pPr>
-            <a:r>
-              <a:rPr/>
-              <a:t>Then the question that leads the rest of the lesson: if enormous opposing coefficients are the symptom, what would happen if we charged for coefficient size?</a:t>
+              <a:t>Left: too small, correct but slow — the cost falls every iteration and simply takes too many of them. Middle: about right. Right: too large, and it climbs out of the valley.</a:t>
+            </a:r>
+          </a:p>
+          <a:p>
+            <a:pPr lvl="0" indent="0" marL="0">
+              <a:buNone/>
+            </a:pPr>
+          </a:p>
+          <a:p>
+            <a:pPr lvl="0" indent="0" marL="0">
+              <a:buNone/>
+            </a:pPr>
+            <a:r>
+              <a:rPr/>
+              <a:t>The threshold is not folklore. Lesson 2 derived it: for a bowl of curvature c, convergence requires alpha below 2/c, and with several features the binding constraint is the largest curvature — the largest feature variance.</a:t>
+            </a:r>
+          </a:p>
+          <a:p>
+            <a:pPr lvl="0" indent="0" marL="0">
+              <a:buNone/>
+            </a:pPr>
+          </a:p>
+          <a:p>
+            <a:pPr lvl="0" indent="0" marL="0">
+              <a:buNone/>
+            </a:pPr>
+            <a:r>
+              <a:rPr/>
+              <a:t>So the safe learning rate is set by your worst-scaled feature, which is another argument for scaling everything.</a:t>
+            </a:r>
+          </a:p>
+          <a:p>
+            <a:pPr lvl="0" indent="0" marL="0">
+              <a:buNone/>
+            </a:pPr>
+          </a:p>
+          <a:p>
+            <a:pPr lvl="0" indent="0" marL="0">
+              <a:buNone/>
+            </a:pPr>
+            <a:r>
+              <a:rPr/>
+              <a:t>Practical recipe to give them: start at 0.01 on scaled features, watch the cost, divide by three if it rises. Lesson 5 replaces the recipe with a search.</a:t>
             </a:r>
           </a:p>
         </p:txBody>
@@ -2221,69 +2374,35 @@
             </a:pPr>
             <a:r>
               <a:rPr/>
-              <a:t>Two penalties, one difference: squares or absolute values. MSE here is the mean squared error from the first half of the lesson. Lambda sets the exchange rate between fitting the data and keeping coefficients small; at lambda = 0 both are ordinary least squares.</a:t>
-            </a:r>
-          </a:p>
-          <a:p>
-            <a:pPr lvl="0" indent="0" marL="0">
-              <a:buNone/>
-            </a:pPr>
-          </a:p>
-          <a:p>
-            <a:pPr lvl="0" indent="0" marL="0">
-              <a:buNone/>
-            </a:pPr>
-            <a:r>
-              <a:rPr/>
-              <a:t>Say the naming trap out loud, because they will hit it in five minutes: we write the penalty strength as lambda, and reserve alpha for the learning rate. scikit-learn calls the penalty </a:t>
-            </a:r>
-            <a:r>
-              <a:rPr>
-                <a:latin typeface="Courier"/>
-              </a:rPr>
-              <a:t>alpha</a:t>
-            </a:r>
-            <a:r>
-              <a:rPr/>
-              <a:t>. So </a:t>
-            </a:r>
-            <a:r>
-              <a:rPr>
-                <a:latin typeface="Courier"/>
-              </a:rPr>
-              <a:t>Ridge(alpha=0.01)</a:t>
-            </a:r>
-            <a:r>
-              <a:rPr/>
-              <a:t> in code is lambda = 0.01 on this slide.</a:t>
-            </a:r>
-          </a:p>
-          <a:p>
-            <a:pPr lvl="0" indent="0" marL="0">
-              <a:buNone/>
-            </a:pPr>
-          </a:p>
-          <a:p>
-            <a:pPr lvl="0" indent="0" marL="0">
-              <a:buNone/>
-            </a:pPr>
-            <a:r>
-              <a:rPr/>
-              <a:t>Two things that are not optional and that students get wrong. The intercept is never penalised — it is not a claim about any feature, and shrinking it would bias every prediction towards zero. And features MUST be scaled first: the penalty is a sum over coefficients, so the same feature in metres and in kilometres attracts penalties differing by a factor of a thousand.</a:t>
-            </a:r>
-          </a:p>
-          <a:p>
-            <a:pPr lvl="0" indent="0" marL="0">
-              <a:buNone/>
-            </a:pPr>
-          </a:p>
-          <a:p>
-            <a:pPr lvl="0" indent="0" marL="0">
-              <a:buNone/>
-            </a:pPr>
-            <a:r>
-              <a:rPr/>
-              <a:t>Lesson 2 introduced scaling for optimisation speed. Here it is correctness.</a:t>
+              <a:t>30 minutes. Let them drive.</a:t>
+            </a:r>
+          </a:p>
+          <a:p>
+            <a:pPr lvl="0" indent="0" marL="0">
+              <a:buNone/>
+            </a:pPr>
+          </a:p>
+          <a:p>
+            <a:pPr lvl="0" indent="0" marL="0">
+              <a:buNone/>
+            </a:pPr>
+            <a:r>
+              <a:rPr/>
+              <a:t>The two moments worth pausing on together. First, the agreement between their four-line normal equation and scikit-learn to twelve decimal places — it lands better than any assurance from the front. Second, the coefficient table at the end, which is the setup for the last section of the lesson.</a:t>
+            </a:r>
+          </a:p>
+          <a:p>
+            <a:pPr lvl="0" indent="0" marL="0">
+              <a:buNone/>
+            </a:pPr>
+          </a:p>
+          <a:p>
+            <a:pPr lvl="0" indent="0" marL="0">
+              <a:buNone/>
+            </a:pPr>
+            <a:r>
+              <a:rPr/>
+              <a:t>Watch for anyone whose gradient descent diverges. That is the “try this” at the end of the notebook and it is a good thing to have happen.</a:t>
             </a:r>
           </a:p>
         </p:txBody>
@@ -2365,49 +2484,21 @@
             </a:pPr>
             <a:r>
               <a:rPr/>
-              <a:t>Read the last column first: 247,514 down to 365, from a penalty of one hundredth. And the test error falls from 182 to 23, which is the noise floor — an eightfold improvement bought with one number.</a:t>
-            </a:r>
-          </a:p>
-          <a:p>
-            <a:pPr lvl="0" indent="0" marL="0">
-              <a:buNone/>
-            </a:pPr>
-          </a:p>
-          <a:p>
-            <a:pPr lvl="0" indent="0" marL="0">
-              <a:buNone/>
-            </a:pPr>
-            <a:r>
-              <a:rPr/>
-              <a:t>Now the training column, which is the honest part: it gets WORSE at every step. 16, 18, 45, 96. That is the trade being made deliberately — a worse fit on the data we have, in exchange for a better fit on data we do not.</a:t>
-            </a:r>
-          </a:p>
-          <a:p>
-            <a:pPr lvl="0" indent="0" marL="0">
-              <a:buNone/>
-            </a:pPr>
-          </a:p>
-          <a:p>
-            <a:pPr lvl="0" indent="0" marL="0">
-              <a:buNone/>
-            </a:pPr>
-            <a:r>
-              <a:rPr/>
-              <a:t>And it stops paying. At lambda 100 the test error is 228, worse than no penalty at all, because the model is now too rigid to follow the curve.</a:t>
-            </a:r>
-          </a:p>
-          <a:p>
-            <a:pPr lvl="0" indent="0" marL="0">
-              <a:buNone/>
-            </a:pPr>
-          </a:p>
-          <a:p>
-            <a:pPr lvl="0" indent="0" marL="0">
-              <a:buNone/>
-            </a:pPr>
-            <a:r>
-              <a:rPr/>
-              <a:t>The useful range spans four orders of magnitude, which is why lambda cannot be guessed.</a:t>
+              <a:t>15 minutes. Back for curves, overfitting and regularisation.</a:t>
+            </a:r>
+          </a:p>
+          <a:p>
+            <a:pPr lvl="0" indent="0" marL="0">
+              <a:buNone/>
+            </a:pPr>
+          </a:p>
+          <a:p>
+            <a:pPr lvl="0" indent="0" marL="0">
+              <a:buNone/>
+            </a:pPr>
+            <a:r>
+              <a:rPr/>
+              <a:t>Check who is stuck in notebook 1 — the second half assumes everyone got the coefficient table out, and it is much cheaper to fix now.</a:t>
             </a:r>
           </a:p>
         </p:txBody>
@@ -2489,35 +2580,35 @@
             </a:pPr>
             <a:r>
               <a:rPr/>
-              <a:t>The same table as a picture. Both ends are failures, and they fail for opposite reasons.</a:t>
-            </a:r>
-          </a:p>
-          <a:p>
-            <a:pPr lvl="0" indent="0" marL="0">
-              <a:buNone/>
-            </a:pPr>
-          </a:p>
-          <a:p>
-            <a:pPr lvl="0" indent="0" marL="0">
-              <a:buNone/>
-            </a:pPr>
-            <a:r>
-              <a:rPr/>
-              <a:t>This shape has a name — the bias-variance trade-off — and lesson 5 gives it the treatment it deserves along with the machinery to find the bottom of that curve honestly. Today the point is only that the bottom exists and is not where either extreme is.</a:t>
-            </a:r>
-          </a:p>
-          <a:p>
-            <a:pPr lvl="0" indent="0" marL="0">
-              <a:buNone/>
-            </a:pPr>
-          </a:p>
-          <a:p>
-            <a:pPr lvl="0" indent="0" marL="0">
-              <a:buNone/>
-            </a:pPr>
-            <a:r>
-              <a:rPr/>
-              <a:t>If someone asks how to choose lambda: not by looking at this test curve, because that would be selecting on the test set. Cross-validation, lesson 5.</a:t>
+              <a:t>Set the problem before the solution. Draw the U shape in the air: consumption high at both ends, minimum somewhere around 18 degrees.</a:t>
+            </a:r>
+          </a:p>
+          <a:p>
+            <a:pPr lvl="0" indent="0" marL="0">
+              <a:buNone/>
+            </a:pPr>
+          </a:p>
+          <a:p>
+            <a:pPr lvl="0" indent="0" marL="0">
+              <a:buNone/>
+            </a:pPr>
+            <a:r>
+              <a:rPr/>
+              <a:t>Ask what a straight line would do here. Someone will say it averages through the middle — right, and it will be too high in the centre and too low at both ends, wrong in a structural way rather than slightly imprecise.</a:t>
+            </a:r>
+          </a:p>
+          <a:p>
+            <a:pPr lvl="0" indent="0" marL="0">
+              <a:buNone/>
+            </a:pPr>
+          </a:p>
+          <a:p>
+            <a:pPr lvl="0" indent="0" marL="0">
+              <a:buNone/>
+            </a:pPr>
+            <a:r>
+              <a:rPr/>
+              <a:t>Notebook 2 has this dataset: 30 days of measurements, which is deliberately few.</a:t>
             </a:r>
           </a:p>
         </p:txBody>
@@ -2599,63 +2690,35 @@
             </a:pPr>
             <a:r>
               <a:rPr/>
-              <a:t>Intuition before algebra again, and this one is worth the time.</a:t>
-            </a:r>
-          </a:p>
-          <a:p>
-            <a:pPr lvl="0" indent="0" marL="0">
-              <a:buNone/>
-            </a:pPr>
-          </a:p>
-          <a:p>
-            <a:pPr lvl="0" indent="0" marL="0">
-              <a:buNone/>
-            </a:pPr>
-            <a:r>
-              <a:rPr/>
-              <a:t>Think of the penalty as a budget: you may spend a fixed total on coefficients and want the best fit that money buys. Draw what you can afford. Charging squares gives a disc; charging absolute values gives a diamond on its corners.</a:t>
-            </a:r>
-          </a:p>
-          <a:p>
-            <a:pPr lvl="0" indent="0" marL="0">
-              <a:buNone/>
-            </a:pPr>
-          </a:p>
-          <a:p>
-            <a:pPr lvl="0" indent="0" marL="0">
-              <a:buNone/>
-            </a:pPr>
-            <a:r>
-              <a:rPr/>
-              <a:t>The best affordable fit is where the error contours first touch the region.</a:t>
-            </a:r>
-          </a:p>
-          <a:p>
-            <a:pPr lvl="0" indent="0" marL="0">
-              <a:buNone/>
-            </a:pPr>
-          </a:p>
-          <a:p>
-            <a:pPr lvl="0" indent="0" marL="0">
-              <a:buNone/>
-            </a:pPr>
-            <a:r>
-              <a:rPr/>
-              <a:t>A disc is smooth, so contact happens at a generic point with both coefficients non-zero. A diamond has corners, its corners lie ON THE AXES, and a corner is a point where one coefficient is exactly zero. Corners stick out, so they get touched first.</a:t>
-            </a:r>
-          </a:p>
-          <a:p>
-            <a:pPr lvl="0" indent="0" marL="0">
-              <a:buNone/>
-            </a:pPr>
-          </a:p>
-          <a:p>
-            <a:pPr lvl="0" indent="0" marL="0">
-              <a:buNone/>
-            </a:pPr>
-            <a:r>
-              <a:rPr/>
-              <a:t>That is the entire reason Lasso produces zeros and Ridge does not. Not a tolerance, not a numerical accident — the shape of the budget.</a:t>
+              <a:t>From notebook 2. Daily energy consumption against outdoor temperature: heating at the cold end, cooling at the warm end, a minimum somewhere around 18 degrees.</a:t>
+            </a:r>
+          </a:p>
+          <a:p>
+            <a:pPr lvl="0" indent="0" marL="0">
+              <a:buNone/>
+            </a:pPr>
+          </a:p>
+          <a:p>
+            <a:pPr lvl="0" indent="0" marL="0">
+              <a:buNone/>
+            </a:pPr>
+            <a:r>
+              <a:rPr/>
+              <a:t>Let them look at it before saying anything. The U is obvious to a human eye in under a second, which is worth remarking on — the hard part was never seeing the shape, it is getting a model to represent it.</a:t>
+            </a:r>
+          </a:p>
+          <a:p>
+            <a:pPr lvl="0" indent="0" marL="0">
+              <a:buNone/>
+            </a:pPr>
+          </a:p>
+          <a:p>
+            <a:pPr lvl="0" indent="0" marL="0">
+              <a:buNone/>
+            </a:pPr>
+            <a:r>
+              <a:rPr/>
+              <a:t>Note the sample size out loud: 21 training points. Deliberately few, because the overfitting we are about to produce needs the model to have nearly as many coefficients as there are observations, and that situation is far more common in real work than people expect.</a:t>
             </a:r>
           </a:p>
         </p:txBody>
@@ -2737,49 +2800,35 @@
             </a:pPr>
             <a:r>
               <a:rPr/>
-              <a:t>From notebook 3. Left: ridge coefficients approach zero smoothly and never arrive. Right: lasso coefficients hit zero at a finite lambda and stay.</a:t>
-            </a:r>
-          </a:p>
-          <a:p>
-            <a:pPr lvl="0" indent="0" marL="0">
-              <a:buNone/>
-            </a:pPr>
-          </a:p>
-          <a:p>
-            <a:pPr lvl="0" indent="0" marL="0">
-              <a:buNone/>
-            </a:pPr>
-            <a:r>
-              <a:rPr/>
-              <a:t>Give the order in which lasso drops features on the housing data, because it is not arbitrary: garage first at lambda 10,000 — the smallest effect once everything is on a common scale — then distance and age, and by 40,000 only area survives.</a:t>
-            </a:r>
-          </a:p>
-          <a:p>
-            <a:pPr lvl="0" indent="0" marL="0">
-              <a:buNone/>
-            </a:pPr>
-          </a:p>
-          <a:p>
-            <a:pPr lvl="0" indent="0" marL="0">
-              <a:buNone/>
-            </a:pPr>
-            <a:r>
-              <a:rPr/>
-              <a:t>Nobody told it which features matter. It was told to keep the total size small, and this is the arrangement that buys the most accuracy per euro of coefficient spent.</a:t>
-            </a:r>
-          </a:p>
-          <a:p>
-            <a:pPr lvl="0" indent="0" marL="0">
-              <a:buNone/>
-            </a:pPr>
-          </a:p>
-          <a:p>
-            <a:pPr lvl="0" indent="0" marL="0">
-              <a:buNone/>
-            </a:pPr>
-            <a:r>
-              <a:rPr/>
-              <a:t>The warning: the selection depends entirely on lambda, so “Lasso chose these features” is never a complete statement.</a:t>
+              <a:t>The trick, and it surprises people. Nothing in the derivation required the inputs to be straight — only that the model is linear in w, which it still is.</a:t>
+            </a:r>
+          </a:p>
+          <a:p>
+            <a:pPr lvl="0" indent="0" marL="0">
+              <a:buNone/>
+            </a:pPr>
+          </a:p>
+          <a:p>
+            <a:pPr lvl="0" indent="0" marL="0">
+              <a:buNone/>
+            </a:pPr>
+            <a:r>
+              <a:rPr/>
+              <a:t>So this is the same least squares, the same normal equation, the same code, on a design matrix with one extra column. PolynomialFeatures builds those columns.</a:t>
+            </a:r>
+          </a:p>
+          <a:p>
+            <a:pPr lvl="0" indent="0" marL="0">
+              <a:buNone/>
+            </a:pPr>
+          </a:p>
+          <a:p>
+            <a:pPr lvl="0" indent="0" marL="0">
+              <a:buNone/>
+            </a:pPr>
+            <a:r>
+              <a:rPr/>
+              <a:t>The same trick covers interactions like x1 times x2, logarithms, anything you can compute. It is why linear models remain useful on relationships that are not lines.</a:t>
             </a:r>
           </a:p>
         </p:txBody>
@@ -2861,35 +2910,35 @@
             </a:pPr>
             <a:r>
               <a:rPr/>
-              <a:t>The situation from the failure-modes slide, made concrete: someone merged two systems and the same fact arrived twice.</a:t>
-            </a:r>
-          </a:p>
-          <a:p>
-            <a:pPr lvl="0" indent="0" marL="0">
-              <a:buNone/>
-            </a:pPr>
-          </a:p>
-          <a:p>
-            <a:pPr lvl="0" indent="0" marL="0">
-              <a:buNone/>
-            </a:pPr>
-            <a:r>
-              <a:rPr/>
-              <a:t>Ask what least squares should do. The honest answer is that it has no basis for choosing between “all the effect on the metres column” and “all of it on the feet column” and everything in between — they all fit identically.</a:t>
-            </a:r>
-          </a:p>
-          <a:p>
-            <a:pPr lvl="0" indent="0" marL="0">
-              <a:buNone/>
-            </a:pPr>
-          </a:p>
-          <a:p>
-            <a:pPr lvl="0" indent="0" marL="0">
-              <a:buNone/>
-            </a:pPr>
-            <a:r>
-              <a:rPr/>
-              <a:t>So it picks one arbitrarily, and the arbitrariness changes with the sample.</a:t>
+              <a:t>This is the diagnostic to teach. The U in the residuals says: there is structure here the model did not take.</a:t>
+            </a:r>
+          </a:p>
+          <a:p>
+            <a:pPr lvl="0" indent="0" marL="0">
+              <a:buNone/>
+            </a:pPr>
+          </a:p>
+          <a:p>
+            <a:pPr lvl="0" indent="0" marL="0">
+              <a:buNone/>
+            </a:pPr>
+            <a:r>
+              <a:rPr/>
+              <a:t>Contrast with notebook 1, where the residuals were a formless cloud with a spread matching the known noise. That is what “the model got everything” looks like.</a:t>
+            </a:r>
+          </a:p>
+          <a:p>
+            <a:pPr lvl="0" indent="0" marL="0">
+              <a:buNone/>
+            </a:pPr>
+          </a:p>
+          <a:p>
+            <a:pPr lvl="0" indent="0" marL="0">
+              <a:buNone/>
+            </a:pPr>
+            <a:r>
+              <a:rPr/>
+              <a:t>Give them the habit: after fitting anything, plot the residuals against each feature. A pattern is a message.</a:t>
             </a:r>
           </a:p>
         </p:txBody>
@@ -2971,49 +3020,49 @@
             </a:pPr>
             <a:r>
               <a:rPr/>
-              <a:t>Same dataset, four different random splits. The area coefficient varies by a factor of five, and its duplicate swings the opposite way to compensate.</a:t>
-            </a:r>
-          </a:p>
-          <a:p>
-            <a:pPr lvl="0" indent="0" marL="0">
-              <a:buNone/>
-            </a:pPr>
-          </a:p>
-          <a:p>
-            <a:pPr lvl="0" indent="0" marL="0">
-              <a:buNone/>
-            </a:pPr>
-            <a:r>
-              <a:rPr/>
-              <a:t>Stress what is and is not broken: the PREDICTIONS are fine throughout — the combined effect is stable at about 2,420, close to the true 2,400. It is the EXPLANATION that is noise.</a:t>
-            </a:r>
-          </a:p>
-          <a:p>
-            <a:pPr lvl="0" indent="0" marL="0">
-              <a:buNone/>
-            </a:pPr>
-          </a:p>
-          <a:p>
-            <a:pPr lvl="0" indent="0" marL="0">
-              <a:buNone/>
-            </a:pPr>
-            <a:r>
-              <a:rPr/>
-              <a:t>Anyone reading these coefficients to learn what drives house prices would draw nonsense, confidently. With ridge at lambda 10 the same four splits give 38,000 to 41,000 on both columns, split evenly, because two moderate coefficients cost less under a squared penalty than one huge positive and one huge negative.</a:t>
-            </a:r>
-          </a:p>
-          <a:p>
-            <a:pPr lvl="0" indent="0" marL="0">
-              <a:buNone/>
-            </a:pPr>
-          </a:p>
-          <a:p>
-            <a:pPr lvl="0" indent="0" marL="0">
-              <a:buNone/>
-            </a:pPr>
-            <a:r>
-              <a:rPr/>
-              <a:t>So ridge is not only a cure for overfitting. It is what makes coefficients readable when features overlap — which in real data they always do.</a:t>
+              <a:t>The contrast to the previous slide, and from notebook 1 — the housing fit, where the model did capture the structure.</a:t>
+            </a:r>
+          </a:p>
+          <a:p>
+            <a:pPr lvl="0" indent="0" marL="0">
+              <a:buNone/>
+            </a:pPr>
+          </a:p>
+          <a:p>
+            <a:pPr lvl="0" indent="0" marL="0">
+              <a:buNone/>
+            </a:pPr>
+            <a:r>
+              <a:rPr/>
+              <a:t>A formless cloud, centred on zero, with no pattern as you sweep left to right. The spread matches the 18,000 euros of noise we know we put in, which is the best possible outcome: the model has taken everything that was there to take, and what remains is the part nobody could have predicted.</a:t>
+            </a:r>
+          </a:p>
+          <a:p>
+            <a:pPr lvl="0" indent="0" marL="0">
+              <a:buNone/>
+            </a:pPr>
+          </a:p>
+          <a:p>
+            <a:pPr lvl="0" indent="0" marL="0">
+              <a:buNone/>
+            </a:pPr>
+            <a:r>
+              <a:rPr/>
+              <a:t>Put the two pictures side by side in words: a U means structure you missed, a cloud means you are done. That is the whole diagnostic, and it costs one line of code after every fit.</a:t>
+            </a:r>
+          </a:p>
+          <a:p>
+            <a:pPr lvl="0" indent="0" marL="0">
+              <a:buNone/>
+            </a:pPr>
+          </a:p>
+          <a:p>
+            <a:pPr lvl="0" indent="0" marL="0">
+              <a:buNone/>
+            </a:pPr>
+            <a:r>
+              <a:rPr/>
+              <a:t>Give them the habit explicitly — plot residuals against each feature, every time. A pattern is a message.</a:t>
             </a:r>
           </a:p>
         </p:txBody>
@@ -3205,49 +3254,35 @@
             </a:pPr>
             <a:r>
               <a:rPr/>
-              <a:t>From notebook 1, and this is the most transferable slide of the lesson.</a:t>
-            </a:r>
-          </a:p>
-          <a:p>
-            <a:pPr lvl="0" indent="0" marL="0">
-              <a:buNone/>
-            </a:pPr>
-          </a:p>
-          <a:p>
-            <a:pPr lvl="0" indent="0" marL="0">
-              <a:buNone/>
-            </a:pPr>
-            <a:r>
-              <a:rPr/>
-              <a:t>The x axis is how correlated each feature is with area; the y axis is how far its estimated coefficient landed from the truth. The three features uncorrelated with area — distance, age, garage — are recovered to within 1%. Bathrooms, at 0.49, is out by 9%. Bedrooms, at 0.77, is out by 17%.</a:t>
-            </a:r>
-          </a:p>
-          <a:p>
-            <a:pPr lvl="0" indent="0" marL="0">
-              <a:buNone/>
-            </a:pPr>
-          </a:p>
-          <a:p>
-            <a:pPr lvl="0" indent="0" marL="0">
-              <a:buNone/>
-            </a:pPr>
-            <a:r>
-              <a:rPr/>
-              <a:t>State the rule: a coefficient is only as trustworthy as its feature is independent. And on a real dataset the same wobble is there with nothing to reveal it — you would just have a number.</a:t>
-            </a:r>
-          </a:p>
-          <a:p>
-            <a:pPr lvl="0" indent="0" marL="0">
-              <a:buNone/>
-            </a:pPr>
-          </a:p>
-          <a:p>
-            <a:pPr lvl="0" indent="0" marL="0">
-              <a:buNone/>
-            </a:pPr>
-            <a:r>
-              <a:rPr/>
-              <a:t>Then the harder point, briefly: a coefficient is an association, not a causal effect. If houses near the centre are older and dearer, age and distance divide the effect between them however the sample suggests. Neither number tells you what would happen if you moved a house.</a:t>
+              <a:t>Degree 1 too rigid, degree 2 right, degree 12 wild.</a:t>
+            </a:r>
+          </a:p>
+          <a:p>
+            <a:pPr lvl="0" indent="0" marL="0">
+              <a:buNone/>
+            </a:pPr>
+          </a:p>
+          <a:p>
+            <a:pPr lvl="0" indent="0" marL="0">
+              <a:buNone/>
+            </a:pPr>
+            <a:r>
+              <a:rPr/>
+              <a:t>Ask them which they would pick if the dashed true curve were not drawn — because that is the real situation. The only thing you ever see is the points.</a:t>
+            </a:r>
+          </a:p>
+          <a:p>
+            <a:pPr lvl="0" indent="0" marL="0">
+              <a:buNone/>
+            </a:pPr>
+          </a:p>
+          <a:p>
+            <a:pPr lvl="0" indent="0" marL="0">
+              <a:buNone/>
+            </a:pPr>
+            <a:r>
+              <a:rPr/>
+              <a:t>Then note the trap in the right-hand panel: it passes closest to the training points of the three. If you selected by training error you would pick it every time.</a:t>
             </a:r>
           </a:p>
         </p:txBody>
@@ -3329,21 +3364,63 @@
             </a:pPr>
             <a:r>
               <a:rPr/>
-              <a:t>30 minutes. The collinear section is the one to make sure everyone reaches — it is the argument they will use in their own projects when a stakeholder asks what the model says drives the outcome.</a:t>
-            </a:r>
-          </a:p>
-          <a:p>
-            <a:pPr lvl="0" indent="0" marL="0">
-              <a:buNone/>
-            </a:pPr>
-          </a:p>
-          <a:p>
-            <a:pPr lvl="0" indent="0" marL="0">
-              <a:buNone/>
-            </a:pPr>
-            <a:r>
-              <a:rPr/>
-              <a:t>The “try this” swaps Ridge for Lasso on the redundant columns. Ask them to predict which way lasso resolves it before running, then to explain why the two penalties disagree. It is a good check of whether the disc-and-diamond picture landed.</a:t>
+              <a:t>Say the name in full before anything else, because every later slide uses the abbreviation: root mean squared error, RMSE, the square root of the mean squared error. Taking the root puts the number back into the units of the target — kilowatt-hours here — so it can be compared with the thing being predicted. An MSE of 285 means nothing to anyone; an RMSE of 16.9 kWh does.</a:t>
+            </a:r>
+          </a:p>
+          <a:p>
+            <a:pPr lvl="0" indent="0" marL="0">
+              <a:buNone/>
+            </a:pPr>
+          </a:p>
+          <a:p>
+            <a:pPr lvl="0" indent="0" marL="0">
+              <a:buNone/>
+            </a:pPr>
+            <a:r>
+              <a:rPr/>
+              <a:t>This is the table the whole lesson turns on. Read the columns against each other, slowly.</a:t>
+            </a:r>
+          </a:p>
+          <a:p>
+            <a:pPr lvl="0" indent="0" marL="0">
+              <a:buNone/>
+            </a:pPr>
+          </a:p>
+          <a:p>
+            <a:pPr lvl="0" indent="0" marL="0">
+              <a:buNone/>
+            </a:pPr>
+            <a:r>
+              <a:rPr/>
+              <a:t>Training error falls at every single step, 113 down to 16, monotonically, never once suggesting anything is wrong. Test error bottoms out at degree 3 and then climbs: 118 at degree 9, 182 at degree 12.</a:t>
+            </a:r>
+          </a:p>
+          <a:p>
+            <a:pPr lvl="0" indent="0" marL="0">
+              <a:buNone/>
+            </a:pPr>
+          </a:p>
+          <a:p>
+            <a:pPr lvl="0" indent="0" marL="0">
+              <a:buNone/>
+            </a:pPr>
+            <a:r>
+              <a:rPr/>
+              <a:t>So the model that fits the training data best is ten times worse on data it has not seen — and the training error congratulated us the whole way.</a:t>
+            </a:r>
+          </a:p>
+          <a:p>
+            <a:pPr lvl="0" indent="0" marL="0">
+              <a:buNone/>
+            </a:pPr>
+          </a:p>
+          <a:p>
+            <a:pPr lvl="0" indent="0" marL="0">
+              <a:buNone/>
+            </a:pPr>
+            <a:r>
+              <a:rPr/>
+              <a:t>This is lesson 1’s empirical-versus-expected risk with numbers in it. And note how little it took: 21 training points, and by degree 9 the model has nearly as many coefficients as data.</a:t>
             </a:r>
           </a:p>
         </p:txBody>
@@ -3425,35 +3502,57 @@
             </a:pPr>
             <a:r>
               <a:rPr/>
-              <a:t>Draw the thread. Lesson 2 prepared data honestly; today we fitted something to it and found that fitting well and explaining well are different goals.</a:t>
-            </a:r>
-          </a:p>
-          <a:p>
-            <a:pPr lvl="0" indent="0" marL="0">
-              <a:buNone/>
-            </a:pPr>
-          </a:p>
-          <a:p>
-            <a:pPr lvl="0" indent="0" marL="0">
-              <a:buNone/>
-            </a:pPr>
-            <a:r>
-              <a:rPr/>
-              <a:t>The one sentence to leave them with: the model that fits your training data best is usually not the one you want.</a:t>
-            </a:r>
-          </a:p>
-          <a:p>
-            <a:pPr lvl="0" indent="0" marL="0">
-              <a:buNone/>
-            </a:pPr>
-          </a:p>
-          <a:p>
-            <a:pPr lvl="0" indent="0" marL="0">
-              <a:buNone/>
-            </a:pPr>
-            <a:r>
-              <a:rPr/>
-              <a:t>Preview lesson 4 in a sentence: same machinery, but the target becomes a category instead of a number — and that single change turns out to require a different cost function, for a reason that is one of the exam derivations.</a:t>
+              <a:t>The previous table as a picture, and the shape is the one to carry out of the room.</a:t>
+            </a:r>
+          </a:p>
+          <a:p>
+            <a:pPr lvl="0" indent="0" marL="0">
+              <a:buNone/>
+            </a:pPr>
+          </a:p>
+          <a:p>
+            <a:pPr lvl="0" indent="0" marL="0">
+              <a:buNone/>
+            </a:pPr>
+            <a:r>
+              <a:rPr/>
+              <a:t>Training error, the lower line, falls monotonically and never once turns up. If that were the only curve you could see — and on your own data it is — you would keep adding degrees forever and congratulate yourself the whole way.</a:t>
+            </a:r>
+          </a:p>
+          <a:p>
+            <a:pPr lvl="0" indent="0" marL="0">
+              <a:buNone/>
+            </a:pPr>
+          </a:p>
+          <a:p>
+            <a:pPr lvl="0" indent="0" marL="0">
+              <a:buNone/>
+            </a:pPr>
+            <a:r>
+              <a:rPr/>
+              <a:t>Test error is the other line, and it turns. The gap between the two curves is the thing with a name: that gap </a:t>
+            </a:r>
+            <a:r>
+              <a:rPr i="1"/>
+              <a:t>is</a:t>
+            </a:r>
+            <a:r>
+              <a:rPr/>
+              <a:t> overfitting, and it widens without limit.</a:t>
+            </a:r>
+          </a:p>
+          <a:p>
+            <a:pPr lvl="0" indent="0" marL="0">
+              <a:buNone/>
+            </a:pPr>
+          </a:p>
+          <a:p>
+            <a:pPr lvl="0" indent="0" marL="0">
+              <a:buNone/>
+            </a:pPr>
+            <a:r>
+              <a:rPr/>
+              <a:t>This is lesson 1’s empirical risk versus expected risk, now with numbers and a picture. Lesson 5 is about measuring the upper curve honestly when you do not have a test set to spend.</a:t>
             </a:r>
           </a:p>
         </p:txBody>
@@ -3535,49 +3634,49 @@
             </a:pPr>
             <a:r>
               <a:rPr/>
-              <a:t>Set it explicitly with the deadline. It uses a new dataset — bike sharing demand — so the exploration is theirs to do.</a:t>
-            </a:r>
-          </a:p>
-          <a:p>
-            <a:pPr lvl="0" indent="0" marL="0">
-              <a:buNone/>
-            </a:pPr>
-          </a:p>
-          <a:p>
-            <a:pPr lvl="0" indent="0" marL="0">
-              <a:buNone/>
-            </a:pPr>
-            <a:r>
-              <a:rPr/>
-              <a:t>Flag the two tasks that carry the most marks. Task 4 asks them to justify a choice of lambda without looking at the test set, which is genuinely awkward before lesson 5 and is meant to be: the point is to feel the need for cross-validation before being handed it. Task 6 asks which coefficients they trust and why, which is section 7 of the handout applied.</a:t>
-            </a:r>
-          </a:p>
-          <a:p>
-            <a:pPr lvl="0" indent="0" marL="0">
-              <a:buNone/>
-            </a:pPr>
-          </a:p>
-          <a:p>
-            <a:pPr lvl="0" indent="0" marL="0">
-              <a:buNone/>
-            </a:pPr>
-            <a:r>
-              <a:rPr/>
-              <a:t>As always: no marks for accuracy.</a:t>
-            </a:r>
-          </a:p>
-          <a:p>
-            <a:pPr lvl="0" indent="0" marL="0">
-              <a:buNone/>
-            </a:pPr>
-          </a:p>
-          <a:p>
-            <a:pPr lvl="0" indent="0" marL="0">
-              <a:buNone/>
-            </a:pPr>
-            <a:r>
-              <a:rPr/>
-              <a:t>Also remind them the project topic must be confirmed by lesson 4 — next week.</a:t>
+              <a:t>20 minutes. This is the shortest of the three notebooks and the most visual.</a:t>
+            </a:r>
+          </a:p>
+          <a:p>
+            <a:pPr lvl="0" indent="0" marL="0">
+              <a:buNone/>
+            </a:pPr>
+          </a:p>
+          <a:p>
+            <a:pPr lvl="0" indent="0" marL="0">
+              <a:buNone/>
+            </a:pPr>
+            <a:r>
+              <a:rPr/>
+              <a:t>Have them run the degree sweep first and stop at the table, then predict which degree wins before scrolling. Most rooms guess too high — the instinct that more flexibility is better is exactly what the lesson is dismantling.</a:t>
+            </a:r>
+          </a:p>
+          <a:p>
+            <a:pPr lvl="0" indent="0" marL="0">
+              <a:buNone/>
+            </a:pPr>
+          </a:p>
+          <a:p>
+            <a:pPr lvl="0" indent="0" marL="0">
+              <a:buNone/>
+            </a:pPr>
+            <a:r>
+              <a:rPr/>
+              <a:t>The moment to make sure everyone reaches is the coefficient printout at the end, because the next slide is about that number and it lands far better if they have just seen it appear on their own screen.</a:t>
+            </a:r>
+          </a:p>
+          <a:p>
+            <a:pPr lvl="0" indent="0" marL="0">
+              <a:buNone/>
+            </a:pPr>
+          </a:p>
+          <a:p>
+            <a:pPr lvl="0" indent="0" marL="0">
+              <a:buNone/>
+            </a:pPr>
+            <a:r>
+              <a:rPr/>
+              <a:t>The “try this” reduces the training set from 21 points to 15 and asks which degree wins then. The answer moves down, which is the first hint that the right amount of flexibility depends on how much data you have — a theme for lesson 5.</a:t>
             </a:r>
           </a:p>
         </p:txBody>
@@ -3600,6 +3699,756 @@
             <a:fld id="{18BDFEC3-8487-43E8-A154-7C12CBC1FFF2}" type="slidenum">
               <a:rPr lang="en-US"/>
               <a:t>34</a:t>
+            </a:fld>
+            <a:endParaRPr lang="en-US"/>
+          </a:p>
+        </p:txBody>
+      </p:sp>
+    </p:spTree>
+  </p:cSld>
+</p:notes>
+</file>
+
+<file path=ppt/notesSlides/notesSlide34.xml><?xml version="1.0" encoding="utf-8"?>
+<p:notes xmlns:a="http://schemas.openxmlformats.org/drawingml/2006/main" xmlns:r="http://schemas.openxmlformats.org/officeDocument/2006/relationships" xmlns:p="http://schemas.openxmlformats.org/presentationml/2006/main">
+  <p:cSld>
+    <p:spTree>
+      <p:nvGrpSpPr>
+        <p:cNvPr id="1" name=""/>
+        <p:cNvGrpSpPr/>
+        <p:nvPr/>
+      </p:nvGrpSpPr>
+      <p:grpSpPr>
+        <a:xfrm>
+          <a:off x="0" y="0"/>
+          <a:ext cx="0" cy="0"/>
+          <a:chOff x="0" y="0"/>
+          <a:chExt cx="0" cy="0"/>
+        </a:xfrm>
+      </p:grpSpPr>
+      <p:sp>
+        <p:nvSpPr>
+          <p:cNvPr id="2" name="Slide Image Placeholder 1"/>
+          <p:cNvSpPr>
+            <a:spLocks noGrp="1" noRot="1" noChangeAspect="1"/>
+          </p:cNvSpPr>
+          <p:nvPr>
+            <p:ph type="sldImg"/>
+          </p:nvPr>
+        </p:nvSpPr>
+        <p:spPr/>
+      </p:sp>
+      <p:sp>
+        <p:nvSpPr>
+          <p:cNvPr id="3" name="Notes Placeholder 2"/>
+          <p:cNvSpPr>
+            <a:spLocks noGrp="1"/>
+          </p:cNvSpPr>
+          <p:nvPr>
+            <p:ph type="body" idx="1"/>
+          </p:nvPr>
+        </p:nvSpPr>
+        <p:spPr/>
+        <p:txBody>
+          <a:bodyPr/>
+          <a:lstStyle/>
+          <a:p>
+            <a:pPr lvl="0" indent="0" marL="0">
+              <a:buNone/>
+            </a:pPr>
+            <a:r>
+              <a:rPr/>
+              <a:t>Here is the mechanism, and it is the setup for everything after the break.</a:t>
+            </a:r>
+          </a:p>
+          <a:p>
+            <a:pPr lvl="0" indent="0" marL="0">
+              <a:buNone/>
+            </a:pPr>
+          </a:p>
+          <a:p>
+            <a:pPr lvl="0" indent="0" marL="0">
+              <a:buNone/>
+            </a:pPr>
+            <a:r>
+              <a:rPr/>
+              <a:t>The huge coefficients work in OPPOSITION. With 21 points and 12 coefficients there are many ways to pass close to every point, and the one least squares finds has terms that nearly cancel — one pushing the curve up where the next pushes it down, the cancellation failing exactly where a training point sits. Between the points, nothing constrains the swing.</a:t>
+            </a:r>
+          </a:p>
+          <a:p>
+            <a:pPr lvl="0" indent="0" marL="0">
+              <a:buNone/>
+            </a:pPr>
+          </a:p>
+          <a:p>
+            <a:pPr lvl="0" indent="0" marL="0">
+              <a:buNone/>
+            </a:pPr>
+            <a:r>
+              <a:rPr/>
+              <a:t>Then the question that leads the rest of the lesson: if enormous opposing coefficients are the symptom, what would happen if we charged for coefficient size?</a:t>
+            </a:r>
+          </a:p>
+        </p:txBody>
+      </p:sp>
+      <p:sp>
+        <p:nvSpPr>
+          <p:cNvPr id="4" name="Slide Number Placeholder 3"/>
+          <p:cNvSpPr>
+            <a:spLocks noGrp="1"/>
+          </p:cNvSpPr>
+          <p:nvPr>
+            <p:ph type="sldNum" sz="quarter" idx="10"/>
+          </p:nvPr>
+        </p:nvSpPr>
+        <p:spPr/>
+        <p:txBody>
+          <a:bodyPr/>
+          <a:lstStyle/>
+          <a:p>
+            <a:fld id="{18BDFEC3-8487-43E8-A154-7C12CBC1FFF2}" type="slidenum">
+              <a:rPr lang="en-US"/>
+              <a:t>35</a:t>
+            </a:fld>
+            <a:endParaRPr lang="en-US"/>
+          </a:p>
+        </p:txBody>
+      </p:sp>
+    </p:spTree>
+  </p:cSld>
+</p:notes>
+</file>
+
+<file path=ppt/notesSlides/notesSlide35.xml><?xml version="1.0" encoding="utf-8"?>
+<p:notes xmlns:a="http://schemas.openxmlformats.org/drawingml/2006/main" xmlns:r="http://schemas.openxmlformats.org/officeDocument/2006/relationships" xmlns:p="http://schemas.openxmlformats.org/presentationml/2006/main">
+  <p:cSld>
+    <p:spTree>
+      <p:nvGrpSpPr>
+        <p:cNvPr id="1" name=""/>
+        <p:cNvGrpSpPr/>
+        <p:nvPr/>
+      </p:nvGrpSpPr>
+      <p:grpSpPr>
+        <a:xfrm>
+          <a:off x="0" y="0"/>
+          <a:ext cx="0" cy="0"/>
+          <a:chOff x="0" y="0"/>
+          <a:chExt cx="0" cy="0"/>
+        </a:xfrm>
+      </p:grpSpPr>
+      <p:sp>
+        <p:nvSpPr>
+          <p:cNvPr id="2" name="Slide Image Placeholder 1"/>
+          <p:cNvSpPr>
+            <a:spLocks noGrp="1" noRot="1" noChangeAspect="1"/>
+          </p:cNvSpPr>
+          <p:nvPr>
+            <p:ph type="sldImg"/>
+          </p:nvPr>
+        </p:nvSpPr>
+        <p:spPr/>
+      </p:sp>
+      <p:sp>
+        <p:nvSpPr>
+          <p:cNvPr id="3" name="Notes Placeholder 2"/>
+          <p:cNvSpPr>
+            <a:spLocks noGrp="1"/>
+          </p:cNvSpPr>
+          <p:nvPr>
+            <p:ph type="body" idx="1"/>
+          </p:nvPr>
+        </p:nvSpPr>
+        <p:spPr/>
+        <p:txBody>
+          <a:bodyPr/>
+          <a:lstStyle/>
+          <a:p>
+            <a:pPr lvl="0" indent="0" marL="0">
+              <a:buNone/>
+            </a:pPr>
+            <a:r>
+              <a:rPr/>
+              <a:t>Two penalties, one difference: squares or absolute values. MSE here is the mean squared error from the first half of the lesson. Lambda sets the exchange rate between fitting the data and keeping coefficients small; at lambda = 0 both are ordinary least squares.</a:t>
+            </a:r>
+          </a:p>
+          <a:p>
+            <a:pPr lvl="0" indent="0" marL="0">
+              <a:buNone/>
+            </a:pPr>
+          </a:p>
+          <a:p>
+            <a:pPr lvl="0" indent="0" marL="0">
+              <a:buNone/>
+            </a:pPr>
+            <a:r>
+              <a:rPr/>
+              <a:t>Say the naming trap out loud, because they will hit it in five minutes: we write the penalty strength as lambda, and reserve alpha for the learning rate. scikit-learn calls the penalty </a:t>
+            </a:r>
+            <a:r>
+              <a:rPr>
+                <a:latin typeface="Courier"/>
+              </a:rPr>
+              <a:t>alpha</a:t>
+            </a:r>
+            <a:r>
+              <a:rPr/>
+              <a:t>. So </a:t>
+            </a:r>
+            <a:r>
+              <a:rPr>
+                <a:latin typeface="Courier"/>
+              </a:rPr>
+              <a:t>Ridge(alpha=0.01)</a:t>
+            </a:r>
+            <a:r>
+              <a:rPr/>
+              <a:t> in code is lambda = 0.01 on this slide.</a:t>
+            </a:r>
+          </a:p>
+          <a:p>
+            <a:pPr lvl="0" indent="0" marL="0">
+              <a:buNone/>
+            </a:pPr>
+          </a:p>
+          <a:p>
+            <a:pPr lvl="0" indent="0" marL="0">
+              <a:buNone/>
+            </a:pPr>
+            <a:r>
+              <a:rPr/>
+              <a:t>Two things that are not optional and that students get wrong. The intercept is never penalised — it is not a claim about any feature, and shrinking it would bias every prediction towards zero. And features MUST be scaled first: the penalty is a sum over coefficients, so the same feature in metres and in kilometres attracts penalties differing by a factor of a thousand.</a:t>
+            </a:r>
+          </a:p>
+          <a:p>
+            <a:pPr lvl="0" indent="0" marL="0">
+              <a:buNone/>
+            </a:pPr>
+          </a:p>
+          <a:p>
+            <a:pPr lvl="0" indent="0" marL="0">
+              <a:buNone/>
+            </a:pPr>
+            <a:r>
+              <a:rPr/>
+              <a:t>Lesson 2 introduced scaling for optimisation speed. Here it is correctness.</a:t>
+            </a:r>
+          </a:p>
+        </p:txBody>
+      </p:sp>
+      <p:sp>
+        <p:nvSpPr>
+          <p:cNvPr id="4" name="Slide Number Placeholder 3"/>
+          <p:cNvSpPr>
+            <a:spLocks noGrp="1"/>
+          </p:cNvSpPr>
+          <p:nvPr>
+            <p:ph type="sldNum" sz="quarter" idx="10"/>
+          </p:nvPr>
+        </p:nvSpPr>
+        <p:spPr/>
+        <p:txBody>
+          <a:bodyPr/>
+          <a:lstStyle/>
+          <a:p>
+            <a:fld id="{18BDFEC3-8487-43E8-A154-7C12CBC1FFF2}" type="slidenum">
+              <a:rPr lang="en-US"/>
+              <a:t>36</a:t>
+            </a:fld>
+            <a:endParaRPr lang="en-US"/>
+          </a:p>
+        </p:txBody>
+      </p:sp>
+    </p:spTree>
+  </p:cSld>
+</p:notes>
+</file>
+
+<file path=ppt/notesSlides/notesSlide36.xml><?xml version="1.0" encoding="utf-8"?>
+<p:notes xmlns:a="http://schemas.openxmlformats.org/drawingml/2006/main" xmlns:r="http://schemas.openxmlformats.org/officeDocument/2006/relationships" xmlns:p="http://schemas.openxmlformats.org/presentationml/2006/main">
+  <p:cSld>
+    <p:spTree>
+      <p:nvGrpSpPr>
+        <p:cNvPr id="1" name=""/>
+        <p:cNvGrpSpPr/>
+        <p:nvPr/>
+      </p:nvGrpSpPr>
+      <p:grpSpPr>
+        <a:xfrm>
+          <a:off x="0" y="0"/>
+          <a:ext cx="0" cy="0"/>
+          <a:chOff x="0" y="0"/>
+          <a:chExt cx="0" cy="0"/>
+        </a:xfrm>
+      </p:grpSpPr>
+      <p:sp>
+        <p:nvSpPr>
+          <p:cNvPr id="2" name="Slide Image Placeholder 1"/>
+          <p:cNvSpPr>
+            <a:spLocks noGrp="1" noRot="1" noChangeAspect="1"/>
+          </p:cNvSpPr>
+          <p:nvPr>
+            <p:ph type="sldImg"/>
+          </p:nvPr>
+        </p:nvSpPr>
+        <p:spPr/>
+      </p:sp>
+      <p:sp>
+        <p:nvSpPr>
+          <p:cNvPr id="3" name="Notes Placeholder 2"/>
+          <p:cNvSpPr>
+            <a:spLocks noGrp="1"/>
+          </p:cNvSpPr>
+          <p:nvPr>
+            <p:ph type="body" idx="1"/>
+          </p:nvPr>
+        </p:nvSpPr>
+        <p:spPr/>
+        <p:txBody>
+          <a:bodyPr/>
+          <a:lstStyle/>
+          <a:p>
+            <a:pPr lvl="0" indent="0" marL="0">
+              <a:buNone/>
+            </a:pPr>
+            <a:r>
+              <a:rPr/>
+              <a:t>Both of these are things students get wrong, and both produce results that look fine, which is what makes them worth a slide of their own.</a:t>
+            </a:r>
+          </a:p>
+          <a:p>
+            <a:pPr lvl="0" indent="0" marL="0">
+              <a:buNone/>
+            </a:pPr>
+          </a:p>
+          <a:p>
+            <a:pPr lvl="0" indent="0" marL="0">
+              <a:buNone/>
+            </a:pPr>
+            <a:r>
+              <a:rPr/>
+              <a:t>The intercept says where the surface sits, not what any feature is worth. Shrinking it would drag every prediction towards zero, which for house prices in euros is a meaningless place to be dragged. scikit-learn handles this for you in both Ridge and Lasso — but only because someone decided it should, not because the formula does it by itself.</a:t>
+            </a:r>
+          </a:p>
+          <a:p>
+            <a:pPr lvl="0" indent="0" marL="0">
+              <a:buNone/>
+            </a:pPr>
+          </a:p>
+          <a:p>
+            <a:pPr lvl="0" indent="0" marL="0">
+              <a:buNone/>
+            </a:pPr>
+            <a:r>
+              <a:rPr/>
+              <a:t>Scaling is the sharper one. The penalty is a sum over coefficients, so the same feature measured in metres and in kilometres attracts penalties differing by a factor of a thousand. Whichever feature happens to be recorded in small units gets a large coefficient and is therefore punished hardest, entirely by accident of the unit someone chose.</a:t>
+            </a:r>
+          </a:p>
+          <a:p>
+            <a:pPr lvl="0" indent="0" marL="0">
+              <a:buNone/>
+            </a:pPr>
+          </a:p>
+          <a:p>
+            <a:pPr lvl="0" indent="0" marL="0">
+              <a:buNone/>
+            </a:pPr>
+            <a:r>
+              <a:rPr/>
+              <a:t>Say the contrast with lesson 2 explicitly, because it is the point: there, scaling was about optimisation speed and you could skip it and still be right. Here it is correctness. Skip it and the model answers a different question.</a:t>
+            </a:r>
+          </a:p>
+          <a:p>
+            <a:pPr lvl="0" indent="0" marL="0">
+              <a:buNone/>
+            </a:pPr>
+          </a:p>
+          <a:p>
+            <a:pPr lvl="0" indent="0" marL="0">
+              <a:buNone/>
+            </a:pPr>
+            <a:r>
+              <a:rPr/>
+              <a:t>Handout section 6.1.</a:t>
+            </a:r>
+          </a:p>
+        </p:txBody>
+      </p:sp>
+      <p:sp>
+        <p:nvSpPr>
+          <p:cNvPr id="4" name="Slide Number Placeholder 3"/>
+          <p:cNvSpPr>
+            <a:spLocks noGrp="1"/>
+          </p:cNvSpPr>
+          <p:nvPr>
+            <p:ph type="sldNum" sz="quarter" idx="10"/>
+          </p:nvPr>
+        </p:nvSpPr>
+        <p:spPr/>
+        <p:txBody>
+          <a:bodyPr/>
+          <a:lstStyle/>
+          <a:p>
+            <a:fld id="{18BDFEC3-8487-43E8-A154-7C12CBC1FFF2}" type="slidenum">
+              <a:rPr lang="en-US"/>
+              <a:t>37</a:t>
+            </a:fld>
+            <a:endParaRPr lang="en-US"/>
+          </a:p>
+        </p:txBody>
+      </p:sp>
+    </p:spTree>
+  </p:cSld>
+</p:notes>
+</file>
+
+<file path=ppt/notesSlides/notesSlide37.xml><?xml version="1.0" encoding="utf-8"?>
+<p:notes xmlns:a="http://schemas.openxmlformats.org/drawingml/2006/main" xmlns:r="http://schemas.openxmlformats.org/officeDocument/2006/relationships" xmlns:p="http://schemas.openxmlformats.org/presentationml/2006/main">
+  <p:cSld>
+    <p:spTree>
+      <p:nvGrpSpPr>
+        <p:cNvPr id="1" name=""/>
+        <p:cNvGrpSpPr/>
+        <p:nvPr/>
+      </p:nvGrpSpPr>
+      <p:grpSpPr>
+        <a:xfrm>
+          <a:off x="0" y="0"/>
+          <a:ext cx="0" cy="0"/>
+          <a:chOff x="0" y="0"/>
+          <a:chExt cx="0" cy="0"/>
+        </a:xfrm>
+      </p:grpSpPr>
+      <p:sp>
+        <p:nvSpPr>
+          <p:cNvPr id="2" name="Slide Image Placeholder 1"/>
+          <p:cNvSpPr>
+            <a:spLocks noGrp="1" noRot="1" noChangeAspect="1"/>
+          </p:cNvSpPr>
+          <p:nvPr>
+            <p:ph type="sldImg"/>
+          </p:nvPr>
+        </p:nvSpPr>
+        <p:spPr/>
+      </p:sp>
+      <p:sp>
+        <p:nvSpPr>
+          <p:cNvPr id="3" name="Notes Placeholder 2"/>
+          <p:cNvSpPr>
+            <a:spLocks noGrp="1"/>
+          </p:cNvSpPr>
+          <p:nvPr>
+            <p:ph type="body" idx="1"/>
+          </p:nvPr>
+        </p:nvSpPr>
+        <p:spPr/>
+        <p:txBody>
+          <a:bodyPr/>
+          <a:lstStyle/>
+          <a:p>
+            <a:pPr lvl="0" indent="0" marL="0">
+              <a:buNone/>
+            </a:pPr>
+            <a:r>
+              <a:rPr/>
+              <a:t>Read the last column first: 247,514 down to 365, from a penalty of one hundredth. And the test error falls from 182 to 23, which is the noise floor — an eightfold improvement bought with one number.</a:t>
+            </a:r>
+          </a:p>
+          <a:p>
+            <a:pPr lvl="0" indent="0" marL="0">
+              <a:buNone/>
+            </a:pPr>
+          </a:p>
+          <a:p>
+            <a:pPr lvl="0" indent="0" marL="0">
+              <a:buNone/>
+            </a:pPr>
+            <a:r>
+              <a:rPr/>
+              <a:t>Now the training column, which is the honest part: it gets WORSE at every step. 16, 18, 45, 96. That is the trade being made deliberately — a worse fit on the data we have, in exchange for a better fit on data we do not.</a:t>
+            </a:r>
+          </a:p>
+          <a:p>
+            <a:pPr lvl="0" indent="0" marL="0">
+              <a:buNone/>
+            </a:pPr>
+          </a:p>
+          <a:p>
+            <a:pPr lvl="0" indent="0" marL="0">
+              <a:buNone/>
+            </a:pPr>
+            <a:r>
+              <a:rPr/>
+              <a:t>And it stops paying. At lambda 100 the test error is 228, worse than no penalty at all, because the model is now too rigid to follow the curve.</a:t>
+            </a:r>
+          </a:p>
+          <a:p>
+            <a:pPr lvl="0" indent="0" marL="0">
+              <a:buNone/>
+            </a:pPr>
+          </a:p>
+          <a:p>
+            <a:pPr lvl="0" indent="0" marL="0">
+              <a:buNone/>
+            </a:pPr>
+            <a:r>
+              <a:rPr/>
+              <a:t>The useful range spans four orders of magnitude, which is why lambda cannot be guessed.</a:t>
+            </a:r>
+          </a:p>
+        </p:txBody>
+      </p:sp>
+      <p:sp>
+        <p:nvSpPr>
+          <p:cNvPr id="4" name="Slide Number Placeholder 3"/>
+          <p:cNvSpPr>
+            <a:spLocks noGrp="1"/>
+          </p:cNvSpPr>
+          <p:nvPr>
+            <p:ph type="sldNum" sz="quarter" idx="10"/>
+          </p:nvPr>
+        </p:nvSpPr>
+        <p:spPr/>
+        <p:txBody>
+          <a:bodyPr/>
+          <a:lstStyle/>
+          <a:p>
+            <a:fld id="{18BDFEC3-8487-43E8-A154-7C12CBC1FFF2}" type="slidenum">
+              <a:rPr lang="en-US"/>
+              <a:t>38</a:t>
+            </a:fld>
+            <a:endParaRPr lang="en-US"/>
+          </a:p>
+        </p:txBody>
+      </p:sp>
+    </p:spTree>
+  </p:cSld>
+</p:notes>
+</file>
+
+<file path=ppt/notesSlides/notesSlide38.xml><?xml version="1.0" encoding="utf-8"?>
+<p:notes xmlns:a="http://schemas.openxmlformats.org/drawingml/2006/main" xmlns:r="http://schemas.openxmlformats.org/officeDocument/2006/relationships" xmlns:p="http://schemas.openxmlformats.org/presentationml/2006/main">
+  <p:cSld>
+    <p:spTree>
+      <p:nvGrpSpPr>
+        <p:cNvPr id="1" name=""/>
+        <p:cNvGrpSpPr/>
+        <p:nvPr/>
+      </p:nvGrpSpPr>
+      <p:grpSpPr>
+        <a:xfrm>
+          <a:off x="0" y="0"/>
+          <a:ext cx="0" cy="0"/>
+          <a:chOff x="0" y="0"/>
+          <a:chExt cx="0" cy="0"/>
+        </a:xfrm>
+      </p:grpSpPr>
+      <p:sp>
+        <p:nvSpPr>
+          <p:cNvPr id="2" name="Slide Image Placeholder 1"/>
+          <p:cNvSpPr>
+            <a:spLocks noGrp="1" noRot="1" noChangeAspect="1"/>
+          </p:cNvSpPr>
+          <p:nvPr>
+            <p:ph type="sldImg"/>
+          </p:nvPr>
+        </p:nvSpPr>
+        <p:spPr/>
+      </p:sp>
+      <p:sp>
+        <p:nvSpPr>
+          <p:cNvPr id="3" name="Notes Placeholder 2"/>
+          <p:cNvSpPr>
+            <a:spLocks noGrp="1"/>
+          </p:cNvSpPr>
+          <p:nvPr>
+            <p:ph type="body" idx="1"/>
+          </p:nvPr>
+        </p:nvSpPr>
+        <p:spPr/>
+        <p:txBody>
+          <a:bodyPr/>
+          <a:lstStyle/>
+          <a:p>
+            <a:pPr lvl="0" indent="0" marL="0">
+              <a:buNone/>
+            </a:pPr>
+            <a:r>
+              <a:rPr/>
+              <a:t>The same table as a picture. Both ends are failures, and they fail for opposite reasons.</a:t>
+            </a:r>
+          </a:p>
+          <a:p>
+            <a:pPr lvl="0" indent="0" marL="0">
+              <a:buNone/>
+            </a:pPr>
+          </a:p>
+          <a:p>
+            <a:pPr lvl="0" indent="0" marL="0">
+              <a:buNone/>
+            </a:pPr>
+            <a:r>
+              <a:rPr/>
+              <a:t>This shape has a name — the bias-variance trade-off — and lesson 5 gives it the treatment it deserves along with the machinery to find the bottom of that curve honestly. Today the point is only that the bottom exists and is not where either extreme is.</a:t>
+            </a:r>
+          </a:p>
+          <a:p>
+            <a:pPr lvl="0" indent="0" marL="0">
+              <a:buNone/>
+            </a:pPr>
+          </a:p>
+          <a:p>
+            <a:pPr lvl="0" indent="0" marL="0">
+              <a:buNone/>
+            </a:pPr>
+            <a:r>
+              <a:rPr/>
+              <a:t>If someone asks how to choose lambda: not by looking at this test curve, because that would be selecting on the test set. Cross-validation, lesson 5.</a:t>
+            </a:r>
+          </a:p>
+        </p:txBody>
+      </p:sp>
+      <p:sp>
+        <p:nvSpPr>
+          <p:cNvPr id="4" name="Slide Number Placeholder 3"/>
+          <p:cNvSpPr>
+            <a:spLocks noGrp="1"/>
+          </p:cNvSpPr>
+          <p:nvPr>
+            <p:ph type="sldNum" sz="quarter" idx="10"/>
+          </p:nvPr>
+        </p:nvSpPr>
+        <p:spPr/>
+        <p:txBody>
+          <a:bodyPr/>
+          <a:lstStyle/>
+          <a:p>
+            <a:fld id="{18BDFEC3-8487-43E8-A154-7C12CBC1FFF2}" type="slidenum">
+              <a:rPr lang="en-US"/>
+              <a:t>39</a:t>
+            </a:fld>
+            <a:endParaRPr lang="en-US"/>
+          </a:p>
+        </p:txBody>
+      </p:sp>
+    </p:spTree>
+  </p:cSld>
+</p:notes>
+</file>
+
+<file path=ppt/notesSlides/notesSlide39.xml><?xml version="1.0" encoding="utf-8"?>
+<p:notes xmlns:a="http://schemas.openxmlformats.org/drawingml/2006/main" xmlns:r="http://schemas.openxmlformats.org/officeDocument/2006/relationships" xmlns:p="http://schemas.openxmlformats.org/presentationml/2006/main">
+  <p:cSld>
+    <p:spTree>
+      <p:nvGrpSpPr>
+        <p:cNvPr id="1" name=""/>
+        <p:cNvGrpSpPr/>
+        <p:nvPr/>
+      </p:nvGrpSpPr>
+      <p:grpSpPr>
+        <a:xfrm>
+          <a:off x="0" y="0"/>
+          <a:ext cx="0" cy="0"/>
+          <a:chOff x="0" y="0"/>
+          <a:chExt cx="0" cy="0"/>
+        </a:xfrm>
+      </p:grpSpPr>
+      <p:sp>
+        <p:nvSpPr>
+          <p:cNvPr id="2" name="Slide Image Placeholder 1"/>
+          <p:cNvSpPr>
+            <a:spLocks noGrp="1" noRot="1" noChangeAspect="1"/>
+          </p:cNvSpPr>
+          <p:nvPr>
+            <p:ph type="sldImg"/>
+          </p:nvPr>
+        </p:nvSpPr>
+        <p:spPr/>
+      </p:sp>
+      <p:sp>
+        <p:nvSpPr>
+          <p:cNvPr id="3" name="Notes Placeholder 2"/>
+          <p:cNvSpPr>
+            <a:spLocks noGrp="1"/>
+          </p:cNvSpPr>
+          <p:nvPr>
+            <p:ph type="body" idx="1"/>
+          </p:nvPr>
+        </p:nvSpPr>
+        <p:spPr/>
+        <p:txBody>
+          <a:bodyPr/>
+          <a:lstStyle/>
+          <a:p>
+            <a:pPr lvl="0" indent="0" marL="0">
+              <a:buNone/>
+            </a:pPr>
+            <a:r>
+              <a:rPr/>
+              <a:t>Put this next to the normal equation from before the break and ask what changed. The answer is: one term. Add lambda down the diagonal of the matrix you invert, and that is the entire modification.</a:t>
+            </a:r>
+          </a:p>
+          <a:p>
+            <a:pPr lvl="0" indent="0" marL="0">
+              <a:buNone/>
+            </a:pPr>
+          </a:p>
+          <a:p>
+            <a:pPr lvl="0" indent="0" marL="0">
+              <a:buNone/>
+            </a:pPr>
+            <a:r>
+              <a:rPr/>
+              <a:t>Everything else is identical — same derivation, same projection idea, same four lines of NumPy. Ridge is not a different method; it is least squares with the floor tilted.</a:t>
+            </a:r>
+          </a:p>
+          <a:p>
+            <a:pPr lvl="0" indent="0" marL="0">
+              <a:buNone/>
+            </a:pPr>
+          </a:p>
+          <a:p>
+            <a:pPr lvl="0" indent="0" marL="0">
+              <a:buNone/>
+            </a:pPr>
+            <a:r>
+              <a:rPr/>
+              <a:t>Note that Lasso has no such formula. The absolute value has a corner, so it cannot be differentiated at zero, and the solution has to be found iteratively. That inconvenience is inseparable from the property that makes Lasso useful — the corner is exactly what produces the zeros.</a:t>
+            </a:r>
+          </a:p>
+          <a:p>
+            <a:pPr lvl="0" indent="0" marL="0">
+              <a:buNone/>
+            </a:pPr>
+          </a:p>
+          <a:p>
+            <a:pPr lvl="0" indent="0" marL="0">
+              <a:buNone/>
+            </a:pPr>
+            <a:r>
+              <a:rPr/>
+              <a:t>Handout section 6.2 derives it in three lines.</a:t>
+            </a:r>
+          </a:p>
+        </p:txBody>
+      </p:sp>
+      <p:sp>
+        <p:nvSpPr>
+          <p:cNvPr id="4" name="Slide Number Placeholder 3"/>
+          <p:cNvSpPr>
+            <a:spLocks noGrp="1"/>
+          </p:cNvSpPr>
+          <p:nvPr>
+            <p:ph type="sldNum" sz="quarter" idx="10"/>
+          </p:nvPr>
+        </p:nvSpPr>
+        <p:spPr/>
+        <p:txBody>
+          <a:bodyPr/>
+          <a:lstStyle/>
+          <a:p>
+            <a:fld id="{18BDFEC3-8487-43E8-A154-7C12CBC1FFF2}" type="slidenum">
+              <a:rPr lang="en-US"/>
+              <a:t>40</a:t>
             </a:fld>
             <a:endParaRPr lang="en-US"/>
           </a:p>
@@ -3659,35 +4508,35 @@
             </a:pPr>
             <a:r>
               <a:rPr/>
-              <a:t>Read it as a sentence, then attack it. Is the hundred-and-first square metre really worth what the fiftieth was? Is a garage worth the same in the centre as in the suburbs, where there is street parking anyway?</a:t>
-            </a:r>
-          </a:p>
-          <a:p>
-            <a:pPr lvl="0" indent="0" marL="0">
-              <a:buNone/>
-            </a:pPr>
-          </a:p>
-          <a:p>
-            <a:pPr lvl="0" indent="0" marL="0">
-              <a:buNone/>
-            </a:pPr>
-            <a:r>
-              <a:rPr/>
-              <a:t>Almost certainly not. The right response is not to abandon linear models but to know what you have assumed — section 5 shows how to check the assumption and how to relax it when it fails.</a:t>
-            </a:r>
-          </a:p>
-          <a:p>
-            <a:pPr lvl="0" indent="0" marL="0">
-              <a:buNone/>
-            </a:pPr>
-          </a:p>
-          <a:p>
-            <a:pPr lvl="0" indent="0" marL="0">
-              <a:buNone/>
-            </a:pPr>
-            <a:r>
-              <a:rPr/>
-              <a:t>Ask the room for a feature where the constant-per-unit claim would obviously break. Bedrooms is a good answer: the tenth bedroom is not worth what the second was.</a:t>
+              <a:t>From notebook 1. Before any model, look at the data — the habit lesson 2 spent three hours arguing for.</a:t>
+            </a:r>
+          </a:p>
+          <a:p>
+            <a:pPr lvl="0" indent="0" marL="0">
+              <a:buNone/>
+            </a:pPr>
+          </a:p>
+          <a:p>
+            <a:pPr lvl="0" indent="0" marL="0">
+              <a:buNone/>
+            </a:pPr>
+            <a:r>
+              <a:rPr/>
+              <a:t>Two things to point at. The cloud clearly slopes, so a line is a reasonable first guess; and the spread around that slope is wide, which is the 18,000 euros of noise we put in. That spread is the floor: no model, however clever, can predict these prices better than the noise allows.</a:t>
+            </a:r>
+          </a:p>
+          <a:p>
+            <a:pPr lvl="0" indent="0" marL="0">
+              <a:buNone/>
+            </a:pPr>
+          </a:p>
+          <a:p>
+            <a:pPr lvl="0" indent="0" marL="0">
+              <a:buNone/>
+            </a:pPr>
+            <a:r>
+              <a:rPr/>
+              <a:t>Ask the room to eyeball the slope in euros per square metre before you show any fit. Someone usually lands near 2,400, and having guessed it makes the fitted number mean something when it arrives.</a:t>
             </a:r>
           </a:p>
         </p:txBody>
@@ -3710,6 +4559,1268 @@
             <a:fld id="{18BDFEC3-8487-43E8-A154-7C12CBC1FFF2}" type="slidenum">
               <a:rPr lang="en-US"/>
               <a:t>5</a:t>
+            </a:fld>
+            <a:endParaRPr lang="en-US"/>
+          </a:p>
+        </p:txBody>
+      </p:sp>
+    </p:spTree>
+  </p:cSld>
+</p:notes>
+</file>
+
+<file path=ppt/notesSlides/notesSlide40.xml><?xml version="1.0" encoding="utf-8"?>
+<p:notes xmlns:a="http://schemas.openxmlformats.org/drawingml/2006/main" xmlns:r="http://schemas.openxmlformats.org/officeDocument/2006/relationships" xmlns:p="http://schemas.openxmlformats.org/presentationml/2006/main">
+  <p:cSld>
+    <p:spTree>
+      <p:nvGrpSpPr>
+        <p:cNvPr id="1" name=""/>
+        <p:cNvGrpSpPr/>
+        <p:nvPr/>
+      </p:nvGrpSpPr>
+      <p:grpSpPr>
+        <a:xfrm>
+          <a:off x="0" y="0"/>
+          <a:ext cx="0" cy="0"/>
+          <a:chOff x="0" y="0"/>
+          <a:chExt cx="0" cy="0"/>
+        </a:xfrm>
+      </p:grpSpPr>
+      <p:sp>
+        <p:nvSpPr>
+          <p:cNvPr id="2" name="Slide Image Placeholder 1"/>
+          <p:cNvSpPr>
+            <a:spLocks noGrp="1" noRot="1" noChangeAspect="1"/>
+          </p:cNvSpPr>
+          <p:nvPr>
+            <p:ph type="sldImg"/>
+          </p:nvPr>
+        </p:nvSpPr>
+        <p:spPr/>
+      </p:sp>
+      <p:sp>
+        <p:nvSpPr>
+          <p:cNvPr id="3" name="Notes Placeholder 2"/>
+          <p:cNvSpPr>
+            <a:spLocks noGrp="1"/>
+          </p:cNvSpPr>
+          <p:nvPr>
+            <p:ph type="body" idx="1"/>
+          </p:nvPr>
+        </p:nvSpPr>
+        <p:spPr/>
+        <p:txBody>
+          <a:bodyPr/>
+          <a:lstStyle/>
+          <a:p>
+            <a:pPr lvl="0" indent="0" marL="0">
+              <a:buNone/>
+            </a:pPr>
+            <a:r>
+              <a:rPr/>
+              <a:t>Come back to the ravine picture from before the break. The reason two identical columns break least squares is that there is a direction in which moving the coefficients changes the predictions not at all — the valley is perfectly flat along it, so there is no unique lowest point. Infinitely many answers fit equally well.</a:t>
+            </a:r>
+          </a:p>
+          <a:p>
+            <a:pPr lvl="0" indent="0" marL="0">
+              <a:buNone/>
+            </a:pPr>
+          </a:p>
+          <a:p>
+            <a:pPr lvl="0" indent="0" marL="0">
+              <a:buNone/>
+            </a:pPr>
+            <a:r>
+              <a:rPr/>
+              <a:t>Ridge tilts the floor. Once coefficient size costs something, moving along that flat direction is no longer free, the flatness acquires a slope, and a single lowest point appears.</a:t>
+            </a:r>
+          </a:p>
+          <a:p>
+            <a:pPr lvl="0" indent="0" marL="0">
+              <a:buNone/>
+            </a:pPr>
+          </a:p>
+          <a:p>
+            <a:pPr lvl="0" indent="0" marL="0">
+              <a:buNone/>
+            </a:pPr>
+            <a:r>
+              <a:rPr/>
+              <a:t>The algebraic version is the third bullet and it is worth one sentence: adding lambda to the diagonal shifts every eigenvalue up by lambda, and a matrix is singular exactly when one of its eigenvalues is zero. So for any lambda above zero, it cannot be singular. </a:t>
+            </a:r>
+            <a:r>
+              <a:rPr b="1"/>
+              <a:t>Ridge always has a unique answer, even where least squares has none at all.</a:t>
+            </a:r>
+          </a:p>
+          <a:p>
+            <a:pPr lvl="0" indent="0" marL="0">
+              <a:buNone/>
+            </a:pPr>
+          </a:p>
+          <a:p>
+            <a:pPr lvl="0" indent="0" marL="0">
+              <a:buNone/>
+            </a:pPr>
+            <a:r>
+              <a:rPr/>
+              <a:t>Worth saying plainly: Hoerl and Kennard invented ridge in 1970 for this problem, not for overfitting. The overfitting cure was the side effect.</a:t>
+            </a:r>
+          </a:p>
+        </p:txBody>
+      </p:sp>
+      <p:sp>
+        <p:nvSpPr>
+          <p:cNvPr id="4" name="Slide Number Placeholder 3"/>
+          <p:cNvSpPr>
+            <a:spLocks noGrp="1"/>
+          </p:cNvSpPr>
+          <p:nvPr>
+            <p:ph type="sldNum" sz="quarter" idx="10"/>
+          </p:nvPr>
+        </p:nvSpPr>
+        <p:spPr/>
+        <p:txBody>
+          <a:bodyPr/>
+          <a:lstStyle/>
+          <a:p>
+            <a:fld id="{18BDFEC3-8487-43E8-A154-7C12CBC1FFF2}" type="slidenum">
+              <a:rPr lang="en-US"/>
+              <a:t>41</a:t>
+            </a:fld>
+            <a:endParaRPr lang="en-US"/>
+          </a:p>
+        </p:txBody>
+      </p:sp>
+    </p:spTree>
+  </p:cSld>
+</p:notes>
+</file>
+
+<file path=ppt/notesSlides/notesSlide41.xml><?xml version="1.0" encoding="utf-8"?>
+<p:notes xmlns:a="http://schemas.openxmlformats.org/drawingml/2006/main" xmlns:r="http://schemas.openxmlformats.org/officeDocument/2006/relationships" xmlns:p="http://schemas.openxmlformats.org/presentationml/2006/main">
+  <p:cSld>
+    <p:spTree>
+      <p:nvGrpSpPr>
+        <p:cNvPr id="1" name=""/>
+        <p:cNvGrpSpPr/>
+        <p:nvPr/>
+      </p:nvGrpSpPr>
+      <p:grpSpPr>
+        <a:xfrm>
+          <a:off x="0" y="0"/>
+          <a:ext cx="0" cy="0"/>
+          <a:chOff x="0" y="0"/>
+          <a:chExt cx="0" cy="0"/>
+        </a:xfrm>
+      </p:grpSpPr>
+      <p:sp>
+        <p:nvSpPr>
+          <p:cNvPr id="2" name="Slide Image Placeholder 1"/>
+          <p:cNvSpPr>
+            <a:spLocks noGrp="1" noRot="1" noChangeAspect="1"/>
+          </p:cNvSpPr>
+          <p:nvPr>
+            <p:ph type="sldImg"/>
+          </p:nvPr>
+        </p:nvSpPr>
+        <p:spPr/>
+      </p:sp>
+      <p:sp>
+        <p:nvSpPr>
+          <p:cNvPr id="3" name="Notes Placeholder 2"/>
+          <p:cNvSpPr>
+            <a:spLocks noGrp="1"/>
+          </p:cNvSpPr>
+          <p:nvPr>
+            <p:ph type="body" idx="1"/>
+          </p:nvPr>
+        </p:nvSpPr>
+        <p:spPr/>
+        <p:txBody>
+          <a:bodyPr/>
+          <a:lstStyle/>
+          <a:p>
+            <a:pPr lvl="0" indent="0" marL="0">
+              <a:buNone/>
+            </a:pPr>
+            <a:r>
+              <a:rPr/>
+              <a:t>Intuition before algebra again, and this one is worth the time.</a:t>
+            </a:r>
+          </a:p>
+          <a:p>
+            <a:pPr lvl="0" indent="0" marL="0">
+              <a:buNone/>
+            </a:pPr>
+          </a:p>
+          <a:p>
+            <a:pPr lvl="0" indent="0" marL="0">
+              <a:buNone/>
+            </a:pPr>
+            <a:r>
+              <a:rPr/>
+              <a:t>Think of the penalty as a budget: you may spend a fixed total on coefficients and want the best fit that money buys. Draw what you can afford. Charging squares gives a disc; charging absolute values gives a diamond on its corners.</a:t>
+            </a:r>
+          </a:p>
+          <a:p>
+            <a:pPr lvl="0" indent="0" marL="0">
+              <a:buNone/>
+            </a:pPr>
+          </a:p>
+          <a:p>
+            <a:pPr lvl="0" indent="0" marL="0">
+              <a:buNone/>
+            </a:pPr>
+            <a:r>
+              <a:rPr/>
+              <a:t>The best affordable fit is where the error contours first touch the region.</a:t>
+            </a:r>
+          </a:p>
+          <a:p>
+            <a:pPr lvl="0" indent="0" marL="0">
+              <a:buNone/>
+            </a:pPr>
+          </a:p>
+          <a:p>
+            <a:pPr lvl="0" indent="0" marL="0">
+              <a:buNone/>
+            </a:pPr>
+            <a:r>
+              <a:rPr/>
+              <a:t>A disc is smooth, so contact happens at a generic point with both coefficients non-zero. A diamond has corners, its corners lie ON THE AXES, and a corner is a point where one coefficient is exactly zero. Corners stick out, so they get touched first.</a:t>
+            </a:r>
+          </a:p>
+          <a:p>
+            <a:pPr lvl="0" indent="0" marL="0">
+              <a:buNone/>
+            </a:pPr>
+          </a:p>
+          <a:p>
+            <a:pPr lvl="0" indent="0" marL="0">
+              <a:buNone/>
+            </a:pPr>
+            <a:r>
+              <a:rPr/>
+              <a:t>That is the entire reason Lasso produces zeros and Ridge does not. Not a tolerance, not a numerical accident — the shape of the budget.</a:t>
+            </a:r>
+          </a:p>
+        </p:txBody>
+      </p:sp>
+      <p:sp>
+        <p:nvSpPr>
+          <p:cNvPr id="4" name="Slide Number Placeholder 3"/>
+          <p:cNvSpPr>
+            <a:spLocks noGrp="1"/>
+          </p:cNvSpPr>
+          <p:nvPr>
+            <p:ph type="sldNum" sz="quarter" idx="10"/>
+          </p:nvPr>
+        </p:nvSpPr>
+        <p:spPr/>
+        <p:txBody>
+          <a:bodyPr/>
+          <a:lstStyle/>
+          <a:p>
+            <a:fld id="{18BDFEC3-8487-43E8-A154-7C12CBC1FFF2}" type="slidenum">
+              <a:rPr lang="en-US"/>
+              <a:t>42</a:t>
+            </a:fld>
+            <a:endParaRPr lang="en-US"/>
+          </a:p>
+        </p:txBody>
+      </p:sp>
+    </p:spTree>
+  </p:cSld>
+</p:notes>
+</file>
+
+<file path=ppt/notesSlides/notesSlide42.xml><?xml version="1.0" encoding="utf-8"?>
+<p:notes xmlns:a="http://schemas.openxmlformats.org/drawingml/2006/main" xmlns:r="http://schemas.openxmlformats.org/officeDocument/2006/relationships" xmlns:p="http://schemas.openxmlformats.org/presentationml/2006/main">
+  <p:cSld>
+    <p:spTree>
+      <p:nvGrpSpPr>
+        <p:cNvPr id="1" name=""/>
+        <p:cNvGrpSpPr/>
+        <p:nvPr/>
+      </p:nvGrpSpPr>
+      <p:grpSpPr>
+        <a:xfrm>
+          <a:off x="0" y="0"/>
+          <a:ext cx="0" cy="0"/>
+          <a:chOff x="0" y="0"/>
+          <a:chExt cx="0" cy="0"/>
+        </a:xfrm>
+      </p:grpSpPr>
+      <p:sp>
+        <p:nvSpPr>
+          <p:cNvPr id="2" name="Slide Image Placeholder 1"/>
+          <p:cNvSpPr>
+            <a:spLocks noGrp="1" noRot="1" noChangeAspect="1"/>
+          </p:cNvSpPr>
+          <p:nvPr>
+            <p:ph type="sldImg"/>
+          </p:nvPr>
+        </p:nvSpPr>
+        <p:spPr/>
+      </p:sp>
+      <p:sp>
+        <p:nvSpPr>
+          <p:cNvPr id="3" name="Notes Placeholder 2"/>
+          <p:cNvSpPr>
+            <a:spLocks noGrp="1"/>
+          </p:cNvSpPr>
+          <p:nvPr>
+            <p:ph type="body" idx="1"/>
+          </p:nvPr>
+        </p:nvSpPr>
+        <p:spPr/>
+        <p:txBody>
+          <a:bodyPr/>
+          <a:lstStyle/>
+          <a:p>
+            <a:pPr lvl="0" indent="0" marL="0">
+              <a:buNone/>
+            </a:pPr>
+            <a:r>
+              <a:rPr/>
+              <a:t>From notebook 3. Left: ridge coefficients approach zero smoothly and never arrive. Right: lasso coefficients hit zero at a finite lambda and stay.</a:t>
+            </a:r>
+          </a:p>
+          <a:p>
+            <a:pPr lvl="0" indent="0" marL="0">
+              <a:buNone/>
+            </a:pPr>
+          </a:p>
+          <a:p>
+            <a:pPr lvl="0" indent="0" marL="0">
+              <a:buNone/>
+            </a:pPr>
+            <a:r>
+              <a:rPr/>
+              <a:t>Give the order in which lasso drops features on the housing data, because it is not arbitrary: garage first at lambda 10,000 — the smallest effect once everything is on a common scale — then distance and age, and by 40,000 only area survives.</a:t>
+            </a:r>
+          </a:p>
+          <a:p>
+            <a:pPr lvl="0" indent="0" marL="0">
+              <a:buNone/>
+            </a:pPr>
+          </a:p>
+          <a:p>
+            <a:pPr lvl="0" indent="0" marL="0">
+              <a:buNone/>
+            </a:pPr>
+            <a:r>
+              <a:rPr/>
+              <a:t>Nobody told it which features matter. It was told to keep the total size small, and this is the arrangement that buys the most accuracy per euro of coefficient spent.</a:t>
+            </a:r>
+          </a:p>
+          <a:p>
+            <a:pPr lvl="0" indent="0" marL="0">
+              <a:buNone/>
+            </a:pPr>
+          </a:p>
+          <a:p>
+            <a:pPr lvl="0" indent="0" marL="0">
+              <a:buNone/>
+            </a:pPr>
+            <a:r>
+              <a:rPr/>
+              <a:t>The warning: the selection depends entirely on lambda, so “Lasso chose these features” is never a complete statement.</a:t>
+            </a:r>
+          </a:p>
+        </p:txBody>
+      </p:sp>
+      <p:sp>
+        <p:nvSpPr>
+          <p:cNvPr id="4" name="Slide Number Placeholder 3"/>
+          <p:cNvSpPr>
+            <a:spLocks noGrp="1"/>
+          </p:cNvSpPr>
+          <p:nvPr>
+            <p:ph type="sldNum" sz="quarter" idx="10"/>
+          </p:nvPr>
+        </p:nvSpPr>
+        <p:spPr/>
+        <p:txBody>
+          <a:bodyPr/>
+          <a:lstStyle/>
+          <a:p>
+            <a:fld id="{18BDFEC3-8487-43E8-A154-7C12CBC1FFF2}" type="slidenum">
+              <a:rPr lang="en-US"/>
+              <a:t>43</a:t>
+            </a:fld>
+            <a:endParaRPr lang="en-US"/>
+          </a:p>
+        </p:txBody>
+      </p:sp>
+    </p:spTree>
+  </p:cSld>
+</p:notes>
+</file>
+
+<file path=ppt/notesSlides/notesSlide43.xml><?xml version="1.0" encoding="utf-8"?>
+<p:notes xmlns:a="http://schemas.openxmlformats.org/drawingml/2006/main" xmlns:r="http://schemas.openxmlformats.org/officeDocument/2006/relationships" xmlns:p="http://schemas.openxmlformats.org/presentationml/2006/main">
+  <p:cSld>
+    <p:spTree>
+      <p:nvGrpSpPr>
+        <p:cNvPr id="1" name=""/>
+        <p:cNvGrpSpPr/>
+        <p:nvPr/>
+      </p:nvGrpSpPr>
+      <p:grpSpPr>
+        <a:xfrm>
+          <a:off x="0" y="0"/>
+          <a:ext cx="0" cy="0"/>
+          <a:chOff x="0" y="0"/>
+          <a:chExt cx="0" cy="0"/>
+        </a:xfrm>
+      </p:grpSpPr>
+      <p:sp>
+        <p:nvSpPr>
+          <p:cNvPr id="2" name="Slide Image Placeholder 1"/>
+          <p:cNvSpPr>
+            <a:spLocks noGrp="1" noRot="1" noChangeAspect="1"/>
+          </p:cNvSpPr>
+          <p:nvPr>
+            <p:ph type="sldImg"/>
+          </p:nvPr>
+        </p:nvSpPr>
+        <p:spPr/>
+      </p:sp>
+      <p:sp>
+        <p:nvSpPr>
+          <p:cNvPr id="3" name="Notes Placeholder 2"/>
+          <p:cNvSpPr>
+            <a:spLocks noGrp="1"/>
+          </p:cNvSpPr>
+          <p:nvPr>
+            <p:ph type="body" idx="1"/>
+          </p:nvPr>
+        </p:nvSpPr>
+        <p:spPr/>
+        <p:txBody>
+          <a:bodyPr/>
+          <a:lstStyle/>
+          <a:p>
+            <a:pPr lvl="0" indent="0" marL="0">
+              <a:buNone/>
+            </a:pPr>
+            <a:r>
+              <a:rPr/>
+              <a:t>The previous picture, now as numbers. Read down the right column.</a:t>
+            </a:r>
+          </a:p>
+          <a:p>
+            <a:pPr lvl="0" indent="0" marL="0">
+              <a:buNone/>
+            </a:pPr>
+          </a:p>
+          <a:p>
+            <a:pPr lvl="0" indent="0" marL="0">
+              <a:buNone/>
+            </a:pPr>
+            <a:r>
+              <a:rPr/>
+              <a:t>The order is not arbitrary and it is worth asking the room to explain it before you do. </a:t>
+            </a:r>
+            <a:r>
+              <a:rPr>
+                <a:latin typeface="Courier"/>
+              </a:rPr>
+              <a:t>garage</a:t>
+            </a:r>
+            <a:r>
+              <a:rPr/>
+              <a:t> goes first because, once every feature is on a common scale, it buys the least accuracy per unit of coefficient spent. </a:t>
+            </a:r>
+            <a:r>
+              <a:rPr>
+                <a:latin typeface="Courier"/>
+              </a:rPr>
+              <a:t>area_sqm</a:t>
+            </a:r>
+            <a:r>
+              <a:rPr/>
+              <a:t> survives longest because it buys the most.</a:t>
+            </a:r>
+          </a:p>
+          <a:p>
+            <a:pPr lvl="0" indent="0" marL="0">
+              <a:buNone/>
+            </a:pPr>
+          </a:p>
+          <a:p>
+            <a:pPr lvl="0" indent="0" marL="0">
+              <a:buNone/>
+            </a:pPr>
+            <a:r>
+              <a:rPr/>
+              <a:t>Nobody told Lasso which features mattered. It was given a budget and told to spend it well, and this ranking fell out of that — which is genuinely remarkable and is why Lasso is used as a feature selector at all.</a:t>
+            </a:r>
+          </a:p>
+          <a:p>
+            <a:pPr lvl="0" indent="0" marL="0">
+              <a:buNone/>
+            </a:pPr>
+          </a:p>
+          <a:p>
+            <a:pPr lvl="0" indent="0" marL="0">
+              <a:buNone/>
+            </a:pPr>
+            <a:r>
+              <a:rPr/>
+              <a:t>Now the warning, and it is the part that gets forgotten in practice: </a:t>
+            </a:r>
+            <a:r>
+              <a:rPr b="1"/>
+              <a:t>the selection depends entirely on lambda</a:t>
+            </a:r>
+            <a:r>
+              <a:rPr/>
+              <a:t>. “Lasso chose these four features” is not a complete statement — at a different lambda it chooses differently. Presenting lasso output as an objective ranking of importance is one of the commonest misuses of it.</a:t>
+            </a:r>
+          </a:p>
+          <a:p>
+            <a:pPr lvl="0" indent="0" marL="0">
+              <a:buNone/>
+            </a:pPr>
+          </a:p>
+          <a:p>
+            <a:pPr lvl="0" indent="0" marL="0">
+              <a:buNone/>
+            </a:pPr>
+            <a:r>
+              <a:rPr/>
+              <a:t>Handout section 6.5.</a:t>
+            </a:r>
+          </a:p>
+        </p:txBody>
+      </p:sp>
+      <p:sp>
+        <p:nvSpPr>
+          <p:cNvPr id="4" name="Slide Number Placeholder 3"/>
+          <p:cNvSpPr>
+            <a:spLocks noGrp="1"/>
+          </p:cNvSpPr>
+          <p:nvPr>
+            <p:ph type="sldNum" sz="quarter" idx="10"/>
+          </p:nvPr>
+        </p:nvSpPr>
+        <p:spPr/>
+        <p:txBody>
+          <a:bodyPr/>
+          <a:lstStyle/>
+          <a:p>
+            <a:fld id="{18BDFEC3-8487-43E8-A154-7C12CBC1FFF2}" type="slidenum">
+              <a:rPr lang="en-US"/>
+              <a:t>44</a:t>
+            </a:fld>
+            <a:endParaRPr lang="en-US"/>
+          </a:p>
+        </p:txBody>
+      </p:sp>
+    </p:spTree>
+  </p:cSld>
+</p:notes>
+</file>
+
+<file path=ppt/notesSlides/notesSlide44.xml><?xml version="1.0" encoding="utf-8"?>
+<p:notes xmlns:a="http://schemas.openxmlformats.org/drawingml/2006/main" xmlns:r="http://schemas.openxmlformats.org/officeDocument/2006/relationships" xmlns:p="http://schemas.openxmlformats.org/presentationml/2006/main">
+  <p:cSld>
+    <p:spTree>
+      <p:nvGrpSpPr>
+        <p:cNvPr id="1" name=""/>
+        <p:cNvGrpSpPr/>
+        <p:nvPr/>
+      </p:nvGrpSpPr>
+      <p:grpSpPr>
+        <a:xfrm>
+          <a:off x="0" y="0"/>
+          <a:ext cx="0" cy="0"/>
+          <a:chOff x="0" y="0"/>
+          <a:chExt cx="0" cy="0"/>
+        </a:xfrm>
+      </p:grpSpPr>
+      <p:sp>
+        <p:nvSpPr>
+          <p:cNvPr id="2" name="Slide Image Placeholder 1"/>
+          <p:cNvSpPr>
+            <a:spLocks noGrp="1" noRot="1" noChangeAspect="1"/>
+          </p:cNvSpPr>
+          <p:nvPr>
+            <p:ph type="sldImg"/>
+          </p:nvPr>
+        </p:nvSpPr>
+        <p:spPr/>
+      </p:sp>
+      <p:sp>
+        <p:nvSpPr>
+          <p:cNvPr id="3" name="Notes Placeholder 2"/>
+          <p:cNvSpPr>
+            <a:spLocks noGrp="1"/>
+          </p:cNvSpPr>
+          <p:nvPr>
+            <p:ph type="body" idx="1"/>
+          </p:nvPr>
+        </p:nvSpPr>
+        <p:spPr/>
+        <p:txBody>
+          <a:bodyPr/>
+          <a:lstStyle/>
+          <a:p>
+            <a:pPr lvl="0" indent="0" marL="0">
+              <a:buNone/>
+            </a:pPr>
+            <a:r>
+              <a:rPr/>
+              <a:t>The situation from the failure-modes slide, made concrete: someone merged two systems and the same fact arrived twice.</a:t>
+            </a:r>
+          </a:p>
+          <a:p>
+            <a:pPr lvl="0" indent="0" marL="0">
+              <a:buNone/>
+            </a:pPr>
+          </a:p>
+          <a:p>
+            <a:pPr lvl="0" indent="0" marL="0">
+              <a:buNone/>
+            </a:pPr>
+            <a:r>
+              <a:rPr/>
+              <a:t>Ask what least squares should do. The honest answer is that it has no basis for choosing between “all the effect on the metres column” and “all of it on the feet column” and everything in between — they all fit identically.</a:t>
+            </a:r>
+          </a:p>
+          <a:p>
+            <a:pPr lvl="0" indent="0" marL="0">
+              <a:buNone/>
+            </a:pPr>
+          </a:p>
+          <a:p>
+            <a:pPr lvl="0" indent="0" marL="0">
+              <a:buNone/>
+            </a:pPr>
+            <a:r>
+              <a:rPr/>
+              <a:t>So it picks one arbitrarily, and the arbitrariness changes with the sample.</a:t>
+            </a:r>
+          </a:p>
+        </p:txBody>
+      </p:sp>
+      <p:sp>
+        <p:nvSpPr>
+          <p:cNvPr id="4" name="Slide Number Placeholder 3"/>
+          <p:cNvSpPr>
+            <a:spLocks noGrp="1"/>
+          </p:cNvSpPr>
+          <p:nvPr>
+            <p:ph type="sldNum" sz="quarter" idx="10"/>
+          </p:nvPr>
+        </p:nvSpPr>
+        <p:spPr/>
+        <p:txBody>
+          <a:bodyPr/>
+          <a:lstStyle/>
+          <a:p>
+            <a:fld id="{18BDFEC3-8487-43E8-A154-7C12CBC1FFF2}" type="slidenum">
+              <a:rPr lang="en-US"/>
+              <a:t>45</a:t>
+            </a:fld>
+            <a:endParaRPr lang="en-US"/>
+          </a:p>
+        </p:txBody>
+      </p:sp>
+    </p:spTree>
+  </p:cSld>
+</p:notes>
+</file>
+
+<file path=ppt/notesSlides/notesSlide45.xml><?xml version="1.0" encoding="utf-8"?>
+<p:notes xmlns:a="http://schemas.openxmlformats.org/drawingml/2006/main" xmlns:r="http://schemas.openxmlformats.org/officeDocument/2006/relationships" xmlns:p="http://schemas.openxmlformats.org/presentationml/2006/main">
+  <p:cSld>
+    <p:spTree>
+      <p:nvGrpSpPr>
+        <p:cNvPr id="1" name=""/>
+        <p:cNvGrpSpPr/>
+        <p:nvPr/>
+      </p:nvGrpSpPr>
+      <p:grpSpPr>
+        <a:xfrm>
+          <a:off x="0" y="0"/>
+          <a:ext cx="0" cy="0"/>
+          <a:chOff x="0" y="0"/>
+          <a:chExt cx="0" cy="0"/>
+        </a:xfrm>
+      </p:grpSpPr>
+      <p:sp>
+        <p:nvSpPr>
+          <p:cNvPr id="2" name="Slide Image Placeholder 1"/>
+          <p:cNvSpPr>
+            <a:spLocks noGrp="1" noRot="1" noChangeAspect="1"/>
+          </p:cNvSpPr>
+          <p:nvPr>
+            <p:ph type="sldImg"/>
+          </p:nvPr>
+        </p:nvSpPr>
+        <p:spPr/>
+      </p:sp>
+      <p:sp>
+        <p:nvSpPr>
+          <p:cNvPr id="3" name="Notes Placeholder 2"/>
+          <p:cNvSpPr>
+            <a:spLocks noGrp="1"/>
+          </p:cNvSpPr>
+          <p:nvPr>
+            <p:ph type="body" idx="1"/>
+          </p:nvPr>
+        </p:nvSpPr>
+        <p:spPr/>
+        <p:txBody>
+          <a:bodyPr/>
+          <a:lstStyle/>
+          <a:p>
+            <a:pPr lvl="0" indent="0" marL="0">
+              <a:buNone/>
+            </a:pPr>
+            <a:r>
+              <a:rPr/>
+              <a:t>Same dataset, four different random splits. The area coefficient varies by a factor of five, and its duplicate swings the opposite way to compensate.</a:t>
+            </a:r>
+          </a:p>
+          <a:p>
+            <a:pPr lvl="0" indent="0" marL="0">
+              <a:buNone/>
+            </a:pPr>
+          </a:p>
+          <a:p>
+            <a:pPr lvl="0" indent="0" marL="0">
+              <a:buNone/>
+            </a:pPr>
+            <a:r>
+              <a:rPr/>
+              <a:t>Stress what is and is not broken: the PREDICTIONS are fine throughout — the combined effect is stable at about 2,420, close to the true 2,400. It is the EXPLANATION that is noise.</a:t>
+            </a:r>
+          </a:p>
+          <a:p>
+            <a:pPr lvl="0" indent="0" marL="0">
+              <a:buNone/>
+            </a:pPr>
+          </a:p>
+          <a:p>
+            <a:pPr lvl="0" indent="0" marL="0">
+              <a:buNone/>
+            </a:pPr>
+            <a:r>
+              <a:rPr/>
+              <a:t>Anyone reading these coefficients to learn what drives house prices would draw nonsense, confidently. With ridge at lambda 10 the same four splits give 38,000 to 41,000 on both columns, split evenly, because two moderate coefficients cost less under a squared penalty than one huge positive and one huge negative.</a:t>
+            </a:r>
+          </a:p>
+          <a:p>
+            <a:pPr lvl="0" indent="0" marL="0">
+              <a:buNone/>
+            </a:pPr>
+          </a:p>
+          <a:p>
+            <a:pPr lvl="0" indent="0" marL="0">
+              <a:buNone/>
+            </a:pPr>
+            <a:r>
+              <a:rPr/>
+              <a:t>So ridge is not only a cure for overfitting. It is what makes coefficients readable when features overlap — which in real data they always do.</a:t>
+            </a:r>
+          </a:p>
+        </p:txBody>
+      </p:sp>
+      <p:sp>
+        <p:nvSpPr>
+          <p:cNvPr id="4" name="Slide Number Placeholder 3"/>
+          <p:cNvSpPr>
+            <a:spLocks noGrp="1"/>
+          </p:cNvSpPr>
+          <p:nvPr>
+            <p:ph type="sldNum" sz="quarter" idx="10"/>
+          </p:nvPr>
+        </p:nvSpPr>
+        <p:spPr/>
+        <p:txBody>
+          <a:bodyPr/>
+          <a:lstStyle/>
+          <a:p>
+            <a:fld id="{18BDFEC3-8487-43E8-A154-7C12CBC1FFF2}" type="slidenum">
+              <a:rPr lang="en-US"/>
+              <a:t>46</a:t>
+            </a:fld>
+            <a:endParaRPr lang="en-US"/>
+          </a:p>
+        </p:txBody>
+      </p:sp>
+    </p:spTree>
+  </p:cSld>
+</p:notes>
+</file>
+
+<file path=ppt/notesSlides/notesSlide46.xml><?xml version="1.0" encoding="utf-8"?>
+<p:notes xmlns:a="http://schemas.openxmlformats.org/drawingml/2006/main" xmlns:r="http://schemas.openxmlformats.org/officeDocument/2006/relationships" xmlns:p="http://schemas.openxmlformats.org/presentationml/2006/main">
+  <p:cSld>
+    <p:spTree>
+      <p:nvGrpSpPr>
+        <p:cNvPr id="1" name=""/>
+        <p:cNvGrpSpPr/>
+        <p:nvPr/>
+      </p:nvGrpSpPr>
+      <p:grpSpPr>
+        <a:xfrm>
+          <a:off x="0" y="0"/>
+          <a:ext cx="0" cy="0"/>
+          <a:chOff x="0" y="0"/>
+          <a:chExt cx="0" cy="0"/>
+        </a:xfrm>
+      </p:grpSpPr>
+      <p:sp>
+        <p:nvSpPr>
+          <p:cNvPr id="2" name="Slide Image Placeholder 1"/>
+          <p:cNvSpPr>
+            <a:spLocks noGrp="1" noRot="1" noChangeAspect="1"/>
+          </p:cNvSpPr>
+          <p:nvPr>
+            <p:ph type="sldImg"/>
+          </p:nvPr>
+        </p:nvSpPr>
+        <p:spPr/>
+      </p:sp>
+      <p:sp>
+        <p:nvSpPr>
+          <p:cNvPr id="3" name="Notes Placeholder 2"/>
+          <p:cNvSpPr>
+            <a:spLocks noGrp="1"/>
+          </p:cNvSpPr>
+          <p:nvPr>
+            <p:ph type="body" idx="1"/>
+          </p:nvPr>
+        </p:nvSpPr>
+        <p:spPr/>
+        <p:txBody>
+          <a:bodyPr/>
+          <a:lstStyle/>
+          <a:p>
+            <a:pPr lvl="0" indent="0" marL="0">
+              <a:buNone/>
+            </a:pPr>
+            <a:r>
+              <a:rPr/>
+              <a:t>That last clause is doing enormous work and is almost always skipped over. Say it slowly, then make it concrete.</a:t>
+            </a:r>
+          </a:p>
+          <a:p>
+            <a:pPr lvl="0" indent="0" marL="0">
+              <a:buNone/>
+            </a:pPr>
+          </a:p>
+          <a:p>
+            <a:pPr lvl="0" indent="0" marL="0">
+              <a:buNone/>
+            </a:pPr>
+            <a:r>
+              <a:rPr/>
+              <a:t>The coefficient on </a:t>
+            </a:r>
+            <a:r>
+              <a:rPr>
+                <a:latin typeface="Courier"/>
+              </a:rPr>
+              <a:t>bedrooms</a:t>
+            </a:r>
+            <a:r>
+              <a:rPr/>
+              <a:t> is not “what a bedroom is worth”. It is what a bedroom is worth </a:t>
+            </a:r>
+            <a:r>
+              <a:rPr i="1"/>
+              <a:t>to a house whose floor area does not change</a:t>
+            </a:r>
+            <a:r>
+              <a:rPr/>
+              <a:t> — which is a strange object. A house that gains a bedroom without gaining any space has had its existing rooms subdivided, and that is a genuinely different proposition from an extra bedroom in an extra 15 square metres.</a:t>
+            </a:r>
+          </a:p>
+          <a:p>
+            <a:pPr lvl="0" indent="0" marL="0">
+              <a:buNone/>
+            </a:pPr>
+          </a:p>
+          <a:p>
+            <a:pPr lvl="0" indent="0" marL="0">
+              <a:buNone/>
+            </a:pPr>
+            <a:r>
+              <a:rPr/>
+              <a:t>Ask the room what the coefficient on bedrooms ought to be for the subdivision version. Plausibly near zero, or negative. The estimate we get, 7,503, is a blend of that and something else — which is the setup for the next slide.</a:t>
+            </a:r>
+          </a:p>
+          <a:p>
+            <a:pPr lvl="0" indent="0" marL="0">
+              <a:buNone/>
+            </a:pPr>
+          </a:p>
+          <a:p>
+            <a:pPr lvl="0" indent="0" marL="0">
+              <a:buNone/>
+            </a:pPr>
+            <a:r>
+              <a:rPr/>
+              <a:t>This is the reason two honest analysts fit the same data, report different coefficients, and are both right: they included different features, so their “held fixed” clauses differ. Handout section 7.1.</a:t>
+            </a:r>
+          </a:p>
+        </p:txBody>
+      </p:sp>
+      <p:sp>
+        <p:nvSpPr>
+          <p:cNvPr id="4" name="Slide Number Placeholder 3"/>
+          <p:cNvSpPr>
+            <a:spLocks noGrp="1"/>
+          </p:cNvSpPr>
+          <p:nvPr>
+            <p:ph type="sldNum" sz="quarter" idx="10"/>
+          </p:nvPr>
+        </p:nvSpPr>
+        <p:spPr/>
+        <p:txBody>
+          <a:bodyPr/>
+          <a:lstStyle/>
+          <a:p>
+            <a:fld id="{18BDFEC3-8487-43E8-A154-7C12CBC1FFF2}" type="slidenum">
+              <a:rPr lang="en-US"/>
+              <a:t>47</a:t>
+            </a:fld>
+            <a:endParaRPr lang="en-US"/>
+          </a:p>
+        </p:txBody>
+      </p:sp>
+    </p:spTree>
+  </p:cSld>
+</p:notes>
+</file>
+
+<file path=ppt/notesSlides/notesSlide47.xml><?xml version="1.0" encoding="utf-8"?>
+<p:notes xmlns:a="http://schemas.openxmlformats.org/drawingml/2006/main" xmlns:r="http://schemas.openxmlformats.org/officeDocument/2006/relationships" xmlns:p="http://schemas.openxmlformats.org/presentationml/2006/main">
+  <p:cSld>
+    <p:spTree>
+      <p:nvGrpSpPr>
+        <p:cNvPr id="1" name=""/>
+        <p:cNvGrpSpPr/>
+        <p:nvPr/>
+      </p:nvGrpSpPr>
+      <p:grpSpPr>
+        <a:xfrm>
+          <a:off x="0" y="0"/>
+          <a:ext cx="0" cy="0"/>
+          <a:chOff x="0" y="0"/>
+          <a:chExt cx="0" cy="0"/>
+        </a:xfrm>
+      </p:grpSpPr>
+      <p:sp>
+        <p:nvSpPr>
+          <p:cNvPr id="2" name="Slide Image Placeholder 1"/>
+          <p:cNvSpPr>
+            <a:spLocks noGrp="1" noRot="1" noChangeAspect="1"/>
+          </p:cNvSpPr>
+          <p:nvPr>
+            <p:ph type="sldImg"/>
+          </p:nvPr>
+        </p:nvSpPr>
+        <p:spPr/>
+      </p:sp>
+      <p:sp>
+        <p:nvSpPr>
+          <p:cNvPr id="3" name="Notes Placeholder 2"/>
+          <p:cNvSpPr>
+            <a:spLocks noGrp="1"/>
+          </p:cNvSpPr>
+          <p:nvPr>
+            <p:ph type="body" idx="1"/>
+          </p:nvPr>
+        </p:nvSpPr>
+        <p:spPr/>
+        <p:txBody>
+          <a:bodyPr/>
+          <a:lstStyle/>
+          <a:p>
+            <a:pPr lvl="0" indent="0" marL="0">
+              <a:buNone/>
+            </a:pPr>
+            <a:r>
+              <a:rPr/>
+              <a:t>From notebook 1, and this is the most transferable slide of the lesson.</a:t>
+            </a:r>
+          </a:p>
+          <a:p>
+            <a:pPr lvl="0" indent="0" marL="0">
+              <a:buNone/>
+            </a:pPr>
+          </a:p>
+          <a:p>
+            <a:pPr lvl="0" indent="0" marL="0">
+              <a:buNone/>
+            </a:pPr>
+            <a:r>
+              <a:rPr/>
+              <a:t>The x axis is how correlated each feature is with area; the y axis is how far its estimated coefficient landed from the truth. The three features uncorrelated with area — distance, age, garage — are recovered to within 1%. Bathrooms, at 0.49, is out by 9%. Bedrooms, at 0.77, is out by 17%.</a:t>
+            </a:r>
+          </a:p>
+          <a:p>
+            <a:pPr lvl="0" indent="0" marL="0">
+              <a:buNone/>
+            </a:pPr>
+          </a:p>
+          <a:p>
+            <a:pPr lvl="0" indent="0" marL="0">
+              <a:buNone/>
+            </a:pPr>
+            <a:r>
+              <a:rPr/>
+              <a:t>State the rule: a coefficient is only as trustworthy as its feature is independent. And on a real dataset the same wobble is there with nothing to reveal it — you would just have a number.</a:t>
+            </a:r>
+          </a:p>
+          <a:p>
+            <a:pPr lvl="0" indent="0" marL="0">
+              <a:buNone/>
+            </a:pPr>
+          </a:p>
+          <a:p>
+            <a:pPr lvl="0" indent="0" marL="0">
+              <a:buNone/>
+            </a:pPr>
+            <a:r>
+              <a:rPr/>
+              <a:t>Then the harder point, briefly: a coefficient is an association, not a causal effect. If houses near the centre are older and dearer, age and distance divide the effect between them however the sample suggests. Neither number tells you what would happen if you moved a house.</a:t>
+            </a:r>
+          </a:p>
+        </p:txBody>
+      </p:sp>
+      <p:sp>
+        <p:nvSpPr>
+          <p:cNvPr id="4" name="Slide Number Placeholder 3"/>
+          <p:cNvSpPr>
+            <a:spLocks noGrp="1"/>
+          </p:cNvSpPr>
+          <p:nvPr>
+            <p:ph type="sldNum" sz="quarter" idx="10"/>
+          </p:nvPr>
+        </p:nvSpPr>
+        <p:spPr/>
+        <p:txBody>
+          <a:bodyPr/>
+          <a:lstStyle/>
+          <a:p>
+            <a:fld id="{18BDFEC3-8487-43E8-A154-7C12CBC1FFF2}" type="slidenum">
+              <a:rPr lang="en-US"/>
+              <a:t>48</a:t>
+            </a:fld>
+            <a:endParaRPr lang="en-US"/>
+          </a:p>
+        </p:txBody>
+      </p:sp>
+    </p:spTree>
+  </p:cSld>
+</p:notes>
+</file>
+
+<file path=ppt/notesSlides/notesSlide48.xml><?xml version="1.0" encoding="utf-8"?>
+<p:notes xmlns:a="http://schemas.openxmlformats.org/drawingml/2006/main" xmlns:r="http://schemas.openxmlformats.org/officeDocument/2006/relationships" xmlns:p="http://schemas.openxmlformats.org/presentationml/2006/main">
+  <p:cSld>
+    <p:spTree>
+      <p:nvGrpSpPr>
+        <p:cNvPr id="1" name=""/>
+        <p:cNvGrpSpPr/>
+        <p:nvPr/>
+      </p:nvGrpSpPr>
+      <p:grpSpPr>
+        <a:xfrm>
+          <a:off x="0" y="0"/>
+          <a:ext cx="0" cy="0"/>
+          <a:chOff x="0" y="0"/>
+          <a:chExt cx="0" cy="0"/>
+        </a:xfrm>
+      </p:grpSpPr>
+      <p:sp>
+        <p:nvSpPr>
+          <p:cNvPr id="2" name="Slide Image Placeholder 1"/>
+          <p:cNvSpPr>
+            <a:spLocks noGrp="1" noRot="1" noChangeAspect="1"/>
+          </p:cNvSpPr>
+          <p:nvPr>
+            <p:ph type="sldImg"/>
+          </p:nvPr>
+        </p:nvSpPr>
+        <p:spPr/>
+      </p:sp>
+      <p:sp>
+        <p:nvSpPr>
+          <p:cNvPr id="3" name="Notes Placeholder 2"/>
+          <p:cNvSpPr>
+            <a:spLocks noGrp="1"/>
+          </p:cNvSpPr>
+          <p:nvPr>
+            <p:ph type="body" idx="1"/>
+          </p:nvPr>
+        </p:nvSpPr>
+        <p:spPr/>
+        <p:txBody>
+          <a:bodyPr/>
+          <a:lstStyle/>
+          <a:p>
+            <a:pPr lvl="0" indent="0" marL="0">
+              <a:buNone/>
+            </a:pPr>
+            <a:r>
+              <a:rPr/>
+              <a:t>30 minutes. The collinear section is the one to make sure everyone reaches — it is the argument they will use in their own projects when a stakeholder asks what the model says drives the outcome.</a:t>
+            </a:r>
+          </a:p>
+          <a:p>
+            <a:pPr lvl="0" indent="0" marL="0">
+              <a:buNone/>
+            </a:pPr>
+          </a:p>
+          <a:p>
+            <a:pPr lvl="0" indent="0" marL="0">
+              <a:buNone/>
+            </a:pPr>
+            <a:r>
+              <a:rPr/>
+              <a:t>The “try this” swaps Ridge for Lasso on the redundant columns. Ask them to predict which way lasso resolves it before running, then to explain why the two penalties disagree. It is a good check of whether the disc-and-diamond picture landed.</a:t>
+            </a:r>
+          </a:p>
+        </p:txBody>
+      </p:sp>
+      <p:sp>
+        <p:nvSpPr>
+          <p:cNvPr id="4" name="Slide Number Placeholder 3"/>
+          <p:cNvSpPr>
+            <a:spLocks noGrp="1"/>
+          </p:cNvSpPr>
+          <p:nvPr>
+            <p:ph type="sldNum" sz="quarter" idx="10"/>
+          </p:nvPr>
+        </p:nvSpPr>
+        <p:spPr/>
+        <p:txBody>
+          <a:bodyPr/>
+          <a:lstStyle/>
+          <a:p>
+            <a:fld id="{18BDFEC3-8487-43E8-A154-7C12CBC1FFF2}" type="slidenum">
+              <a:rPr lang="en-US"/>
+              <a:t>49</a:t>
+            </a:fld>
+            <a:endParaRPr lang="en-US"/>
+          </a:p>
+        </p:txBody>
+      </p:sp>
+    </p:spTree>
+  </p:cSld>
+</p:notes>
+</file>
+
+<file path=ppt/notesSlides/notesSlide49.xml><?xml version="1.0" encoding="utf-8"?>
+<p:notes xmlns:a="http://schemas.openxmlformats.org/drawingml/2006/main" xmlns:r="http://schemas.openxmlformats.org/officeDocument/2006/relationships" xmlns:p="http://schemas.openxmlformats.org/presentationml/2006/main">
+  <p:cSld>
+    <p:spTree>
+      <p:nvGrpSpPr>
+        <p:cNvPr id="1" name=""/>
+        <p:cNvGrpSpPr/>
+        <p:nvPr/>
+      </p:nvGrpSpPr>
+      <p:grpSpPr>
+        <a:xfrm>
+          <a:off x="0" y="0"/>
+          <a:ext cx="0" cy="0"/>
+          <a:chOff x="0" y="0"/>
+          <a:chExt cx="0" cy="0"/>
+        </a:xfrm>
+      </p:grpSpPr>
+      <p:sp>
+        <p:nvSpPr>
+          <p:cNvPr id="2" name="Slide Image Placeholder 1"/>
+          <p:cNvSpPr>
+            <a:spLocks noGrp="1" noRot="1" noChangeAspect="1"/>
+          </p:cNvSpPr>
+          <p:nvPr>
+            <p:ph type="sldImg"/>
+          </p:nvPr>
+        </p:nvSpPr>
+        <p:spPr/>
+      </p:sp>
+      <p:sp>
+        <p:nvSpPr>
+          <p:cNvPr id="3" name="Notes Placeholder 2"/>
+          <p:cNvSpPr>
+            <a:spLocks noGrp="1"/>
+          </p:cNvSpPr>
+          <p:nvPr>
+            <p:ph type="body" idx="1"/>
+          </p:nvPr>
+        </p:nvSpPr>
+        <p:spPr/>
+        <p:txBody>
+          <a:bodyPr/>
+          <a:lstStyle/>
+          <a:p>
+            <a:pPr lvl="0" indent="0" marL="0">
+              <a:buNone/>
+            </a:pPr>
+            <a:r>
+              <a:rPr/>
+              <a:t>Draw the thread. Lesson 2 prepared data honestly; today we fitted something to it and found that fitting well and explaining well are different goals.</a:t>
+            </a:r>
+          </a:p>
+          <a:p>
+            <a:pPr lvl="0" indent="0" marL="0">
+              <a:buNone/>
+            </a:pPr>
+          </a:p>
+          <a:p>
+            <a:pPr lvl="0" indent="0" marL="0">
+              <a:buNone/>
+            </a:pPr>
+            <a:r>
+              <a:rPr/>
+              <a:t>The one sentence to leave them with: the model that fits your training data best is usually not the one you want.</a:t>
+            </a:r>
+          </a:p>
+          <a:p>
+            <a:pPr lvl="0" indent="0" marL="0">
+              <a:buNone/>
+            </a:pPr>
+          </a:p>
+          <a:p>
+            <a:pPr lvl="0" indent="0" marL="0">
+              <a:buNone/>
+            </a:pPr>
+            <a:r>
+              <a:rPr/>
+              <a:t>Preview lesson 4 in a sentence: same machinery, but the target becomes a category instead of a number — and that single change turns out to require a different cost function, for a reason that is one of the exam derivations.</a:t>
+            </a:r>
+          </a:p>
+        </p:txBody>
+      </p:sp>
+      <p:sp>
+        <p:nvSpPr>
+          <p:cNvPr id="4" name="Slide Number Placeholder 3"/>
+          <p:cNvSpPr>
+            <a:spLocks noGrp="1"/>
+          </p:cNvSpPr>
+          <p:nvPr>
+            <p:ph type="sldNum" sz="quarter" idx="10"/>
+          </p:nvPr>
+        </p:nvSpPr>
+        <p:spPr/>
+        <p:txBody>
+          <a:bodyPr/>
+          <a:lstStyle/>
+          <a:p>
+            <a:fld id="{18BDFEC3-8487-43E8-A154-7C12CBC1FFF2}" type="slidenum">
+              <a:rPr lang="en-US"/>
+              <a:t>50</a:t>
             </a:fld>
             <a:endParaRPr lang="en-US"/>
           </a:p>
@@ -3769,21 +5880,35 @@
             </a:pPr>
             <a:r>
               <a:rPr/>
-              <a:t>This is the intuition before the formula, and it takes ten seconds. A model that is 50,000 too high on one house and 50,000 too low on another is not perfect, but the sum of its errors is zero.</a:t>
-            </a:r>
-          </a:p>
-          <a:p>
-            <a:pPr lvl="0" indent="0" marL="0">
-              <a:buNone/>
-            </a:pPr>
-          </a:p>
-          <a:p>
-            <a:pPr lvl="0" indent="0" marL="0">
-              <a:buNone/>
-            </a:pPr>
-            <a:r>
-              <a:rPr/>
-              <a:t>So every error must count as a positive amount. That is the requirement; squaring is one way to meet it, absolute value is another. The next slide says why we choose squaring.</a:t>
+              <a:t>Read it as a sentence, then attack it. Is the hundred-and-first square metre really worth what the fiftieth was? Is a garage worth the same in the centre as in the suburbs, where there is street parking anyway?</a:t>
+            </a:r>
+          </a:p>
+          <a:p>
+            <a:pPr lvl="0" indent="0" marL="0">
+              <a:buNone/>
+            </a:pPr>
+          </a:p>
+          <a:p>
+            <a:pPr lvl="0" indent="0" marL="0">
+              <a:buNone/>
+            </a:pPr>
+            <a:r>
+              <a:rPr/>
+              <a:t>Almost certainly not. The right response is not to abandon linear models but to know what you have assumed — section 5 shows how to check the assumption and how to relax it when it fails.</a:t>
+            </a:r>
+          </a:p>
+          <a:p>
+            <a:pPr lvl="0" indent="0" marL="0">
+              <a:buNone/>
+            </a:pPr>
+          </a:p>
+          <a:p>
+            <a:pPr lvl="0" indent="0" marL="0">
+              <a:buNone/>
+            </a:pPr>
+            <a:r>
+              <a:rPr/>
+              <a:t>Ask the room for a feature where the constant-per-unit claim would obviously break. Bedrooms is a good answer: the tenth bedroom is not worth what the second was.</a:t>
             </a:r>
           </a:p>
         </p:txBody>
@@ -3806,6 +5931,130 @@
             <a:fld id="{18BDFEC3-8487-43E8-A154-7C12CBC1FFF2}" type="slidenum">
               <a:rPr lang="en-US"/>
               <a:t>6</a:t>
+            </a:fld>
+            <a:endParaRPr lang="en-US"/>
+          </a:p>
+        </p:txBody>
+      </p:sp>
+    </p:spTree>
+  </p:cSld>
+</p:notes>
+</file>
+
+<file path=ppt/notesSlides/notesSlide50.xml><?xml version="1.0" encoding="utf-8"?>
+<p:notes xmlns:a="http://schemas.openxmlformats.org/drawingml/2006/main" xmlns:r="http://schemas.openxmlformats.org/officeDocument/2006/relationships" xmlns:p="http://schemas.openxmlformats.org/presentationml/2006/main">
+  <p:cSld>
+    <p:spTree>
+      <p:nvGrpSpPr>
+        <p:cNvPr id="1" name=""/>
+        <p:cNvGrpSpPr/>
+        <p:nvPr/>
+      </p:nvGrpSpPr>
+      <p:grpSpPr>
+        <a:xfrm>
+          <a:off x="0" y="0"/>
+          <a:ext cx="0" cy="0"/>
+          <a:chOff x="0" y="0"/>
+          <a:chExt cx="0" cy="0"/>
+        </a:xfrm>
+      </p:grpSpPr>
+      <p:sp>
+        <p:nvSpPr>
+          <p:cNvPr id="2" name="Slide Image Placeholder 1"/>
+          <p:cNvSpPr>
+            <a:spLocks noGrp="1" noRot="1" noChangeAspect="1"/>
+          </p:cNvSpPr>
+          <p:nvPr>
+            <p:ph type="sldImg"/>
+          </p:nvPr>
+        </p:nvSpPr>
+        <p:spPr/>
+      </p:sp>
+      <p:sp>
+        <p:nvSpPr>
+          <p:cNvPr id="3" name="Notes Placeholder 2"/>
+          <p:cNvSpPr>
+            <a:spLocks noGrp="1"/>
+          </p:cNvSpPr>
+          <p:nvPr>
+            <p:ph type="body" idx="1"/>
+          </p:nvPr>
+        </p:nvSpPr>
+        <p:spPr/>
+        <p:txBody>
+          <a:bodyPr/>
+          <a:lstStyle/>
+          <a:p>
+            <a:pPr lvl="0" indent="0" marL="0">
+              <a:buNone/>
+            </a:pPr>
+            <a:r>
+              <a:rPr/>
+              <a:t>Set it explicitly with the deadline. It uses a new dataset — bike sharing demand — so the exploration is theirs to do.</a:t>
+            </a:r>
+          </a:p>
+          <a:p>
+            <a:pPr lvl="0" indent="0" marL="0">
+              <a:buNone/>
+            </a:pPr>
+          </a:p>
+          <a:p>
+            <a:pPr lvl="0" indent="0" marL="0">
+              <a:buNone/>
+            </a:pPr>
+            <a:r>
+              <a:rPr/>
+              <a:t>Flag the two tasks that carry the most marks. Task 4 asks them to justify a choice of lambda without looking at the test set, which is genuinely awkward before lesson 5 and is meant to be: the point is to feel the need for cross-validation before being handed it. Task 6 asks which coefficients they trust and why, which is section 7 of the handout applied.</a:t>
+            </a:r>
+          </a:p>
+          <a:p>
+            <a:pPr lvl="0" indent="0" marL="0">
+              <a:buNone/>
+            </a:pPr>
+          </a:p>
+          <a:p>
+            <a:pPr lvl="0" indent="0" marL="0">
+              <a:buNone/>
+            </a:pPr>
+            <a:r>
+              <a:rPr/>
+              <a:t>As always: no marks for accuracy.</a:t>
+            </a:r>
+          </a:p>
+          <a:p>
+            <a:pPr lvl="0" indent="0" marL="0">
+              <a:buNone/>
+            </a:pPr>
+          </a:p>
+          <a:p>
+            <a:pPr lvl="0" indent="0" marL="0">
+              <a:buNone/>
+            </a:pPr>
+            <a:r>
+              <a:rPr/>
+              <a:t>Also remind them the project topic must be confirmed by lesson 4 — next week.</a:t>
+            </a:r>
+          </a:p>
+        </p:txBody>
+      </p:sp>
+      <p:sp>
+        <p:nvSpPr>
+          <p:cNvPr id="4" name="Slide Number Placeholder 3"/>
+          <p:cNvSpPr>
+            <a:spLocks noGrp="1"/>
+          </p:cNvSpPr>
+          <p:nvPr>
+            <p:ph type="sldNum" sz="quarter" idx="10"/>
+          </p:nvPr>
+        </p:nvSpPr>
+        <p:spPr/>
+        <p:txBody>
+          <a:bodyPr/>
+          <a:lstStyle/>
+          <a:p>
+            <a:fld id="{18BDFEC3-8487-43E8-A154-7C12CBC1FFF2}" type="slidenum">
+              <a:rPr lang="en-US"/>
+              <a:t>51</a:t>
             </a:fld>
             <a:endParaRPr lang="en-US"/>
           </a:p>
@@ -3865,35 +6114,21 @@
             </a:pPr>
             <a:r>
               <a:rPr/>
-              <a:t>Give the three in increasing order of depth. The first is convenience. The second is a design decision: being wrong by 40,000 on one house costs the same as 20,000 on four, which matches most intuitions about what a bad prediction is.</a:t>
-            </a:r>
-          </a:p>
-          <a:p>
-            <a:pPr lvl="0" indent="0" marL="0">
-              <a:buNone/>
-            </a:pPr>
-          </a:p>
-          <a:p>
-            <a:pPr lvl="0" indent="0" marL="0">
-              <a:buNone/>
-            </a:pPr>
-            <a:r>
-              <a:rPr/>
-              <a:t>The third is the real reason and worth saying even though we do not prove it: if you believe the noise is Gaussian, least squares is not a convention, it is the maximum likelihood estimator. That connects to the residual histogram in notebook 1.</a:t>
-            </a:r>
-          </a:p>
-          <a:p>
-            <a:pPr lvl="0" indent="0" marL="0">
-              <a:buNone/>
-            </a:pPr>
-          </a:p>
-          <a:p>
-            <a:pPr lvl="0" indent="0" marL="0">
-              <a:buNone/>
-            </a:pPr>
-            <a:r>
-              <a:rPr/>
-              <a:t>Then the consequence, which is not optional: squared error is sensitive to outliers, because one absurd value contributes its error squared. Lesson 2’s outlier work is a prerequisite for this lesson, not a preliminary.</a:t>
+              <a:t>This is the intuition before the formula, and it takes ten seconds. A model that is 50,000 too high on one house and 50,000 too low on another is not perfect, but the sum of its errors is zero.</a:t>
+            </a:r>
+          </a:p>
+          <a:p>
+            <a:pPr lvl="0" indent="0" marL="0">
+              <a:buNone/>
+            </a:pPr>
+          </a:p>
+          <a:p>
+            <a:pPr lvl="0" indent="0" marL="0">
+              <a:buNone/>
+            </a:pPr>
+            <a:r>
+              <a:rPr/>
+              <a:t>So every error must count as a positive amount. That is the requirement; squaring is one way to meet it, absolute value is another. The next slide says why we choose squaring.</a:t>
             </a:r>
           </a:p>
         </p:txBody>
@@ -3975,35 +6210,35 @@
             </a:pPr>
             <a:r>
               <a:rPr/>
-              <a:t>Name the parts: m examples, the half for convenience when we differentiate, the square doing the work discussed. This is the mean squared error, MSE from here on, and the name is worth saying aloud because every later slide uses the abbreviation.</a:t>
-            </a:r>
-          </a:p>
-          <a:p>
-            <a:pPr lvl="0" indent="0" marL="0">
-              <a:buNone/>
-            </a:pPr>
-          </a:p>
-          <a:p>
-            <a:pPr lvl="0" indent="0" marL="0">
-              <a:buNone/>
-            </a:pPr>
-            <a:r>
-              <a:rPr/>
-              <a:t>Ask where the half comes from if nobody has. Answer: differentiating a square brings down a 2, and the half cancels it. It cannot move the minimum, because scaling a function by a constant does not move its minimiser.</a:t>
-            </a:r>
-          </a:p>
-          <a:p>
-            <a:pPr lvl="0" indent="0" marL="0">
-              <a:buNone/>
-            </a:pPr>
-          </a:p>
-          <a:p>
-            <a:pPr lvl="0" indent="0" marL="0">
-              <a:buNone/>
-            </a:pPr>
-            <a:r>
-              <a:rPr/>
-              <a:t>Handout section 2.2. The worked table there computes the cost for three houses and shows how the two large errors contribute nearly everything — squared error spends its attention on the worst predictions, which is a choice you are making whether or not you notice.</a:t>
+              <a:t>Give the three in increasing order of depth. The first is convenience. The second is a design decision: being wrong by 40,000 on one house costs the same as 20,000 on four, which matches most intuitions about what a bad prediction is.</a:t>
+            </a:r>
+          </a:p>
+          <a:p>
+            <a:pPr lvl="0" indent="0" marL="0">
+              <a:buNone/>
+            </a:pPr>
+          </a:p>
+          <a:p>
+            <a:pPr lvl="0" indent="0" marL="0">
+              <a:buNone/>
+            </a:pPr>
+            <a:r>
+              <a:rPr/>
+              <a:t>The third is the real reason and worth saying even though we do not prove it: if you believe the noise is Gaussian, least squares is not a convention, it is the maximum likelihood estimator. That connects to the residual histogram in notebook 1.</a:t>
+            </a:r>
+          </a:p>
+          <a:p>
+            <a:pPr lvl="0" indent="0" marL="0">
+              <a:buNone/>
+            </a:pPr>
+          </a:p>
+          <a:p>
+            <a:pPr lvl="0" indent="0" marL="0">
+              <a:buNone/>
+            </a:pPr>
+            <a:r>
+              <a:rPr/>
+              <a:t>Then the consequence, which is not optional: squared error is sensitive to outliers, because one absurd value contributes its error squared. Lesson 2’s outlier work is a prerequisite for this lesson, not a preliminary.</a:t>
             </a:r>
           </a:p>
         </p:txBody>
@@ -4085,21 +6320,35 @@
             </a:pPr>
             <a:r>
               <a:rPr/>
-              <a:t>From notebook 1. Two parameters, so the cost is a surface over the plane of (slope, intercept), and fitting means finding its lowest point.</a:t>
-            </a:r>
-          </a:p>
-          <a:p>
-            <a:pPr lvl="0" indent="0" marL="0">
-              <a:buNone/>
-            </a:pPr>
-          </a:p>
-          <a:p>
-            <a:pPr lvl="0" indent="0" marL="0">
-              <a:buNone/>
-            </a:pPr>
-            <a:r>
-              <a:rPr/>
-              <a:t>The important structural fact: this bowl is convex. There is one minimum and no local traps. Say that explicitly, because it is a property most methods later in the course do NOT have — lesson 9’s networks have cost surfaces full of local minima, and a great deal of the difficulty of training them comes from exactly that.</a:t>
+              <a:t>Name the parts: m examples, the half for convenience when we differentiate, the square doing the work discussed. This is the mean squared error, MSE from here on, and the name is worth saying aloud because every later slide uses the abbreviation.</a:t>
+            </a:r>
+          </a:p>
+          <a:p>
+            <a:pPr lvl="0" indent="0" marL="0">
+              <a:buNone/>
+            </a:pPr>
+          </a:p>
+          <a:p>
+            <a:pPr lvl="0" indent="0" marL="0">
+              <a:buNone/>
+            </a:pPr>
+            <a:r>
+              <a:rPr/>
+              <a:t>Ask where the half comes from if nobody has. Answer: differentiating a square brings down a 2, and the half cancels it. It cannot move the minimum, because scaling a function by a constant does not move its minimiser.</a:t>
+            </a:r>
+          </a:p>
+          <a:p>
+            <a:pPr lvl="0" indent="0" marL="0">
+              <a:buNone/>
+            </a:pPr>
+          </a:p>
+          <a:p>
+            <a:pPr lvl="0" indent="0" marL="0">
+              <a:buNone/>
+            </a:pPr>
+            <a:r>
+              <a:rPr/>
+              <a:t>Handout section 2.2. The worked table there computes the cost for three houses and shows how the two large errors contribute nearly everything — squared error spends its attention on the worst predictions, which is a choice you are making whether or not you notice.</a:t>
             </a:r>
           </a:p>
         </p:txBody>
@@ -4181,49 +6430,35 @@
             </a:pPr>
             <a:r>
               <a:rPr/>
-              <a:t>Spend a full minute here. This is the intuition; the algebra follows.</a:t>
-            </a:r>
-          </a:p>
-          <a:p>
-            <a:pPr lvl="0" indent="0" marL="0">
-              <a:buNone/>
-            </a:pPr>
-          </a:p>
-          <a:p>
-            <a:pPr lvl="0" indent="0" marL="0">
-              <a:buNone/>
-            </a:pPr>
-            <a:r>
-              <a:rPr/>
-              <a:t>Each feature is a direction the model can move in. Everything the model can predict lies on the flat surface those directions span. The true prices are a point that almost certainly does NOT lie on it — no combination of area and age reproduces them exactly.</a:t>
-            </a:r>
-          </a:p>
-          <a:p>
-            <a:pPr lvl="0" indent="0" marL="0">
-              <a:buNone/>
-            </a:pPr>
-          </a:p>
-          <a:p>
-            <a:pPr lvl="0" indent="0" marL="0">
-              <a:buNone/>
-            </a:pPr>
-            <a:r>
-              <a:rPr/>
-              <a:t>So the best you can do is the closest point on the surface: the shadow, the perpendicular projection.</a:t>
-            </a:r>
-          </a:p>
-          <a:p>
-            <a:pPr lvl="0" indent="0" marL="0">
-              <a:buNone/>
-            </a:pPr>
-          </a:p>
-          <a:p>
-            <a:pPr lvl="0" indent="0" marL="0">
-              <a:buNone/>
-            </a:pPr>
-            <a:r>
-              <a:rPr/>
-              <a:t>Then the punchline, which is the whole method: why perpendicular? Because if the leftover error had any component lying ALONG the surface, you could have moved that way and done better. At the optimum the error must be at right angles to every feature. That is what the normal equations say, and it is where the name comes from.</a:t>
+              <a:t>Walk the first row across out loud: 80 square metres, the model says 237,000, the truth is 240,000, so it is 3,000 euros light. Then the last column squares it.</a:t>
+            </a:r>
+          </a:p>
+          <a:p>
+            <a:pPr lvl="0" indent="0" marL="0">
+              <a:buNone/>
+            </a:pPr>
+          </a:p>
+          <a:p>
+            <a:pPr lvl="0" indent="0" marL="0">
+              <a:buNone/>
+            </a:pPr>
+            <a:r>
+              <a:rPr/>
+              <a:t>Dividing the sum by 2m gives a cost of about 6.7 × 10⁷. Nobody should be impressed by that number on its own — a cost is only meaningful compared with another cost, which is exactly what fitting does.</a:t>
+            </a:r>
+          </a:p>
+          <a:p>
+            <a:pPr lvl="0" indent="0" marL="0">
+              <a:buNone/>
+            </a:pPr>
+          </a:p>
+          <a:p>
+            <a:pPr lvl="0" indent="0" marL="0">
+              <a:buNone/>
+            </a:pPr>
+            <a:r>
+              <a:rPr/>
+              <a:t>Handout section 2.3 has this table. The next slide is what it is really for.</a:t>
             </a:r>
           </a:p>
         </p:txBody>
@@ -7414,6 +9649,594 @@
             </a:pPr>
             <a:r>
               <a:rPr/>
+              <a:t>Trying ŷ = 2,400 · area + 45,000</a:t>
+            </a:r>
+          </a:p>
+        </p:txBody>
+      </p:sp>
+      <p:graphicFrame>
+        <p:nvGraphicFramePr>
+          <p:cNvPr id="6" name="Content Placeholder 5"/>
+          <p:cNvGraphicFramePr>
+            <a:graphicFrameLocks noGrp="1"/>
+          </p:cNvGraphicFramePr>
+          <p:nvPr>
+            <p:ph idx="1"/>
+          </p:nvPr>
+        </p:nvGraphicFramePr>
+        <p:xfrm>
+          <a:off x="457200" y="1193800"/>
+          <a:ext cx="8229600" cy="3390900"/>
+        </p:xfrm>
+        <a:graphic>
+          <a:graphicData uri="http://schemas.openxmlformats.org/drawingml/2006/table">
+            <a:tbl>
+              <a:tblPr firstRow="1" bandRow="1">
+                <a:tableStyleId>{5C22544A-7EE6-4342-B048-85BDC9FD1C3A}</a:tableStyleId>
+              </a:tblPr>
+              <a:tblGrid>
+                <a:gridCol w="1638300"/>
+                <a:gridCol w="1638300"/>
+                <a:gridCol w="1638300"/>
+                <a:gridCol w="1638300"/>
+                <a:gridCol w="1638300"/>
+              </a:tblGrid>
+              <a:tr h="0">
+                <a:tc>
+                  <a:txBody>
+                    <a:bodyPr/>
+                    <a:lstStyle/>
+                    <a:p>
+                      <a:pPr lvl="0" indent="0" marL="0">
+                        <a:buNone/>
+                      </a:pPr>
+                      <a:r>
+                        <a:rPr/>
+                        <a:t>Area (m²)</a:t>
+                      </a:r>
+                    </a:p>
+                  </a:txBody>
+                  <a:tcPr/>
+                </a:tc>
+                <a:tc>
+                  <a:txBody>
+                    <a:bodyPr/>
+                    <a:lstStyle/>
+                    <a:p>
+                      <a:pPr lvl="0" indent="0" marL="0">
+                        <a:buNone/>
+                      </a:pPr>
+                      <a:r>
+                        <a:rPr/>
+                        <a:t>True (€)</a:t>
+                      </a:r>
+                    </a:p>
+                  </a:txBody>
+                  <a:tcPr/>
+                </a:tc>
+                <a:tc>
+                  <a:txBody>
+                    <a:bodyPr/>
+                    <a:lstStyle/>
+                    <a:p>
+                      <a:pPr lvl="0" indent="0" marL="0">
+                        <a:buNone/>
+                      </a:pPr>
+                      <a:r>
+                        <a:rPr/>
+                        <a:t>Predicted (€)</a:t>
+                      </a:r>
+                    </a:p>
+                  </a:txBody>
+                  <a:tcPr/>
+                </a:tc>
+                <a:tc>
+                  <a:txBody>
+                    <a:bodyPr/>
+                    <a:lstStyle/>
+                    <a:p>
+                      <a:pPr lvl="0" indent="0" marL="0">
+                        <a:buNone/>
+                      </a:pPr>
+                      <a:r>
+                        <a:rPr/>
+                        <a:t>Error ŷ − y</a:t>
+                      </a:r>
+                    </a:p>
+                  </a:txBody>
+                  <a:tcPr/>
+                </a:tc>
+                <a:tc>
+                  <a:txBody>
+                    <a:bodyPr/>
+                    <a:lstStyle/>
+                    <a:p>
+                      <a:pPr lvl="0" indent="0" marL="0">
+                        <a:buNone/>
+                      </a:pPr>
+                      <a:r>
+                        <a:rPr/>
+                        <a:t>Error²</a:t>
+                      </a:r>
+                    </a:p>
+                  </a:txBody>
+                  <a:tcPr/>
+                </a:tc>
+              </a:tr>
+              <a:tr h="0">
+                <a:tc>
+                  <a:txBody>
+                    <a:bodyPr/>
+                    <a:lstStyle/>
+                    <a:p>
+                      <a:pPr lvl="0" indent="0" marL="0">
+                        <a:buNone/>
+                      </a:pPr>
+                      <a:r>
+                        <a:rPr/>
+                        <a:t>80</a:t>
+                      </a:r>
+                    </a:p>
+                  </a:txBody>
+                </a:tc>
+                <a:tc>
+                  <a:txBody>
+                    <a:bodyPr/>
+                    <a:lstStyle/>
+                    <a:p>
+                      <a:pPr lvl="0" indent="0" marL="0">
+                        <a:buNone/>
+                      </a:pPr>
+                      <a:r>
+                        <a:rPr/>
+                        <a:t>240,000</a:t>
+                      </a:r>
+                    </a:p>
+                  </a:txBody>
+                </a:tc>
+                <a:tc>
+                  <a:txBody>
+                    <a:bodyPr/>
+                    <a:lstStyle/>
+                    <a:p>
+                      <a:pPr lvl="0" indent="0" marL="0">
+                        <a:buNone/>
+                      </a:pPr>
+                      <a:r>
+                        <a:rPr/>
+                        <a:t>237,000</a:t>
+                      </a:r>
+                    </a:p>
+                  </a:txBody>
+                </a:tc>
+                <a:tc>
+                  <a:txBody>
+                    <a:bodyPr/>
+                    <a:lstStyle/>
+                    <a:p>
+                      <a:pPr lvl="0" indent="0" marL="0">
+                        <a:buNone/>
+                      </a:pPr>
+                      <a:r>
+                        <a:rPr/>
+                        <a:t>−3,000</a:t>
+                      </a:r>
+                    </a:p>
+                  </a:txBody>
+                </a:tc>
+                <a:tc>
+                  <a:txBody>
+                    <a:bodyPr/>
+                    <a:lstStyle/>
+                    <a:p>
+                      <a:pPr lvl="0" indent="0" marL="0">
+                        <a:buNone/>
+                      </a:pPr>
+                      <a:r>
+                        <a:rPr/>
+                        <a:t>9.0 × 10⁶</a:t>
+                      </a:r>
+                    </a:p>
+                  </a:txBody>
+                </a:tc>
+              </a:tr>
+              <a:tr h="0">
+                <a:tc>
+                  <a:txBody>
+                    <a:bodyPr/>
+                    <a:lstStyle/>
+                    <a:p>
+                      <a:pPr lvl="0" indent="0" marL="0">
+                        <a:buNone/>
+                      </a:pPr>
+                      <a:r>
+                        <a:rPr/>
+                        <a:t>120</a:t>
+                      </a:r>
+                    </a:p>
+                  </a:txBody>
+                </a:tc>
+                <a:tc>
+                  <a:txBody>
+                    <a:bodyPr/>
+                    <a:lstStyle/>
+                    <a:p>
+                      <a:pPr lvl="0" indent="0" marL="0">
+                        <a:buNone/>
+                      </a:pPr>
+                      <a:r>
+                        <a:rPr/>
+                        <a:t>320,000</a:t>
+                      </a:r>
+                    </a:p>
+                  </a:txBody>
+                </a:tc>
+                <a:tc>
+                  <a:txBody>
+                    <a:bodyPr/>
+                    <a:lstStyle/>
+                    <a:p>
+                      <a:pPr lvl="0" indent="0" marL="0">
+                        <a:buNone/>
+                      </a:pPr>
+                      <a:r>
+                        <a:rPr/>
+                        <a:t>333,000</a:t>
+                      </a:r>
+                    </a:p>
+                  </a:txBody>
+                </a:tc>
+                <a:tc>
+                  <a:txBody>
+                    <a:bodyPr/>
+                    <a:lstStyle/>
+                    <a:p>
+                      <a:pPr lvl="0" indent="0" marL="0">
+                        <a:buNone/>
+                      </a:pPr>
+                      <a:r>
+                        <a:rPr/>
+                        <a:t>+13,000</a:t>
+                      </a:r>
+                    </a:p>
+                  </a:txBody>
+                </a:tc>
+                <a:tc>
+                  <a:txBody>
+                    <a:bodyPr/>
+                    <a:lstStyle/>
+                    <a:p>
+                      <a:pPr lvl="0" indent="0" marL="0">
+                        <a:buNone/>
+                      </a:pPr>
+                      <a:r>
+                        <a:rPr/>
+                        <a:t>1.69 × 10⁸</a:t>
+                      </a:r>
+                    </a:p>
+                  </a:txBody>
+                </a:tc>
+              </a:tr>
+              <a:tr h="0">
+                <a:tc>
+                  <a:txBody>
+                    <a:bodyPr/>
+                    <a:lstStyle/>
+                    <a:p>
+                      <a:pPr lvl="0" indent="0" marL="0">
+                        <a:buNone/>
+                      </a:pPr>
+                      <a:r>
+                        <a:rPr/>
+                        <a:t>200</a:t>
+                      </a:r>
+                    </a:p>
+                  </a:txBody>
+                </a:tc>
+                <a:tc>
+                  <a:txBody>
+                    <a:bodyPr/>
+                    <a:lstStyle/>
+                    <a:p>
+                      <a:pPr lvl="0" indent="0" marL="0">
+                        <a:buNone/>
+                      </a:pPr>
+                      <a:r>
+                        <a:rPr/>
+                        <a:t>540,000</a:t>
+                      </a:r>
+                    </a:p>
+                  </a:txBody>
+                </a:tc>
+                <a:tc>
+                  <a:txBody>
+                    <a:bodyPr/>
+                    <a:lstStyle/>
+                    <a:p>
+                      <a:pPr lvl="0" indent="0" marL="0">
+                        <a:buNone/>
+                      </a:pPr>
+                      <a:r>
+                        <a:rPr/>
+                        <a:t>525,000</a:t>
+                      </a:r>
+                    </a:p>
+                  </a:txBody>
+                </a:tc>
+                <a:tc>
+                  <a:txBody>
+                    <a:bodyPr/>
+                    <a:lstStyle/>
+                    <a:p>
+                      <a:pPr lvl="0" indent="0" marL="0">
+                        <a:buNone/>
+                      </a:pPr>
+                      <a:r>
+                        <a:rPr/>
+                        <a:t>−15,000</a:t>
+                      </a:r>
+                    </a:p>
+                  </a:txBody>
+                </a:tc>
+                <a:tc>
+                  <a:txBody>
+                    <a:bodyPr/>
+                    <a:lstStyle/>
+                    <a:p>
+                      <a:pPr lvl="0" indent="0" marL="0">
+                        <a:buNone/>
+                      </a:pPr>
+                      <a:r>
+                        <a:rPr/>
+                        <a:t>2.25 × 10⁸</a:t>
+                      </a:r>
+                    </a:p>
+                  </a:txBody>
+                </a:tc>
+              </a:tr>
+            </a:tbl>
+          </a:graphicData>
+        </a:graphic>
+      </p:graphicFrame>
+    </p:spTree>
+  </p:cSld>
+</p:sld>
+</file>
+
+<file path=ppt/slides/slide11.xml><?xml version="1.0" encoding="utf-8"?>
+<p:sld xmlns:a="http://schemas.openxmlformats.org/drawingml/2006/main" xmlns:r="http://schemas.openxmlformats.org/officeDocument/2006/relationships" xmlns:p="http://schemas.openxmlformats.org/presentationml/2006/main">
+  <p:cSld>
+    <p:spTree>
+      <p:nvGrpSpPr>
+        <p:cNvPr id="1" name=""/>
+        <p:cNvGrpSpPr/>
+        <p:nvPr/>
+      </p:nvGrpSpPr>
+      <p:grpSpPr>
+        <a:xfrm>
+          <a:off x="0" y="0"/>
+          <a:ext cx="0" cy="0"/>
+          <a:chOff x="0" y="0"/>
+          <a:chExt cx="0" cy="0"/>
+        </a:xfrm>
+      </p:grpSpPr>
+      <p:sp>
+        <p:nvSpPr>
+          <p:cNvPr id="2" name="Title 1"/>
+          <p:cNvSpPr>
+            <a:spLocks noGrp="1"/>
+          </p:cNvSpPr>
+          <p:nvPr>
+            <p:ph type="title"/>
+          </p:nvPr>
+        </p:nvSpPr>
+        <p:spPr>
+          <a:xfrm>
+            <a:off x="457200" y="205979"/>
+            <a:ext cx="8229600" cy="857250"/>
+          </a:xfrm>
+        </p:spPr>
+        <p:txBody>
+          <a:bodyPr/>
+          <a:lstStyle/>
+          <a:p>
+            <a:pPr lvl="0" indent="0" marL="0">
+              <a:buNone/>
+            </a:pPr>
+            <a:r>
+              <a:rPr/>
+              <a:t>Squared error spends its attention on the worst house</a:t>
+            </a:r>
+          </a:p>
+        </p:txBody>
+      </p:sp>
+      <p:sp>
+        <p:nvSpPr>
+          <p:cNvPr id="3" name="Content Placeholder 2"/>
+          <p:cNvSpPr>
+            <a:spLocks noGrp="1"/>
+          </p:cNvSpPr>
+          <p:nvPr>
+            <p:ph idx="1"/>
+          </p:nvPr>
+        </p:nvSpPr>
+        <p:spPr>
+          <a:xfrm>
+            <a:off x="457200" y="1200151"/>
+            <a:ext cx="8229600" cy="3394472"/>
+          </a:xfrm>
+        </p:spPr>
+        <p:txBody>
+          <a:bodyPr/>
+          <a:lstStyle/>
+          <a:p>
+            <a:pPr lvl="0"/>
+            <a:r>
+              <a:rPr/>
+              <a:t>The 3,000 € error contributes about </a:t>
+            </a:r>
+            <a:r>
+              <a:rPr b="1"/>
+              <a:t>2%</a:t>
+            </a:r>
+            <a:r>
+              <a:rPr/>
+              <a:t> of the total</a:t>
+            </a:r>
+          </a:p>
+          <a:p>
+            <a:pPr lvl="0"/>
+            <a:r>
+              <a:rPr/>
+              <a:t>The two large errors contribute the other </a:t>
+            </a:r>
+            <a:r>
+              <a:rPr b="1"/>
+              <a:t>98%</a:t>
+            </a:r>
+          </a:p>
+          <a:p>
+            <a:pPr lvl="0"/>
+            <a:r>
+              <a:rPr/>
+              <a:t>Halving the 15,000 € error cuts the cost by </a:t>
+            </a:r>
+            <a:r>
+              <a:rPr b="1"/>
+              <a:t>42%</a:t>
+            </a:r>
+          </a:p>
+        </p:txBody>
+      </p:sp>
+    </p:spTree>
+  </p:cSld>
+</p:sld>
+</file>
+
+<file path=ppt/slides/slide12.xml><?xml version="1.0" encoding="utf-8"?>
+<p:sld xmlns:a="http://schemas.openxmlformats.org/drawingml/2006/main" xmlns:r="http://schemas.openxmlformats.org/officeDocument/2006/relationships" xmlns:p="http://schemas.openxmlformats.org/presentationml/2006/main">
+  <p:cSld>
+    <p:spTree>
+      <p:nvGrpSpPr>
+        <p:cNvPr id="1" name=""/>
+        <p:cNvGrpSpPr/>
+        <p:nvPr/>
+      </p:nvGrpSpPr>
+      <p:grpSpPr>
+        <a:xfrm>
+          <a:off x="0" y="0"/>
+          <a:ext cx="0" cy="0"/>
+          <a:chOff x="0" y="0"/>
+          <a:chExt cx="0" cy="0"/>
+        </a:xfrm>
+      </p:grpSpPr>
+      <p:sp>
+        <p:nvSpPr>
+          <p:cNvPr id="2" name="Title 1"/>
+          <p:cNvSpPr>
+            <a:spLocks noGrp="1"/>
+          </p:cNvSpPr>
+          <p:nvPr>
+            <p:ph type="title"/>
+          </p:nvPr>
+        </p:nvSpPr>
+        <p:spPr>
+          <a:xfrm>
+            <a:off x="457200" y="205979"/>
+            <a:ext cx="8229600" cy="857250"/>
+          </a:xfrm>
+        </p:spPr>
+        <p:txBody>
+          <a:bodyPr/>
+          <a:lstStyle/>
+          <a:p>
+            <a:pPr lvl="0" indent="0" marL="0">
+              <a:buNone/>
+            </a:pPr>
+            <a:r>
+              <a:rPr/>
+              <a:t>The cost is a bowl</a:t>
+            </a:r>
+          </a:p>
+        </p:txBody>
+      </p:sp>
+      <p:pic>
+        <p:nvPicPr>
+          <p:cNvPr descr="cost_surface.png" id="0" name="Picture 1"/>
+          <p:cNvPicPr>
+            <a:picLocks noGrp="1" noChangeAspect="1"/>
+          </p:cNvPicPr>
+          <p:nvPr/>
+        </p:nvPicPr>
+        <p:blipFill>
+          <a:blip r:embed="rId3"/>
+          <a:stretch>
+            <a:fillRect/>
+          </a:stretch>
+        </p:blipFill>
+        <p:spPr bwMode="auto">
+          <a:xfrm>
+            <a:off x="2023548" y="1166099"/>
+            <a:ext cx="5096903" cy="3360181"/>
+          </a:xfrm>
+          <a:prstGeom prst="rect">
+            <a:avLst/>
+          </a:prstGeom>
+          <a:noFill/>
+          <a:ln w="9525">
+            <a:noFill/>
+            <a:headEnd/>
+            <a:tailEnd/>
+          </a:ln>
+        </p:spPr>
+      </p:pic>
+    </p:spTree>
+  </p:cSld>
+</p:sld>
+</file>
+
+<file path=ppt/slides/slide13.xml><?xml version="1.0" encoding="utf-8"?>
+<p:sld xmlns:a="http://schemas.openxmlformats.org/drawingml/2006/main" xmlns:r="http://schemas.openxmlformats.org/officeDocument/2006/relationships" xmlns:p="http://schemas.openxmlformats.org/presentationml/2006/main">
+  <p:cSld>
+    <p:spTree>
+      <p:nvGrpSpPr>
+        <p:cNvPr id="1" name=""/>
+        <p:cNvGrpSpPr/>
+        <p:nvPr/>
+      </p:nvGrpSpPr>
+      <p:grpSpPr>
+        <a:xfrm>
+          <a:off x="0" y="0"/>
+          <a:ext cx="0" cy="0"/>
+          <a:chOff x="0" y="0"/>
+          <a:chExt cx="0" cy="0"/>
+        </a:xfrm>
+      </p:grpSpPr>
+      <p:sp>
+        <p:nvSpPr>
+          <p:cNvPr id="2" name="Title 1"/>
+          <p:cNvSpPr>
+            <a:spLocks noGrp="1"/>
+          </p:cNvSpPr>
+          <p:nvPr>
+            <p:ph type="title"/>
+          </p:nvPr>
+        </p:nvSpPr>
+        <p:spPr>
+          <a:xfrm>
+            <a:off x="457200" y="205979"/>
+            <a:ext cx="8229600" cy="857250"/>
+          </a:xfrm>
+        </p:spPr>
+        <p:txBody>
+          <a:bodyPr/>
+          <a:lstStyle/>
+          <a:p>
+            <a:pPr lvl="0" indent="0" marL="0">
+              <a:buNone/>
+            </a:pPr>
+            <a:r>
+              <a:rPr/>
               <a:t>The picture behind the exact solution</a:t>
             </a:r>
           </a:p>
@@ -7454,7 +10277,7 @@
 </p:sld>
 </file>
 
-<file path=ppt/slides/slide11.xml><?xml version="1.0" encoding="utf-8"?>
+<file path=ppt/slides/slide14.xml><?xml version="1.0" encoding="utf-8"?>
 <p:sld xmlns:a="http://schemas.openxmlformats.org/drawingml/2006/main" xmlns:r="http://schemas.openxmlformats.org/officeDocument/2006/relationships" xmlns:p="http://schemas.openxmlformats.org/presentationml/2006/main">
   <p:cSld>
     <p:spTree>
@@ -7536,7 +10359,7 @@
 </p:sld>
 </file>
 
-<file path=ppt/slides/slide12.xml><?xml version="1.0" encoding="utf-8"?>
+<file path=ppt/slides/slide15.xml><?xml version="1.0" encoding="utf-8"?>
 <p:sld xmlns:a="http://schemas.openxmlformats.org/drawingml/2006/main" xmlns:r="http://schemas.openxmlformats.org/officeDocument/2006/relationships" xmlns:p="http://schemas.openxmlformats.org/presentationml/2006/main">
   <p:cSld>
     <p:spTree>
@@ -7578,63 +10401,275 @@
             </a:pPr>
             <a:r>
               <a:rPr/>
-              <a:t>So why learn anything else?</a:t>
-            </a:r>
-          </a:p>
-        </p:txBody>
-      </p:sp>
-      <p:sp>
-        <p:nvSpPr>
-          <p:cNvPr id="3" name="Content Placeholder 2"/>
-          <p:cNvSpPr>
-            <a:spLocks noGrp="1"/>
-          </p:cNvSpPr>
+              <a:t>The same equation, by hand</a:t>
+            </a:r>
+          </a:p>
+        </p:txBody>
+      </p:sp>
+      <p:graphicFrame>
+        <p:nvGraphicFramePr>
+          <p:cNvPr id="6" name="Content Placeholder 5"/>
+          <p:cNvGraphicFramePr>
+            <a:graphicFrameLocks noGrp="1"/>
+          </p:cNvGraphicFramePr>
           <p:nvPr>
             <p:ph idx="1"/>
           </p:nvPr>
-        </p:nvSpPr>
-        <p:spPr>
-          <a:xfrm>
-            <a:off x="457200" y="1200151"/>
-            <a:ext cx="8229600" cy="3394472"/>
-          </a:xfrm>
-        </p:spPr>
-        <p:txBody>
-          <a:bodyPr/>
-          <a:lstStyle/>
-          <a:p>
-            <a:pPr lvl="0"/>
-            <a:r>
-              <a:rPr/>
-              <a:t>(Xᵀ X)⁻¹ costs about n³ operations</a:t>
-            </a:r>
-          </a:p>
-          <a:p>
-            <a:pPr lvl="0"/>
-            <a:r>
-              <a:rPr/>
-              <a:t>Two columns carrying one fact → </a:t>
-            </a:r>
-            <a:r>
-              <a:rPr b="1"/>
-              <a:t>no inverse exists</a:t>
-            </a:r>
-          </a:p>
-          <a:p>
-            <a:pPr lvl="0"/>
-            <a:r>
-              <a:rPr/>
-              <a:t>Nearly-redundant columns → an inverse that is useless</a:t>
-            </a:r>
-          </a:p>
-        </p:txBody>
-      </p:sp>
+        </p:nvGraphicFramePr>
+        <p:xfrm>
+          <a:off x="457200" y="1193800"/>
+          <a:ext cx="8229600" cy="3390900"/>
+        </p:xfrm>
+        <a:graphic>
+          <a:graphicData uri="http://schemas.openxmlformats.org/drawingml/2006/table">
+            <a:tbl>
+              <a:tblPr firstRow="1" bandRow="1">
+                <a:tableStyleId>{5C22544A-7EE6-4342-B048-85BDC9FD1C3A}</a:tableStyleId>
+              </a:tblPr>
+              <a:tblGrid>
+                <a:gridCol w="4114800"/>
+                <a:gridCol w="4114800"/>
+              </a:tblGrid>
+              <a:tr h="0">
+                <a:tc>
+                  <a:txBody>
+                    <a:bodyPr/>
+                    <a:lstStyle/>
+                    <a:p>
+                      <a:pPr lvl="0" indent="0" marL="0">
+                        <a:buNone/>
+                      </a:pPr>
+                      <a:r>
+                        <a:rPr/>
+                        <a:t>Quantity</a:t>
+                      </a:r>
+                    </a:p>
+                  </a:txBody>
+                  <a:tcPr/>
+                </a:tc>
+                <a:tc>
+                  <a:txBody>
+                    <a:bodyPr/>
+                    <a:lstStyle/>
+                    <a:p>
+                      <a:pPr lvl="0" indent="0" marL="0">
+                        <a:buNone/>
+                      </a:pPr>
+                      <a:r>
+                        <a:rPr/>
+                        <a:t>Value</a:t>
+                      </a:r>
+                    </a:p>
+                  </a:txBody>
+                  <a:tcPr/>
+                </a:tc>
+              </a:tr>
+              <a:tr h="0">
+                <a:tc>
+                  <a:txBody>
+                    <a:bodyPr/>
+                    <a:lstStyle/>
+                    <a:p>
+                      <a:pPr lvl="0" indent="0" marL="0">
+                        <a:buNone/>
+                      </a:pPr>
+                      <a:r>
+                        <a:rPr/>
+                        <a:t>the three houses</a:t>
+                      </a:r>
+                    </a:p>
+                  </a:txBody>
+                </a:tc>
+                <a:tc>
+                  <a:txBody>
+                    <a:bodyPr/>
+                    <a:lstStyle/>
+                    <a:p>
+                      <a:pPr lvl="0" indent="0" marL="0">
+                        <a:buNone/>
+                      </a:pPr>
+                      <a:r>
+                        <a:rPr/>
+                        <a:t>80, 120, 200 m² → 240k, 320k, 540k</a:t>
+                      </a:r>
+                    </a:p>
+                  </a:txBody>
+                </a:tc>
+              </a:tr>
+              <a:tr h="0">
+                <a:tc>
+                  <a:txBody>
+                    <a:bodyPr/>
+                    <a:lstStyle/>
+                    <a:p>
+                      <a:pPr lvl="0" indent="0" marL="0">
+                        <a:buNone/>
+                      </a:pPr>
+                      <a:r>
+                        <a:rPr/>
+                        <a:t>Xᵀ X</a:t>
+                      </a:r>
+                    </a:p>
+                  </a:txBody>
+                </a:tc>
+                <a:tc>
+                  <a:txBody>
+                    <a:bodyPr/>
+                    <a:lstStyle/>
+                    <a:p>
+                      <a:pPr lvl="0" indent="0" marL="0">
+                        <a:buNone/>
+                      </a:pPr>
+                      <a:r>
+                        <a:rPr/>
+                        <a:t>rows (3, 400) and (400, 60,800)</a:t>
+                      </a:r>
+                    </a:p>
+                  </a:txBody>
+                </a:tc>
+              </a:tr>
+              <a:tr h="0">
+                <a:tc>
+                  <a:txBody>
+                    <a:bodyPr/>
+                    <a:lstStyle/>
+                    <a:p>
+                      <a:pPr lvl="0" indent="0" marL="0">
+                        <a:buNone/>
+                      </a:pPr>
+                      <a:r>
+                        <a:rPr/>
+                        <a:t>Xᵀ y</a:t>
+                      </a:r>
+                    </a:p>
+                  </a:txBody>
+                </a:tc>
+                <a:tc>
+                  <a:txBody>
+                    <a:bodyPr/>
+                    <a:lstStyle/>
+                    <a:p>
+                      <a:pPr lvl="0" indent="0" marL="0">
+                        <a:buNone/>
+                      </a:pPr>
+                      <a:r>
+                        <a:rPr/>
+                        <a:t>(1,100 , 165,200)</a:t>
+                      </a:r>
+                    </a:p>
+                  </a:txBody>
+                </a:tc>
+              </a:tr>
+              <a:tr h="0">
+                <a:tc>
+                  <a:txBody>
+                    <a:bodyPr/>
+                    <a:lstStyle/>
+                    <a:p>
+                      <a:pPr lvl="0" indent="0" marL="0">
+                        <a:buNone/>
+                      </a:pPr>
+                      <a:r>
+                        <a:rPr/>
+                        <a:t>determinant</a:t>
+                      </a:r>
+                    </a:p>
+                  </a:txBody>
+                </a:tc>
+                <a:tc>
+                  <a:txBody>
+                    <a:bodyPr/>
+                    <a:lstStyle/>
+                    <a:p>
+                      <a:pPr lvl="0" indent="0" marL="0">
+                        <a:buNone/>
+                      </a:pPr>
+                      <a:r>
+                        <a:rPr/>
+                        <a:t>22,400</a:t>
+                      </a:r>
+                    </a:p>
+                  </a:txBody>
+                </a:tc>
+              </a:tr>
+              <a:tr h="0">
+                <a:tc>
+                  <a:txBody>
+                    <a:bodyPr/>
+                    <a:lstStyle/>
+                    <a:p>
+                      <a:pPr lvl="0" indent="0" marL="0">
+                        <a:buNone/>
+                      </a:pPr>
+                      <a:r>
+                        <a:rPr b="1"/>
+                        <a:t>slope w</a:t>
+                      </a:r>
+                    </a:p>
+                  </a:txBody>
+                </a:tc>
+                <a:tc>
+                  <a:txBody>
+                    <a:bodyPr/>
+                    <a:lstStyle/>
+                    <a:p>
+                      <a:pPr lvl="0" indent="0" marL="0">
+                        <a:buNone/>
+                      </a:pPr>
+                      <a:r>
+                        <a:rPr b="1"/>
+                        <a:t>2,480 €/m²</a:t>
+                      </a:r>
+                      <a:r>
+                        <a:rPr/>
+                        <a:t> — the truth is 2,400</a:t>
+                      </a:r>
+                    </a:p>
+                  </a:txBody>
+                </a:tc>
+              </a:tr>
+              <a:tr h="0">
+                <a:tc>
+                  <a:txBody>
+                    <a:bodyPr/>
+                    <a:lstStyle/>
+                    <a:p>
+                      <a:pPr lvl="0" indent="0" marL="0">
+                        <a:buNone/>
+                      </a:pPr>
+                      <a:r>
+                        <a:rPr/>
+                        <a:t>intercept b</a:t>
+                      </a:r>
+                    </a:p>
+                  </a:txBody>
+                </a:tc>
+                <a:tc>
+                  <a:txBody>
+                    <a:bodyPr/>
+                    <a:lstStyle/>
+                    <a:p>
+                      <a:pPr lvl="0" indent="0" marL="0">
+                        <a:buNone/>
+                      </a:pPr>
+                      <a:r>
+                        <a:rPr/>
+                        <a:t>35,700 €</a:t>
+                      </a:r>
+                    </a:p>
+                  </a:txBody>
+                </a:tc>
+              </a:tr>
+            </a:tbl>
+          </a:graphicData>
+        </a:graphic>
+      </p:graphicFrame>
     </p:spTree>
   </p:cSld>
 </p:sld>
 </file>
 
-<file path=ppt/slides/slide13.xml><?xml version="1.0" encoding="utf-8"?>
+<file path=ppt/slides/slide16.xml><?xml version="1.0" encoding="utf-8"?>
 <p:sld xmlns:a="http://schemas.openxmlformats.org/drawingml/2006/main" xmlns:r="http://schemas.openxmlformats.org/officeDocument/2006/relationships" xmlns:p="http://schemas.openxmlformats.org/presentationml/2006/main">
   <p:cSld>
     <p:spTree>
@@ -7676,7 +10711,7 @@
             </a:pPr>
             <a:r>
               <a:rPr/>
-              <a:t>The picture behind gradient descent</a:t>
+              <a:t>And it really is the minimum</a:t>
             </a:r>
           </a:p>
         </p:txBody>
@@ -7701,21 +10736,48 @@
           <a:bodyPr/>
           <a:lstStyle/>
           <a:p>
-            <a:pPr lvl="0" indent="0" marL="0">
-              <a:buNone/>
-            </a:pPr>
-            <a:r>
-              <a:rPr/>
-              <a:t>You are on a hillside in fog.</a:t>
-            </a:r>
-          </a:p>
-          <a:p>
-            <a:pPr lvl="0" indent="0" marL="0">
-              <a:buNone/>
-            </a:pPr>
-            <a:r>
-              <a:rPr/>
-              <a:t>You cannot see the valley — but you can feel which way the ground slopes.</a:t>
+            <a:pPr lvl="0"/>
+            <a:r>
+              <a:rPr/>
+              <a:t>The second derivative is Xᵀ X — never negative in any direction</a:t>
+            </a:r>
+          </a:p>
+          <a:p>
+            <a:pPr lvl="0"/>
+            <a:r>
+              <a:rPr/>
+              <a:t>So the cost is </a:t>
+            </a:r>
+            <a:r>
+              <a:rPr b="1"/>
+              <a:t>convex</a:t>
+            </a:r>
+            <a:r>
+              <a:rPr/>
+              <a:t>: one bottom, no local traps</a:t>
+            </a:r>
+          </a:p>
+          <a:p>
+            <a:pPr lvl="0"/>
+            <a:r>
+              <a:rPr/>
+              <a:t>Any stationary point is </a:t>
+            </a:r>
+            <a:r>
+              <a:rPr i="1"/>
+              <a:t>the</a:t>
+            </a:r>
+            <a:r>
+              <a:rPr/>
+              <a:t> answer, not </a:t>
+            </a:r>
+            <a:r>
+              <a:rPr i="1"/>
+              <a:t>an</a:t>
+            </a:r>
+            <a:r>
+              <a:rPr/>
+              <a:t> answer</a:t>
             </a:r>
           </a:p>
         </p:txBody>
@@ -7725,7 +10787,426 @@
 </p:sld>
 </file>
 
-<file path=ppt/slides/slide14.xml><?xml version="1.0" encoding="utf-8"?>
+<file path=ppt/slides/slide17.xml><?xml version="1.0" encoding="utf-8"?>
+<p:sld xmlns:a="http://schemas.openxmlformats.org/drawingml/2006/main" xmlns:r="http://schemas.openxmlformats.org/officeDocument/2006/relationships" xmlns:p="http://schemas.openxmlformats.org/presentationml/2006/main">
+  <p:cSld>
+    <p:spTree>
+      <p:nvGrpSpPr>
+        <p:cNvPr id="1" name=""/>
+        <p:cNvGrpSpPr/>
+        <p:nvPr/>
+      </p:nvGrpSpPr>
+      <p:grpSpPr>
+        <a:xfrm>
+          <a:off x="0" y="0"/>
+          <a:ext cx="0" cy="0"/>
+          <a:chOff x="0" y="0"/>
+          <a:chExt cx="0" cy="0"/>
+        </a:xfrm>
+      </p:grpSpPr>
+      <p:sp>
+        <p:nvSpPr>
+          <p:cNvPr id="2" name="Title 1"/>
+          <p:cNvSpPr>
+            <a:spLocks noGrp="1"/>
+          </p:cNvSpPr>
+          <p:nvPr>
+            <p:ph type="title"/>
+          </p:nvPr>
+        </p:nvSpPr>
+        <p:spPr>
+          <a:xfrm>
+            <a:off x="457200" y="205979"/>
+            <a:ext cx="8229600" cy="857250"/>
+          </a:xfrm>
+        </p:spPr>
+        <p:txBody>
+          <a:bodyPr/>
+          <a:lstStyle/>
+          <a:p>
+            <a:pPr lvl="0" indent="0" marL="0">
+              <a:buNone/>
+            </a:pPr>
+            <a:r>
+              <a:rPr/>
+              <a:t>So why learn anything else?</a:t>
+            </a:r>
+          </a:p>
+        </p:txBody>
+      </p:sp>
+      <p:sp>
+        <p:nvSpPr>
+          <p:cNvPr id="3" name="Content Placeholder 2"/>
+          <p:cNvSpPr>
+            <a:spLocks noGrp="1"/>
+          </p:cNvSpPr>
+          <p:nvPr>
+            <p:ph idx="1"/>
+          </p:nvPr>
+        </p:nvSpPr>
+        <p:spPr>
+          <a:xfrm>
+            <a:off x="457200" y="1200151"/>
+            <a:ext cx="8229600" cy="3394472"/>
+          </a:xfrm>
+        </p:spPr>
+        <p:txBody>
+          <a:bodyPr/>
+          <a:lstStyle/>
+          <a:p>
+            <a:pPr lvl="0"/>
+            <a:r>
+              <a:rPr/>
+              <a:t>(Xᵀ X)⁻¹ costs about n³ operations</a:t>
+            </a:r>
+          </a:p>
+          <a:p>
+            <a:pPr lvl="0"/>
+            <a:r>
+              <a:rPr/>
+              <a:t>Two columns carrying one fact → </a:t>
+            </a:r>
+            <a:r>
+              <a:rPr b="1"/>
+              <a:t>no inverse exists</a:t>
+            </a:r>
+          </a:p>
+          <a:p>
+            <a:pPr lvl="0"/>
+            <a:r>
+              <a:rPr/>
+              <a:t>Nearly-redundant columns → an inverse that is useless</a:t>
+            </a:r>
+          </a:p>
+        </p:txBody>
+      </p:sp>
+    </p:spTree>
+  </p:cSld>
+</p:sld>
+</file>
+
+<file path=ppt/slides/slide18.xml><?xml version="1.0" encoding="utf-8"?>
+<p:sld xmlns:a="http://schemas.openxmlformats.org/drawingml/2006/main" xmlns:r="http://schemas.openxmlformats.org/officeDocument/2006/relationships" xmlns:p="http://schemas.openxmlformats.org/presentationml/2006/main">
+  <p:cSld>
+    <p:spTree>
+      <p:nvGrpSpPr>
+        <p:cNvPr id="1" name=""/>
+        <p:cNvGrpSpPr/>
+        <p:nvPr/>
+      </p:nvGrpSpPr>
+      <p:grpSpPr>
+        <a:xfrm>
+          <a:off x="0" y="0"/>
+          <a:ext cx="0" cy="0"/>
+          <a:chOff x="0" y="0"/>
+          <a:chExt cx="0" cy="0"/>
+        </a:xfrm>
+      </p:grpSpPr>
+      <p:sp>
+        <p:nvSpPr>
+          <p:cNvPr id="2" name="Title 1"/>
+          <p:cNvSpPr>
+            <a:spLocks noGrp="1"/>
+          </p:cNvSpPr>
+          <p:nvPr>
+            <p:ph type="title"/>
+          </p:nvPr>
+        </p:nvSpPr>
+        <p:spPr>
+          <a:xfrm>
+            <a:off x="457200" y="205979"/>
+            <a:ext cx="8229600" cy="857250"/>
+          </a:xfrm>
+        </p:spPr>
+        <p:txBody>
+          <a:bodyPr/>
+          <a:lstStyle/>
+          <a:p>
+            <a:pPr lvl="0" indent="0" marL="0">
+              <a:buNone/>
+            </a:pPr>
+            <a:r>
+              <a:rPr/>
+              <a:t>How stretched is the valley?</a:t>
+            </a:r>
+          </a:p>
+        </p:txBody>
+      </p:sp>
+      <p:sp>
+        <p:nvSpPr>
+          <p:cNvPr id="3" name="Content Placeholder 2"/>
+          <p:cNvSpPr>
+            <a:spLocks noGrp="1"/>
+          </p:cNvSpPr>
+          <p:nvPr>
+            <p:ph idx="1"/>
+          </p:nvPr>
+        </p:nvSpPr>
+        <p:spPr>
+          <a:xfrm>
+            <a:off x="457200" y="1200151"/>
+            <a:ext cx="8229600" cy="3394472"/>
+          </a:xfrm>
+        </p:spPr>
+        <p:txBody>
+          <a:bodyPr/>
+          <a:lstStyle/>
+          <a:p>
+            <a:pPr lvl="0" indent="0" marL="0">
+              <a:buNone/>
+            </a:pPr>
+            <a:r>
+              <a:rPr/>
+              <a:t>The </a:t>
+            </a:r>
+            <a:r>
+              <a:rPr b="1"/>
+              <a:t>condition number</a:t>
+            </a:r>
+            <a:r>
+              <a:rPr/>
+              <a:t> compares the steepest direction with the shallowest.</a:t>
+            </a:r>
+          </a:p>
+          <a:p>
+            <a:pPr lvl="0"/>
+            <a:r>
+              <a:rPr/>
+              <a:t>Housing features as recorded: </a:t>
+            </a:r>
+            <a:r>
+              <a:rPr b="1"/>
+              <a:t>285</a:t>
+            </a:r>
+          </a:p>
+          <a:p>
+            <a:pPr lvl="0"/>
+            <a:r>
+              <a:rPr/>
+              <a:t>The same features, standardised: </a:t>
+            </a:r>
+            <a:r>
+              <a:rPr b="1"/>
+              <a:t>3.4</a:t>
+            </a:r>
+          </a:p>
+          <a:p>
+            <a:pPr lvl="0"/>
+            <a:r>
+              <a:rPr/>
+              <a:t>Add </a:t>
+            </a:r>
+            <a:r>
+              <a:rPr>
+                <a:latin typeface="Courier"/>
+              </a:rPr>
+              <a:t>area_sqft</a:t>
+            </a:r>
+            <a:r>
+              <a:rPr/>
+              <a:t> beside </a:t>
+            </a:r>
+            <a:r>
+              <a:rPr>
+                <a:latin typeface="Courier"/>
+              </a:rPr>
+              <a:t>area_sqm</a:t>
+            </a:r>
+            <a:r>
+              <a:rPr/>
+              <a:t>: </a:t>
+            </a:r>
+            <a:r>
+              <a:rPr b="1"/>
+              <a:t>2,286</a:t>
+            </a:r>
+          </a:p>
+        </p:txBody>
+      </p:sp>
+    </p:spTree>
+  </p:cSld>
+</p:sld>
+</file>
+
+<file path=ppt/slides/slide19.xml><?xml version="1.0" encoding="utf-8"?>
+<p:sld xmlns:a="http://schemas.openxmlformats.org/drawingml/2006/main" xmlns:r="http://schemas.openxmlformats.org/officeDocument/2006/relationships" xmlns:p="http://schemas.openxmlformats.org/presentationml/2006/main">
+  <p:cSld>
+    <p:spTree>
+      <p:nvGrpSpPr>
+        <p:cNvPr id="1" name=""/>
+        <p:cNvGrpSpPr/>
+        <p:nvPr/>
+      </p:nvGrpSpPr>
+      <p:grpSpPr>
+        <a:xfrm>
+          <a:off x="0" y="0"/>
+          <a:ext cx="0" cy="0"/>
+          <a:chOff x="0" y="0"/>
+          <a:chExt cx="0" cy="0"/>
+        </a:xfrm>
+      </p:grpSpPr>
+      <p:sp>
+        <p:nvSpPr>
+          <p:cNvPr id="2" name="Title 1"/>
+          <p:cNvSpPr>
+            <a:spLocks noGrp="1"/>
+          </p:cNvSpPr>
+          <p:nvPr>
+            <p:ph type="title"/>
+          </p:nvPr>
+        </p:nvSpPr>
+        <p:spPr>
+          <a:xfrm>
+            <a:off x="457200" y="205979"/>
+            <a:ext cx="8229600" cy="857250"/>
+          </a:xfrm>
+        </p:spPr>
+        <p:txBody>
+          <a:bodyPr/>
+          <a:lstStyle/>
+          <a:p>
+            <a:pPr lvl="0" indent="0" marL="0">
+              <a:buNone/>
+            </a:pPr>
+            <a:r>
+              <a:rPr/>
+              <a:t>The picture behind gradient descent</a:t>
+            </a:r>
+          </a:p>
+        </p:txBody>
+      </p:sp>
+      <p:sp>
+        <p:nvSpPr>
+          <p:cNvPr id="3" name="Content Placeholder 2"/>
+          <p:cNvSpPr>
+            <a:spLocks noGrp="1"/>
+          </p:cNvSpPr>
+          <p:nvPr>
+            <p:ph idx="1"/>
+          </p:nvPr>
+        </p:nvSpPr>
+        <p:spPr>
+          <a:xfrm>
+            <a:off x="457200" y="1200151"/>
+            <a:ext cx="8229600" cy="3394472"/>
+          </a:xfrm>
+        </p:spPr>
+        <p:txBody>
+          <a:bodyPr/>
+          <a:lstStyle/>
+          <a:p>
+            <a:pPr lvl="0" indent="0" marL="0">
+              <a:buNone/>
+            </a:pPr>
+            <a:r>
+              <a:rPr/>
+              <a:t>You are on a hillside in fog.</a:t>
+            </a:r>
+          </a:p>
+          <a:p>
+            <a:pPr lvl="0" indent="0" marL="0">
+              <a:buNone/>
+            </a:pPr>
+            <a:r>
+              <a:rPr/>
+              <a:t>You cannot see the valley — but you can feel which way the ground slopes.</a:t>
+            </a:r>
+          </a:p>
+        </p:txBody>
+      </p:sp>
+    </p:spTree>
+  </p:cSld>
+</p:sld>
+</file>
+
+<file path=ppt/slides/slide2.xml><?xml version="1.0" encoding="utf-8"?>
+<p:sld xmlns:a="http://schemas.openxmlformats.org/drawingml/2006/main" xmlns:r="http://schemas.openxmlformats.org/officeDocument/2006/relationships" xmlns:p="http://schemas.openxmlformats.org/presentationml/2006/main">
+  <p:cSld>
+    <p:spTree>
+      <p:nvGrpSpPr>
+        <p:cNvPr id="1" name=""/>
+        <p:cNvGrpSpPr/>
+        <p:nvPr/>
+      </p:nvGrpSpPr>
+      <p:grpSpPr>
+        <a:xfrm>
+          <a:off x="0" y="0"/>
+          <a:ext cx="0" cy="0"/>
+          <a:chOff x="0" y="0"/>
+          <a:chExt cx="0" cy="0"/>
+        </a:xfrm>
+      </p:grpSpPr>
+      <p:sp>
+        <p:nvSpPr>
+          <p:cNvPr id="2" name="Title 1"/>
+          <p:cNvSpPr>
+            <a:spLocks noGrp="1"/>
+          </p:cNvSpPr>
+          <p:nvPr>
+            <p:ph type="title"/>
+          </p:nvPr>
+        </p:nvSpPr>
+        <p:spPr>
+          <a:xfrm>
+            <a:off x="457200" y="205979"/>
+            <a:ext cx="8229600" cy="857250"/>
+          </a:xfrm>
+        </p:spPr>
+        <p:txBody>
+          <a:bodyPr/>
+          <a:lstStyle/>
+          <a:p>
+            <a:pPr lvl="0" indent="0" marL="0">
+              <a:buNone/>
+            </a:pPr>
+            <a:r>
+              <a:rPr/>
+              <a:t>Before we start</a:t>
+            </a:r>
+          </a:p>
+        </p:txBody>
+      </p:sp>
+      <p:sp>
+        <p:nvSpPr>
+          <p:cNvPr id="3" name="Content Placeholder 2"/>
+          <p:cNvSpPr>
+            <a:spLocks noGrp="1"/>
+          </p:cNvSpPr>
+          <p:nvPr>
+            <p:ph idx="1"/>
+          </p:nvPr>
+        </p:nvSpPr>
+        <p:spPr>
+          <a:xfrm>
+            <a:off x="457200" y="1200151"/>
+            <a:ext cx="8229600" cy="3394472"/>
+          </a:xfrm>
+        </p:spPr>
+        <p:txBody>
+          <a:bodyPr/>
+          <a:lstStyle/>
+          <a:p>
+            <a:pPr lvl="0"/>
+            <a:r>
+              <a:rPr/>
+              <a:t>Exercise 2 was due today</a:t>
+            </a:r>
+          </a:p>
+          <a:p>
+            <a:pPr lvl="0"/>
+            <a:r>
+              <a:rPr/>
+              <a:t>The pipeline you built is the one we fit models into from now on</a:t>
+            </a:r>
+          </a:p>
+        </p:txBody>
+      </p:sp>
+    </p:spTree>
+  </p:cSld>
+</p:sld>
+</file>
+
+<file path=ppt/slides/slide20.xml><?xml version="1.0" encoding="utf-8"?>
 <p:sld xmlns:a="http://schemas.openxmlformats.org/drawingml/2006/main" xmlns:r="http://schemas.openxmlformats.org/officeDocument/2006/relationships" xmlns:p="http://schemas.openxmlformats.org/presentationml/2006/main">
   <p:cSld>
     <p:spTree>
@@ -7807,7 +11288,314 @@
 </p:sld>
 </file>
 
-<file path=ppt/slides/slide15.xml><?xml version="1.0" encoding="utf-8"?>
+<file path=ppt/slides/slide21.xml><?xml version="1.0" encoding="utf-8"?>
+<p:sld xmlns:a="http://schemas.openxmlformats.org/drawingml/2006/main" xmlns:r="http://schemas.openxmlformats.org/officeDocument/2006/relationships" xmlns:p="http://schemas.openxmlformats.org/presentationml/2006/main">
+  <p:cSld>
+    <p:spTree>
+      <p:nvGrpSpPr>
+        <p:cNvPr id="1" name=""/>
+        <p:cNvGrpSpPr/>
+        <p:nvPr/>
+      </p:nvGrpSpPr>
+      <p:grpSpPr>
+        <a:xfrm>
+          <a:off x="0" y="0"/>
+          <a:ext cx="0" cy="0"/>
+          <a:chOff x="0" y="0"/>
+          <a:chExt cx="0" cy="0"/>
+        </a:xfrm>
+      </p:grpSpPr>
+      <p:sp>
+        <p:nvSpPr>
+          <p:cNvPr id="2" name="Title 1"/>
+          <p:cNvSpPr>
+            <a:spLocks noGrp="1"/>
+          </p:cNvSpPr>
+          <p:nvPr>
+            <p:ph type="title"/>
+          </p:nvPr>
+        </p:nvSpPr>
+        <p:spPr>
+          <a:xfrm>
+            <a:off x="457200" y="205979"/>
+            <a:ext cx="8229600" cy="857250"/>
+          </a:xfrm>
+        </p:spPr>
+        <p:txBody>
+          <a:bodyPr/>
+          <a:lstStyle/>
+          <a:p>
+            <a:pPr lvl="0" indent="0" marL="0">
+              <a:buNone/>
+            </a:pPr>
+            <a:r>
+              <a:rPr/>
+              <a:t>One step, from w = 0 and b = 0</a:t>
+            </a:r>
+          </a:p>
+        </p:txBody>
+      </p:sp>
+      <p:graphicFrame>
+        <p:nvGraphicFramePr>
+          <p:cNvPr id="6" name="Content Placeholder 5"/>
+          <p:cNvGraphicFramePr>
+            <a:graphicFrameLocks noGrp="1"/>
+          </p:cNvGraphicFramePr>
+          <p:nvPr>
+            <p:ph idx="1"/>
+          </p:nvPr>
+        </p:nvGraphicFramePr>
+        <p:xfrm>
+          <a:off x="457200" y="1193800"/>
+          <a:ext cx="8229600" cy="3390900"/>
+        </p:xfrm>
+        <a:graphic>
+          <a:graphicData uri="http://schemas.openxmlformats.org/drawingml/2006/table">
+            <a:tbl>
+              <a:tblPr firstRow="1" bandRow="1">
+                <a:tableStyleId>{5C22544A-7EE6-4342-B048-85BDC9FD1C3A}</a:tableStyleId>
+              </a:tblPr>
+              <a:tblGrid>
+                <a:gridCol w="2743200"/>
+                <a:gridCol w="2743200"/>
+                <a:gridCol w="2743200"/>
+              </a:tblGrid>
+              <a:tr h="0">
+                <a:tc>
+                  <a:txBody>
+                    <a:bodyPr/>
+                    <a:lstStyle/>
+                    <a:p>
+                      <a:pPr lvl="0" indent="0" marL="0">
+                        <a:buNone/>
+                      </a:pPr>
+                      <a:r>
+                        <a:rPr/>
+                        <a:t>α = 10⁻⁵</a:t>
+                      </a:r>
+                    </a:p>
+                  </a:txBody>
+                  <a:tcPr/>
+                </a:tc>
+                <a:tc>
+                  <a:txBody>
+                    <a:bodyPr/>
+                    <a:lstStyle/>
+                    <a:p>
+                      <a:pPr lvl="0" indent="0" marL="0">
+                        <a:buNone/>
+                      </a:pPr>
+                      <a:r>
+                        <a:rPr/>
+                        <a:t>Gradient</a:t>
+                      </a:r>
+                    </a:p>
+                  </a:txBody>
+                  <a:tcPr/>
+                </a:tc>
+                <a:tc>
+                  <a:txBody>
+                    <a:bodyPr/>
+                    <a:lstStyle/>
+                    <a:p>
+                      <a:pPr lvl="0" indent="0" marL="0">
+                        <a:buNone/>
+                      </a:pPr>
+                      <a:r>
+                        <a:rPr/>
+                        <a:t>After one step</a:t>
+                      </a:r>
+                    </a:p>
+                  </a:txBody>
+                  <a:tcPr/>
+                </a:tc>
+              </a:tr>
+              <a:tr h="0">
+                <a:tc>
+                  <a:txBody>
+                    <a:bodyPr/>
+                    <a:lstStyle/>
+                    <a:p>
+                      <a:pPr lvl="0" indent="0" marL="0">
+                        <a:buNone/>
+                      </a:pPr>
+                      <a:r>
+                        <a:rPr/>
+                        <a:t>slope w</a:t>
+                      </a:r>
+                    </a:p>
+                  </a:txBody>
+                </a:tc>
+                <a:tc>
+                  <a:txBody>
+                    <a:bodyPr/>
+                    <a:lstStyle/>
+                    <a:p>
+                      <a:pPr lvl="0" indent="0" marL="0">
+                        <a:buNone/>
+                      </a:pPr>
+                      <a:r>
+                        <a:rPr/>
+                        <a:t>−63,600</a:t>
+                      </a:r>
+                    </a:p>
+                  </a:txBody>
+                </a:tc>
+                <a:tc>
+                  <a:txBody>
+                    <a:bodyPr/>
+                    <a:lstStyle/>
+                    <a:p>
+                      <a:pPr lvl="0" indent="0" marL="0">
+                        <a:buNone/>
+                      </a:pPr>
+                      <a:r>
+                        <a:rPr/>
+                        <a:t>0.636</a:t>
+                      </a:r>
+                    </a:p>
+                  </a:txBody>
+                </a:tc>
+              </a:tr>
+              <a:tr h="0">
+                <a:tc>
+                  <a:txBody>
+                    <a:bodyPr/>
+                    <a:lstStyle/>
+                    <a:p>
+                      <a:pPr lvl="0" indent="0" marL="0">
+                        <a:buNone/>
+                      </a:pPr>
+                      <a:r>
+                        <a:rPr/>
+                        <a:t>intercept b</a:t>
+                      </a:r>
+                    </a:p>
+                  </a:txBody>
+                </a:tc>
+                <a:tc>
+                  <a:txBody>
+                    <a:bodyPr/>
+                    <a:lstStyle/>
+                    <a:p>
+                      <a:pPr lvl="0" indent="0" marL="0">
+                        <a:buNone/>
+                      </a:pPr>
+                      <a:r>
+                        <a:rPr/>
+                        <a:t>−390</a:t>
+                      </a:r>
+                    </a:p>
+                  </a:txBody>
+                </a:tc>
+                <a:tc>
+                  <a:txBody>
+                    <a:bodyPr/>
+                    <a:lstStyle/>
+                    <a:p>
+                      <a:pPr lvl="0" indent="0" marL="0">
+                        <a:buNone/>
+                      </a:pPr>
+                      <a:r>
+                        <a:rPr/>
+                        <a:t>0.0039</a:t>
+                      </a:r>
+                    </a:p>
+                  </a:txBody>
+                </a:tc>
+              </a:tr>
+            </a:tbl>
+          </a:graphicData>
+        </a:graphic>
+      </p:graphicFrame>
+    </p:spTree>
+  </p:cSld>
+</p:sld>
+</file>
+
+<file path=ppt/slides/slide22.xml><?xml version="1.0" encoding="utf-8"?>
+<p:sld xmlns:a="http://schemas.openxmlformats.org/drawingml/2006/main" xmlns:r="http://schemas.openxmlformats.org/officeDocument/2006/relationships" xmlns:p="http://schemas.openxmlformats.org/presentationml/2006/main">
+  <p:cSld>
+    <p:spTree>
+      <p:nvGrpSpPr>
+        <p:cNvPr id="1" name=""/>
+        <p:cNvGrpSpPr/>
+        <p:nvPr/>
+      </p:nvGrpSpPr>
+      <p:grpSpPr>
+        <a:xfrm>
+          <a:off x="0" y="0"/>
+          <a:ext cx="0" cy="0"/>
+          <a:chOff x="0" y="0"/>
+          <a:chExt cx="0" cy="0"/>
+        </a:xfrm>
+      </p:grpSpPr>
+      <p:sp>
+        <p:nvSpPr>
+          <p:cNvPr id="2" name="Title 1"/>
+          <p:cNvSpPr>
+            <a:spLocks noGrp="1"/>
+          </p:cNvSpPr>
+          <p:nvPr>
+            <p:ph type="title"/>
+          </p:nvPr>
+        </p:nvSpPr>
+        <p:spPr>
+          <a:xfrm>
+            <a:off x="457200" y="205979"/>
+            <a:ext cx="8229600" cy="857250"/>
+          </a:xfrm>
+        </p:spPr>
+        <p:txBody>
+          <a:bodyPr/>
+          <a:lstStyle/>
+          <a:p>
+            <a:pPr lvl="0" indent="0" marL="0">
+              <a:buNone/>
+            </a:pPr>
+            <a:r>
+              <a:rPr/>
+              <a:t>The path it takes</a:t>
+            </a:r>
+          </a:p>
+        </p:txBody>
+      </p:sp>
+      <p:pic>
+        <p:nvPicPr>
+          <p:cNvPr descr="gradient_descent_path.png" id="0" name="Picture 1"/>
+          <p:cNvPicPr>
+            <a:picLocks noGrp="1" noChangeAspect="1"/>
+          </p:cNvPicPr>
+          <p:nvPr/>
+        </p:nvPicPr>
+        <p:blipFill>
+          <a:blip r:embed="rId3"/>
+          <a:stretch>
+            <a:fillRect/>
+          </a:stretch>
+        </p:blipFill>
+        <p:spPr bwMode="auto">
+          <a:xfrm>
+            <a:off x="457200" y="1455539"/>
+            <a:ext cx="8229600" cy="2781300"/>
+          </a:xfrm>
+          <a:prstGeom prst="rect">
+            <a:avLst/>
+          </a:prstGeom>
+          <a:noFill/>
+          <a:ln w="9525">
+            <a:noFill/>
+            <a:headEnd/>
+            <a:tailEnd/>
+          </a:ln>
+        </p:spPr>
+      </p:pic>
+    </p:spTree>
+  </p:cSld>
+</p:sld>
+</file>
+
+<file path=ppt/slides/slide23.xml><?xml version="1.0" encoding="utf-8"?>
 <p:sld xmlns:a="http://schemas.openxmlformats.org/drawingml/2006/main" xmlns:r="http://schemas.openxmlformats.org/officeDocument/2006/relationships" xmlns:p="http://schemas.openxmlformats.org/presentationml/2006/main">
   <p:cSld>
     <p:spTree>
@@ -7889,7 +11677,7 @@
 </p:sld>
 </file>
 
-<file path=ppt/slides/slide16.xml><?xml version="1.0" encoding="utf-8"?>
+<file path=ppt/slides/slide24.xml><?xml version="1.0" encoding="utf-8"?>
 <p:sld xmlns:a="http://schemas.openxmlformats.org/drawingml/2006/main" xmlns:r="http://schemas.openxmlformats.org/officeDocument/2006/relationships" xmlns:p="http://schemas.openxmlformats.org/presentationml/2006/main">
   <p:cSld>
     <p:spTree>
@@ -7971,7 +11759,7 @@
 </p:sld>
 </file>
 
-<file path=ppt/slides/slide17.xml><?xml version="1.0" encoding="utf-8"?>
+<file path=ppt/slides/slide25.xml><?xml version="1.0" encoding="utf-8"?>
 <p:sld xmlns:a="http://schemas.openxmlformats.org/drawingml/2006/main" xmlns:r="http://schemas.openxmlformats.org/officeDocument/2006/relationships" xmlns:p="http://schemas.openxmlformats.org/presentationml/2006/main">
   <p:cSld>
     <p:spTree>
@@ -8023,7 +11811,7 @@
 </p:sld>
 </file>
 
-<file path=ppt/slides/slide18.xml><?xml version="1.0" encoding="utf-8"?>
+<file path=ppt/slides/slide26.xml><?xml version="1.0" encoding="utf-8"?>
 <p:sld xmlns:a="http://schemas.openxmlformats.org/drawingml/2006/main" xmlns:r="http://schemas.openxmlformats.org/officeDocument/2006/relationships" xmlns:p="http://schemas.openxmlformats.org/presentationml/2006/main">
   <p:cSld>
     <p:spTree>
@@ -8114,7 +11902,89 @@
 </p:sld>
 </file>
 
-<file path=ppt/slides/slide19.xml><?xml version="1.0" encoding="utf-8"?>
+<file path=ppt/slides/slide27.xml><?xml version="1.0" encoding="utf-8"?>
+<p:sld xmlns:a="http://schemas.openxmlformats.org/drawingml/2006/main" xmlns:r="http://schemas.openxmlformats.org/officeDocument/2006/relationships" xmlns:p="http://schemas.openxmlformats.org/presentationml/2006/main">
+  <p:cSld>
+    <p:spTree>
+      <p:nvGrpSpPr>
+        <p:cNvPr id="1" name=""/>
+        <p:cNvGrpSpPr/>
+        <p:nvPr/>
+      </p:nvGrpSpPr>
+      <p:grpSpPr>
+        <a:xfrm>
+          <a:off x="0" y="0"/>
+          <a:ext cx="0" cy="0"/>
+          <a:chOff x="0" y="0"/>
+          <a:chExt cx="0" cy="0"/>
+        </a:xfrm>
+      </p:grpSpPr>
+      <p:sp>
+        <p:nvSpPr>
+          <p:cNvPr id="2" name="Title 1"/>
+          <p:cNvSpPr>
+            <a:spLocks noGrp="1"/>
+          </p:cNvSpPr>
+          <p:nvPr>
+            <p:ph type="title"/>
+          </p:nvPr>
+        </p:nvSpPr>
+        <p:spPr>
+          <a:xfrm>
+            <a:off x="457200" y="205979"/>
+            <a:ext cx="8229600" cy="857250"/>
+          </a:xfrm>
+        </p:spPr>
+        <p:txBody>
+          <a:bodyPr/>
+          <a:lstStyle/>
+          <a:p>
+            <a:pPr lvl="0" indent="0" marL="0">
+              <a:buNone/>
+            </a:pPr>
+            <a:r>
+              <a:rPr/>
+              <a:t>A relationship a line cannot follow</a:t>
+            </a:r>
+          </a:p>
+        </p:txBody>
+      </p:sp>
+      <p:pic>
+        <p:nvPicPr>
+          <p:cNvPr descr="energy_curve.png" id="0" name="Picture 1"/>
+          <p:cNvPicPr>
+            <a:picLocks noGrp="1" noChangeAspect="1"/>
+          </p:cNvPicPr>
+          <p:nvPr/>
+        </p:nvPicPr>
+        <p:blipFill>
+          <a:blip r:embed="rId3"/>
+          <a:stretch>
+            <a:fillRect/>
+          </a:stretch>
+        </p:blipFill>
+        <p:spPr bwMode="auto">
+          <a:xfrm>
+            <a:off x="1759264" y="1166099"/>
+            <a:ext cx="5625471" cy="3360181"/>
+          </a:xfrm>
+          <a:prstGeom prst="rect">
+            <a:avLst/>
+          </a:prstGeom>
+          <a:noFill/>
+          <a:ln w="9525">
+            <a:noFill/>
+            <a:headEnd/>
+            <a:tailEnd/>
+          </a:ln>
+        </p:spPr>
+      </p:pic>
+    </p:spTree>
+  </p:cSld>
+</p:sld>
+</file>
+
+<file path=ppt/slides/slide28.xml><?xml version="1.0" encoding="utf-8"?>
 <p:sld xmlns:a="http://schemas.openxmlformats.org/drawingml/2006/main" xmlns:r="http://schemas.openxmlformats.org/officeDocument/2006/relationships" xmlns:p="http://schemas.openxmlformats.org/presentationml/2006/main">
   <p:cSld>
     <p:spTree>
@@ -8196,94 +12066,7 @@
 </p:sld>
 </file>
 
-<file path=ppt/slides/slide2.xml><?xml version="1.0" encoding="utf-8"?>
-<p:sld xmlns:a="http://schemas.openxmlformats.org/drawingml/2006/main" xmlns:r="http://schemas.openxmlformats.org/officeDocument/2006/relationships" xmlns:p="http://schemas.openxmlformats.org/presentationml/2006/main">
-  <p:cSld>
-    <p:spTree>
-      <p:nvGrpSpPr>
-        <p:cNvPr id="1" name=""/>
-        <p:cNvGrpSpPr/>
-        <p:nvPr/>
-      </p:nvGrpSpPr>
-      <p:grpSpPr>
-        <a:xfrm>
-          <a:off x="0" y="0"/>
-          <a:ext cx="0" cy="0"/>
-          <a:chOff x="0" y="0"/>
-          <a:chExt cx="0" cy="0"/>
-        </a:xfrm>
-      </p:grpSpPr>
-      <p:sp>
-        <p:nvSpPr>
-          <p:cNvPr id="2" name="Title 1"/>
-          <p:cNvSpPr>
-            <a:spLocks noGrp="1"/>
-          </p:cNvSpPr>
-          <p:nvPr>
-            <p:ph type="title"/>
-          </p:nvPr>
-        </p:nvSpPr>
-        <p:spPr>
-          <a:xfrm>
-            <a:off x="457200" y="205979"/>
-            <a:ext cx="8229600" cy="857250"/>
-          </a:xfrm>
-        </p:spPr>
-        <p:txBody>
-          <a:bodyPr/>
-          <a:lstStyle/>
-          <a:p>
-            <a:pPr lvl="0" indent="0" marL="0">
-              <a:buNone/>
-            </a:pPr>
-            <a:r>
-              <a:rPr/>
-              <a:t>Before we start</a:t>
-            </a:r>
-          </a:p>
-        </p:txBody>
-      </p:sp>
-      <p:sp>
-        <p:nvSpPr>
-          <p:cNvPr id="3" name="Content Placeholder 2"/>
-          <p:cNvSpPr>
-            <a:spLocks noGrp="1"/>
-          </p:cNvSpPr>
-          <p:nvPr>
-            <p:ph idx="1"/>
-          </p:nvPr>
-        </p:nvSpPr>
-        <p:spPr>
-          <a:xfrm>
-            <a:off x="457200" y="1200151"/>
-            <a:ext cx="8229600" cy="3394472"/>
-          </a:xfrm>
-        </p:spPr>
-        <p:txBody>
-          <a:bodyPr/>
-          <a:lstStyle/>
-          <a:p>
-            <a:pPr lvl="0"/>
-            <a:r>
-              <a:rPr/>
-              <a:t>Exercise 2 was due today</a:t>
-            </a:r>
-          </a:p>
-          <a:p>
-            <a:pPr lvl="0"/>
-            <a:r>
-              <a:rPr/>
-              <a:t>The pipeline you built is the one we fit models into from now on</a:t>
-            </a:r>
-          </a:p>
-        </p:txBody>
-      </p:sp>
-    </p:spTree>
-  </p:cSld>
-</p:sld>
-</file>
-
-<file path=ppt/slides/slide20.xml><?xml version="1.0" encoding="utf-8"?>
+<file path=ppt/slides/slide29.xml><?xml version="1.0" encoding="utf-8"?>
 <p:sld xmlns:a="http://schemas.openxmlformats.org/drawingml/2006/main" xmlns:r="http://schemas.openxmlformats.org/officeDocument/2006/relationships" xmlns:p="http://schemas.openxmlformats.org/presentationml/2006/main">
   <p:cSld>
     <p:spTree>
@@ -8365,7 +12148,197 @@
 </p:sld>
 </file>
 
-<file path=ppt/slides/slide21.xml><?xml version="1.0" encoding="utf-8"?>
+<file path=ppt/slides/slide3.xml><?xml version="1.0" encoding="utf-8"?>
+<p:sld xmlns:a="http://schemas.openxmlformats.org/drawingml/2006/main" xmlns:r="http://schemas.openxmlformats.org/officeDocument/2006/relationships" xmlns:p="http://schemas.openxmlformats.org/presentationml/2006/main">
+  <p:cSld>
+    <p:spTree>
+      <p:nvGrpSpPr>
+        <p:cNvPr id="1" name=""/>
+        <p:cNvGrpSpPr/>
+        <p:nvPr/>
+      </p:nvGrpSpPr>
+      <p:grpSpPr>
+        <a:xfrm>
+          <a:off x="0" y="0"/>
+          <a:ext cx="0" cy="0"/>
+          <a:chOff x="0" y="0"/>
+          <a:chExt cx="0" cy="0"/>
+        </a:xfrm>
+      </p:grpSpPr>
+      <p:sp>
+        <p:nvSpPr>
+          <p:cNvPr id="2" name="Title 1"/>
+          <p:cNvSpPr>
+            <a:spLocks noGrp="1"/>
+          </p:cNvSpPr>
+          <p:nvPr>
+            <p:ph type="title"/>
+          </p:nvPr>
+        </p:nvSpPr>
+        <p:spPr>
+          <a:xfrm>
+            <a:off x="457200" y="205979"/>
+            <a:ext cx="8229600" cy="857250"/>
+          </a:xfrm>
+        </p:spPr>
+        <p:txBody>
+          <a:bodyPr/>
+          <a:lstStyle/>
+          <a:p>
+            <a:pPr lvl="0" indent="0" marL="0">
+              <a:buNone/>
+            </a:pPr>
+            <a:r>
+              <a:rPr/>
+              <a:t>Today: the first real model</a:t>
+            </a:r>
+          </a:p>
+        </p:txBody>
+      </p:sp>
+      <p:sp>
+        <p:nvSpPr>
+          <p:cNvPr id="3" name="Content Placeholder 2"/>
+          <p:cNvSpPr>
+            <a:spLocks noGrp="1"/>
+          </p:cNvSpPr>
+          <p:nvPr>
+            <p:ph idx="1"/>
+          </p:nvPr>
+        </p:nvSpPr>
+        <p:spPr>
+          <a:xfrm>
+            <a:off x="457200" y="1200151"/>
+            <a:ext cx="8229600" cy="3394472"/>
+          </a:xfrm>
+        </p:spPr>
+        <p:txBody>
+          <a:bodyPr/>
+          <a:lstStyle/>
+          <a:p>
+            <a:pPr lvl="0"/>
+            <a:r>
+              <a:rPr/>
+              <a:t>The model and what it claims</a:t>
+            </a:r>
+          </a:p>
+          <a:p>
+            <a:pPr lvl="0"/>
+            <a:r>
+              <a:rPr/>
+              <a:t>The exact solution — and why it sometimes fails</a:t>
+            </a:r>
+          </a:p>
+          <a:p>
+            <a:pPr lvl="0"/>
+            <a:r>
+              <a:rPr/>
+              <a:t>Gradient descent</a:t>
+            </a:r>
+          </a:p>
+          <a:p>
+            <a:pPr lvl="0"/>
+            <a:r>
+              <a:rPr/>
+              <a:t>Curves, and the price of flexibility</a:t>
+            </a:r>
+          </a:p>
+          <a:p>
+            <a:pPr lvl="0"/>
+            <a:r>
+              <a:rPr/>
+              <a:t>Ridge and Lasso</a:t>
+            </a:r>
+          </a:p>
+        </p:txBody>
+      </p:sp>
+    </p:spTree>
+  </p:cSld>
+</p:sld>
+</file>
+
+<file path=ppt/slides/slide30.xml><?xml version="1.0" encoding="utf-8"?>
+<p:sld xmlns:a="http://schemas.openxmlformats.org/drawingml/2006/main" xmlns:r="http://schemas.openxmlformats.org/officeDocument/2006/relationships" xmlns:p="http://schemas.openxmlformats.org/presentationml/2006/main">
+  <p:cSld>
+    <p:spTree>
+      <p:nvGrpSpPr>
+        <p:cNvPr id="1" name=""/>
+        <p:cNvGrpSpPr/>
+        <p:nvPr/>
+      </p:nvGrpSpPr>
+      <p:grpSpPr>
+        <a:xfrm>
+          <a:off x="0" y="0"/>
+          <a:ext cx="0" cy="0"/>
+          <a:chOff x="0" y="0"/>
+          <a:chExt cx="0" cy="0"/>
+        </a:xfrm>
+      </p:grpSpPr>
+      <p:sp>
+        <p:nvSpPr>
+          <p:cNvPr id="2" name="Title 1"/>
+          <p:cNvSpPr>
+            <a:spLocks noGrp="1"/>
+          </p:cNvSpPr>
+          <p:nvPr>
+            <p:ph type="title"/>
+          </p:nvPr>
+        </p:nvSpPr>
+        <p:spPr>
+          <a:xfrm>
+            <a:off x="457200" y="205979"/>
+            <a:ext cx="8229600" cy="857250"/>
+          </a:xfrm>
+        </p:spPr>
+        <p:txBody>
+          <a:bodyPr/>
+          <a:lstStyle/>
+          <a:p>
+            <a:pPr lvl="0" indent="0" marL="0">
+              <a:buNone/>
+            </a:pPr>
+            <a:r>
+              <a:rPr/>
+              <a:t>What “nothing left” looks like</a:t>
+            </a:r>
+          </a:p>
+        </p:txBody>
+      </p:sp>
+      <p:pic>
+        <p:nvPicPr>
+          <p:cNvPr descr="residuals.png" id="0" name="Picture 1"/>
+          <p:cNvPicPr>
+            <a:picLocks noGrp="1" noChangeAspect="1"/>
+          </p:cNvPicPr>
+          <p:nvPr/>
+        </p:nvPicPr>
+        <p:blipFill>
+          <a:blip r:embed="rId3"/>
+          <a:stretch>
+            <a:fillRect/>
+          </a:stretch>
+        </p:blipFill>
+        <p:spPr bwMode="auto">
+          <a:xfrm>
+            <a:off x="457200" y="1493639"/>
+            <a:ext cx="8229600" cy="2705100"/>
+          </a:xfrm>
+          <a:prstGeom prst="rect">
+            <a:avLst/>
+          </a:prstGeom>
+          <a:noFill/>
+          <a:ln w="9525">
+            <a:noFill/>
+            <a:headEnd/>
+            <a:tailEnd/>
+          </a:ln>
+        </p:spPr>
+      </p:pic>
+    </p:spTree>
+  </p:cSld>
+</p:sld>
+</file>
+
+<file path=ppt/slides/slide31.xml><?xml version="1.0" encoding="utf-8"?>
 <p:sld xmlns:a="http://schemas.openxmlformats.org/drawingml/2006/main" xmlns:r="http://schemas.openxmlformats.org/officeDocument/2006/relationships" xmlns:p="http://schemas.openxmlformats.org/presentationml/2006/main">
   <p:cSld>
     <p:spTree>
@@ -8447,7 +12420,7 @@
 </p:sld>
 </file>
 
-<file path=ppt/slides/slide22.xml><?xml version="1.0" encoding="utf-8"?>
+<file path=ppt/slides/slide32.xml><?xml version="1.0" encoding="utf-8"?>
 <p:sld xmlns:a="http://schemas.openxmlformats.org/drawingml/2006/main" xmlns:r="http://schemas.openxmlformats.org/officeDocument/2006/relationships" xmlns:p="http://schemas.openxmlformats.org/presentationml/2006/main">
   <p:cSld>
     <p:spTree>
@@ -8476,8 +12449,8 @@
         </p:nvSpPr>
         <p:spPr>
           <a:xfrm>
-            <a:off x="457200" y="205740"/>
-            <a:ext cx="8229600" cy="874395"/>
+            <a:off x="457200" y="205979"/>
+            <a:ext cx="8229600" cy="857250"/>
           </a:xfrm>
         </p:spPr>
         <p:txBody>
@@ -8489,37 +12462,7 @@
             </a:pPr>
             <a:r>
               <a:rPr/>
-              <a:t>The table that matters</a:t>
-            </a:r>
-          </a:p>
-        </p:txBody>
-      </p:sp>
-      <p:sp>
-        <p:nvSpPr>
-          <p:cNvPr id="4" name="Text Placeholder 3"/>
-          <p:cNvSpPr>
-            <a:spLocks noGrp="1"/>
-          </p:cNvSpPr>
-          <p:nvPr>
-            <p:ph idx="2" sz="half" type="body"/>
-          </p:nvPr>
-        </p:nvSpPr>
-        <p:spPr>
-          <a:xfrm>
-            <a:off x="457200" y="1234440"/>
-            <a:ext cx="8229600" cy="822960"/>
-          </a:xfrm>
-        </p:spPr>
-        <p:txBody>
-          <a:bodyPr/>
-          <a:lstStyle/>
-          <a:p>
-            <a:pPr lvl="0" indent="0" marL="0">
-              <a:buNone/>
-            </a:pPr>
-            <a:r>
-              <a:rPr/>
-              <a:t>Root mean squared error (RMSE) — the square root of the MSE, so it reads in the units of the target:</a:t>
+              <a:t>Root mean squared error (RMSE), by degree</a:t>
             </a:r>
           </a:p>
         </p:txBody>
@@ -8535,8 +12478,8 @@
           </p:nvPr>
         </p:nvGraphicFramePr>
         <p:xfrm>
-          <a:off x="3568700" y="203200"/>
-          <a:ext cx="5105400" cy="4381500"/>
+          <a:off x="457200" y="1193800"/>
+          <a:ext cx="8229600" cy="3390900"/>
         </p:xfrm>
         <a:graphic>
           <a:graphicData uri="http://schemas.openxmlformats.org/drawingml/2006/table">
@@ -8545,9 +12488,9 @@
                 <a:tableStyleId>{5C22544A-7EE6-4342-B048-85BDC9FD1C3A}</a:tableStyleId>
               </a:tblPr>
               <a:tblGrid>
-                <a:gridCol w="1701800"/>
-                <a:gridCol w="1701800"/>
-                <a:gridCol w="1701800"/>
+                <a:gridCol w="2743200"/>
+                <a:gridCol w="2743200"/>
+                <a:gridCol w="2743200"/>
               </a:tblGrid>
               <a:tr h="0">
                 <a:tc>
@@ -8796,7 +12739,7 @@
 </p:sld>
 </file>
 
-<file path=ppt/slides/slide23.xml><?xml version="1.0" encoding="utf-8"?>
+<file path=ppt/slides/slide33.xml><?xml version="1.0" encoding="utf-8"?>
 <p:sld xmlns:a="http://schemas.openxmlformats.org/drawingml/2006/main" xmlns:r="http://schemas.openxmlformats.org/officeDocument/2006/relationships" xmlns:p="http://schemas.openxmlformats.org/presentationml/2006/main">
   <p:cSld>
     <p:spTree>
@@ -8838,7 +12781,89 @@
             </a:pPr>
             <a:r>
               <a:rPr/>
-              <a:t>Why flexibility goes wrong</a:t>
+              <a:t>The gap is the overfitting</a:t>
+            </a:r>
+          </a:p>
+        </p:txBody>
+      </p:sp>
+      <p:pic>
+        <p:nvPicPr>
+          <p:cNvPr descr="train_test_by_degree.png" id="0" name="Picture 1"/>
+          <p:cNvPicPr>
+            <a:picLocks noGrp="1" noChangeAspect="1"/>
+          </p:cNvPicPr>
+          <p:nvPr/>
+        </p:nvPicPr>
+        <p:blipFill>
+          <a:blip r:embed="rId3"/>
+          <a:stretch>
+            <a:fillRect/>
+          </a:stretch>
+        </p:blipFill>
+        <p:spPr bwMode="auto">
+          <a:xfrm>
+            <a:off x="1677462" y="1166099"/>
+            <a:ext cx="5789075" cy="3360181"/>
+          </a:xfrm>
+          <a:prstGeom prst="rect">
+            <a:avLst/>
+          </a:prstGeom>
+          <a:noFill/>
+          <a:ln w="9525">
+            <a:noFill/>
+            <a:headEnd/>
+            <a:tailEnd/>
+          </a:ln>
+        </p:spPr>
+      </p:pic>
+    </p:spTree>
+  </p:cSld>
+</p:sld>
+</file>
+
+<file path=ppt/slides/slide34.xml><?xml version="1.0" encoding="utf-8"?>
+<p:sld xmlns:a="http://schemas.openxmlformats.org/drawingml/2006/main" xmlns:r="http://schemas.openxmlformats.org/officeDocument/2006/relationships" xmlns:p="http://schemas.openxmlformats.org/presentationml/2006/main">
+  <p:cSld>
+    <p:spTree>
+      <p:nvGrpSpPr>
+        <p:cNvPr id="1" name=""/>
+        <p:cNvGrpSpPr/>
+        <p:nvPr/>
+      </p:nvGrpSpPr>
+      <p:grpSpPr>
+        <a:xfrm>
+          <a:off x="0" y="0"/>
+          <a:ext cx="0" cy="0"/>
+          <a:chOff x="0" y="0"/>
+          <a:chExt cx="0" cy="0"/>
+        </a:xfrm>
+      </p:grpSpPr>
+      <p:sp>
+        <p:nvSpPr>
+          <p:cNvPr id="2" name="Title 1"/>
+          <p:cNvSpPr>
+            <a:spLocks noGrp="1"/>
+          </p:cNvSpPr>
+          <p:nvPr>
+            <p:ph type="title"/>
+          </p:nvPr>
+        </p:nvSpPr>
+        <p:spPr>
+          <a:xfrm>
+            <a:off x="457200" y="205979"/>
+            <a:ext cx="8229600" cy="857250"/>
+          </a:xfrm>
+        </p:spPr>
+        <p:txBody>
+          <a:bodyPr/>
+          <a:lstStyle/>
+          <a:p>
+            <a:pPr lvl="0" indent="0" marL="0">
+              <a:buNone/>
+            </a:pPr>
+            <a:r>
+              <a:rPr/>
+              <a:t>Notebook 2, live</a:t>
             </a:r>
           </a:p>
         </p:txBody>
@@ -8868,24 +12893,7 @@
             </a:pPr>
             <a:r>
               <a:rPr/>
-              <a:t>Largest coefficient, degree 2: </a:t>
-            </a:r>
-            <a:r>
-              <a:rPr b="1"/>
-              <a:t>411</a:t>
-            </a:r>
-          </a:p>
-          <a:p>
-            <a:pPr lvl="0" indent="0" marL="0">
-              <a:buNone/>
-            </a:pPr>
-            <a:r>
-              <a:rPr/>
-              <a:t>Largest coefficient, degree 12: </a:t>
-            </a:r>
-            <a:r>
-              <a:rPr b="1"/>
-              <a:t>247,514</a:t>
+              <a:t>Fit the curve, push the degree up, and watch the test error turn.</a:t>
             </a:r>
           </a:p>
         </p:txBody>
@@ -8895,7 +12903,106 @@
 </p:sld>
 </file>
 
-<file path=ppt/slides/slide24.xml><?xml version="1.0" encoding="utf-8"?>
+<file path=ppt/slides/slide35.xml><?xml version="1.0" encoding="utf-8"?>
+<p:sld xmlns:a="http://schemas.openxmlformats.org/drawingml/2006/main" xmlns:r="http://schemas.openxmlformats.org/officeDocument/2006/relationships" xmlns:p="http://schemas.openxmlformats.org/presentationml/2006/main">
+  <p:cSld>
+    <p:spTree>
+      <p:nvGrpSpPr>
+        <p:cNvPr id="1" name=""/>
+        <p:cNvGrpSpPr/>
+        <p:nvPr/>
+      </p:nvGrpSpPr>
+      <p:grpSpPr>
+        <a:xfrm>
+          <a:off x="0" y="0"/>
+          <a:ext cx="0" cy="0"/>
+          <a:chOff x="0" y="0"/>
+          <a:chExt cx="0" cy="0"/>
+        </a:xfrm>
+      </p:grpSpPr>
+      <p:sp>
+        <p:nvSpPr>
+          <p:cNvPr id="2" name="Title 1"/>
+          <p:cNvSpPr>
+            <a:spLocks noGrp="1"/>
+          </p:cNvSpPr>
+          <p:nvPr>
+            <p:ph type="title"/>
+          </p:nvPr>
+        </p:nvSpPr>
+        <p:spPr>
+          <a:xfrm>
+            <a:off x="457200" y="205979"/>
+            <a:ext cx="8229600" cy="857250"/>
+          </a:xfrm>
+        </p:spPr>
+        <p:txBody>
+          <a:bodyPr/>
+          <a:lstStyle/>
+          <a:p>
+            <a:pPr lvl="0" indent="0" marL="0">
+              <a:buNone/>
+            </a:pPr>
+            <a:r>
+              <a:rPr/>
+              <a:t>Why flexibility goes wrong</a:t>
+            </a:r>
+          </a:p>
+        </p:txBody>
+      </p:sp>
+      <p:sp>
+        <p:nvSpPr>
+          <p:cNvPr id="3" name="Content Placeholder 2"/>
+          <p:cNvSpPr>
+            <a:spLocks noGrp="1"/>
+          </p:cNvSpPr>
+          <p:nvPr>
+            <p:ph idx="1"/>
+          </p:nvPr>
+        </p:nvSpPr>
+        <p:spPr>
+          <a:xfrm>
+            <a:off x="457200" y="1200151"/>
+            <a:ext cx="8229600" cy="3394472"/>
+          </a:xfrm>
+        </p:spPr>
+        <p:txBody>
+          <a:bodyPr/>
+          <a:lstStyle/>
+          <a:p>
+            <a:pPr lvl="0" indent="0" marL="0">
+              <a:buNone/>
+            </a:pPr>
+            <a:r>
+              <a:rPr/>
+              <a:t>Largest coefficient, degree 2: </a:t>
+            </a:r>
+            <a:r>
+              <a:rPr b="1"/>
+              <a:t>411</a:t>
+            </a:r>
+          </a:p>
+          <a:p>
+            <a:pPr lvl="0" indent="0" marL="0">
+              <a:buNone/>
+            </a:pPr>
+            <a:r>
+              <a:rPr/>
+              <a:t>Largest coefficient, degree 12: </a:t>
+            </a:r>
+            <a:r>
+              <a:rPr b="1"/>
+              <a:t>247,514</a:t>
+            </a:r>
+          </a:p>
+        </p:txBody>
+      </p:sp>
+    </p:spTree>
+  </p:cSld>
+</p:sld>
+</file>
+
+<file path=ppt/slides/slide36.xml><?xml version="1.0" encoding="utf-8"?>
 <p:sld xmlns:a="http://schemas.openxmlformats.org/drawingml/2006/main" xmlns:r="http://schemas.openxmlformats.org/officeDocument/2006/relationships" xmlns:p="http://schemas.openxmlformats.org/presentationml/2006/main">
   <p:cSld>
     <p:spTree>
@@ -8977,7 +13084,110 @@
 </p:sld>
 </file>
 
-<file path=ppt/slides/slide25.xml><?xml version="1.0" encoding="utf-8"?>
+<file path=ppt/slides/slide37.xml><?xml version="1.0" encoding="utf-8"?>
+<p:sld xmlns:a="http://schemas.openxmlformats.org/drawingml/2006/main" xmlns:r="http://schemas.openxmlformats.org/officeDocument/2006/relationships" xmlns:p="http://schemas.openxmlformats.org/presentationml/2006/main">
+  <p:cSld>
+    <p:spTree>
+      <p:nvGrpSpPr>
+        <p:cNvPr id="1" name=""/>
+        <p:cNvGrpSpPr/>
+        <p:nvPr/>
+      </p:nvGrpSpPr>
+      <p:grpSpPr>
+        <a:xfrm>
+          <a:off x="0" y="0"/>
+          <a:ext cx="0" cy="0"/>
+          <a:chOff x="0" y="0"/>
+          <a:chExt cx="0" cy="0"/>
+        </a:xfrm>
+      </p:grpSpPr>
+      <p:sp>
+        <p:nvSpPr>
+          <p:cNvPr id="2" name="Title 1"/>
+          <p:cNvSpPr>
+            <a:spLocks noGrp="1"/>
+          </p:cNvSpPr>
+          <p:nvPr>
+            <p:ph type="title"/>
+          </p:nvPr>
+        </p:nvSpPr>
+        <p:spPr>
+          <a:xfrm>
+            <a:off x="457200" y="205979"/>
+            <a:ext cx="8229600" cy="857250"/>
+          </a:xfrm>
+        </p:spPr>
+        <p:txBody>
+          <a:bodyPr/>
+          <a:lstStyle/>
+          <a:p>
+            <a:pPr lvl="0" indent="0" marL="0">
+              <a:buNone/>
+            </a:pPr>
+            <a:r>
+              <a:rPr/>
+              <a:t>Two rules that are not optional</a:t>
+            </a:r>
+          </a:p>
+        </p:txBody>
+      </p:sp>
+      <p:sp>
+        <p:nvSpPr>
+          <p:cNvPr id="3" name="Content Placeholder 2"/>
+          <p:cNvSpPr>
+            <a:spLocks noGrp="1"/>
+          </p:cNvSpPr>
+          <p:nvPr>
+            <p:ph idx="1"/>
+          </p:nvPr>
+        </p:nvSpPr>
+        <p:spPr>
+          <a:xfrm>
+            <a:off x="457200" y="1200151"/>
+            <a:ext cx="8229600" cy="3394472"/>
+          </a:xfrm>
+        </p:spPr>
+        <p:txBody>
+          <a:bodyPr/>
+          <a:lstStyle/>
+          <a:p>
+            <a:pPr lvl="0"/>
+            <a:r>
+              <a:rPr/>
+              <a:t>The </a:t>
+            </a:r>
+            <a:r>
+              <a:rPr b="1"/>
+              <a:t>intercept is never penalised</a:t>
+            </a:r>
+            <a:r>
+              <a:rPr/>
+              <a:t> — it is not a claim about any feature</a:t>
+            </a:r>
+          </a:p>
+          <a:p>
+            <a:pPr lvl="0"/>
+            <a:r>
+              <a:rPr/>
+              <a:t>Features </a:t>
+            </a:r>
+            <a:r>
+              <a:rPr b="1"/>
+              <a:t>must be scaled first</a:t>
+            </a:r>
+            <a:r>
+              <a:rPr/>
+              <a:t>, or the penalty is arbitrary</a:t>
+            </a:r>
+          </a:p>
+        </p:txBody>
+      </p:sp>
+    </p:spTree>
+  </p:cSld>
+</p:sld>
+</file>
+
+<file path=ppt/slides/slide38.xml><?xml version="1.0" encoding="utf-8"?>
 <p:sld xmlns:a="http://schemas.openxmlformats.org/drawingml/2006/main" xmlns:r="http://schemas.openxmlformats.org/officeDocument/2006/relationships" xmlns:p="http://schemas.openxmlformats.org/presentationml/2006/main">
   <p:cSld>
     <p:spTree>
@@ -9373,7 +13583,7 @@
 </p:sld>
 </file>
 
-<file path=ppt/slides/slide26.xml><?xml version="1.0" encoding="utf-8"?>
+<file path=ppt/slides/slide39.xml><?xml version="1.0" encoding="utf-8"?>
 <p:sld xmlns:a="http://schemas.openxmlformats.org/drawingml/2006/main" xmlns:r="http://schemas.openxmlformats.org/officeDocument/2006/relationships" xmlns:p="http://schemas.openxmlformats.org/presentationml/2006/main">
   <p:cSld>
     <p:spTree>
@@ -9455,7 +13665,282 @@
 </p:sld>
 </file>
 
-<file path=ppt/slides/slide27.xml><?xml version="1.0" encoding="utf-8"?>
+<file path=ppt/slides/slide4.xml><?xml version="1.0" encoding="utf-8"?>
+<p:sld xmlns:a="http://schemas.openxmlformats.org/drawingml/2006/main" xmlns:r="http://schemas.openxmlformats.org/officeDocument/2006/relationships" xmlns:p="http://schemas.openxmlformats.org/presentationml/2006/main">
+  <p:cSld>
+    <p:spTree>
+      <p:nvGrpSpPr>
+        <p:cNvPr id="1" name=""/>
+        <p:cNvGrpSpPr/>
+        <p:nvPr/>
+      </p:nvGrpSpPr>
+      <p:grpSpPr>
+        <a:xfrm>
+          <a:off x="0" y="0"/>
+          <a:ext cx="0" cy="0"/>
+          <a:chOff x="0" y="0"/>
+          <a:chExt cx="0" cy="0"/>
+        </a:xfrm>
+      </p:grpSpPr>
+      <p:sp>
+        <p:nvSpPr>
+          <p:cNvPr id="2" name="Title 1"/>
+          <p:cNvSpPr>
+            <a:spLocks noGrp="1"/>
+          </p:cNvSpPr>
+          <p:nvPr>
+            <p:ph type="title"/>
+          </p:nvPr>
+        </p:nvSpPr>
+        <p:spPr>
+          <a:xfrm>
+            <a:off x="457200" y="205979"/>
+            <a:ext cx="8229600" cy="857250"/>
+          </a:xfrm>
+        </p:spPr>
+        <p:txBody>
+          <a:bodyPr/>
+          <a:lstStyle/>
+          <a:p>
+            <a:pPr lvl="0" indent="0" marL="0">
+              <a:buNone/>
+            </a:pPr>
+            <a:r>
+              <a:rPr/>
+              <a:t>One dataset, all lesson</a:t>
+            </a:r>
+          </a:p>
+        </p:txBody>
+      </p:sp>
+      <p:sp>
+        <p:nvSpPr>
+          <p:cNvPr id="3" name="Content Placeholder 2"/>
+          <p:cNvSpPr>
+            <a:spLocks noGrp="1"/>
+          </p:cNvSpPr>
+          <p:nvPr>
+            <p:ph idx="1"/>
+          </p:nvPr>
+        </p:nvSpPr>
+        <p:spPr>
+          <a:xfrm>
+            <a:off x="457200" y="1200151"/>
+            <a:ext cx="8229600" cy="3394472"/>
+          </a:xfrm>
+        </p:spPr>
+        <p:txBody>
+          <a:bodyPr/>
+          <a:lstStyle/>
+          <a:p>
+            <a:pPr lvl="0" indent="0" marL="0">
+              <a:buNone/>
+            </a:pPr>
+            <a:r>
+              <a:rPr/>
+              <a:t>600 houses. Six measurements. A price.</a:t>
+            </a:r>
+          </a:p>
+          <a:p>
+            <a:pPr lvl="0" indent="0" marL="0">
+              <a:buNone/>
+            </a:pPr>
+            <a:r>
+              <a:rPr b="1"/>
+              <a:t>And we know the coefficients that generated it.</a:t>
+            </a:r>
+          </a:p>
+        </p:txBody>
+      </p:sp>
+    </p:spTree>
+  </p:cSld>
+</p:sld>
+</file>
+
+<file path=ppt/slides/slide40.xml><?xml version="1.0" encoding="utf-8"?>
+<p:sld xmlns:a="http://schemas.openxmlformats.org/drawingml/2006/main" xmlns:r="http://schemas.openxmlformats.org/officeDocument/2006/relationships" xmlns:p="http://schemas.openxmlformats.org/presentationml/2006/main">
+  <p:cSld>
+    <p:spTree>
+      <p:nvGrpSpPr>
+        <p:cNvPr id="1" name=""/>
+        <p:cNvGrpSpPr/>
+        <p:nvPr/>
+      </p:nvGrpSpPr>
+      <p:grpSpPr>
+        <a:xfrm>
+          <a:off x="0" y="0"/>
+          <a:ext cx="0" cy="0"/>
+          <a:chOff x="0" y="0"/>
+          <a:chExt cx="0" cy="0"/>
+        </a:xfrm>
+      </p:grpSpPr>
+      <p:sp>
+        <p:nvSpPr>
+          <p:cNvPr id="2" name="Title 1"/>
+          <p:cNvSpPr>
+            <a:spLocks noGrp="1"/>
+          </p:cNvSpPr>
+          <p:nvPr>
+            <p:ph type="title"/>
+          </p:nvPr>
+        </p:nvSpPr>
+        <p:spPr>
+          <a:xfrm>
+            <a:off x="457200" y="205979"/>
+            <a:ext cx="8229600" cy="857250"/>
+          </a:xfrm>
+        </p:spPr>
+        <p:txBody>
+          <a:bodyPr/>
+          <a:lstStyle/>
+          <a:p>
+            <a:pPr lvl="0" indent="0" marL="0">
+              <a:buNone/>
+            </a:pPr>
+            <a:r>
+              <a:rPr/>
+              <a:t>Ridge has an exact solution too</a:t>
+            </a:r>
+          </a:p>
+        </p:txBody>
+      </p:sp>
+      <p:pic>
+        <p:nvPicPr>
+          <p:cNvPr descr="eq_33ff54cfd2.png" id="0" name="Picture 1"/>
+          <p:cNvPicPr>
+            <a:picLocks noGrp="1" noChangeAspect="1"/>
+          </p:cNvPicPr>
+          <p:nvPr/>
+        </p:nvPicPr>
+        <p:blipFill>
+          <a:blip r:embed="rId3"/>
+          <a:stretch>
+            <a:fillRect/>
+          </a:stretch>
+        </p:blipFill>
+        <p:spPr bwMode="auto">
+          <a:xfrm>
+            <a:off x="457200" y="2274689"/>
+            <a:ext cx="8229600" cy="1143000"/>
+          </a:xfrm>
+          <a:prstGeom prst="rect">
+            <a:avLst/>
+          </a:prstGeom>
+          <a:noFill/>
+          <a:ln w="9525">
+            <a:noFill/>
+            <a:headEnd/>
+            <a:tailEnd/>
+          </a:ln>
+        </p:spPr>
+      </p:pic>
+    </p:spTree>
+  </p:cSld>
+</p:sld>
+</file>
+
+<file path=ppt/slides/slide41.xml><?xml version="1.0" encoding="utf-8"?>
+<p:sld xmlns:a="http://schemas.openxmlformats.org/drawingml/2006/main" xmlns:r="http://schemas.openxmlformats.org/officeDocument/2006/relationships" xmlns:p="http://schemas.openxmlformats.org/presentationml/2006/main">
+  <p:cSld>
+    <p:spTree>
+      <p:nvGrpSpPr>
+        <p:cNvPr id="1" name=""/>
+        <p:cNvGrpSpPr/>
+        <p:nvPr/>
+      </p:nvGrpSpPr>
+      <p:grpSpPr>
+        <a:xfrm>
+          <a:off x="0" y="0"/>
+          <a:ext cx="0" cy="0"/>
+          <a:chOff x="0" y="0"/>
+          <a:chExt cx="0" cy="0"/>
+        </a:xfrm>
+      </p:grpSpPr>
+      <p:sp>
+        <p:nvSpPr>
+          <p:cNvPr id="2" name="Title 1"/>
+          <p:cNvSpPr>
+            <a:spLocks noGrp="1"/>
+          </p:cNvSpPr>
+          <p:nvPr>
+            <p:ph type="title"/>
+          </p:nvPr>
+        </p:nvSpPr>
+        <p:spPr>
+          <a:xfrm>
+            <a:off x="457200" y="205979"/>
+            <a:ext cx="8229600" cy="857250"/>
+          </a:xfrm>
+        </p:spPr>
+        <p:txBody>
+          <a:bodyPr/>
+          <a:lstStyle/>
+          <a:p>
+            <a:pPr lvl="0" indent="0" marL="0">
+              <a:buNone/>
+            </a:pPr>
+            <a:r>
+              <a:rPr/>
+              <a:t>Why that one change fixes it</a:t>
+            </a:r>
+          </a:p>
+        </p:txBody>
+      </p:sp>
+      <p:sp>
+        <p:nvSpPr>
+          <p:cNvPr id="3" name="Content Placeholder 2"/>
+          <p:cNvSpPr>
+            <a:spLocks noGrp="1"/>
+          </p:cNvSpPr>
+          <p:nvPr>
+            <p:ph idx="1"/>
+          </p:nvPr>
+        </p:nvSpPr>
+        <p:spPr>
+          <a:xfrm>
+            <a:off x="457200" y="1200151"/>
+            <a:ext cx="8229600" cy="3394472"/>
+          </a:xfrm>
+        </p:spPr>
+        <p:txBody>
+          <a:bodyPr/>
+          <a:lstStyle/>
+          <a:p>
+            <a:pPr lvl="0"/>
+            <a:r>
+              <a:rPr/>
+              <a:t>Least squares fails when a direction costs nothing — the valley is flat</a:t>
+            </a:r>
+          </a:p>
+          <a:p>
+            <a:pPr lvl="0"/>
+            <a:r>
+              <a:rPr/>
+              <a:t>The penalty makes </a:t>
+            </a:r>
+            <a:r>
+              <a:rPr b="1"/>
+              <a:t>every</a:t>
+            </a:r>
+            <a:r>
+              <a:rPr/>
+              <a:t> direction cost something</a:t>
+            </a:r>
+          </a:p>
+          <a:p>
+            <a:pPr lvl="0"/>
+            <a:r>
+              <a:rPr/>
+              <a:t>Every eigenvalue shifts up by λ, so none of them can be zero</a:t>
+            </a:r>
+          </a:p>
+        </p:txBody>
+      </p:sp>
+    </p:spTree>
+  </p:cSld>
+</p:sld>
+</file>
+
+<file path=ppt/slides/slide42.xml><?xml version="1.0" encoding="utf-8"?>
 <p:sld xmlns:a="http://schemas.openxmlformats.org/drawingml/2006/main" xmlns:r="http://schemas.openxmlformats.org/officeDocument/2006/relationships" xmlns:p="http://schemas.openxmlformats.org/presentationml/2006/main">
   <p:cSld>
     <p:spTree>
@@ -9537,7 +14022,7 @@
 </p:sld>
 </file>
 
-<file path=ppt/slides/slide28.xml><?xml version="1.0" encoding="utf-8"?>
+<file path=ppt/slides/slide43.xml><?xml version="1.0" encoding="utf-8"?>
 <p:sld xmlns:a="http://schemas.openxmlformats.org/drawingml/2006/main" xmlns:r="http://schemas.openxmlformats.org/officeDocument/2006/relationships" xmlns:p="http://schemas.openxmlformats.org/presentationml/2006/main">
   <p:cSld>
     <p:spTree>
@@ -9619,7 +14104,7 @@
 </p:sld>
 </file>
 
-<file path=ppt/slides/slide29.xml><?xml version="1.0" encoding="utf-8"?>
+<file path=ppt/slides/slide44.xml><?xml version="1.0" encoding="utf-8"?>
 <p:sld xmlns:a="http://schemas.openxmlformats.org/drawingml/2006/main" xmlns:r="http://schemas.openxmlformats.org/officeDocument/2006/relationships" xmlns:p="http://schemas.openxmlformats.org/presentationml/2006/main">
   <p:cSld>
     <p:spTree>
@@ -9661,76 +14146,249 @@
             </a:pPr>
             <a:r>
               <a:rPr/>
-              <a:t>The case Ridge was invented for</a:t>
-            </a:r>
-          </a:p>
-        </p:txBody>
-      </p:sp>
-      <p:sp>
-        <p:nvSpPr>
-          <p:cNvPr id="3" name="Content Placeholder 2"/>
-          <p:cNvSpPr>
-            <a:spLocks noGrp="1"/>
-          </p:cNvSpPr>
+              <a:t>The order Lasso drops features</a:t>
+            </a:r>
+          </a:p>
+        </p:txBody>
+      </p:sp>
+      <p:graphicFrame>
+        <p:nvGraphicFramePr>
+          <p:cNvPr id="6" name="Content Placeholder 5"/>
+          <p:cNvGraphicFramePr>
+            <a:graphicFrameLocks noGrp="1"/>
+          </p:cNvGraphicFramePr>
           <p:nvPr>
             <p:ph idx="1"/>
           </p:nvPr>
-        </p:nvSpPr>
-        <p:spPr>
-          <a:xfrm>
-            <a:off x="457200" y="1200151"/>
-            <a:ext cx="8229600" cy="3394472"/>
-          </a:xfrm>
-        </p:spPr>
-        <p:txBody>
-          <a:bodyPr/>
-          <a:lstStyle/>
-          <a:p>
-            <a:pPr lvl="0" indent="0" marL="0">
-              <a:buNone/>
-            </a:pPr>
-            <a:r>
-              <a:rPr>
-                <a:latin typeface="Courier"/>
-              </a:rPr>
-              <a:t>area_sqm</a:t>
-            </a:r>
-            <a:r>
-              <a:rPr/>
-              <a:t> and </a:t>
-            </a:r>
-            <a:r>
-              <a:rPr>
-                <a:latin typeface="Courier"/>
-              </a:rPr>
-              <a:t>area_sqft</a:t>
-            </a:r>
-            <a:r>
-              <a:rPr/>
-              <a:t> — the same measurement, two units.</a:t>
-            </a:r>
-          </a:p>
-          <a:p>
-            <a:pPr lvl="0" indent="0" marL="0">
-              <a:buNone/>
-            </a:pPr>
-            <a:r>
-              <a:rPr/>
-              <a:t>Correlation: </a:t>
-            </a:r>
-            <a:r>
-              <a:rPr b="1"/>
-              <a:t>0.999999</a:t>
-            </a:r>
-          </a:p>
-        </p:txBody>
-      </p:sp>
+        </p:nvGraphicFramePr>
+        <p:xfrm>
+          <a:off x="457200" y="1193800"/>
+          <a:ext cx="8229600" cy="3390900"/>
+        </p:xfrm>
+        <a:graphic>
+          <a:graphicData uri="http://schemas.openxmlformats.org/drawingml/2006/table">
+            <a:tbl>
+              <a:tblPr firstRow="1" bandRow="1">
+                <a:tableStyleId>{5C22544A-7EE6-4342-B048-85BDC9FD1C3A}</a:tableStyleId>
+              </a:tblPr>
+              <a:tblGrid>
+                <a:gridCol w="4114800"/>
+                <a:gridCol w="4114800"/>
+              </a:tblGrid>
+              <a:tr h="0">
+                <a:tc>
+                  <a:txBody>
+                    <a:bodyPr/>
+                    <a:lstStyle/>
+                    <a:p>
+                      <a:pPr lvl="0" indent="0" marL="0">
+                        <a:buNone/>
+                      </a:pPr>
+                      <a:r>
+                        <a:rPr/>
+                        <a:t>λ</a:t>
+                      </a:r>
+                    </a:p>
+                  </a:txBody>
+                  <a:tcPr/>
+                </a:tc>
+                <a:tc>
+                  <a:txBody>
+                    <a:bodyPr/>
+                    <a:lstStyle/>
+                    <a:p>
+                      <a:pPr lvl="0" indent="0" marL="0">
+                        <a:buNone/>
+                      </a:pPr>
+                      <a:r>
+                        <a:rPr/>
+                        <a:t>Features kept</a:t>
+                      </a:r>
+                    </a:p>
+                  </a:txBody>
+                  <a:tcPr/>
+                </a:tc>
+              </a:tr>
+              <a:tr h="0">
+                <a:tc>
+                  <a:txBody>
+                    <a:bodyPr/>
+                    <a:lstStyle/>
+                    <a:p>
+                      <a:pPr lvl="0" indent="0" marL="0">
+                        <a:buNone/>
+                      </a:pPr>
+                      <a:r>
+                        <a:rPr/>
+                        <a:t>1,000</a:t>
+                      </a:r>
+                    </a:p>
+                  </a:txBody>
+                </a:tc>
+                <a:tc>
+                  <a:txBody>
+                    <a:bodyPr/>
+                    <a:lstStyle/>
+                    <a:p>
+                      <a:pPr lvl="0" indent="0" marL="0">
+                        <a:buNone/>
+                      </a:pPr>
+                      <a:r>
+                        <a:rPr/>
+                        <a:t>all six</a:t>
+                      </a:r>
+                    </a:p>
+                  </a:txBody>
+                </a:tc>
+              </a:tr>
+              <a:tr h="0">
+                <a:tc>
+                  <a:txBody>
+                    <a:bodyPr/>
+                    <a:lstStyle/>
+                    <a:p>
+                      <a:pPr lvl="0" indent="0" marL="0">
+                        <a:buNone/>
+                      </a:pPr>
+                      <a:r>
+                        <a:rPr/>
+                        <a:t>10,000</a:t>
+                      </a:r>
+                    </a:p>
+                  </a:txBody>
+                </a:tc>
+                <a:tc>
+                  <a:txBody>
+                    <a:bodyPr/>
+                    <a:lstStyle/>
+                    <a:p>
+                      <a:pPr lvl="0" indent="0" marL="0">
+                        <a:buNone/>
+                      </a:pPr>
+                      <a:r>
+                        <a:rPr/>
+                        <a:t>five — </a:t>
+                      </a:r>
+                      <a:r>
+                        <a:rPr>
+                          <a:latin typeface="Courier"/>
+                        </a:rPr>
+                        <a:t>garage</a:t>
+                      </a:r>
+                      <a:r>
+                        <a:rPr/>
+                        <a:t> dropped</a:t>
+                      </a:r>
+                    </a:p>
+                  </a:txBody>
+                </a:tc>
+              </a:tr>
+              <a:tr h="0">
+                <a:tc>
+                  <a:txBody>
+                    <a:bodyPr/>
+                    <a:lstStyle/>
+                    <a:p>
+                      <a:pPr lvl="0" indent="0" marL="0">
+                        <a:buNone/>
+                      </a:pPr>
+                      <a:r>
+                        <a:rPr/>
+                        <a:t>20,000</a:t>
+                      </a:r>
+                    </a:p>
+                  </a:txBody>
+                </a:tc>
+                <a:tc>
+                  <a:txBody>
+                    <a:bodyPr/>
+                    <a:lstStyle/>
+                    <a:p>
+                      <a:pPr lvl="0" indent="0" marL="0">
+                        <a:buNone/>
+                      </a:pPr>
+                      <a:r>
+                        <a:rPr/>
+                        <a:t>three — </a:t>
+                      </a:r>
+                      <a:r>
+                        <a:rPr>
+                          <a:latin typeface="Courier"/>
+                        </a:rPr>
+                        <a:t>area</a:t>
+                      </a:r>
+                      <a:r>
+                        <a:rPr/>
+                        <a:t>, </a:t>
+                      </a:r>
+                      <a:r>
+                        <a:rPr>
+                          <a:latin typeface="Courier"/>
+                        </a:rPr>
+                        <a:t>bedrooms</a:t>
+                      </a:r>
+                      <a:r>
+                        <a:rPr/>
+                        <a:t>, </a:t>
+                      </a:r>
+                      <a:r>
+                        <a:rPr>
+                          <a:latin typeface="Courier"/>
+                        </a:rPr>
+                        <a:t>bathrooms</a:t>
+                      </a:r>
+                    </a:p>
+                  </a:txBody>
+                </a:tc>
+              </a:tr>
+              <a:tr h="0">
+                <a:tc>
+                  <a:txBody>
+                    <a:bodyPr/>
+                    <a:lstStyle/>
+                    <a:p>
+                      <a:pPr lvl="0" indent="0" marL="0">
+                        <a:buNone/>
+                      </a:pPr>
+                      <a:r>
+                        <a:rPr/>
+                        <a:t>40,000</a:t>
+                      </a:r>
+                    </a:p>
+                  </a:txBody>
+                </a:tc>
+                <a:tc>
+                  <a:txBody>
+                    <a:bodyPr/>
+                    <a:lstStyle/>
+                    <a:p>
+                      <a:pPr lvl="0" indent="0" marL="0">
+                        <a:buNone/>
+                      </a:pPr>
+                      <a:r>
+                        <a:rPr/>
+                        <a:t>one — </a:t>
+                      </a:r>
+                      <a:r>
+                        <a:rPr>
+                          <a:latin typeface="Courier"/>
+                        </a:rPr>
+                        <a:t>area_sqm</a:t>
+                      </a:r>
+                    </a:p>
+                  </a:txBody>
+                </a:tc>
+              </a:tr>
+            </a:tbl>
+          </a:graphicData>
+        </a:graphic>
+      </p:graphicFrame>
     </p:spTree>
   </p:cSld>
 </p:sld>
 </file>
 
-<file path=ppt/slides/slide3.xml><?xml version="1.0" encoding="utf-8"?>
+<file path=ppt/slides/slide45.xml><?xml version="1.0" encoding="utf-8"?>
 <p:sld xmlns:a="http://schemas.openxmlformats.org/drawingml/2006/main" xmlns:r="http://schemas.openxmlformats.org/officeDocument/2006/relationships" xmlns:p="http://schemas.openxmlformats.org/presentationml/2006/main">
   <p:cSld>
     <p:spTree>
@@ -9772,7 +14430,7 @@
             </a:pPr>
             <a:r>
               <a:rPr/>
-              <a:t>Today: the first real model</a:t>
+              <a:t>The case Ridge was invented for</a:t>
             </a:r>
           </a:p>
         </p:txBody>
@@ -9797,38 +14455,41 @@
           <a:bodyPr/>
           <a:lstStyle/>
           <a:p>
-            <a:pPr lvl="0"/>
-            <a:r>
-              <a:rPr/>
-              <a:t>The model and what it claims</a:t>
-            </a:r>
-          </a:p>
-          <a:p>
-            <a:pPr lvl="0"/>
-            <a:r>
-              <a:rPr/>
-              <a:t>The exact solution — and why it sometimes fails</a:t>
-            </a:r>
-          </a:p>
-          <a:p>
-            <a:pPr lvl="0"/>
-            <a:r>
-              <a:rPr/>
-              <a:t>Gradient descent</a:t>
-            </a:r>
-          </a:p>
-          <a:p>
-            <a:pPr lvl="0"/>
-            <a:r>
-              <a:rPr/>
-              <a:t>Curves, and the price of flexibility</a:t>
-            </a:r>
-          </a:p>
-          <a:p>
-            <a:pPr lvl="0"/>
-            <a:r>
-              <a:rPr/>
-              <a:t>Ridge and Lasso</a:t>
+            <a:pPr lvl="0" indent="0" marL="0">
+              <a:buNone/>
+            </a:pPr>
+            <a:r>
+              <a:rPr>
+                <a:latin typeface="Courier"/>
+              </a:rPr>
+              <a:t>area_sqm</a:t>
+            </a:r>
+            <a:r>
+              <a:rPr/>
+              <a:t> and </a:t>
+            </a:r>
+            <a:r>
+              <a:rPr>
+                <a:latin typeface="Courier"/>
+              </a:rPr>
+              <a:t>area_sqft</a:t>
+            </a:r>
+            <a:r>
+              <a:rPr/>
+              <a:t> — the same measurement, two units.</a:t>
+            </a:r>
+          </a:p>
+          <a:p>
+            <a:pPr lvl="0" indent="0" marL="0">
+              <a:buNone/>
+            </a:pPr>
+            <a:r>
+              <a:rPr/>
+              <a:t>Correlation: </a:t>
+            </a:r>
+            <a:r>
+              <a:rPr b="1"/>
+              <a:t>0.999999</a:t>
             </a:r>
           </a:p>
         </p:txBody>
@@ -9838,7 +14499,7 @@
 </p:sld>
 </file>
 
-<file path=ppt/slides/slide30.xml><?xml version="1.0" encoding="utf-8"?>
+<file path=ppt/slides/slide46.xml><?xml version="1.0" encoding="utf-8"?>
 <p:sld xmlns:a="http://schemas.openxmlformats.org/drawingml/2006/main" xmlns:r="http://schemas.openxmlformats.org/officeDocument/2006/relationships" xmlns:p="http://schemas.openxmlformats.org/presentationml/2006/main">
   <p:cSld>
     <p:spTree>
@@ -10157,7 +14818,97 @@
 </p:sld>
 </file>
 
-<file path=ppt/slides/slide31.xml><?xml version="1.0" encoding="utf-8"?>
+<file path=ppt/slides/slide47.xml><?xml version="1.0" encoding="utf-8"?>
+<p:sld xmlns:a="http://schemas.openxmlformats.org/drawingml/2006/main" xmlns:r="http://schemas.openxmlformats.org/officeDocument/2006/relationships" xmlns:p="http://schemas.openxmlformats.org/presentationml/2006/main">
+  <p:cSld>
+    <p:spTree>
+      <p:nvGrpSpPr>
+        <p:cNvPr id="1" name=""/>
+        <p:cNvGrpSpPr/>
+        <p:nvPr/>
+      </p:nvGrpSpPr>
+      <p:grpSpPr>
+        <a:xfrm>
+          <a:off x="0" y="0"/>
+          <a:ext cx="0" cy="0"/>
+          <a:chOff x="0" y="0"/>
+          <a:chExt cx="0" cy="0"/>
+        </a:xfrm>
+      </p:grpSpPr>
+      <p:sp>
+        <p:nvSpPr>
+          <p:cNvPr id="2" name="Title 1"/>
+          <p:cNvSpPr>
+            <a:spLocks noGrp="1"/>
+          </p:cNvSpPr>
+          <p:nvPr>
+            <p:ph type="title"/>
+          </p:nvPr>
+        </p:nvSpPr>
+        <p:spPr>
+          <a:xfrm>
+            <a:off x="457200" y="205979"/>
+            <a:ext cx="8229600" cy="857250"/>
+          </a:xfrm>
+        </p:spPr>
+        <p:txBody>
+          <a:bodyPr/>
+          <a:lstStyle/>
+          <a:p>
+            <a:pPr lvl="0" indent="0" marL="0">
+              <a:buNone/>
+            </a:pPr>
+            <a:r>
+              <a:rPr/>
+              <a:t>What a coefficient actually says</a:t>
+            </a:r>
+          </a:p>
+        </p:txBody>
+      </p:sp>
+      <p:sp>
+        <p:nvSpPr>
+          <p:cNvPr id="3" name="Content Placeholder 2"/>
+          <p:cNvSpPr>
+            <a:spLocks noGrp="1"/>
+          </p:cNvSpPr>
+          <p:nvPr>
+            <p:ph idx="1"/>
+          </p:nvPr>
+        </p:nvSpPr>
+        <p:spPr>
+          <a:xfrm>
+            <a:off x="457200" y="1200151"/>
+            <a:ext cx="8229600" cy="3394472"/>
+          </a:xfrm>
+        </p:spPr>
+        <p:txBody>
+          <a:bodyPr/>
+          <a:lstStyle/>
+          <a:p>
+            <a:pPr lvl="0" indent="0" marL="0">
+              <a:buNone/>
+            </a:pPr>
+            <a:r>
+              <a:rPr/>
+              <a:t>The change in the prediction for a one-unit change in that feature — </a:t>
+            </a:r>
+            <a:r>
+              <a:rPr b="1"/>
+              <a:t>with every other feature held fixed</a:t>
+            </a:r>
+            <a:r>
+              <a:rPr/>
+              <a:t>.</a:t>
+            </a:r>
+          </a:p>
+        </p:txBody>
+      </p:sp>
+    </p:spTree>
+  </p:cSld>
+</p:sld>
+</file>
+
+<file path=ppt/slides/slide48.xml><?xml version="1.0" encoding="utf-8"?>
 <p:sld xmlns:a="http://schemas.openxmlformats.org/drawingml/2006/main" xmlns:r="http://schemas.openxmlformats.org/officeDocument/2006/relationships" xmlns:p="http://schemas.openxmlformats.org/presentationml/2006/main">
   <p:cSld>
     <p:spTree>
@@ -10239,7 +14990,7 @@
 </p:sld>
 </file>
 
-<file path=ppt/slides/slide32.xml><?xml version="1.0" encoding="utf-8"?>
+<file path=ppt/slides/slide49.xml><?xml version="1.0" encoding="utf-8"?>
 <p:sld xmlns:a="http://schemas.openxmlformats.org/drawingml/2006/main" xmlns:r="http://schemas.openxmlformats.org/officeDocument/2006/relationships" xmlns:p="http://schemas.openxmlformats.org/presentationml/2006/main">
   <p:cSld>
     <p:spTree>
@@ -10312,306 +15063,6 @@
             <a:r>
               <a:rPr/>
               <a:t>Ridge on the disaster, the regularisation paths, the collinear case.</a:t>
-            </a:r>
-          </a:p>
-        </p:txBody>
-      </p:sp>
-    </p:spTree>
-  </p:cSld>
-</p:sld>
-</file>
-
-<file path=ppt/slides/slide33.xml><?xml version="1.0" encoding="utf-8"?>
-<p:sld xmlns:a="http://schemas.openxmlformats.org/drawingml/2006/main" xmlns:r="http://schemas.openxmlformats.org/officeDocument/2006/relationships" xmlns:p="http://schemas.openxmlformats.org/presentationml/2006/main">
-  <p:cSld>
-    <p:spTree>
-      <p:nvGrpSpPr>
-        <p:cNvPr id="1" name=""/>
-        <p:cNvGrpSpPr/>
-        <p:nvPr/>
-      </p:nvGrpSpPr>
-      <p:grpSpPr>
-        <a:xfrm>
-          <a:off x="0" y="0"/>
-          <a:ext cx="0" cy="0"/>
-          <a:chOff x="0" y="0"/>
-          <a:chExt cx="0" cy="0"/>
-        </a:xfrm>
-      </p:grpSpPr>
-      <p:sp>
-        <p:nvSpPr>
-          <p:cNvPr id="2" name="Title 1"/>
-          <p:cNvSpPr>
-            <a:spLocks noGrp="1"/>
-          </p:cNvSpPr>
-          <p:nvPr>
-            <p:ph type="title"/>
-          </p:nvPr>
-        </p:nvSpPr>
-        <p:spPr>
-          <a:xfrm>
-            <a:off x="457200" y="205979"/>
-            <a:ext cx="8229600" cy="857250"/>
-          </a:xfrm>
-        </p:spPr>
-        <p:txBody>
-          <a:bodyPr/>
-          <a:lstStyle/>
-          <a:p>
-            <a:pPr lvl="0" indent="0" marL="0">
-              <a:buNone/>
-            </a:pPr>
-            <a:r>
-              <a:rPr/>
-              <a:t>What we did today</a:t>
-            </a:r>
-          </a:p>
-        </p:txBody>
-      </p:sp>
-      <p:sp>
-        <p:nvSpPr>
-          <p:cNvPr id="3" name="Content Placeholder 2"/>
-          <p:cNvSpPr>
-            <a:spLocks noGrp="1"/>
-          </p:cNvSpPr>
-          <p:nvPr>
-            <p:ph idx="1"/>
-          </p:nvPr>
-        </p:nvSpPr>
-        <p:spPr>
-          <a:xfrm>
-            <a:off x="457200" y="1200151"/>
-            <a:ext cx="8229600" cy="3394472"/>
-          </a:xfrm>
-        </p:spPr>
-        <p:txBody>
-          <a:bodyPr/>
-          <a:lstStyle/>
-          <a:p>
-            <a:pPr lvl="0"/>
-            <a:r>
-              <a:rPr/>
-              <a:t>A model that claims a fixed amount per unit</a:t>
-            </a:r>
-          </a:p>
-          <a:p>
-            <a:pPr lvl="0"/>
-            <a:r>
-              <a:rPr/>
-              <a:t>An exact solution — a projection — and when it fails</a:t>
-            </a:r>
-          </a:p>
-          <a:p>
-            <a:pPr lvl="0"/>
-            <a:r>
-              <a:rPr/>
-              <a:t>An iterative one: walk downhill, mind your stride</a:t>
-            </a:r>
-          </a:p>
-          <a:p>
-            <a:pPr lvl="0"/>
-            <a:r>
-              <a:rPr/>
-              <a:t>Flexibility helps until it does not</a:t>
-            </a:r>
-          </a:p>
-          <a:p>
-            <a:pPr lvl="0"/>
-            <a:r>
-              <a:rPr/>
-              <a:t>Charging for size buys generalisation, and readable coefficients</a:t>
-            </a:r>
-          </a:p>
-        </p:txBody>
-      </p:sp>
-    </p:spTree>
-  </p:cSld>
-</p:sld>
-</file>
-
-<file path=ppt/slides/slide34.xml><?xml version="1.0" encoding="utf-8"?>
-<p:sld xmlns:a="http://schemas.openxmlformats.org/drawingml/2006/main" xmlns:r="http://schemas.openxmlformats.org/officeDocument/2006/relationships" xmlns:p="http://schemas.openxmlformats.org/presentationml/2006/main">
-  <p:cSld>
-    <p:spTree>
-      <p:nvGrpSpPr>
-        <p:cNvPr id="1" name=""/>
-        <p:cNvGrpSpPr/>
-        <p:nvPr/>
-      </p:nvGrpSpPr>
-      <p:grpSpPr>
-        <a:xfrm>
-          <a:off x="0" y="0"/>
-          <a:ext cx="0" cy="0"/>
-          <a:chOff x="0" y="0"/>
-          <a:chExt cx="0" cy="0"/>
-        </a:xfrm>
-      </p:grpSpPr>
-      <p:sp>
-        <p:nvSpPr>
-          <p:cNvPr id="2" name="Title 1"/>
-          <p:cNvSpPr>
-            <a:spLocks noGrp="1"/>
-          </p:cNvSpPr>
-          <p:nvPr>
-            <p:ph type="title"/>
-          </p:nvPr>
-        </p:nvSpPr>
-        <p:spPr>
-          <a:xfrm>
-            <a:off x="457200" y="205979"/>
-            <a:ext cx="8229600" cy="857250"/>
-          </a:xfrm>
-        </p:spPr>
-        <p:txBody>
-          <a:bodyPr/>
-          <a:lstStyle/>
-          <a:p>
-            <a:pPr lvl="0" indent="0" marL="0">
-              <a:buNone/>
-            </a:pPr>
-            <a:r>
-              <a:rPr/>
-              <a:t>Homework — due Friday 16 October</a:t>
-            </a:r>
-          </a:p>
-        </p:txBody>
-      </p:sp>
-      <p:sp>
-        <p:nvSpPr>
-          <p:cNvPr id="3" name="Content Placeholder 2"/>
-          <p:cNvSpPr>
-            <a:spLocks noGrp="1"/>
-          </p:cNvSpPr>
-          <p:nvPr>
-            <p:ph idx="1"/>
-          </p:nvPr>
-        </p:nvSpPr>
-        <p:spPr>
-          <a:xfrm>
-            <a:off x="457200" y="1200151"/>
-            <a:ext cx="8229600" cy="3394472"/>
-          </a:xfrm>
-        </p:spPr>
-        <p:txBody>
-          <a:bodyPr/>
-          <a:lstStyle/>
-          <a:p>
-            <a:pPr lvl="0" indent="0" marL="0">
-              <a:buNone/>
-            </a:pPr>
-            <a:r>
-              <a:rPr>
-                <a:latin typeface="Courier"/>
-              </a:rPr>
-              <a:t>Exercises/03_regression.md</a:t>
-            </a:r>
-          </a:p>
-          <a:p>
-            <a:pPr lvl="0" indent="0" marL="0">
-              <a:buNone/>
-            </a:pPr>
-            <a:r>
-              <a:rPr/>
-              <a:t>Fit, regularise, and </a:t>
-            </a:r>
-            <a:r>
-              <a:rPr b="1"/>
-              <a:t>explain which coefficients you believe</a:t>
-            </a:r>
-            <a:r>
-              <a:rPr/>
-              <a:t>.</a:t>
-            </a:r>
-          </a:p>
-        </p:txBody>
-      </p:sp>
-    </p:spTree>
-  </p:cSld>
-</p:sld>
-</file>
-
-<file path=ppt/slides/slide4.xml><?xml version="1.0" encoding="utf-8"?>
-<p:sld xmlns:a="http://schemas.openxmlformats.org/drawingml/2006/main" xmlns:r="http://schemas.openxmlformats.org/officeDocument/2006/relationships" xmlns:p="http://schemas.openxmlformats.org/presentationml/2006/main">
-  <p:cSld>
-    <p:spTree>
-      <p:nvGrpSpPr>
-        <p:cNvPr id="1" name=""/>
-        <p:cNvGrpSpPr/>
-        <p:nvPr/>
-      </p:nvGrpSpPr>
-      <p:grpSpPr>
-        <a:xfrm>
-          <a:off x="0" y="0"/>
-          <a:ext cx="0" cy="0"/>
-          <a:chOff x="0" y="0"/>
-          <a:chExt cx="0" cy="0"/>
-        </a:xfrm>
-      </p:grpSpPr>
-      <p:sp>
-        <p:nvSpPr>
-          <p:cNvPr id="2" name="Title 1"/>
-          <p:cNvSpPr>
-            <a:spLocks noGrp="1"/>
-          </p:cNvSpPr>
-          <p:nvPr>
-            <p:ph type="title"/>
-          </p:nvPr>
-        </p:nvSpPr>
-        <p:spPr>
-          <a:xfrm>
-            <a:off x="457200" y="205979"/>
-            <a:ext cx="8229600" cy="857250"/>
-          </a:xfrm>
-        </p:spPr>
-        <p:txBody>
-          <a:bodyPr/>
-          <a:lstStyle/>
-          <a:p>
-            <a:pPr lvl="0" indent="0" marL="0">
-              <a:buNone/>
-            </a:pPr>
-            <a:r>
-              <a:rPr/>
-              <a:t>One dataset, all lesson</a:t>
-            </a:r>
-          </a:p>
-        </p:txBody>
-      </p:sp>
-      <p:sp>
-        <p:nvSpPr>
-          <p:cNvPr id="3" name="Content Placeholder 2"/>
-          <p:cNvSpPr>
-            <a:spLocks noGrp="1"/>
-          </p:cNvSpPr>
-          <p:nvPr>
-            <p:ph idx="1"/>
-          </p:nvPr>
-        </p:nvSpPr>
-        <p:spPr>
-          <a:xfrm>
-            <a:off x="457200" y="1200151"/>
-            <a:ext cx="8229600" cy="3394472"/>
-          </a:xfrm>
-        </p:spPr>
-        <p:txBody>
-          <a:bodyPr/>
-          <a:lstStyle/>
-          <a:p>
-            <a:pPr lvl="0" indent="0" marL="0">
-              <a:buNone/>
-            </a:pPr>
-            <a:r>
-              <a:rPr/>
-              <a:t>600 houses. Six measurements. A price.</a:t>
-            </a:r>
-          </a:p>
-          <a:p>
-            <a:pPr lvl="0" indent="0" marL="0">
-              <a:buNone/>
-            </a:pPr>
-            <a:r>
-              <a:rPr b="1"/>
-              <a:t>And we know the coefficients that generated it.</a:t>
             </a:r>
           </a:p>
         </p:txBody>
@@ -10663,7 +15114,89 @@
             </a:pPr>
             <a:r>
               <a:rPr/>
-              <a:t>What a linear model claims</a:t>
+              <a:t>What we are trying to predict</a:t>
+            </a:r>
+          </a:p>
+        </p:txBody>
+      </p:sp>
+      <p:pic>
+        <p:nvPicPr>
+          <p:cNvPr descr="price_vs_area.png" id="0" name="Picture 1"/>
+          <p:cNvPicPr>
+            <a:picLocks noGrp="1" noChangeAspect="1"/>
+          </p:cNvPicPr>
+          <p:nvPr/>
+        </p:nvPicPr>
+        <p:blipFill>
+          <a:blip r:embed="rId3"/>
+          <a:stretch>
+            <a:fillRect/>
+          </a:stretch>
+        </p:blipFill>
+        <p:spPr bwMode="auto">
+          <a:xfrm>
+            <a:off x="1847359" y="1166099"/>
+            <a:ext cx="5449282" cy="3360181"/>
+          </a:xfrm>
+          <a:prstGeom prst="rect">
+            <a:avLst/>
+          </a:prstGeom>
+          <a:noFill/>
+          <a:ln w="9525">
+            <a:noFill/>
+            <a:headEnd/>
+            <a:tailEnd/>
+          </a:ln>
+        </p:spPr>
+      </p:pic>
+    </p:spTree>
+  </p:cSld>
+</p:sld>
+</file>
+
+<file path=ppt/slides/slide50.xml><?xml version="1.0" encoding="utf-8"?>
+<p:sld xmlns:a="http://schemas.openxmlformats.org/drawingml/2006/main" xmlns:r="http://schemas.openxmlformats.org/officeDocument/2006/relationships" xmlns:p="http://schemas.openxmlformats.org/presentationml/2006/main">
+  <p:cSld>
+    <p:spTree>
+      <p:nvGrpSpPr>
+        <p:cNvPr id="1" name=""/>
+        <p:cNvGrpSpPr/>
+        <p:nvPr/>
+      </p:nvGrpSpPr>
+      <p:grpSpPr>
+        <a:xfrm>
+          <a:off x="0" y="0"/>
+          <a:ext cx="0" cy="0"/>
+          <a:chOff x="0" y="0"/>
+          <a:chExt cx="0" cy="0"/>
+        </a:xfrm>
+      </p:grpSpPr>
+      <p:sp>
+        <p:nvSpPr>
+          <p:cNvPr id="2" name="Title 1"/>
+          <p:cNvSpPr>
+            <a:spLocks noGrp="1"/>
+          </p:cNvSpPr>
+          <p:nvPr>
+            <p:ph type="title"/>
+          </p:nvPr>
+        </p:nvSpPr>
+        <p:spPr>
+          <a:xfrm>
+            <a:off x="457200" y="205979"/>
+            <a:ext cx="8229600" cy="857250"/>
+          </a:xfrm>
+        </p:spPr>
+        <p:txBody>
+          <a:bodyPr/>
+          <a:lstStyle/>
+          <a:p>
+            <a:pPr lvl="0" indent="0" marL="0">
+              <a:buNone/>
+            </a:pPr>
+            <a:r>
+              <a:rPr/>
+              <a:t>What we did today</a:t>
             </a:r>
           </a:p>
         </p:txBody>
@@ -10688,26 +15221,139 @@
           <a:bodyPr/>
           <a:lstStyle/>
           <a:p>
-            <a:pPr lvl="0" indent="0" marL="0">
-              <a:buNone/>
-            </a:pPr>
-            <a:r>
-              <a:rPr/>
-              <a:t>Each feature contributes a fixed amount per unit, and the contributions add up.</a:t>
-            </a:r>
-          </a:p>
-          <a:p>
             <a:pPr lvl="0"/>
             <a:r>
               <a:rPr/>
-              <a:t>Every square metre: the same 2,400 €</a:t>
+              <a:t>A model that claims a fixed amount per unit</a:t>
             </a:r>
           </a:p>
           <a:p>
             <a:pPr lvl="0"/>
             <a:r>
               <a:rPr/>
-              <a:t>Every kilometre out: the same −6,500 €</a:t>
+              <a:t>An exact solution — a projection — and when it fails</a:t>
+            </a:r>
+          </a:p>
+          <a:p>
+            <a:pPr lvl="0"/>
+            <a:r>
+              <a:rPr/>
+              <a:t>An iterative one: walk downhill, mind your stride</a:t>
+            </a:r>
+          </a:p>
+          <a:p>
+            <a:pPr lvl="0"/>
+            <a:r>
+              <a:rPr/>
+              <a:t>Flexibility helps until it does not</a:t>
+            </a:r>
+          </a:p>
+          <a:p>
+            <a:pPr lvl="0"/>
+            <a:r>
+              <a:rPr/>
+              <a:t>Charging for size buys generalisation, and readable coefficients</a:t>
+            </a:r>
+          </a:p>
+        </p:txBody>
+      </p:sp>
+    </p:spTree>
+  </p:cSld>
+</p:sld>
+</file>
+
+<file path=ppt/slides/slide51.xml><?xml version="1.0" encoding="utf-8"?>
+<p:sld xmlns:a="http://schemas.openxmlformats.org/drawingml/2006/main" xmlns:r="http://schemas.openxmlformats.org/officeDocument/2006/relationships" xmlns:p="http://schemas.openxmlformats.org/presentationml/2006/main">
+  <p:cSld>
+    <p:spTree>
+      <p:nvGrpSpPr>
+        <p:cNvPr id="1" name=""/>
+        <p:cNvGrpSpPr/>
+        <p:nvPr/>
+      </p:nvGrpSpPr>
+      <p:grpSpPr>
+        <a:xfrm>
+          <a:off x="0" y="0"/>
+          <a:ext cx="0" cy="0"/>
+          <a:chOff x="0" y="0"/>
+          <a:chExt cx="0" cy="0"/>
+        </a:xfrm>
+      </p:grpSpPr>
+      <p:sp>
+        <p:nvSpPr>
+          <p:cNvPr id="2" name="Title 1"/>
+          <p:cNvSpPr>
+            <a:spLocks noGrp="1"/>
+          </p:cNvSpPr>
+          <p:nvPr>
+            <p:ph type="title"/>
+          </p:nvPr>
+        </p:nvSpPr>
+        <p:spPr>
+          <a:xfrm>
+            <a:off x="457200" y="205979"/>
+            <a:ext cx="8229600" cy="857250"/>
+          </a:xfrm>
+        </p:spPr>
+        <p:txBody>
+          <a:bodyPr/>
+          <a:lstStyle/>
+          <a:p>
+            <a:pPr lvl="0" indent="0" marL="0">
+              <a:buNone/>
+            </a:pPr>
+            <a:r>
+              <a:rPr/>
+              <a:t>Homework — due Friday 16 October</a:t>
+            </a:r>
+          </a:p>
+        </p:txBody>
+      </p:sp>
+      <p:sp>
+        <p:nvSpPr>
+          <p:cNvPr id="3" name="Content Placeholder 2"/>
+          <p:cNvSpPr>
+            <a:spLocks noGrp="1"/>
+          </p:cNvSpPr>
+          <p:nvPr>
+            <p:ph idx="1"/>
+          </p:nvPr>
+        </p:nvSpPr>
+        <p:spPr>
+          <a:xfrm>
+            <a:off x="457200" y="1200151"/>
+            <a:ext cx="8229600" cy="3394472"/>
+          </a:xfrm>
+        </p:spPr>
+        <p:txBody>
+          <a:bodyPr/>
+          <a:lstStyle/>
+          <a:p>
+            <a:pPr lvl="0" indent="0" marL="0">
+              <a:buNone/>
+            </a:pPr>
+            <a:r>
+              <a:rPr>
+                <a:latin typeface="Courier"/>
+              </a:rPr>
+              <a:t>Exercises/03_regression.md</a:t>
+            </a:r>
+          </a:p>
+          <a:p>
+            <a:pPr lvl="0" indent="0" marL="0">
+              <a:buNone/>
+            </a:pPr>
+            <a:r>
+              <a:rPr/>
+              <a:t>Fit, regularise, and </a:t>
+            </a:r>
+            <a:r>
+              <a:rPr b="1"/>
+              <a:t>explain which coefficients you believe</a:t>
+            </a:r>
+            <a:r>
+              <a:rPr/>
+              <a:t>.</a:t>
             </a:r>
           </a:p>
         </p:txBody>
@@ -10759,7 +15405,7 @@
             </a:pPr>
             <a:r>
               <a:rPr/>
-              <a:t>Fitting means minimising something</a:t>
+              <a:t>What a linear model claims</a:t>
             </a:r>
           </a:p>
         </p:txBody>
@@ -10789,16 +15435,21 @@
             </a:pPr>
             <a:r>
               <a:rPr/>
-              <a:t>We need one number saying how badly a candidate model is doing.</a:t>
-            </a:r>
-          </a:p>
-          <a:p>
-            <a:pPr lvl="0" indent="0" marL="0">
-              <a:buNone/>
-            </a:pPr>
-            <a:r>
-              <a:rPr/>
-              <a:t>Adding up the errors fails: +50,000 and −50,000 cancel to zero.</a:t>
+              <a:t>Each feature contributes a fixed amount per unit, and the contributions add up.</a:t>
+            </a:r>
+          </a:p>
+          <a:p>
+            <a:pPr lvl="0"/>
+            <a:r>
+              <a:rPr/>
+              <a:t>Every square metre: the same 2,400 €</a:t>
+            </a:r>
+          </a:p>
+          <a:p>
+            <a:pPr lvl="0"/>
+            <a:r>
+              <a:rPr/>
+              <a:t>Every kilometre out: the same −6,500 €</a:t>
             </a:r>
           </a:p>
         </p:txBody>
@@ -10850,7 +15501,7 @@
             </a:pPr>
             <a:r>
               <a:rPr/>
-              <a:t>Why squared, not absolute</a:t>
+              <a:t>Fitting means minimising something</a:t>
             </a:r>
           </a:p>
         </p:txBody>
@@ -10875,40 +15526,21 @@
           <a:bodyPr/>
           <a:lstStyle/>
           <a:p>
-            <a:pPr lvl="0"/>
-            <a:r>
-              <a:rPr b="1"/>
-              <a:t>Differentiable everywhere</a:t>
-            </a:r>
-            <a:r>
-              <a:rPr/>
-              <a:t> — no corner at zero</a:t>
-            </a:r>
-          </a:p>
-          <a:p>
-            <a:pPr lvl="0"/>
-            <a:r>
-              <a:rPr b="1"/>
-              <a:t>Punishes one large error more</a:t>
-            </a:r>
-            <a:r>
-              <a:rPr/>
-              <a:t> than several small ones</a:t>
-            </a:r>
-          </a:p>
-          <a:p>
-            <a:pPr lvl="0"/>
-            <a:r>
-              <a:rPr/>
-              <a:t>Under Gaussian noise, it </a:t>
-            </a:r>
-            <a:r>
-              <a:rPr b="1"/>
-              <a:t>is</a:t>
-            </a:r>
-            <a:r>
-              <a:rPr/>
-              <a:t> maximum likelihood</a:t>
+            <a:pPr lvl="0" indent="0" marL="0">
+              <a:buNone/>
+            </a:pPr>
+            <a:r>
+              <a:rPr/>
+              <a:t>We need one number saying how badly a candidate model is doing.</a:t>
+            </a:r>
+          </a:p>
+          <a:p>
+            <a:pPr lvl="0" indent="0" marL="0">
+              <a:buNone/>
+            </a:pPr>
+            <a:r>
+              <a:rPr/>
+              <a:t>Adding up the errors fails: +50,000 and −50,000 cancel to zero.</a:t>
             </a:r>
           </a:p>
         </p:txBody>
@@ -10960,41 +15592,69 @@
             </a:pPr>
             <a:r>
               <a:rPr/>
-              <a:t>The cost function — mean squared error</a:t>
-            </a:r>
-          </a:p>
-        </p:txBody>
-      </p:sp>
-      <p:pic>
-        <p:nvPicPr>
-          <p:cNvPr descr="eq_d901970e7c.png" id="0" name="Picture 1"/>
-          <p:cNvPicPr>
-            <a:picLocks noGrp="1" noChangeAspect="1"/>
-          </p:cNvPicPr>
-          <p:nvPr/>
-        </p:nvPicPr>
-        <p:blipFill>
-          <a:blip r:embed="rId3"/>
-          <a:stretch>
-            <a:fillRect/>
-          </a:stretch>
-        </p:blipFill>
-        <p:spPr bwMode="auto">
+              <a:t>Why squared, not absolute</a:t>
+            </a:r>
+          </a:p>
+        </p:txBody>
+      </p:sp>
+      <p:sp>
+        <p:nvSpPr>
+          <p:cNvPr id="3" name="Content Placeholder 2"/>
+          <p:cNvSpPr>
+            <a:spLocks noGrp="1"/>
+          </p:cNvSpPr>
+          <p:nvPr>
+            <p:ph idx="1"/>
+          </p:nvPr>
+        </p:nvSpPr>
+        <p:spPr>
           <a:xfrm>
-            <a:off x="457200" y="1900039"/>
-            <a:ext cx="8229600" cy="1892300"/>
+            <a:off x="457200" y="1200151"/>
+            <a:ext cx="8229600" cy="3394472"/>
           </a:xfrm>
-          <a:prstGeom prst="rect">
-            <a:avLst/>
-          </a:prstGeom>
-          <a:noFill/>
-          <a:ln w="9525">
-            <a:noFill/>
-            <a:headEnd/>
-            <a:tailEnd/>
-          </a:ln>
         </p:spPr>
-      </p:pic>
+        <p:txBody>
+          <a:bodyPr/>
+          <a:lstStyle/>
+          <a:p>
+            <a:pPr lvl="0"/>
+            <a:r>
+              <a:rPr b="1"/>
+              <a:t>Differentiable everywhere</a:t>
+            </a:r>
+            <a:r>
+              <a:rPr/>
+              <a:t> — no corner at zero</a:t>
+            </a:r>
+          </a:p>
+          <a:p>
+            <a:pPr lvl="0"/>
+            <a:r>
+              <a:rPr b="1"/>
+              <a:t>Punishes one large error more</a:t>
+            </a:r>
+            <a:r>
+              <a:rPr/>
+              <a:t> than several small ones</a:t>
+            </a:r>
+          </a:p>
+          <a:p>
+            <a:pPr lvl="0"/>
+            <a:r>
+              <a:rPr/>
+              <a:t>Under Gaussian noise, it </a:t>
+            </a:r>
+            <a:r>
+              <a:rPr b="1"/>
+              <a:t>is</a:t>
+            </a:r>
+            <a:r>
+              <a:rPr/>
+              <a:t> maximum likelihood</a:t>
+            </a:r>
+          </a:p>
+        </p:txBody>
+      </p:sp>
     </p:spTree>
   </p:cSld>
 </p:sld>
@@ -11042,14 +15702,14 @@
             </a:pPr>
             <a:r>
               <a:rPr/>
-              <a:t>The cost is a bowl</a:t>
+              <a:t>The cost function — mean squared error</a:t>
             </a:r>
           </a:p>
         </p:txBody>
       </p:sp>
       <p:pic>
         <p:nvPicPr>
-          <p:cNvPr descr="cost_surface.png" id="0" name="Picture 1"/>
+          <p:cNvPr descr="eq_d901970e7c.png" id="0" name="Picture 1"/>
           <p:cNvPicPr>
             <a:picLocks noGrp="1" noChangeAspect="1"/>
           </p:cNvPicPr>
@@ -11063,8 +15723,8 @@
         </p:blipFill>
         <p:spPr bwMode="auto">
           <a:xfrm>
-            <a:off x="2023548" y="1166099"/>
-            <a:ext cx="5096903" cy="3360181"/>
+            <a:off x="457200" y="1900039"/>
+            <a:ext cx="8229600" cy="1892300"/>
           </a:xfrm>
           <a:prstGeom prst="rect">
             <a:avLst/>

--- a/Lessons/03_regression/Slides/regression_slides.pptx
+++ b/Lessons/03_regression/Slides/regression_slides.pptx
@@ -1058,7 +1058,7 @@
             </a:pPr>
             <a:r>
               <a:rPr/>
-              <a:t>Handout section 3.1 derives it properly and section 3.2 does it by hand on three houses: X transpose X, determinant 22,400, the inverse, and out comes 2,480 euros per square metre against a true 2,400. Three data points, two parameters, 4% error. Worth doing on the board if the room is engaged.</a:t>
+              <a:t>Handout section 3.1 derives it properly and section 3.2 does it by hand on three houses: X transpose X, determinant 22,400, the inverse, and out comes 2,536 euros per square metre against a true 2,400. Three data points, two parameters, 6% error. Worth doing on the board if the room is engaged.</a:t>
             </a:r>
           </a:p>
           <a:p>
@@ -1168,21 +1168,35 @@
             </a:pPr>
             <a:r>
               <a:rPr/>
-              <a:t>The whole method on three data points: build the two-by-two matrix, take its determinant, invert it, multiply. Out comes a slope within 4% of the value that generated the data, from three houses and two parameters.</a:t>
-            </a:r>
-          </a:p>
-          <a:p>
-            <a:pPr lvl="0" indent="0" marL="0">
-              <a:buNone/>
-            </a:pPr>
-          </a:p>
-          <a:p>
-            <a:pPr lvl="0" indent="0" marL="0">
-              <a:buNone/>
-            </a:pPr>
-            <a:r>
-              <a:rPr/>
-              <a:t>Then the honest caveat: three points is nothing, and 4% here is luck as much as method. Notebook 1 does the same on 450 houses and gets 2,410. The point is not the accuracy, it is that the formula is arithmetic you could do by hand.</a:t>
+              <a:t>The whole method on three data points: build the two-by-two matrix, take its determinant, invert it, multiply. Out comes a slope within 6% of the value that generated the data, from three houses and two parameters.</a:t>
+            </a:r>
+          </a:p>
+          <a:p>
+            <a:pPr lvl="0" indent="0" marL="0">
+              <a:buNone/>
+            </a:pPr>
+          </a:p>
+          <a:p>
+            <a:pPr lvl="0" indent="0" marL="0">
+              <a:buNone/>
+            </a:pPr>
+            <a:r>
+              <a:rPr/>
+              <a:t>If you do put it on the board, show the dot product that gives the second entry of X transpose y — 80 times 240, plus 120 times 320, plus 200 times 540. It is the step where an arithmetic slip hides, and watching it done is what makes the formula stop being a black box.</a:t>
+            </a:r>
+          </a:p>
+          <a:p>
+            <a:pPr lvl="0" indent="0" marL="0">
+              <a:buNone/>
+            </a:pPr>
+          </a:p>
+          <a:p>
+            <a:pPr lvl="0" indent="0" marL="0">
+              <a:buNone/>
+            </a:pPr>
+            <a:r>
+              <a:rPr/>
+              <a:t>Then the honest caveat: three points is nothing, and 6% here is luck as much as method. Notebook 1 does the same on 450 houses and gets 2,410. The point is not the accuracy, it is that the formula is arithmetic you could do by hand.</a:t>
             </a:r>
           </a:p>
           <a:p>
@@ -10554,7 +10568,7 @@
                       </a:pPr>
                       <a:r>
                         <a:rPr/>
-                        <a:t>(1,100 , 165,200)</a:t>
+                        <a:t>(1,100 , 165,600)</a:t>
                       </a:r>
                     </a:p>
                   </a:txBody>
@@ -10618,7 +10632,7 @@
                       </a:pPr>
                       <a:r>
                         <a:rPr b="1"/>
-                        <a:t>2,480 €/m²</a:t>
+                        <a:t>2,536 €/m²</a:t>
                       </a:r>
                       <a:r>
                         <a:rPr/>
@@ -10654,7 +10668,7 @@
                       </a:pPr>
                       <a:r>
                         <a:rPr/>
-                        <a:t>35,700 €</a:t>
+                        <a:t>28,600 €</a:t>
                       </a:r>
                     </a:p>
                   </a:txBody>

--- a/Lessons/03_regression/Slides/regression_slides.pptx
+++ b/Lessons/03_regression/Slides/regression_slides.pptx
@@ -13660,8 +13660,8 @@
         </p:blipFill>
         <p:spPr bwMode="auto">
           <a:xfrm>
-            <a:off x="1570490" y="1166099"/>
-            <a:ext cx="6003019" cy="3360181"/>
+            <a:off x="1557905" y="1166099"/>
+            <a:ext cx="6028189" cy="3360181"/>
           </a:xfrm>
           <a:prstGeom prst="rect">
             <a:avLst/>

--- a/Lessons/03_regression/Slides/regression_slides.pptx
+++ b/Lessons/03_regression/Slides/regression_slides.pptx
@@ -10190,8 +10190,8 @@
         </p:blipFill>
         <p:spPr bwMode="auto">
           <a:xfrm>
-            <a:off x="2023548" y="1166099"/>
-            <a:ext cx="5096903" cy="3360181"/>
+            <a:off x="2010963" y="1166099"/>
+            <a:ext cx="5122073" cy="3360181"/>
           </a:xfrm>
           <a:prstGeom prst="rect">
             <a:avLst/>
@@ -11590,8 +11590,8 @@
         </p:blipFill>
         <p:spPr bwMode="auto">
           <a:xfrm>
-            <a:off x="457200" y="1455539"/>
-            <a:ext cx="8229600" cy="2781300"/>
+            <a:off x="457200" y="1461889"/>
+            <a:ext cx="8229600" cy="2768600"/>
           </a:xfrm>
           <a:prstGeom prst="rect">
             <a:avLst/>
@@ -11979,8 +11979,8 @@
         </p:blipFill>
         <p:spPr bwMode="auto">
           <a:xfrm>
-            <a:off x="1759264" y="1166099"/>
-            <a:ext cx="5625471" cy="3360181"/>
+            <a:off x="1746679" y="1166099"/>
+            <a:ext cx="5650641" cy="3360181"/>
           </a:xfrm>
           <a:prstGeom prst="rect">
             <a:avLst/>
@@ -12143,8 +12143,8 @@
         </p:blipFill>
         <p:spPr bwMode="auto">
           <a:xfrm>
-            <a:off x="1343961" y="1166099"/>
-            <a:ext cx="6456078" cy="3360181"/>
+            <a:off x="1325084" y="1166099"/>
+            <a:ext cx="6493832" cy="3360181"/>
           </a:xfrm>
           <a:prstGeom prst="rect">
             <a:avLst/>
@@ -12333,8 +12333,8 @@
         </p:blipFill>
         <p:spPr bwMode="auto">
           <a:xfrm>
-            <a:off x="457200" y="1493639"/>
-            <a:ext cx="8229600" cy="2705100"/>
+            <a:off x="457200" y="1499989"/>
+            <a:ext cx="8229600" cy="2692400"/>
           </a:xfrm>
           <a:prstGeom prst="rect">
             <a:avLst/>
@@ -12816,8 +12816,8 @@
         </p:blipFill>
         <p:spPr bwMode="auto">
           <a:xfrm>
-            <a:off x="1677462" y="1166099"/>
-            <a:ext cx="5789075" cy="3360181"/>
+            <a:off x="1658585" y="1166099"/>
+            <a:ext cx="5826830" cy="3360181"/>
           </a:xfrm>
           <a:prstGeom prst="rect">
             <a:avLst/>
@@ -14099,8 +14099,8 @@
         </p:blipFill>
         <p:spPr bwMode="auto">
           <a:xfrm>
-            <a:off x="457200" y="1506339"/>
-            <a:ext cx="8229600" cy="2679700"/>
+            <a:off x="457200" y="1512689"/>
+            <a:ext cx="8229600" cy="2667000"/>
           </a:xfrm>
           <a:prstGeom prst="rect">
             <a:avLst/>
@@ -15149,8 +15149,8 @@
         </p:blipFill>
         <p:spPr bwMode="auto">
           <a:xfrm>
-            <a:off x="1847359" y="1166099"/>
-            <a:ext cx="5449282" cy="3360181"/>
+            <a:off x="1834774" y="1166099"/>
+            <a:ext cx="5474452" cy="3360181"/>
           </a:xfrm>
           <a:prstGeom prst="rect">
             <a:avLst/>

--- a/Lessons/03_regression/Slides/regression_slides.pptx
+++ b/Lessons/03_regression/Slides/regression_slides.pptx
@@ -700,21 +700,21 @@
             </a:r>
             <a:r>
               <a:rPr/>
-              <a:t> one cuts it by 1.7%. Same effort, twenty-five times the reward — so that is where the fit will go.</a:t>
-            </a:r>
-          </a:p>
-          <a:p>
-            <a:pPr lvl="0" indent="0" marL="0">
-              <a:buNone/>
-            </a:pPr>
-          </a:p>
-          <a:p>
-            <a:pPr lvl="0" indent="0" marL="0">
-              <a:buNone/>
-            </a:pPr>
-            <a:r>
-              <a:rPr/>
-              <a:t>Squaring means the fit will bend itself towards its worst predictions and largely ignore the ones it already gets nearly right. Most of the time that is what you want — a model wrong by 40,000 on one house is worse than one wrong by 10,000 on four.</a:t>
+              <a:t> one cuts it by 1.7%. Same effort, twenty-five times the reward - so that is where the fit will go.</a:t>
+            </a:r>
+          </a:p>
+          <a:p>
+            <a:pPr lvl="0" indent="0" marL="0">
+              <a:buNone/>
+            </a:pPr>
+          </a:p>
+          <a:p>
+            <a:pPr lvl="0" indent="0" marL="0">
+              <a:buNone/>
+            </a:pPr>
+            <a:r>
+              <a:rPr/>
+              <a:t>Squaring means the fit will bend itself towards its worst predictions and largely ignore the ones it already gets nearly right. Most of the time that is what you want - a model wrong by 40,000 on one house is worse than one wrong by 10,000 on four.</a:t>
             </a:r>
           </a:p>
           <a:p>
@@ -742,7 +742,7 @@
             </a:pPr>
             <a:r>
               <a:rPr/>
-              <a:t>Ask what would change if we minimised absolute error instead. Answer: the fit would follow the bulk of the data and shrug at the outlier — which is what robust regression does, and why it exists.</a:t>
+              <a:t>Ask what would change if we minimised absolute error instead. Answer: the fit would follow the bulk of the data and shrug at the outlier - which is what robust regression does, and why it exists.</a:t>
             </a:r>
           </a:p>
         </p:txBody>
@@ -838,7 +838,7 @@
             </a:pPr>
             <a:r>
               <a:rPr/>
-              <a:t>The important structural fact: this bowl is convex. There is one minimum and no local traps. Say that explicitly, because it is a property most methods later in the course do NOT have — lesson 9’s networks have cost surfaces full of local minima, and a great deal of the difficulty of training them comes from exactly that.</a:t>
+              <a:t>The important structural fact: this bowl is convex. There is one minimum and no local traps. Say that explicitly, because it is a property most methods later in the course do NOT have - lesson 9’s networks have cost surfaces full of local minima, and a great deal of the difficulty of training them comes from exactly that.</a:t>
             </a:r>
           </a:p>
         </p:txBody>
@@ -934,7 +934,7 @@
             </a:pPr>
             <a:r>
               <a:rPr/>
-              <a:t>Each feature is a direction the model can move in. Everything the model can predict lies on the flat surface those directions span. The true prices are a point that almost certainly does NOT lie on it — no combination of area and age reproduces them exactly.</a:t>
+              <a:t>Each feature is a direction the model can move in. Everything the model can predict lies on the flat surface those directions span. The true prices are a point that almost certainly does NOT lie on it - no combination of area and age reproduces them exactly.</a:t>
             </a:r>
           </a:p>
           <a:p>
@@ -1154,7 +1154,7 @@
             </a:pPr>
             <a:r>
               <a:rPr/>
-              <a:t>Worth doing on the board if the room is awake — it takes four minutes and it turns the formula into something they have touched.</a:t>
+              <a:t>Worth doing on the board if the room is awake - it takes four minutes and it turns the formula into something they have touched.</a:t>
             </a:r>
           </a:p>
           <a:p>
@@ -1182,7 +1182,7 @@
             </a:pPr>
             <a:r>
               <a:rPr/>
-              <a:t>If you do put it on the board, show the dot product that gives the second entry of X transpose y — 80 times 240, plus 120 times 320, plus 200 times 540. It is the step where an arithmetic slip hides, and watching it done is what makes the formula stop being a black box.</a:t>
+              <a:t>If you do put it on the board, show the dot product that gives the second entry of X transpose y - 80 times 240, plus 120 times 320, plus 200 times 540. It is the step where an arithmetic slip hides, and watching it done is what makes the formula stop being a black box.</a:t>
             </a:r>
           </a:p>
           <a:p>
@@ -1554,21 +1554,21 @@
             </a:pPr>
             <a:r>
               <a:rPr/>
-              <a:t>The picture: a round bowl is easy to walk down because every direction behaves the same. Two nearly-identical columns produce a ravine instead — steep across, almost flat along. The flat direction is the one where moving one coefficient up and the other down changes the predictions barely at all, which is precisely why the fit cannot decide between them.</a:t>
-            </a:r>
-          </a:p>
-          <a:p>
-            <a:pPr lvl="0" indent="0" marL="0">
-              <a:buNone/>
-            </a:pPr>
-          </a:p>
-          <a:p>
-            <a:pPr lvl="0" indent="0" marL="0">
-              <a:buNone/>
-            </a:pPr>
-            <a:r>
-              <a:rPr/>
-              <a:t>Then the payoff, which lands twice. For the exact solution, a stretched valley is what makes the inverse enormous and the answer unstable. For gradient descent — next section — one step size has to serve every direction at once, so the steep direction sets the limit and the shallow one crawls. The condition number is, near enough, what sets the iteration count.</a:t>
+              <a:t>The picture: a round bowl is easy to walk down because every direction behaves the same. Two nearly-identical columns produce a ravine instead - steep across, almost flat along. The flat direction is the one where moving one coefficient up and the other down changes the predictions barely at all, which is precisely why the fit cannot decide between them.</a:t>
+            </a:r>
+          </a:p>
+          <a:p>
+            <a:pPr lvl="0" indent="0" marL="0">
+              <a:buNone/>
+            </a:pPr>
+          </a:p>
+          <a:p>
+            <a:pPr lvl="0" indent="0" marL="0">
+              <a:buNone/>
+            </a:pPr>
+            <a:r>
+              <a:rPr/>
+              <a:t>Then the payoff, which lands twice. For the exact solution, a stretched valley is what makes the inverse enormous and the answer unstable. For gradient descent - next section - one step size has to serve every direction at once, so the steep direction sets the limit and the shallow one crawls. The condition number is, near enough, what sets the iteration count.</a:t>
             </a:r>
           </a:p>
           <a:p>
@@ -1774,7 +1774,7 @@
             </a:pPr>
             <a:r>
               <a:rPr/>
-              <a:t>Read the gradient aloud as a sentence, because its shape carries a lesson: each example pulls the coefficient in proportion to two things — how wrong the prediction was, AND how large that feature was for that example.</a:t>
+              <a:t>Read the gradient aloud as a sentence, because its shape carries a lesson: each example pulls the coefficient in proportion to two things - how wrong the prediction was, AND how large that feature was for that example.</a:t>
             </a:r>
           </a:p>
           <a:p>
@@ -1802,7 +1802,7 @@
             </a:pPr>
             <a:r>
               <a:rPr/>
-              <a:t>That is precisely why unscaled features cause trouble, and it is lesson 2’s argument arriving from a different direction. The intercept gradient has no x in it — every example gets an equal vote there.</a:t>
+              <a:t>That is precisely why unscaled features cause trouble, and it is lesson 2’s argument arriving from a different direction. The intercept gradient has no x in it - every example gets an equal vote there.</a:t>
             </a:r>
           </a:p>
           <a:p>
@@ -1912,7 +1912,7 @@
             </a:pPr>
             <a:r>
               <a:rPr/>
-              <a:t>That third property is why linear models are still in production in medicine and credit scoring, decades after more accurate methods existed. Worth saying — the room usually assumes “simple” means “obsolete”.</a:t>
+              <a:t>That third property is why linear models are still in production in medicine and credit scoring, decades after more accurate methods existed. Worth saying - the room usually assumes “simple” means “obsolete”.</a:t>
             </a:r>
           </a:p>
         </p:txBody>
@@ -1994,7 +1994,7 @@
             </a:pPr>
             <a:r>
               <a:rPr/>
-              <a:t>Both gradients are negative — the model predicts zero for everything, so every prediction is far too low — and both parameters therefore increase. So far, so unremarkable.</a:t>
+              <a:t>Both gradients are negative - the model predicts zero for everything, so every prediction is far too low - and both parameters therefore increase. So far, so unremarkable.</a:t>
             </a:r>
           </a:p>
           <a:p>
@@ -2030,7 +2030,7 @@
             </a:pPr>
             <a:r>
               <a:rPr/>
-              <a:t>Nothing clever caused that. Areas are around 140, and the intercept’s “feature” is always 1, so the slope’s gradient is roughly 140 times larger before anything else happens. With one shared learning rate, the intercept crawls towards its value long after the slope has arrived — which is exactly what notebook 1 shows after 4,000 iterations.</a:t>
+              <a:t>Nothing clever caused that. Areas are around 140, and the intercept’s “feature” is always 1, so the slope’s gradient is roughly 140 times larger before anything else happens. With one shared learning rate, the intercept crawls towards its value long after the slope has arrived - which is exactly what notebook 1 shows after 4,000 iterations.</a:t>
             </a:r>
           </a:p>
           <a:p>
@@ -2140,7 +2140,7 @@
             </a:pPr>
             <a:r>
               <a:rPr/>
-              <a:t>Left: the cost against iteration. It drops off a cliff in the first few dozen steps and then flattens into a long tail that is still creeping at 4,000. Point at the flat part and say what it means — the model was essentially fitted very early, and almost all the iterations bought almost nothing.</a:t>
+              <a:t>Left: the cost against iteration. It drops off a cliff in the first few dozen steps and then flattens into a long tail that is still creeping at 4,000. Point at the flat part and say what it means - the model was essentially fitted very early, and almost all the iterations bought almost nothing.</a:t>
             </a:r>
           </a:p>
           <a:p>
@@ -2264,21 +2264,21 @@
             </a:pPr>
             <a:r>
               <a:rPr/>
-              <a:t>Left: too small, correct but slow — the cost falls every iteration and simply takes too many of them. Middle: about right. Right: too large, and it climbs out of the valley.</a:t>
-            </a:r>
-          </a:p>
-          <a:p>
-            <a:pPr lvl="0" indent="0" marL="0">
-              <a:buNone/>
-            </a:pPr>
-          </a:p>
-          <a:p>
-            <a:pPr lvl="0" indent="0" marL="0">
-              <a:buNone/>
-            </a:pPr>
-            <a:r>
-              <a:rPr/>
-              <a:t>The threshold is not folklore. Lesson 2 derived it: for a bowl of curvature c, convergence requires alpha below 2/c, and with several features the binding constraint is the largest curvature — the largest feature variance.</a:t>
+              <a:t>Left: too small, correct but slow - the cost falls every iteration and simply takes too many of them. Middle: about right. Right: too large, and it climbs out of the valley.</a:t>
+            </a:r>
+          </a:p>
+          <a:p>
+            <a:pPr lvl="0" indent="0" marL="0">
+              <a:buNone/>
+            </a:pPr>
+          </a:p>
+          <a:p>
+            <a:pPr lvl="0" indent="0" marL="0">
+              <a:buNone/>
+            </a:pPr>
+            <a:r>
+              <a:rPr/>
+              <a:t>The threshold is not folklore. Lesson 2 derived it: for a bowl of curvature c, convergence requires alpha below 2/c, and with several features the binding constraint is the largest curvature - the largest feature variance.</a:t>
             </a:r>
           </a:p>
           <a:p>
@@ -2402,7 +2402,7 @@
             </a:pPr>
             <a:r>
               <a:rPr/>
-              <a:t>The two moments worth pausing on together. First, the agreement between their four-line normal equation and scikit-learn to twelve decimal places — it lands better than any assurance from the front. Second, the coefficient table at the end, which is the setup for the last section of the lesson.</a:t>
+              <a:t>The two moments worth pausing on together. First, the agreement between their four-line normal equation and scikit-learn to twelve decimal places - it lands better than any assurance from the front. Second, the coefficient table at the end, which is the setup for the last section of the lesson.</a:t>
             </a:r>
           </a:p>
           <a:p>
@@ -2512,7 +2512,7 @@
             </a:pPr>
             <a:r>
               <a:rPr/>
-              <a:t>Check who is stuck in notebook 1 — the second half assumes everyone got the coefficient table out, and it is much cheaper to fix now.</a:t>
+              <a:t>Check who is stuck in notebook 1 - the second half assumes everyone got the coefficient table out, and it is much cheaper to fix now.</a:t>
             </a:r>
           </a:p>
         </p:txBody>
@@ -2608,7 +2608,7 @@
             </a:pPr>
             <a:r>
               <a:rPr/>
-              <a:t>Ask what a straight line would do here. Someone will say it averages through the middle — right, and it will be too high in the centre and too low at both ends, wrong in a structural way rather than slightly imprecise.</a:t>
+              <a:t>Ask what a straight line would do here. Someone will say it averages through the middle - right, and it will be too high in the centre and too low at both ends, wrong in a structural way rather than slightly imprecise.</a:t>
             </a:r>
           </a:p>
           <a:p>
@@ -2718,7 +2718,7 @@
             </a:pPr>
             <a:r>
               <a:rPr/>
-              <a:t>Let them look at it before saying anything. The U is obvious to a human eye in under a second, which is worth remarking on — the hard part was never seeing the shape, it is getting a model to represent it.</a:t>
+              <a:t>Let them look at it before saying anything. The U is obvious to a human eye in under a second, which is worth remarking on - the hard part was never seeing the shape, it is getting a model to represent it.</a:t>
             </a:r>
           </a:p>
           <a:p>
@@ -2814,7 +2814,7 @@
             </a:pPr>
             <a:r>
               <a:rPr/>
-              <a:t>The trick, and it surprises people. Nothing in the derivation required the inputs to be straight — only that the model is linear in w, which it still is.</a:t>
+              <a:t>The trick, and it surprises people. Nothing in the derivation required the inputs to be straight - only that the model is linear in w, which it still is.</a:t>
             </a:r>
           </a:p>
           <a:p>
@@ -3034,7 +3034,7 @@
             </a:pPr>
             <a:r>
               <a:rPr/>
-              <a:t>The contrast to the previous slide, and from notebook 1 — the housing fit, where the model did capture the structure.</a:t>
+              <a:t>The contrast to the previous slide, and from notebook 1 - the housing fit, where the model did capture the structure.</a:t>
             </a:r>
           </a:p>
           <a:p>
@@ -3076,7 +3076,7 @@
             </a:pPr>
             <a:r>
               <a:rPr/>
-              <a:t>Give them the habit explicitly — plot residuals against each feature, every time. A pattern is a message.</a:t>
+              <a:t>Give them the habit explicitly - plot residuals against each feature, every time. A pattern is a message.</a:t>
             </a:r>
           </a:p>
         </p:txBody>
@@ -3186,7 +3186,7 @@
             </a:pPr>
             <a:r>
               <a:rPr/>
-              <a:t>Say why this matters: without the truth, “the coefficient is 7,503” is a number. With it, “the coefficient is 7,503 and the truth is 9,000” is a lesson about when estimates can be trusted — which is section 7 of the handout and the most useful thing in today’s lesson.</a:t>
+              <a:t>Say why this matters: without the truth, “the coefficient is 7,503” is a number. With it, “the coefficient is 7,503 and the truth is 9,000” is a lesson about when estimates can be trusted - which is section 7 of the handout and the most useful thing in today’s lesson.</a:t>
             </a:r>
           </a:p>
         </p:txBody>
@@ -3282,7 +3282,7 @@
             </a:pPr>
             <a:r>
               <a:rPr/>
-              <a:t>Ask them which they would pick if the dashed true curve were not drawn — because that is the real situation. The only thing you ever see is the points.</a:t>
+              <a:t>Ask them which they would pick if the dashed true curve were not drawn - because that is the real situation. The only thing you ever see is the points.</a:t>
             </a:r>
           </a:p>
           <a:p>
@@ -3378,7 +3378,7 @@
             </a:pPr>
             <a:r>
               <a:rPr/>
-              <a:t>Say the name in full before anything else, because every later slide uses the abbreviation: root mean squared error, RMSE, the square root of the mean squared error. Taking the root puts the number back into the units of the target — kilowatt-hours here — so it can be compared with the thing being predicted. An MSE of 285 means nothing to anyone; an RMSE of 16.9 kWh does.</a:t>
+              <a:t>Say the name in full before anything else, because every later slide uses the abbreviation: root mean squared error, RMSE, the square root of the mean squared error. Taking the root puts the number back into the units of the target - kilowatt-hours here - so it can be compared with the thing being predicted. An MSE of 285 means nothing to anyone; an RMSE of 16.9 kWh does.</a:t>
             </a:r>
           </a:p>
           <a:p>
@@ -3420,7 +3420,7 @@
             </a:pPr>
             <a:r>
               <a:rPr/>
-              <a:t>So the model that fits the training data best is ten times worse on data it has not seen — and the training error congratulated us the whole way.</a:t>
+              <a:t>So the model that fits the training data best is ten times worse on data it has not seen - and the training error congratulated us the whole way.</a:t>
             </a:r>
           </a:p>
           <a:p>
@@ -3530,7 +3530,7 @@
             </a:pPr>
             <a:r>
               <a:rPr/>
-              <a:t>Training error, the lower line, falls monotonically and never once turns up. If that were the only curve you could see — and on your own data it is — you would keep adding degrees forever and congratulate yourself the whole way.</a:t>
+              <a:t>Training error, the lower line, falls monotonically and never once turns up. If that were the only curve you could see - and on your own data it is - you would keep adding degrees forever and congratulate yourself the whole way.</a:t>
             </a:r>
           </a:p>
           <a:p>
@@ -3662,7 +3662,7 @@
             </a:pPr>
             <a:r>
               <a:rPr/>
-              <a:t>Have them run the degree sweep first and stop at the table, then predict which degree wins before scrolling. Most rooms guess too high — the instinct that more flexibility is better is exactly what the lesson is dismantling.</a:t>
+              <a:t>Have them run the degree sweep first and stop at the table, then predict which degree wins before scrolling. Most rooms guess too high - the instinct that more flexibility is better is exactly what the lesson is dismantling.</a:t>
             </a:r>
           </a:p>
           <a:p>
@@ -3690,7 +3690,7 @@
             </a:pPr>
             <a:r>
               <a:rPr/>
-              <a:t>The “try this” reduces the training set from 21 points to 15 and asks which degree wins then. The answer moves down, which is the first hint that the right amount of flexibility depends on how much data you have — a theme for lesson 5.</a:t>
+              <a:t>The “try this” reduces the training set from 21 points to 15 and asks which degree wins then. The answer moves down, which is the first hint that the right amount of flexibility depends on how much data you have - a theme for lesson 5.</a:t>
             </a:r>
           </a:p>
         </p:txBody>
@@ -3786,7 +3786,7 @@
             </a:pPr>
             <a:r>
               <a:rPr/>
-              <a:t>The huge coefficients work in OPPOSITION. With 21 points and 12 coefficients there are many ways to pass close to every point, and the one least squares finds has terms that nearly cancel — one pushing the curve up where the next pushes it down, the cancellation failing exactly where a training point sits. Between the points, nothing constrains the swing.</a:t>
+              <a:t>The huge coefficients work in OPPOSITION. With 21 points and 12 coefficients there are many ways to pass close to every point, and the one least squares finds has terms that nearly cancel - one pushing the curve up where the next pushes it down, the cancellation failing exactly where a training point sits. Between the points, nothing constrains the swing.</a:t>
             </a:r>
           </a:p>
           <a:p>
@@ -3930,7 +3930,7 @@
             </a:pPr>
             <a:r>
               <a:rPr/>
-              <a:t>Two things that are not optional and that students get wrong. The intercept is never penalised — it is not a claim about any feature, and shrinking it would bias every prediction towards zero. And features MUST be scaled first: the penalty is a sum over coefficients, so the same feature in metres and in kilometres attracts penalties differing by a factor of a thousand.</a:t>
+              <a:t>Two things that are not optional and that students get wrong. The intercept is never penalised - it is not a claim about any feature, and shrinking it would bias every prediction towards zero. And features MUST be scaled first: the penalty is a sum over coefficients, so the same feature in metres and in kilometres attracts penalties differing by a factor of a thousand.</a:t>
             </a:r>
           </a:p>
           <a:p>
@@ -4040,7 +4040,7 @@
             </a:pPr>
             <a:r>
               <a:rPr/>
-              <a:t>The intercept says where the surface sits, not what any feature is worth. Shrinking it would drag every prediction towards zero, which for house prices in euros is a meaningless place to be dragged. scikit-learn handles this for you in both Ridge and Lasso — but only because someone decided it should, not because the formula does it by itself.</a:t>
+              <a:t>The intercept says where the surface sits, not what any feature is worth. Shrinking it would drag every prediction towards zero, which for house prices in euros is a meaningless place to be dragged. scikit-learn handles this for you in both Ridge and Lasso - but only because someone decided it should, not because the formula does it by itself.</a:t>
             </a:r>
           </a:p>
           <a:p>
@@ -4164,21 +4164,21 @@
             </a:pPr>
             <a:r>
               <a:rPr/>
-              <a:t>Read the last column first: 247,514 down to 365, from a penalty of one hundredth. And the test error falls from 182 to 23, which is the noise floor — an eightfold improvement bought with one number.</a:t>
-            </a:r>
-          </a:p>
-          <a:p>
-            <a:pPr lvl="0" indent="0" marL="0">
-              <a:buNone/>
-            </a:pPr>
-          </a:p>
-          <a:p>
-            <a:pPr lvl="0" indent="0" marL="0">
-              <a:buNone/>
-            </a:pPr>
-            <a:r>
-              <a:rPr/>
-              <a:t>Now the training column, which is the honest part: it gets WORSE at every step. 16, 18, 45, 96. That is the trade being made deliberately — a worse fit on the data we have, in exchange for a better fit on data we do not.</a:t>
+              <a:t>Read the last column first: 247,514 down to 365, from a penalty of one hundredth. And the test error falls from 182 to 23, which is the noise floor - an eightfold improvement bought with one number.</a:t>
+            </a:r>
+          </a:p>
+          <a:p>
+            <a:pPr lvl="0" indent="0" marL="0">
+              <a:buNone/>
+            </a:pPr>
+          </a:p>
+          <a:p>
+            <a:pPr lvl="0" indent="0" marL="0">
+              <a:buNone/>
+            </a:pPr>
+            <a:r>
+              <a:rPr/>
+              <a:t>Now the training column, which is the honest part: it gets WORSE at every step. 16, 18, 45, 96. That is the trade being made deliberately - a worse fit on the data we have, in exchange for a better fit on data we do not.</a:t>
             </a:r>
           </a:p>
           <a:p>
@@ -4302,7 +4302,7 @@
             </a:pPr>
             <a:r>
               <a:rPr/>
-              <a:t>This shape has a name — the bias-variance trade-off — and lesson 5 gives it the treatment it deserves along with the machinery to find the bottom of that curve honestly. Today the point is only that the bottom exists and is not where either extreme is.</a:t>
+              <a:t>This shape has a name - the bias-variance trade-off - and lesson 5 gives it the treatment it deserves along with the machinery to find the bottom of that curve honestly. Today the point is only that the bottom exists and is not where either extreme is.</a:t>
             </a:r>
           </a:p>
           <a:p>
@@ -4412,21 +4412,21 @@
             </a:pPr>
             <a:r>
               <a:rPr/>
-              <a:t>Everything else is identical — same derivation, same projection idea, same four lines of NumPy. Ridge is not a different method; it is least squares with the floor tilted.</a:t>
-            </a:r>
-          </a:p>
-          <a:p>
-            <a:pPr lvl="0" indent="0" marL="0">
-              <a:buNone/>
-            </a:pPr>
-          </a:p>
-          <a:p>
-            <a:pPr lvl="0" indent="0" marL="0">
-              <a:buNone/>
-            </a:pPr>
-            <a:r>
-              <a:rPr/>
-              <a:t>Note that Lasso has no such formula. The absolute value has a corner, so it cannot be differentiated at zero, and the solution has to be found iteratively. That inconvenience is inseparable from the property that makes Lasso useful — the corner is exactly what produces the zeros.</a:t>
+              <a:t>Everything else is identical - same derivation, same projection idea, same four lines of NumPy. Ridge is not a different method; it is least squares with the floor tilted.</a:t>
+            </a:r>
+          </a:p>
+          <a:p>
+            <a:pPr lvl="0" indent="0" marL="0">
+              <a:buNone/>
+            </a:pPr>
+          </a:p>
+          <a:p>
+            <a:pPr lvl="0" indent="0" marL="0">
+              <a:buNone/>
+            </a:pPr>
+            <a:r>
+              <a:rPr/>
+              <a:t>Note that Lasso has no such formula. The absolute value has a corner, so it cannot be differentiated at zero, and the solution has to be found iteratively. That inconvenience is inseparable from the property that makes Lasso useful - the corner is exactly what produces the zeros.</a:t>
             </a:r>
           </a:p>
           <a:p>
@@ -4522,7 +4522,7 @@
             </a:pPr>
             <a:r>
               <a:rPr/>
-              <a:t>From notebook 1. Before any model, look at the data — the habit lesson 2 spent three hours arguing for.</a:t>
+              <a:t>From notebook 1. Before any model, look at the data - the habit lesson 2 spent three hours arguing for.</a:t>
             </a:r>
           </a:p>
           <a:p>
@@ -4632,7 +4632,7 @@
             </a:pPr>
             <a:r>
               <a:rPr/>
-              <a:t>Come back to the ravine picture from before the break. The reason two identical columns break least squares is that there is a direction in which moving the coefficients changes the predictions not at all — the valley is perfectly flat along it, so there is no unique lowest point. Infinitely many answers fit equally well.</a:t>
+              <a:t>Come back to the ravine picture from before the break. The reason two identical columns break least squares is that there is a direction in which moving the coefficients changes the predictions not at all - the valley is perfectly flat along it, so there is no unique lowest point. Infinitely many answers fit equally well.</a:t>
             </a:r>
           </a:p>
           <a:p>
@@ -4816,7 +4816,7 @@
             </a:pPr>
             <a:r>
               <a:rPr/>
-              <a:t>That is the entire reason Lasso produces zeros and Ridge does not. Not a tolerance, not a numerical accident — the shape of the budget.</a:t>
+              <a:t>That is the entire reason Lasso produces zeros and Ridge does not. Not a tolerance, not a numerical accident - the shape of the budget.</a:t>
             </a:r>
           </a:p>
         </p:txBody>
@@ -4912,7 +4912,7 @@
             </a:pPr>
             <a:r>
               <a:rPr/>
-              <a:t>Give the order in which lasso drops features on the housing data, because it is not arbitrary: garage first at lambda 10,000 — the smallest effect once everything is on a common scale — then distance and age, and by 40,000 only area survives.</a:t>
+              <a:t>Give the order in which lasso drops features on the housing data, because it is not arbitrary: garage first at lambda 10,000 - the smallest effect once everything is on a common scale - then distance and age, and by 40,000 only area survives.</a:t>
             </a:r>
           </a:p>
           <a:p>
@@ -5070,7 +5070,7 @@
             </a:pPr>
             <a:r>
               <a:rPr/>
-              <a:t>Nobody told Lasso which features mattered. It was given a budget and told to spend it well, and this ranking fell out of that — which is genuinely remarkable and is why Lasso is used as a feature selector at all.</a:t>
+              <a:t>Nobody told Lasso which features mattered. It was given a budget and told to spend it well, and this ranking fell out of that - which is genuinely remarkable and is why Lasso is used as a feature selector at all.</a:t>
             </a:r>
           </a:p>
           <a:p>
@@ -5092,7 +5092,7 @@
             </a:r>
             <a:r>
               <a:rPr/>
-              <a:t>. “Lasso chose these four features” is not a complete statement — at a different lambda it chooses differently. Presenting lasso output as an objective ranking of importance is one of the commonest misuses of it.</a:t>
+              <a:t>. “Lasso chose these four features” is not a complete statement - at a different lambda it chooses differently. Presenting lasso output as an objective ranking of importance is one of the commonest misuses of it.</a:t>
             </a:r>
           </a:p>
           <a:p>
@@ -5202,7 +5202,7 @@
             </a:pPr>
             <a:r>
               <a:rPr/>
-              <a:t>Ask what least squares should do. The honest answer is that it has no basis for choosing between “all the effect on the metres column” and “all of it on the feet column” and everything in between — they all fit identically.</a:t>
+              <a:t>Ask what least squares should do. The honest answer is that it has no basis for choosing between “all the effect on the metres column” and “all of it on the feet column” and everything in between - they all fit identically.</a:t>
             </a:r>
           </a:p>
           <a:p>
@@ -5312,7 +5312,7 @@
             </a:pPr>
             <a:r>
               <a:rPr/>
-              <a:t>Stress what is and is not broken: the PREDICTIONS are fine throughout — the combined effect is stable at about 2,420, close to the true 2,400. It is the EXPLANATION that is noise.</a:t>
+              <a:t>Stress what is and is not broken: the PREDICTIONS are fine throughout - the combined effect is stable at about 2,420, close to the true 2,400. It is the EXPLANATION that is noise.</a:t>
             </a:r>
           </a:p>
           <a:p>
@@ -5340,7 +5340,7 @@
             </a:pPr>
             <a:r>
               <a:rPr/>
-              <a:t>So ridge is not only a cure for overfitting. It is what makes coefficients readable when features overlap — which in real data they always do.</a:t>
+              <a:t>So ridge is not only a cure for overfitting. It is what makes coefficients readable when features overlap - which in real data they always do.</a:t>
             </a:r>
           </a:p>
         </p:txBody>
@@ -5454,21 +5454,21 @@
             </a:r>
             <a:r>
               <a:rPr/>
-              <a:t> — which is a strange object. A house that gains a bedroom without gaining any space has had its existing rooms subdivided, and that is a genuinely different proposition from an extra bedroom in an extra 15 square metres.</a:t>
-            </a:r>
-          </a:p>
-          <a:p>
-            <a:pPr lvl="0" indent="0" marL="0">
-              <a:buNone/>
-            </a:pPr>
-          </a:p>
-          <a:p>
-            <a:pPr lvl="0" indent="0" marL="0">
-              <a:buNone/>
-            </a:pPr>
-            <a:r>
-              <a:rPr/>
-              <a:t>Ask the room what the coefficient on bedrooms ought to be for the subdivision version. Plausibly near zero, or negative. The estimate we get, 7,503, is a blend of that and something else — which is the setup for the next slide.</a:t>
+              <a:t> - which is a strange object. A house that gains a bedroom without gaining any space has had its existing rooms subdivided, and that is a genuinely different proposition from an extra bedroom in an extra 15 square metres.</a:t>
+            </a:r>
+          </a:p>
+          <a:p>
+            <a:pPr lvl="0" indent="0" marL="0">
+              <a:buNone/>
+            </a:pPr>
+          </a:p>
+          <a:p>
+            <a:pPr lvl="0" indent="0" marL="0">
+              <a:buNone/>
+            </a:pPr>
+            <a:r>
+              <a:rPr/>
+              <a:t>Ask the room what the coefficient on bedrooms ought to be for the subdivision version. Plausibly near zero, or negative. The estimate we get, 7,503, is a blend of that and something else - which is the setup for the next slide.</a:t>
             </a:r>
           </a:p>
           <a:p>
@@ -5578,21 +5578,21 @@
             </a:pPr>
             <a:r>
               <a:rPr/>
-              <a:t>The x axis is how correlated each feature is with area; the y axis is how far its estimated coefficient landed from the truth. The three features uncorrelated with area — distance, age, garage — are recovered to within 1%. Bathrooms, at 0.49, is out by 9%. Bedrooms, at 0.77, is out by 17%.</a:t>
-            </a:r>
-          </a:p>
-          <a:p>
-            <a:pPr lvl="0" indent="0" marL="0">
-              <a:buNone/>
-            </a:pPr>
-          </a:p>
-          <a:p>
-            <a:pPr lvl="0" indent="0" marL="0">
-              <a:buNone/>
-            </a:pPr>
-            <a:r>
-              <a:rPr/>
-              <a:t>State the rule: a coefficient is only as trustworthy as its feature is independent. And on a real dataset the same wobble is there with nothing to reveal it — you would just have a number.</a:t>
+              <a:t>The x axis is how correlated each feature is with area; the y axis is how far its estimated coefficient landed from the truth. The three features uncorrelated with area - distance, age, garage - are recovered to within 1%. Bathrooms, at 0.49, is out by 9%. Bedrooms, at 0.77, is out by 17%.</a:t>
+            </a:r>
+          </a:p>
+          <a:p>
+            <a:pPr lvl="0" indent="0" marL="0">
+              <a:buNone/>
+            </a:pPr>
+          </a:p>
+          <a:p>
+            <a:pPr lvl="0" indent="0" marL="0">
+              <a:buNone/>
+            </a:pPr>
+            <a:r>
+              <a:rPr/>
+              <a:t>State the rule: a coefficient is only as trustworthy as its feature is independent. And on a real dataset the same wobble is there with nothing to reveal it - you would just have a number.</a:t>
             </a:r>
           </a:p>
           <a:p>
@@ -5688,7 +5688,7 @@
             </a:pPr>
             <a:r>
               <a:rPr/>
-              <a:t>30 minutes. The collinear section is the one to make sure everyone reaches — it is the argument they will use in their own projects when a stakeholder asks what the model says drives the outcome.</a:t>
+              <a:t>30 minutes. The collinear section is the one to make sure everyone reaches - it is the argument they will use in their own projects when a stakeholder asks what the model says drives the outcome.</a:t>
             </a:r>
           </a:p>
           <a:p>
@@ -5812,7 +5812,7 @@
             </a:pPr>
             <a:r>
               <a:rPr/>
-              <a:t>Preview lesson 4 in a sentence: same machinery, but the target becomes a category instead of a number — and that single change turns out to require a different cost function, for a reason that is one of the exam derivations.</a:t>
+              <a:t>Preview lesson 4 in a sentence: same machinery, but the target becomes a category instead of a number - and that single change turns out to require a different cost function, for a reason that is one of the exam derivations.</a:t>
             </a:r>
           </a:p>
         </p:txBody>
@@ -5908,7 +5908,7 @@
             </a:pPr>
             <a:r>
               <a:rPr/>
-              <a:t>Almost certainly not. The right response is not to abandon linear models but to know what you have assumed — section 5 shows how to check the assumption and how to relax it when it fails.</a:t>
+              <a:t>Almost certainly not. The right response is not to abandon linear models but to know what you have assumed - section 5 shows how to check the assumption and how to relax it when it fails.</a:t>
             </a:r>
           </a:p>
           <a:p>
@@ -6004,7 +6004,7 @@
             </a:pPr>
             <a:r>
               <a:rPr/>
-              <a:t>Set it explicitly with the deadline. It uses a new dataset — bike sharing demand — so the exploration is theirs to do.</a:t>
+              <a:t>Set it explicitly with the deadline. It uses a new dataset - bike sharing demand - so the exploration is theirs to do.</a:t>
             </a:r>
           </a:p>
           <a:p>
@@ -6046,7 +6046,7 @@
             </a:pPr>
             <a:r>
               <a:rPr/>
-              <a:t>Also remind them the project topic must be confirmed by lesson 4 — next week.</a:t>
+              <a:t>Also remind them the project topic must be confirmed by lesson 4 - next week.</a:t>
             </a:r>
           </a:p>
         </p:txBody>
@@ -6362,7 +6362,7 @@
             </a:pPr>
             <a:r>
               <a:rPr/>
-              <a:t>Handout section 2.2. The worked table there computes the cost for three houses and shows how the two large errors contribute nearly everything — squared error spends its attention on the worst predictions, which is a choice you are making whether or not you notice.</a:t>
+              <a:t>Handout section 2.2. The worked table there computes the cost for three houses and shows how the two large errors contribute nearly everything - squared error spends its attention on the worst predictions, which is a choice you are making whether or not you notice.</a:t>
             </a:r>
           </a:p>
         </p:txBody>
@@ -6458,7 +6458,7 @@
             </a:pPr>
             <a:r>
               <a:rPr/>
-              <a:t>Dividing the sum by 2m gives a cost of about 6.7 × 10⁷. Nobody should be impressed by that number on its own — a cost is only meaningful compared with another cost, which is exactly what fitting does.</a:t>
+              <a:t>Dividing the sum by 2m gives a cost of about 6.7 × 10⁷. Nobody should be impressed by that number on its own - a cost is only meaningful compared with another cost, which is exactly what fitting does.</a:t>
             </a:r>
           </a:p>
           <a:p>
@@ -9545,7 +9545,7 @@
             </a:pPr>
             <a:r>
               <a:rPr/>
-              <a:t>Lesson 3 — Regression</a:t>
+              <a:t>Lesson 3: Regression</a:t>
             </a:r>
           </a:p>
         </p:txBody>
@@ -9581,7 +9581,7 @@
             <a:br/>
             <a:r>
               <a:rPr/>
-              <a:t>Fabio Antonini — Università degli Studi dell’Aquila</a:t>
+              <a:t>Fabio Antonini, Università degli Studi dell’Aquila</a:t>
             </a:r>
           </a:p>
         </p:txBody>
@@ -10636,7 +10636,7 @@
                       </a:r>
                       <a:r>
                         <a:rPr/>
-                        <a:t> — the truth is 2,400</a:t>
+                        <a:t> (truth 2,400)</a:t>
                       </a:r>
                     </a:p>
                   </a:txBody>
@@ -10753,7 +10753,7 @@
             <a:pPr lvl="0"/>
             <a:r>
               <a:rPr/>
-              <a:t>The second derivative is Xᵀ X — never negative in any direction</a:t>
+              <a:t>The second derivative is Xᵀ X, never negative in any direction</a:t>
             </a:r>
           </a:p>
           <a:p>
@@ -11123,7 +11123,7 @@
             </a:pPr>
             <a:r>
               <a:rPr/>
-              <a:t>You cannot see the valley — but you can feel which way the ground slopes.</a:t>
+              <a:t>You cannot see the valley, but you can feel which way the ground slopes.</a:t>
             </a:r>
           </a:p>
         </p:txBody>
@@ -11763,7 +11763,7 @@
             </a:pPr>
             <a:r>
               <a:rPr/>
-              <a:t>The model, the cost, the exact solution, the iterative one — from scratch.</a:t>
+              <a:t>The model, the cost, the exact solution, the iterative one: from scratch.</a:t>
             </a:r>
           </a:p>
         </p:txBody>
@@ -12239,7 +12239,7 @@
             <a:pPr lvl="0"/>
             <a:r>
               <a:rPr/>
-              <a:t>The exact solution — and why it sometimes fails</a:t>
+              <a:t>The exact solution, and why it sometimes fails</a:t>
             </a:r>
           </a:p>
           <a:p>
@@ -13176,7 +13176,7 @@
             </a:r>
             <a:r>
               <a:rPr/>
-              <a:t> — it is not a claim about any feature</a:t>
+              <a:t>: it is not a claim about any feature</a:t>
             </a:r>
           </a:p>
           <a:p>
@@ -13922,7 +13922,7 @@
             <a:pPr lvl="0"/>
             <a:r>
               <a:rPr/>
-              <a:t>Least squares fails when a direction costs nothing — the valley is flat</a:t>
+              <a:t>Least squares fails when a direction costs nothing: the valley is flat</a:t>
             </a:r>
           </a:p>
           <a:p>
@@ -14281,7 +14281,7 @@
                       </a:pPr>
                       <a:r>
                         <a:rPr/>
-                        <a:t>five — </a:t>
+                        <a:t>five: </a:t>
                       </a:r>
                       <a:r>
                         <a:rPr>
@@ -14323,7 +14323,7 @@
                       </a:pPr>
                       <a:r>
                         <a:rPr/>
-                        <a:t>three — </a:t>
+                        <a:t>three: </a:t>
                       </a:r>
                       <a:r>
                         <a:rPr>
@@ -14381,7 +14381,7 @@
                       </a:pPr>
                       <a:r>
                         <a:rPr/>
-                        <a:t>one — </a:t>
+                        <a:t>one: </a:t>
                       </a:r>
                       <a:r>
                         <a:rPr>
@@ -14490,7 +14490,7 @@
             </a:r>
             <a:r>
               <a:rPr/>
-              <a:t> — the same measurement, two units.</a:t>
+              <a:t>: the same measurement, two units.</a:t>
             </a:r>
           </a:p>
           <a:p>
@@ -14904,7 +14904,7 @@
             </a:pPr>
             <a:r>
               <a:rPr/>
-              <a:t>The change in the prediction for a one-unit change in that feature — </a:t>
+              <a:t>The change in the prediction for a one-unit change in that feature, </a:t>
             </a:r>
             <a:r>
               <a:rPr b="1"/>
@@ -15245,7 +15245,7 @@
             <a:pPr lvl="0"/>
             <a:r>
               <a:rPr/>
-              <a:t>An exact solution — a projection — and when it fails</a:t>
+              <a:t>An exact solution (a projection), and when it fails</a:t>
             </a:r>
           </a:p>
           <a:p>
@@ -15318,7 +15318,7 @@
             </a:pPr>
             <a:r>
               <a:rPr/>
-              <a:t>Homework — due Friday 16 October</a:t>
+              <a:t>Homework: due Friday 16 October</a:t>
             </a:r>
           </a:p>
         </p:txBody>
@@ -15638,7 +15638,7 @@
             </a:r>
             <a:r>
               <a:rPr/>
-              <a:t> — no corner at zero</a:t>
+              <a:t>: no corner at zero</a:t>
             </a:r>
           </a:p>
           <a:p>
@@ -15716,7 +15716,7 @@
             </a:pPr>
             <a:r>
               <a:rPr/>
-              <a:t>The cost function — mean squared error</a:t>
+              <a:t>The cost function: mean squared error</a:t>
             </a:r>
           </a:p>
         </p:txBody>

--- a/Lessons/03_regression/Slides/regression_slides.pptx
+++ b/Lessons/03_regression/Slides/regression_slides.pptx
@@ -13660,8 +13660,8 @@
         </p:blipFill>
         <p:spPr bwMode="auto">
           <a:xfrm>
-            <a:off x="1557905" y="1166099"/>
-            <a:ext cx="6028189" cy="3360181"/>
+            <a:off x="1551613" y="1166099"/>
+            <a:ext cx="6040774" cy="3360181"/>
           </a:xfrm>
           <a:prstGeom prst="rect">
             <a:avLst/>
@@ -14017,8 +14017,8 @@
         </p:blipFill>
         <p:spPr bwMode="auto">
           <a:xfrm>
-            <a:off x="1318791" y="1166099"/>
-            <a:ext cx="6506417" cy="3360181"/>
+            <a:off x="1325084" y="1166099"/>
+            <a:ext cx="6493832" cy="3360181"/>
           </a:xfrm>
           <a:prstGeom prst="rect">
             <a:avLst/>
@@ -14985,8 +14985,8 @@
         </p:blipFill>
         <p:spPr bwMode="auto">
           <a:xfrm>
-            <a:off x="1652292" y="1166099"/>
-            <a:ext cx="5839415" cy="3360181"/>
+            <a:off x="1633415" y="1166099"/>
+            <a:ext cx="5877170" cy="3360181"/>
           </a:xfrm>
           <a:prstGeom prst="rect">
             <a:avLst/>

--- a/Lessons/03_regression/Slides/regression_slides.pptx
+++ b/Lessons/03_regression/Slides/regression_slides.pptx
@@ -4164,7 +4164,7 @@
             </a:pPr>
             <a:r>
               <a:rPr/>
-              <a:t>Read the last column first: 247,514 down to 365, from a penalty of one hundredth. And the test error falls from 182 to 23, which is the noise floor - an eightfold improvement bought with one number.</a:t>
+              <a:t>Read the last column first: three billion down to 365, from a penalty of one hundredth. And the test error falls from 24,656 to 23, which is the noise floor - a thousandfold improvement bought with one number.</a:t>
             </a:r>
           </a:p>
           <a:p>
@@ -5799,6 +5799,20 @@
             <a:r>
               <a:rPr/>
               <a:t>The one sentence to leave them with: the model that fits your training data best is usually not the one you want.</a:t>
+            </a:r>
+          </a:p>
+          <a:p>
+            <a:pPr lvl="0" indent="0" marL="0">
+              <a:buNone/>
+            </a:pPr>
+          </a:p>
+          <a:p>
+            <a:pPr lvl="0" indent="0" marL="0">
+              <a:buNone/>
+            </a:pPr>
+            <a:r>
+              <a:rPr/>
+              <a:t>And the number to leave them with, repeated from before the break: a penalty of one hundredth took the largest coefficient from billions to 365 and the test error from 24,656 to 22.8. One number, chosen well, bought all of that.</a:t>
             </a:r>
           </a:p>
           <a:p>
@@ -12676,7 +12690,7 @@
                       </a:pPr>
                       <a:r>
                         <a:rPr/>
-                        <a:t>16.5</a:t>
+                        <a:t>16.2</a:t>
                       </a:r>
                     </a:p>
                   </a:txBody>
@@ -12691,7 +12705,7 @@
                       </a:pPr>
                       <a:r>
                         <a:rPr/>
-                        <a:t>118.2</a:t>
+                        <a:t>590.1</a:t>
                       </a:r>
                     </a:p>
                   </a:txBody>
@@ -12723,7 +12737,7 @@
                       </a:pPr>
                       <a:r>
                         <a:rPr/>
-                        <a:t>16.3</a:t>
+                        <a:t>13.6</a:t>
                       </a:r>
                     </a:p>
                   </a:txBody>
@@ -12738,7 +12752,7 @@
                       </a:pPr>
                       <a:r>
                         <a:rPr/>
-                        <a:t>182.0</a:t>
+                        <a:t>24,655.7</a:t>
                       </a:r>
                     </a:p>
                   </a:txBody>
@@ -13006,7 +13020,7 @@
             </a:r>
             <a:r>
               <a:rPr b="1"/>
-              <a:t>247,514</a:t>
+              <a:t>3,097,038,010</a:t>
             </a:r>
           </a:p>
         </p:txBody>
@@ -13366,7 +13380,7 @@
                       </a:pPr>
                       <a:r>
                         <a:rPr/>
-                        <a:t>16.3</a:t>
+                        <a:t>13.6</a:t>
                       </a:r>
                     </a:p>
                   </a:txBody>
@@ -13381,7 +13395,7 @@
                       </a:pPr>
                       <a:r>
                         <a:rPr/>
-                        <a:t>182.0</a:t>
+                        <a:t>24,655.7</a:t>
                       </a:r>
                     </a:p>
                   </a:txBody>
@@ -13396,7 +13410,7 @@
                       </a:pPr>
                       <a:r>
                         <a:rPr/>
-                        <a:t>247,514</a:t>
+                        <a:t>3,097,038,010</a:t>
                       </a:r>
                     </a:p>
                   </a:txBody>
@@ -15267,6 +15281,17 @@
             <a:r>
               <a:rPr/>
               <a:t>Charging for size buys generalisation, and readable coefficients</a:t>
+            </a:r>
+          </a:p>
+          <a:p>
+            <a:pPr lvl="0"/>
+            <a:r>
+              <a:rPr b="1"/>
+              <a:t>365</a:t>
+            </a:r>
+            <a:r>
+              <a:rPr/>
+              <a:t> against billions: what a penalty of 0.01 costs, and buys</a:t>
             </a:r>
           </a:p>
         </p:txBody>

--- a/Lessons/03_regression/Slides/regression_slides.pptx
+++ b/Lessons/03_regression/Slides/regression_slides.pptx
@@ -1196,7 +1196,21 @@
             </a:pPr>
             <a:r>
               <a:rPr/>
-              <a:t>Then the honest caveat: three points is nothing, and 6% here is luck as much as method. Notebook 1 does the same on 450 houses and gets 2,410. The point is not the accuracy, it is that the formula is arithmetic you could do by hand.</a:t>
+              <a:t>Then the honest caveat, and it is sharper than it looks: three points is nothing, and the 6% is luck. Run the SAME one-feature fit on 450 houses and you get 2,785 - sixteen percent high, further from the truth, with 150 times the data. More rows cannot fix it, because nothing is broken: asked what a square metre is worth when area is all you are told, the honest answer includes the bedrooms and bathrooms that come with it. All six features give 2,421.</a:t>
+            </a:r>
+          </a:p>
+          <a:p>
+            <a:pPr lvl="0" indent="0" marL="0">
+              <a:buNone/>
+            </a:pPr>
+          </a:p>
+          <a:p>
+            <a:pPr lvl="0" indent="0" marL="0">
+              <a:buNone/>
+            </a:pPr>
+            <a:r>
+              <a:rPr/>
+              <a:t>So the point is not the accuracy. It is that the formula is arithmetic you could do by hand - and that what a coefficient means depends on what else is in the model, which is section 7.</a:t>
             </a:r>
           </a:p>
           <a:p>
@@ -3406,21 +3420,21 @@
             </a:pPr>
             <a:r>
               <a:rPr/>
-              <a:t>Training error falls at every single step, 113 down to 16, monotonically, never once suggesting anything is wrong. Test error bottoms out at degree 3 and then climbs: 118 at degree 9, 182 at degree 12.</a:t>
-            </a:r>
-          </a:p>
-          <a:p>
-            <a:pPr lvl="0" indent="0" marL="0">
-              <a:buNone/>
-            </a:pPr>
-          </a:p>
-          <a:p>
-            <a:pPr lvl="0" indent="0" marL="0">
-              <a:buNone/>
-            </a:pPr>
-            <a:r>
-              <a:rPr/>
-              <a:t>So the model that fits the training data best is ten times worse on data it has not seen - and the training error congratulated us the whole way.</a:t>
+              <a:t>Training error falls at every single step, 113 down to 14, monotonically, never once suggesting anything is wrong. Test error bottoms out at degree 3 and then climbs: 590 at degree 9, and 24,656 at degree 12.</a:t>
+            </a:r>
+          </a:p>
+          <a:p>
+            <a:pPr lvl="0" indent="0" marL="0">
+              <a:buNone/>
+            </a:pPr>
+          </a:p>
+          <a:p>
+            <a:pPr lvl="0" indent="0" marL="0">
+              <a:buNone/>
+            </a:pPr>
+            <a:r>
+              <a:rPr/>
+              <a:t>So the model that fits the training data best is more than a thousand times worse on data it has not seen - and the training error congratulated us the whole way.</a:t>
             </a:r>
           </a:p>
           <a:p>

--- a/Lessons/03_regression/Slides/regression_slides.pptx
+++ b/Lessons/03_regression/Slides/regression_slides.pptx
@@ -13688,8 +13688,8 @@
         </p:blipFill>
         <p:spPr bwMode="auto">
           <a:xfrm>
-            <a:off x="1551613" y="1166099"/>
-            <a:ext cx="6040774" cy="3360181"/>
+            <a:off x="1557905" y="1166099"/>
+            <a:ext cx="6028189" cy="3360181"/>
           </a:xfrm>
           <a:prstGeom prst="rect">
             <a:avLst/>

--- a/Lessons/03_regression/Slides/regression_slides.pptx
+++ b/Lessons/03_regression/Slides/regression_slides.pptx
@@ -10899,7 +10899,7 @@
             <a:pPr lvl="0"/>
             <a:r>
               <a:rPr/>
-              <a:t>(Xᵀ X)⁻¹ costs about n³ operations</a:t>
+              <a:t>(XᵀX)⁻¹ costs about n³ operations</a:t>
             </a:r>
           </a:p>
           <a:p>

--- a/Lessons/03_regression/Slides/regression_slides.pptx
+++ b/Lessons/03_regression/Slides/regression_slides.pptx
@@ -1320,7 +1320,7 @@
             </a:pPr>
             <a:r>
               <a:rPr/>
-              <a:t>Here it does, because the cost is convex. Give the one-line reason without the algebra: Xᵀ X can never be negative in any direction, since asking for its value in direction v gives the squared length of Xv, and a squared length is never negative.</a:t>
+              <a:t>Here it does, because the cost is convex. Give the one-line reason without the algebra: XᵀX can never be negative in any direction, since asking for its value in direction v gives the squared length of Xv, and a squared length is never negative.</a:t>
             </a:r>
           </a:p>
           <a:p>
@@ -10549,7 +10549,7 @@
                       </a:pPr>
                       <a:r>
                         <a:rPr/>
-                        <a:t>Xᵀ X</a:t>
+                        <a:t>XᵀX</a:t>
                       </a:r>
                     </a:p>
                   </a:txBody>
@@ -10581,7 +10581,7 @@
                       </a:pPr>
                       <a:r>
                         <a:rPr/>
-                        <a:t>Xᵀ y</a:t>
+                        <a:t>Xᵀy</a:t>
                       </a:r>
                     </a:p>
                   </a:txBody>
@@ -10596,7 +10596,7 @@
                       </a:pPr>
                       <a:r>
                         <a:rPr/>
-                        <a:t>(1,100 , 165,600)</a:t>
+                        <a:t>(1,100, 165,600)</a:t>
                       </a:r>
                     </a:p>
                   </a:txBody>
@@ -10781,7 +10781,7 @@
             <a:pPr lvl="0"/>
             <a:r>
               <a:rPr/>
-              <a:t>The second derivative is Xᵀ X, never negative in any direction</a:t>
+              <a:t>The second derivative is XᵀX, never negative in any direction</a:t>
             </a:r>
           </a:p>
           <a:p>

--- a/Lessons/03_regression/Slides/regression_slides.pptx
+++ b/Lessons/03_regression/Slides/regression_slides.pptx
@@ -15357,7 +15357,7 @@
             </a:pPr>
             <a:r>
               <a:rPr/>
-              <a:t>Homework: due Friday 16 October</a:t>
+              <a:t>Homework: due Friday 16 October, 09:00</a:t>
             </a:r>
           </a:p>
         </p:txBody>

--- a/Lessons/03_regression/Slides/regression_slides.pptx
+++ b/Lessons/03_regression/Slides/regression_slides.pptx
@@ -574,7 +574,7 @@
             </a:pPr>
             <a:r>
               <a:rPr/>
-              <a:t>Collect exercise 2 and say one sentence about what you saw, if you have looked. The recurring mistake to name, if it appeared: fitting the scaler or the imputer before splitting. It is the exact thing lesson 2 warned about, and seeing it in their own work is more instructive than any slide.</a:t>
+              <a:t>Nothing to collect - ask two or three people what they built, and name the recurring mistake if it came up. The recurring mistake to name, if it appeared: fitting the scaler or the imputer before splitting. It is the exact thing lesson 2 warned about, and seeing it in their own work is more instructive than any slide.</a:t>
             </a:r>
           </a:p>
           <a:p>
@@ -11231,7 +11231,7 @@
             <a:pPr lvl="0"/>
             <a:r>
               <a:rPr/>
-              <a:t>Exercise 2 was due today</a:t>
+              <a:t>Exercise 2, which we discuss now</a:t>
             </a:r>
           </a:p>
           <a:p>
@@ -15357,7 +15357,7 @@
             </a:pPr>
             <a:r>
               <a:rPr/>
-              <a:t>Homework: due Friday 16 October, 09:00</a:t>
+              <a:t>Homework: we discuss it on Friday 16 October</a:t>
             </a:r>
           </a:p>
         </p:txBody>

--- a/Lessons/03_regression/Slides/regression_slides.pptx
+++ b/Lessons/03_regression/Slides/regression_slides.pptx
@@ -9707,7 +9707,7 @@
           </p:nvPr>
         </p:nvGraphicFramePr>
         <p:xfrm>
-          <a:off x="457200" y="1193800"/>
+          <a:off x="457200" y="1166099"/>
           <a:ext cx="8229600" cy="3390900"/>
         </p:xfrm>
         <a:graphic>
@@ -9717,11 +9717,11 @@
                 <a:tableStyleId>{5C22544A-7EE6-4342-B048-85BDC9FD1C3A}</a:tableStyleId>
               </a:tblPr>
               <a:tblGrid>
-                <a:gridCol w="1638300"/>
-                <a:gridCol w="1638300"/>
-                <a:gridCol w="1638300"/>
-                <a:gridCol w="1638300"/>
-                <a:gridCol w="1638300"/>
+                <a:gridCol w="1645920"/>
+                <a:gridCol w="1645920"/>
+                <a:gridCol w="1645920"/>
+                <a:gridCol w="1645920"/>
+                <a:gridCol w="1645920"/>
               </a:tblGrid>
               <a:tr h="0">
                 <a:tc>
@@ -10382,8 +10382,8 @@
         </p:blipFill>
         <p:spPr bwMode="auto">
           <a:xfrm>
-            <a:off x="457200" y="2128639"/>
-            <a:ext cx="8229600" cy="1435100"/>
+            <a:off x="1572013" y="2378599"/>
+            <a:ext cx="5999973" cy="935181"/>
           </a:xfrm>
           <a:prstGeom prst="rect">
             <a:avLst/>
@@ -10459,7 +10459,7 @@
           </p:nvPr>
         </p:nvGraphicFramePr>
         <p:xfrm>
-          <a:off x="457200" y="1193800"/>
+          <a:off x="457200" y="1166099"/>
           <a:ext cx="8229600" cy="3390900"/>
         </p:xfrm>
         <a:graphic>
@@ -11311,8 +11311,8 @@
         </p:blipFill>
         <p:spPr bwMode="auto">
           <a:xfrm>
-            <a:off x="457200" y="2312789"/>
-            <a:ext cx="8229600" cy="1066800"/>
+            <a:off x="457204" y="2350890"/>
+            <a:ext cx="8229591" cy="990599"/>
           </a:xfrm>
           <a:prstGeom prst="rect">
             <a:avLst/>
@@ -11388,7 +11388,7 @@
           </p:nvPr>
         </p:nvGraphicFramePr>
         <p:xfrm>
-          <a:off x="457200" y="1193800"/>
+          <a:off x="457200" y="1166099"/>
           <a:ext cx="8229600" cy="3390900"/>
         </p:xfrm>
         <a:graphic>
@@ -12089,8 +12089,8 @@
         </p:blipFill>
         <p:spPr bwMode="auto">
           <a:xfrm>
-            <a:off x="457200" y="2166739"/>
-            <a:ext cx="8229600" cy="1358900"/>
+            <a:off x="1387708" y="2374442"/>
+            <a:ext cx="6368584" cy="943494"/>
           </a:xfrm>
           <a:prstGeom prst="rect">
             <a:avLst/>
@@ -12520,7 +12520,7 @@
           </p:nvPr>
         </p:nvGraphicFramePr>
         <p:xfrm>
-          <a:off x="457200" y="1193800"/>
+          <a:off x="457200" y="1166099"/>
           <a:ext cx="8229600" cy="3390900"/>
         </p:xfrm>
         <a:graphic>
@@ -13107,8 +13107,8 @@
         </p:blipFill>
         <p:spPr bwMode="auto">
           <a:xfrm>
-            <a:off x="457200" y="2376289"/>
-            <a:ext cx="8229599" cy="939800"/>
+            <a:off x="457205" y="2401690"/>
+            <a:ext cx="8229590" cy="888999"/>
           </a:xfrm>
           <a:prstGeom prst="rect">
             <a:avLst/>
@@ -13287,7 +13287,7 @@
           </p:nvPr>
         </p:nvGraphicFramePr>
         <p:xfrm>
-          <a:off x="457200" y="1193800"/>
+          <a:off x="457200" y="1166099"/>
           <a:ext cx="8229600" cy="3390900"/>
         </p:xfrm>
         <a:graphic>
@@ -13861,8 +13861,8 @@
         </p:blipFill>
         <p:spPr bwMode="auto">
           <a:xfrm>
-            <a:off x="457200" y="2274689"/>
-            <a:ext cx="8229600" cy="1143000"/>
+            <a:off x="831276" y="2378599"/>
+            <a:ext cx="7481448" cy="935181"/>
           </a:xfrm>
           <a:prstGeom prst="rect">
             <a:avLst/>
@@ -14204,7 +14204,7 @@
           </p:nvPr>
         </p:nvGraphicFramePr>
         <p:xfrm>
-          <a:off x="457200" y="1193800"/>
+          <a:off x="457200" y="1166099"/>
           <a:ext cx="8229600" cy="3390900"/>
         </p:xfrm>
         <a:graphic>
@@ -14599,7 +14599,7 @@
           </p:nvPr>
         </p:nvGraphicFramePr>
         <p:xfrm>
-          <a:off x="457200" y="1193800"/>
+          <a:off x="457200" y="1166099"/>
           <a:ext cx="8229600" cy="3390900"/>
         </p:xfrm>
         <a:graphic>
@@ -15776,8 +15776,8 @@
         </p:blipFill>
         <p:spPr bwMode="auto">
           <a:xfrm>
-            <a:off x="457200" y="1900039"/>
-            <a:ext cx="8229600" cy="1892300"/>
+            <a:off x="457200" y="1944489"/>
+            <a:ext cx="8229600" cy="1803400"/>
           </a:xfrm>
           <a:prstGeom prst="rect">
             <a:avLst/>

--- a/Lessons/03_regression/Slides/regression_slides.pptx
+++ b/Lessons/03_regression/Slides/regression_slides.pptx
@@ -10382,8 +10382,8 @@
         </p:blipFill>
         <p:spPr bwMode="auto">
           <a:xfrm>
-            <a:off x="1572013" y="2378599"/>
-            <a:ext cx="5999973" cy="935181"/>
+            <a:off x="1545483" y="2393146"/>
+            <a:ext cx="6053034" cy="906087"/>
           </a:xfrm>
           <a:prstGeom prst="rect">
             <a:avLst/>
@@ -11311,8 +11311,8 @@
         </p:blipFill>
         <p:spPr bwMode="auto">
           <a:xfrm>
-            <a:off x="457204" y="2350890"/>
-            <a:ext cx="8229591" cy="990599"/>
+            <a:off x="457200" y="2357239"/>
+            <a:ext cx="8229600" cy="977900"/>
           </a:xfrm>
           <a:prstGeom prst="rect">
             <a:avLst/>
@@ -12089,8 +12089,8 @@
         </p:blipFill>
         <p:spPr bwMode="auto">
           <a:xfrm>
-            <a:off x="1387708" y="2374442"/>
-            <a:ext cx="6368584" cy="943494"/>
+            <a:off x="1377260" y="2382755"/>
+            <a:ext cx="6389479" cy="926869"/>
           </a:xfrm>
           <a:prstGeom prst="rect">
             <a:avLst/>
@@ -13861,8 +13861,8 @@
         </p:blipFill>
         <p:spPr bwMode="auto">
           <a:xfrm>
-            <a:off x="831276" y="2378599"/>
-            <a:ext cx="7481448" cy="935181"/>
+            <a:off x="808254" y="2393146"/>
+            <a:ext cx="7527492" cy="906087"/>
           </a:xfrm>
           <a:prstGeom prst="rect">
             <a:avLst/>
@@ -15776,8 +15776,8 @@
         </p:blipFill>
         <p:spPr bwMode="auto">
           <a:xfrm>
-            <a:off x="457200" y="1944489"/>
-            <a:ext cx="8229600" cy="1803400"/>
+            <a:off x="457200" y="1938139"/>
+            <a:ext cx="8229600" cy="1816100"/>
           </a:xfrm>
           <a:prstGeom prst="rect">
             <a:avLst/>

--- a/Lessons/03_regression/Slides/regression_slides.pptx
+++ b/Lessons/03_regression/Slides/regression_slides.pptx
@@ -4192,21 +4192,21 @@
             </a:pPr>
             <a:r>
               <a:rPr/>
-              <a:t>Now the training column, which is the honest part: it gets WORSE at every step. 16, 18, 45, 96. That is the trade being made deliberately - a worse fit on the data we have, in exchange for a better fit on data we do not.</a:t>
-            </a:r>
-          </a:p>
-          <a:p>
-            <a:pPr lvl="0" indent="0" marL="0">
-              <a:buNone/>
-            </a:pPr>
-          </a:p>
-          <a:p>
-            <a:pPr lvl="0" indent="0" marL="0">
-              <a:buNone/>
-            </a:pPr>
-            <a:r>
-              <a:rPr/>
-              <a:t>And it stops paying. At lambda 100 the test error is 228, worse than no penalty at all, because the model is now too rigid to follow the curve.</a:t>
+              <a:t>Now the training column, which is the honest part: it gets WORSE at every step. 13.6, 18, 45, 96. That is the trade being made deliberately - a worse fit on the data we have, in exchange for a better fit on data we do not.</a:t>
+            </a:r>
+          </a:p>
+          <a:p>
+            <a:pPr lvl="0" indent="0" marL="0">
+              <a:buNone/>
+            </a:pPr>
+          </a:p>
+          <a:p>
+            <a:pPr lvl="0" indent="0" marL="0">
+              <a:buNone/>
+            </a:pPr>
+            <a:r>
+              <a:rPr/>
+              <a:t>And it stops paying. The test error rises from 22.8 at lambda 0.01, to 105 at lambda 1, to 228 at lambda 100 - a tenfold loss against the best penalty, because the model is now too rigid to follow the curve.</a:t>
             </a:r>
           </a:p>
           <a:p>

--- a/Lessons/03_regression/Slides/regression_slides.pptx
+++ b/Lessons/03_regression/Slides/regression_slides.pptx
@@ -5,7 +5,7 @@
     <p:sldMasterId id="2147483648" r:id="rId1"/>
   </p:sldMasterIdLst>
   <p:notesMasterIdLst>
-    <p:notesMasterId r:id="rId53"/>
+    <p:notesMasterId r:id="rId54"/>
   </p:notesMasterIdLst>
   <p:sldIdLst>
     <p:sldId id="256" r:id="rId2"/>
@@ -59,6 +59,7 @@
     <p:sldId id="304" r:id="rId50"/>
     <p:sldId id="305" r:id="rId51"/>
     <p:sldId id="306" r:id="rId52"/>
+    <p:sldId id="307" r:id="rId53"/>
   </p:sldIdLst>
   <p:sldSz cx="9144000" cy="5143500" type="screen16x9"/>
   <p:notesSz cx="6858000" cy="9144000"/>
@@ -4302,35 +4303,63 @@
             </a:pPr>
             <a:r>
               <a:rPr/>
-              <a:t>The same table as a picture. Both ends are failures, and they fail for opposite reasons.</a:t>
-            </a:r>
-          </a:p>
-          <a:p>
-            <a:pPr lvl="0" indent="0" marL="0">
-              <a:buNone/>
-            </a:pPr>
-          </a:p>
-          <a:p>
-            <a:pPr lvl="0" indent="0" marL="0">
-              <a:buNone/>
-            </a:pPr>
-            <a:r>
-              <a:rPr/>
-              <a:t>This shape has a name - the bias-variance trade-off - and lesson 5 gives it the treatment it deserves along with the machinery to find the bottom of that curve honestly. Today the point is only that the bottom exists and is not where either extreme is.</a:t>
-            </a:r>
-          </a:p>
-          <a:p>
-            <a:pPr lvl="0" indent="0" marL="0">
-              <a:buNone/>
-            </a:pPr>
-          </a:p>
-          <a:p>
-            <a:pPr lvl="0" indent="0" marL="0">
-              <a:buNone/>
-            </a:pPr>
-            <a:r>
-              <a:rPr/>
-              <a:t>If someone asks how to choose lambda: not by looking at this test curve, because that would be selecting on the test set. Cross-validation, lesson 5.</a:t>
+              <a:t>The last column of that table, drawn. Give the room a moment on the left panel before saying anything.</a:t>
+            </a:r>
+          </a:p>
+          <a:p>
+            <a:pPr lvl="0" indent="0" marL="0">
+              <a:buNone/>
+            </a:pPr>
+          </a:p>
+          <a:p>
+            <a:pPr lvl="0" indent="0" marL="0">
+              <a:buNone/>
+            </a:pPr>
+            <a:r>
+              <a:rPr/>
+              <a:t>Point at the vertical scale. The unpenalised curve goes off the top and off the bottom between the training points, and it only comes back where a point is sitting there to pull it. That is what a coefficient of three billion looks like from the outside.</a:t>
+            </a:r>
+          </a:p>
+          <a:p>
+            <a:pPr lvl="0" indent="0" marL="0">
+              <a:buNone/>
+            </a:pPr>
+          </a:p>
+          <a:p>
+            <a:pPr lvl="0" indent="0" marL="0">
+              <a:buNone/>
+            </a:pPr>
+            <a:r>
+              <a:rPr/>
+              <a:t>Middle panel, lambda one hundredth: on top of the true curve, the dashed line. You cannot separate them by eye.</a:t>
+            </a:r>
+          </a:p>
+          <a:p>
+            <a:pPr lvl="0" indent="0" marL="0">
+              <a:buNone/>
+            </a:pPr>
+          </a:p>
+          <a:p>
+            <a:pPr lvl="0" indent="0" marL="0">
+              <a:buNone/>
+            </a:pPr>
+            <a:r>
+              <a:rPr/>
+              <a:t>Right panel, lambda one hundred: a nearly flat line. It misses the curve completely - but look at how it misses. It is wrong by a few hundred kilowatt hours, on a plot where the left panel is wrong by thousands.</a:t>
+            </a:r>
+          </a:p>
+          <a:p>
+            <a:pPr lvl="0" indent="0" marL="0">
+              <a:buNone/>
+            </a:pPr>
+          </a:p>
+          <a:p>
+            <a:pPr lvl="0" indent="0" marL="0">
+              <a:buNone/>
+            </a:pPr>
+            <a:r>
+              <a:rPr/>
+              <a:t>That is the asymmetry to take away, and the table hides it: too much penalty is a mild failure, too little is a catastrophic one. If you have to err, err towards more penalty. Handout section 6.4.</a:t>
             </a:r>
           </a:p>
         </p:txBody>
@@ -4412,49 +4441,35 @@
             </a:pPr>
             <a:r>
               <a:rPr/>
-              <a:t>Put this next to the normal equation from before the break and ask what changed. The answer is: one term. Add lambda down the diagonal of the matrix you invert, and that is the entire modification.</a:t>
-            </a:r>
-          </a:p>
-          <a:p>
-            <a:pPr lvl="0" indent="0" marL="0">
-              <a:buNone/>
-            </a:pPr>
-          </a:p>
-          <a:p>
-            <a:pPr lvl="0" indent="0" marL="0">
-              <a:buNone/>
-            </a:pPr>
-            <a:r>
-              <a:rPr/>
-              <a:t>Everything else is identical - same derivation, same projection idea, same four lines of NumPy. Ridge is not a different method; it is least squares with the floor tilted.</a:t>
-            </a:r>
-          </a:p>
-          <a:p>
-            <a:pPr lvl="0" indent="0" marL="0">
-              <a:buNone/>
-            </a:pPr>
-          </a:p>
-          <a:p>
-            <a:pPr lvl="0" indent="0" marL="0">
-              <a:buNone/>
-            </a:pPr>
-            <a:r>
-              <a:rPr/>
-              <a:t>Note that Lasso has no such formula. The absolute value has a corner, so it cannot be differentiated at zero, and the solution has to be found iteratively. That inconvenience is inseparable from the property that makes Lasso useful - the corner is exactly what produces the zeros.</a:t>
-            </a:r>
-          </a:p>
-          <a:p>
-            <a:pPr lvl="0" indent="0" marL="0">
-              <a:buNone/>
-            </a:pPr>
-          </a:p>
-          <a:p>
-            <a:pPr lvl="0" indent="0" marL="0">
-              <a:buNone/>
-            </a:pPr>
-            <a:r>
-              <a:rPr/>
-              <a:t>Handout section 6.2 derives it in three lines.</a:t>
+              <a:t>The same table as a picture. Both ends are failures, and they fail for opposite reasons.</a:t>
+            </a:r>
+          </a:p>
+          <a:p>
+            <a:pPr lvl="0" indent="0" marL="0">
+              <a:buNone/>
+            </a:pPr>
+          </a:p>
+          <a:p>
+            <a:pPr lvl="0" indent="0" marL="0">
+              <a:buNone/>
+            </a:pPr>
+            <a:r>
+              <a:rPr/>
+              <a:t>This shape has a name - the bias-variance trade-off - and lesson 5 gives it the treatment it deserves along with the machinery to find the bottom of that curve honestly. Today the point is only that the bottom exists and is not where either extreme is.</a:t>
+            </a:r>
+          </a:p>
+          <a:p>
+            <a:pPr lvl="0" indent="0" marL="0">
+              <a:buNone/>
+            </a:pPr>
+          </a:p>
+          <a:p>
+            <a:pPr lvl="0" indent="0" marL="0">
+              <a:buNone/>
+            </a:pPr>
+            <a:r>
+              <a:rPr/>
+              <a:t>If someone asks how to choose lambda: not by looking at this test curve, because that would be selecting on the test set. Cross-validation, lesson 5.</a:t>
             </a:r>
           </a:p>
         </p:txBody>
@@ -4646,53 +4661,49 @@
             </a:pPr>
             <a:r>
               <a:rPr/>
-              <a:t>Come back to the ravine picture from before the break. The reason two identical columns break least squares is that there is a direction in which moving the coefficients changes the predictions not at all - the valley is perfectly flat along it, so there is no unique lowest point. Infinitely many answers fit equally well.</a:t>
-            </a:r>
-          </a:p>
-          <a:p>
-            <a:pPr lvl="0" indent="0" marL="0">
-              <a:buNone/>
-            </a:pPr>
-          </a:p>
-          <a:p>
-            <a:pPr lvl="0" indent="0" marL="0">
-              <a:buNone/>
-            </a:pPr>
-            <a:r>
-              <a:rPr/>
-              <a:t>Ridge tilts the floor. Once coefficient size costs something, moving along that flat direction is no longer free, the flatness acquires a slope, and a single lowest point appears.</a:t>
-            </a:r>
-          </a:p>
-          <a:p>
-            <a:pPr lvl="0" indent="0" marL="0">
-              <a:buNone/>
-            </a:pPr>
-          </a:p>
-          <a:p>
-            <a:pPr lvl="0" indent="0" marL="0">
-              <a:buNone/>
-            </a:pPr>
-            <a:r>
-              <a:rPr/>
-              <a:t>The algebraic version is the third bullet and it is worth one sentence: adding lambda to the diagonal shifts every eigenvalue up by lambda, and a matrix is singular exactly when one of its eigenvalues is zero. So for any lambda above zero, it cannot be singular. </a:t>
-            </a:r>
-            <a:r>
-              <a:rPr b="1"/>
-              <a:t>Ridge always has a unique answer, even where least squares has none at all.</a:t>
-            </a:r>
-          </a:p>
-          <a:p>
-            <a:pPr lvl="0" indent="0" marL="0">
-              <a:buNone/>
-            </a:pPr>
-          </a:p>
-          <a:p>
-            <a:pPr lvl="0" indent="0" marL="0">
-              <a:buNone/>
-            </a:pPr>
-            <a:r>
-              <a:rPr/>
-              <a:t>Worth saying plainly: Hoerl and Kennard invented ridge in 1970 for this problem, not for overfitting. The overfitting cure was the side effect.</a:t>
+              <a:t>Put this next to the normal equation from before the break and ask what changed. The answer is: one term. Add lambda down the diagonal of the matrix you invert, and that is the entire modification.</a:t>
+            </a:r>
+          </a:p>
+          <a:p>
+            <a:pPr lvl="0" indent="0" marL="0">
+              <a:buNone/>
+            </a:pPr>
+          </a:p>
+          <a:p>
+            <a:pPr lvl="0" indent="0" marL="0">
+              <a:buNone/>
+            </a:pPr>
+            <a:r>
+              <a:rPr/>
+              <a:t>Everything else is identical - same derivation, same projection idea, same four lines of NumPy. Ridge is not a different method; it is least squares with the floor tilted.</a:t>
+            </a:r>
+          </a:p>
+          <a:p>
+            <a:pPr lvl="0" indent="0" marL="0">
+              <a:buNone/>
+            </a:pPr>
+          </a:p>
+          <a:p>
+            <a:pPr lvl="0" indent="0" marL="0">
+              <a:buNone/>
+            </a:pPr>
+            <a:r>
+              <a:rPr/>
+              <a:t>Note that Lasso has no such formula. The absolute value has a corner, so it cannot be differentiated at zero, and the solution has to be found iteratively. That inconvenience is inseparable from the property that makes Lasso useful - the corner is exactly what produces the zeros.</a:t>
+            </a:r>
+          </a:p>
+          <a:p>
+            <a:pPr lvl="0" indent="0" marL="0">
+              <a:buNone/>
+            </a:pPr>
+          </a:p>
+          <a:p>
+            <a:pPr lvl="0" indent="0" marL="0">
+              <a:buNone/>
+            </a:pPr>
+            <a:r>
+              <a:rPr/>
+              <a:t>Handout section 6.2 derives it in three lines.</a:t>
             </a:r>
           </a:p>
         </p:txBody>
@@ -4774,63 +4785,53 @@
             </a:pPr>
             <a:r>
               <a:rPr/>
-              <a:t>Intuition before algebra again, and this one is worth the time.</a:t>
-            </a:r>
-          </a:p>
-          <a:p>
-            <a:pPr lvl="0" indent="0" marL="0">
-              <a:buNone/>
-            </a:pPr>
-          </a:p>
-          <a:p>
-            <a:pPr lvl="0" indent="0" marL="0">
-              <a:buNone/>
-            </a:pPr>
-            <a:r>
-              <a:rPr/>
-              <a:t>Think of the penalty as a budget: you may spend a fixed total on coefficients and want the best fit that money buys. Draw what you can afford. Charging squares gives a disc; charging absolute values gives a diamond on its corners.</a:t>
-            </a:r>
-          </a:p>
-          <a:p>
-            <a:pPr lvl="0" indent="0" marL="0">
-              <a:buNone/>
-            </a:pPr>
-          </a:p>
-          <a:p>
-            <a:pPr lvl="0" indent="0" marL="0">
-              <a:buNone/>
-            </a:pPr>
-            <a:r>
-              <a:rPr/>
-              <a:t>The best affordable fit is where the error contours first touch the region.</a:t>
-            </a:r>
-          </a:p>
-          <a:p>
-            <a:pPr lvl="0" indent="0" marL="0">
-              <a:buNone/>
-            </a:pPr>
-          </a:p>
-          <a:p>
-            <a:pPr lvl="0" indent="0" marL="0">
-              <a:buNone/>
-            </a:pPr>
-            <a:r>
-              <a:rPr/>
-              <a:t>A disc is smooth, so contact happens at a generic point with both coefficients non-zero. A diamond has corners, its corners lie ON THE AXES, and a corner is a point where one coefficient is exactly zero. Corners stick out, so they get touched first.</a:t>
-            </a:r>
-          </a:p>
-          <a:p>
-            <a:pPr lvl="0" indent="0" marL="0">
-              <a:buNone/>
-            </a:pPr>
-          </a:p>
-          <a:p>
-            <a:pPr lvl="0" indent="0" marL="0">
-              <a:buNone/>
-            </a:pPr>
-            <a:r>
-              <a:rPr/>
-              <a:t>That is the entire reason Lasso produces zeros and Ridge does not. Not a tolerance, not a numerical accident - the shape of the budget.</a:t>
+              <a:t>Come back to the ravine picture from before the break. The reason two identical columns break least squares is that there is a direction in which moving the coefficients changes the predictions not at all - the valley is perfectly flat along it, so there is no unique lowest point. Infinitely many answers fit equally well.</a:t>
+            </a:r>
+          </a:p>
+          <a:p>
+            <a:pPr lvl="0" indent="0" marL="0">
+              <a:buNone/>
+            </a:pPr>
+          </a:p>
+          <a:p>
+            <a:pPr lvl="0" indent="0" marL="0">
+              <a:buNone/>
+            </a:pPr>
+            <a:r>
+              <a:rPr/>
+              <a:t>Ridge tilts the floor. Once coefficient size costs something, moving along that flat direction is no longer free, the flatness acquires a slope, and a single lowest point appears.</a:t>
+            </a:r>
+          </a:p>
+          <a:p>
+            <a:pPr lvl="0" indent="0" marL="0">
+              <a:buNone/>
+            </a:pPr>
+          </a:p>
+          <a:p>
+            <a:pPr lvl="0" indent="0" marL="0">
+              <a:buNone/>
+            </a:pPr>
+            <a:r>
+              <a:rPr/>
+              <a:t>The algebraic version is the third bullet and it is worth one sentence: adding lambda to the diagonal shifts every eigenvalue up by lambda, and a matrix is singular exactly when one of its eigenvalues is zero. So for any lambda above zero, it cannot be singular. </a:t>
+            </a:r>
+            <a:r>
+              <a:rPr b="1"/>
+              <a:t>Ridge always has a unique answer, even where least squares has none at all.</a:t>
+            </a:r>
+          </a:p>
+          <a:p>
+            <a:pPr lvl="0" indent="0" marL="0">
+              <a:buNone/>
+            </a:pPr>
+          </a:p>
+          <a:p>
+            <a:pPr lvl="0" indent="0" marL="0">
+              <a:buNone/>
+            </a:pPr>
+            <a:r>
+              <a:rPr/>
+              <a:t>Worth saying plainly: Hoerl and Kennard invented ridge in 1970 for this problem, not for overfitting. The overfitting cure was the side effect.</a:t>
             </a:r>
           </a:p>
         </p:txBody>
@@ -4912,49 +4913,63 @@
             </a:pPr>
             <a:r>
               <a:rPr/>
-              <a:t>From notebook 3. Left: ridge coefficients approach zero smoothly and never arrive. Right: lasso coefficients hit zero at a finite lambda and stay.</a:t>
-            </a:r>
-          </a:p>
-          <a:p>
-            <a:pPr lvl="0" indent="0" marL="0">
-              <a:buNone/>
-            </a:pPr>
-          </a:p>
-          <a:p>
-            <a:pPr lvl="0" indent="0" marL="0">
-              <a:buNone/>
-            </a:pPr>
-            <a:r>
-              <a:rPr/>
-              <a:t>Give the order in which lasso drops features on the housing data, because it is not arbitrary: garage first at lambda 10,000 - the smallest effect once everything is on a common scale - then distance and age, and by 40,000 only area survives.</a:t>
-            </a:r>
-          </a:p>
-          <a:p>
-            <a:pPr lvl="0" indent="0" marL="0">
-              <a:buNone/>
-            </a:pPr>
-          </a:p>
-          <a:p>
-            <a:pPr lvl="0" indent="0" marL="0">
-              <a:buNone/>
-            </a:pPr>
-            <a:r>
-              <a:rPr/>
-              <a:t>Nobody told it which features matter. It was told to keep the total size small, and this is the arrangement that buys the most accuracy per euro of coefficient spent.</a:t>
-            </a:r>
-          </a:p>
-          <a:p>
-            <a:pPr lvl="0" indent="0" marL="0">
-              <a:buNone/>
-            </a:pPr>
-          </a:p>
-          <a:p>
-            <a:pPr lvl="0" indent="0" marL="0">
-              <a:buNone/>
-            </a:pPr>
-            <a:r>
-              <a:rPr/>
-              <a:t>The warning: the selection depends entirely on lambda, so “Lasso chose these features” is never a complete statement.</a:t>
+              <a:t>Intuition before algebra again, and this one is worth the time.</a:t>
+            </a:r>
+          </a:p>
+          <a:p>
+            <a:pPr lvl="0" indent="0" marL="0">
+              <a:buNone/>
+            </a:pPr>
+          </a:p>
+          <a:p>
+            <a:pPr lvl="0" indent="0" marL="0">
+              <a:buNone/>
+            </a:pPr>
+            <a:r>
+              <a:rPr/>
+              <a:t>Think of the penalty as a budget: you may spend a fixed total on coefficients and want the best fit that money buys. Draw what you can afford. Charging squares gives a disc; charging absolute values gives a diamond on its corners.</a:t>
+            </a:r>
+          </a:p>
+          <a:p>
+            <a:pPr lvl="0" indent="0" marL="0">
+              <a:buNone/>
+            </a:pPr>
+          </a:p>
+          <a:p>
+            <a:pPr lvl="0" indent="0" marL="0">
+              <a:buNone/>
+            </a:pPr>
+            <a:r>
+              <a:rPr/>
+              <a:t>The best affordable fit is where the error contours first touch the region.</a:t>
+            </a:r>
+          </a:p>
+          <a:p>
+            <a:pPr lvl="0" indent="0" marL="0">
+              <a:buNone/>
+            </a:pPr>
+          </a:p>
+          <a:p>
+            <a:pPr lvl="0" indent="0" marL="0">
+              <a:buNone/>
+            </a:pPr>
+            <a:r>
+              <a:rPr/>
+              <a:t>A disc is smooth, so contact happens at a generic point with both coefficients non-zero. A diamond has corners, its corners lie ON THE AXES, and a corner is a point where one coefficient is exactly zero. Corners stick out, so they get touched first.</a:t>
+            </a:r>
+          </a:p>
+          <a:p>
+            <a:pPr lvl="0" indent="0" marL="0">
+              <a:buNone/>
+            </a:pPr>
+          </a:p>
+          <a:p>
+            <a:pPr lvl="0" indent="0" marL="0">
+              <a:buNone/>
+            </a:pPr>
+            <a:r>
+              <a:rPr/>
+              <a:t>That is the entire reason Lasso produces zeros and Ridge does not. Not a tolerance, not a numerical accident - the shape of the budget.</a:t>
             </a:r>
           </a:p>
         </p:txBody>
@@ -5036,91 +5051,49 @@
             </a:pPr>
             <a:r>
               <a:rPr/>
-              <a:t>The previous picture, now as numbers. Read down the right column.</a:t>
-            </a:r>
-          </a:p>
-          <a:p>
-            <a:pPr lvl="0" indent="0" marL="0">
-              <a:buNone/>
-            </a:pPr>
-          </a:p>
-          <a:p>
-            <a:pPr lvl="0" indent="0" marL="0">
-              <a:buNone/>
-            </a:pPr>
-            <a:r>
-              <a:rPr/>
-              <a:t>The order is not arbitrary and it is worth asking the room to explain it before you do. </a:t>
-            </a:r>
-            <a:r>
-              <a:rPr>
-                <a:latin typeface="Courier"/>
-              </a:rPr>
-              <a:t>garage</a:t>
-            </a:r>
-            <a:r>
-              <a:rPr/>
-              <a:t> goes first because, once every feature is on a common scale, it buys the least accuracy per unit of coefficient spent. </a:t>
-            </a:r>
-            <a:r>
-              <a:rPr>
-                <a:latin typeface="Courier"/>
-              </a:rPr>
-              <a:t>area_sqm</a:t>
-            </a:r>
-            <a:r>
-              <a:rPr/>
-              <a:t> survives longest because it buys the most.</a:t>
-            </a:r>
-          </a:p>
-          <a:p>
-            <a:pPr lvl="0" indent="0" marL="0">
-              <a:buNone/>
-            </a:pPr>
-          </a:p>
-          <a:p>
-            <a:pPr lvl="0" indent="0" marL="0">
-              <a:buNone/>
-            </a:pPr>
-            <a:r>
-              <a:rPr/>
-              <a:t>Nobody told Lasso which features mattered. It was given a budget and told to spend it well, and this ranking fell out of that - which is genuinely remarkable and is why Lasso is used as a feature selector at all.</a:t>
-            </a:r>
-          </a:p>
-          <a:p>
-            <a:pPr lvl="0" indent="0" marL="0">
-              <a:buNone/>
-            </a:pPr>
-          </a:p>
-          <a:p>
-            <a:pPr lvl="0" indent="0" marL="0">
-              <a:buNone/>
-            </a:pPr>
-            <a:r>
-              <a:rPr/>
-              <a:t>Now the warning, and it is the part that gets forgotten in practice: </a:t>
-            </a:r>
-            <a:r>
-              <a:rPr b="1"/>
-              <a:t>the selection depends entirely on lambda</a:t>
-            </a:r>
-            <a:r>
-              <a:rPr/>
-              <a:t>. “Lasso chose these four features” is not a complete statement - at a different lambda it chooses differently. Presenting lasso output as an objective ranking of importance is one of the commonest misuses of it.</a:t>
-            </a:r>
-          </a:p>
-          <a:p>
-            <a:pPr lvl="0" indent="0" marL="0">
-              <a:buNone/>
-            </a:pPr>
-          </a:p>
-          <a:p>
-            <a:pPr lvl="0" indent="0" marL="0">
-              <a:buNone/>
-            </a:pPr>
-            <a:r>
-              <a:rPr/>
-              <a:t>Handout section 6.5.</a:t>
+              <a:t>From notebook 3. Left: ridge coefficients approach zero smoothly and never arrive. Right: lasso coefficients hit zero at a finite lambda and stay.</a:t>
+            </a:r>
+          </a:p>
+          <a:p>
+            <a:pPr lvl="0" indent="0" marL="0">
+              <a:buNone/>
+            </a:pPr>
+          </a:p>
+          <a:p>
+            <a:pPr lvl="0" indent="0" marL="0">
+              <a:buNone/>
+            </a:pPr>
+            <a:r>
+              <a:rPr/>
+              <a:t>Give the order in which lasso drops features on the housing data, because it is not arbitrary: garage first at lambda 10,000 - the smallest effect once everything is on a common scale - then distance and age, and by 40,000 only area survives.</a:t>
+            </a:r>
+          </a:p>
+          <a:p>
+            <a:pPr lvl="0" indent="0" marL="0">
+              <a:buNone/>
+            </a:pPr>
+          </a:p>
+          <a:p>
+            <a:pPr lvl="0" indent="0" marL="0">
+              <a:buNone/>
+            </a:pPr>
+            <a:r>
+              <a:rPr/>
+              <a:t>Nobody told it which features matter. It was told to keep the total size small, and this is the arrangement that buys the most accuracy per euro of coefficient spent.</a:t>
+            </a:r>
+          </a:p>
+          <a:p>
+            <a:pPr lvl="0" indent="0" marL="0">
+              <a:buNone/>
+            </a:pPr>
+          </a:p>
+          <a:p>
+            <a:pPr lvl="0" indent="0" marL="0">
+              <a:buNone/>
+            </a:pPr>
+            <a:r>
+              <a:rPr/>
+              <a:t>The warning: the selection depends entirely on lambda, so “Lasso chose these features” is never a complete statement.</a:t>
             </a:r>
           </a:p>
         </p:txBody>
@@ -5202,35 +5175,91 @@
             </a:pPr>
             <a:r>
               <a:rPr/>
-              <a:t>The situation from the failure-modes slide, made concrete: someone merged two systems and the same fact arrived twice.</a:t>
-            </a:r>
-          </a:p>
-          <a:p>
-            <a:pPr lvl="0" indent="0" marL="0">
-              <a:buNone/>
-            </a:pPr>
-          </a:p>
-          <a:p>
-            <a:pPr lvl="0" indent="0" marL="0">
-              <a:buNone/>
-            </a:pPr>
-            <a:r>
-              <a:rPr/>
-              <a:t>Ask what least squares should do. The honest answer is that it has no basis for choosing between “all the effect on the metres column” and “all of it on the feet column” and everything in between - they all fit identically.</a:t>
-            </a:r>
-          </a:p>
-          <a:p>
-            <a:pPr lvl="0" indent="0" marL="0">
-              <a:buNone/>
-            </a:pPr>
-          </a:p>
-          <a:p>
-            <a:pPr lvl="0" indent="0" marL="0">
-              <a:buNone/>
-            </a:pPr>
-            <a:r>
-              <a:rPr/>
-              <a:t>So it picks one arbitrarily, and the arbitrariness changes with the sample.</a:t>
+              <a:t>The previous picture, now as numbers. Read down the right column.</a:t>
+            </a:r>
+          </a:p>
+          <a:p>
+            <a:pPr lvl="0" indent="0" marL="0">
+              <a:buNone/>
+            </a:pPr>
+          </a:p>
+          <a:p>
+            <a:pPr lvl="0" indent="0" marL="0">
+              <a:buNone/>
+            </a:pPr>
+            <a:r>
+              <a:rPr/>
+              <a:t>The order is not arbitrary and it is worth asking the room to explain it before you do. </a:t>
+            </a:r>
+            <a:r>
+              <a:rPr>
+                <a:latin typeface="Courier"/>
+              </a:rPr>
+              <a:t>garage</a:t>
+            </a:r>
+            <a:r>
+              <a:rPr/>
+              <a:t> goes first because, once every feature is on a common scale, it buys the least accuracy per unit of coefficient spent. </a:t>
+            </a:r>
+            <a:r>
+              <a:rPr>
+                <a:latin typeface="Courier"/>
+              </a:rPr>
+              <a:t>area_sqm</a:t>
+            </a:r>
+            <a:r>
+              <a:rPr/>
+              <a:t> survives longest because it buys the most.</a:t>
+            </a:r>
+          </a:p>
+          <a:p>
+            <a:pPr lvl="0" indent="0" marL="0">
+              <a:buNone/>
+            </a:pPr>
+          </a:p>
+          <a:p>
+            <a:pPr lvl="0" indent="0" marL="0">
+              <a:buNone/>
+            </a:pPr>
+            <a:r>
+              <a:rPr/>
+              <a:t>Nobody told Lasso which features mattered. It was given a budget and told to spend it well, and this ranking fell out of that - which is genuinely remarkable and is why Lasso is used as a feature selector at all.</a:t>
+            </a:r>
+          </a:p>
+          <a:p>
+            <a:pPr lvl="0" indent="0" marL="0">
+              <a:buNone/>
+            </a:pPr>
+          </a:p>
+          <a:p>
+            <a:pPr lvl="0" indent="0" marL="0">
+              <a:buNone/>
+            </a:pPr>
+            <a:r>
+              <a:rPr/>
+              <a:t>Now the warning, and it is the part that gets forgotten in practice: </a:t>
+            </a:r>
+            <a:r>
+              <a:rPr b="1"/>
+              <a:t>the selection depends entirely on lambda</a:t>
+            </a:r>
+            <a:r>
+              <a:rPr/>
+              <a:t>. “Lasso chose these four features” is not a complete statement - at a different lambda it chooses differently. Presenting lasso output as an objective ranking of importance is one of the commonest misuses of it.</a:t>
+            </a:r>
+          </a:p>
+          <a:p>
+            <a:pPr lvl="0" indent="0" marL="0">
+              <a:buNone/>
+            </a:pPr>
+          </a:p>
+          <a:p>
+            <a:pPr lvl="0" indent="0" marL="0">
+              <a:buNone/>
+            </a:pPr>
+            <a:r>
+              <a:rPr/>
+              <a:t>Handout section 6.5.</a:t>
             </a:r>
           </a:p>
         </p:txBody>
@@ -5312,49 +5341,35 @@
             </a:pPr>
             <a:r>
               <a:rPr/>
-              <a:t>Same dataset, four different random splits. The area coefficient varies by a factor of five, and its duplicate swings the opposite way to compensate.</a:t>
-            </a:r>
-          </a:p>
-          <a:p>
-            <a:pPr lvl="0" indent="0" marL="0">
-              <a:buNone/>
-            </a:pPr>
-          </a:p>
-          <a:p>
-            <a:pPr lvl="0" indent="0" marL="0">
-              <a:buNone/>
-            </a:pPr>
-            <a:r>
-              <a:rPr/>
-              <a:t>Stress what is and is not broken: the PREDICTIONS are fine throughout - the combined effect is stable at about 2,420, close to the true 2,400. It is the EXPLANATION that is noise.</a:t>
-            </a:r>
-          </a:p>
-          <a:p>
-            <a:pPr lvl="0" indent="0" marL="0">
-              <a:buNone/>
-            </a:pPr>
-          </a:p>
-          <a:p>
-            <a:pPr lvl="0" indent="0" marL="0">
-              <a:buNone/>
-            </a:pPr>
-            <a:r>
-              <a:rPr/>
-              <a:t>Anyone reading these coefficients to learn what drives house prices would draw nonsense, confidently. With ridge at lambda 10 the same four splits give 38,000 to 41,000 on both columns, split evenly, because two moderate coefficients cost less under a squared penalty than one huge positive and one huge negative.</a:t>
-            </a:r>
-          </a:p>
-          <a:p>
-            <a:pPr lvl="0" indent="0" marL="0">
-              <a:buNone/>
-            </a:pPr>
-          </a:p>
-          <a:p>
-            <a:pPr lvl="0" indent="0" marL="0">
-              <a:buNone/>
-            </a:pPr>
-            <a:r>
-              <a:rPr/>
-              <a:t>So ridge is not only a cure for overfitting. It is what makes coefficients readable when features overlap - which in real data they always do.</a:t>
+              <a:t>The situation from the failure-modes slide, made concrete: someone merged two systems and the same fact arrived twice.</a:t>
+            </a:r>
+          </a:p>
+          <a:p>
+            <a:pPr lvl="0" indent="0" marL="0">
+              <a:buNone/>
+            </a:pPr>
+          </a:p>
+          <a:p>
+            <a:pPr lvl="0" indent="0" marL="0">
+              <a:buNone/>
+            </a:pPr>
+            <a:r>
+              <a:rPr/>
+              <a:t>Ask what least squares should do. The honest answer is that it has no basis for choosing between “all the effect on the metres column” and “all of it on the feet column” and everything in between - they all fit identically.</a:t>
+            </a:r>
+          </a:p>
+          <a:p>
+            <a:pPr lvl="0" indent="0" marL="0">
+              <a:buNone/>
+            </a:pPr>
+          </a:p>
+          <a:p>
+            <a:pPr lvl="0" indent="0" marL="0">
+              <a:buNone/>
+            </a:pPr>
+            <a:r>
+              <a:rPr/>
+              <a:t>So it picks one arbitrarily, and the arbitrariness changes with the sample.</a:t>
             </a:r>
           </a:p>
         </p:txBody>
@@ -5436,67 +5451,49 @@
             </a:pPr>
             <a:r>
               <a:rPr/>
-              <a:t>That last clause is doing enormous work and is almost always skipped over. Say it slowly, then make it concrete.</a:t>
-            </a:r>
-          </a:p>
-          <a:p>
-            <a:pPr lvl="0" indent="0" marL="0">
-              <a:buNone/>
-            </a:pPr>
-          </a:p>
-          <a:p>
-            <a:pPr lvl="0" indent="0" marL="0">
-              <a:buNone/>
-            </a:pPr>
-            <a:r>
-              <a:rPr/>
-              <a:t>The coefficient on </a:t>
-            </a:r>
-            <a:r>
-              <a:rPr>
-                <a:latin typeface="Courier"/>
-              </a:rPr>
-              <a:t>bedrooms</a:t>
-            </a:r>
-            <a:r>
-              <a:rPr/>
-              <a:t> is not “what a bedroom is worth”. It is what a bedroom is worth </a:t>
-            </a:r>
-            <a:r>
-              <a:rPr i="1"/>
-              <a:t>to a house whose floor area does not change</a:t>
-            </a:r>
-            <a:r>
-              <a:rPr/>
-              <a:t> - which is a strange object. A house that gains a bedroom without gaining any space has had its existing rooms subdivided, and that is a genuinely different proposition from an extra bedroom in an extra 15 square metres.</a:t>
-            </a:r>
-          </a:p>
-          <a:p>
-            <a:pPr lvl="0" indent="0" marL="0">
-              <a:buNone/>
-            </a:pPr>
-          </a:p>
-          <a:p>
-            <a:pPr lvl="0" indent="0" marL="0">
-              <a:buNone/>
-            </a:pPr>
-            <a:r>
-              <a:rPr/>
-              <a:t>Ask the room what the coefficient on bedrooms ought to be for the subdivision version. Plausibly near zero, or negative. The estimate we get, 7,503, is a blend of that and something else - which is the setup for the next slide.</a:t>
-            </a:r>
-          </a:p>
-          <a:p>
-            <a:pPr lvl="0" indent="0" marL="0">
-              <a:buNone/>
-            </a:pPr>
-          </a:p>
-          <a:p>
-            <a:pPr lvl="0" indent="0" marL="0">
-              <a:buNone/>
-            </a:pPr>
-            <a:r>
-              <a:rPr/>
-              <a:t>This is the reason two honest analysts fit the same data, report different coefficients, and are both right: they included different features, so their “held fixed” clauses differ. Handout section 7.1.</a:t>
+              <a:t>Same dataset, four different random splits. The area coefficient varies by a factor of five, and its duplicate swings the opposite way to compensate.</a:t>
+            </a:r>
+          </a:p>
+          <a:p>
+            <a:pPr lvl="0" indent="0" marL="0">
+              <a:buNone/>
+            </a:pPr>
+          </a:p>
+          <a:p>
+            <a:pPr lvl="0" indent="0" marL="0">
+              <a:buNone/>
+            </a:pPr>
+            <a:r>
+              <a:rPr/>
+              <a:t>Stress what is and is not broken: the PREDICTIONS are fine throughout - the combined effect is stable at about 2,420, close to the true 2,400. It is the EXPLANATION that is noise.</a:t>
+            </a:r>
+          </a:p>
+          <a:p>
+            <a:pPr lvl="0" indent="0" marL="0">
+              <a:buNone/>
+            </a:pPr>
+          </a:p>
+          <a:p>
+            <a:pPr lvl="0" indent="0" marL="0">
+              <a:buNone/>
+            </a:pPr>
+            <a:r>
+              <a:rPr/>
+              <a:t>Anyone reading these coefficients to learn what drives house prices would draw nonsense, confidently. With ridge at lambda 10 the same four splits give 38,000 to 41,000 on both columns, split evenly, because two moderate coefficients cost less under a squared penalty than one huge positive and one huge negative.</a:t>
+            </a:r>
+          </a:p>
+          <a:p>
+            <a:pPr lvl="0" indent="0" marL="0">
+              <a:buNone/>
+            </a:pPr>
+          </a:p>
+          <a:p>
+            <a:pPr lvl="0" indent="0" marL="0">
+              <a:buNone/>
+            </a:pPr>
+            <a:r>
+              <a:rPr/>
+              <a:t>So ridge is not only a cure for overfitting. It is what makes coefficients readable when features overlap - which in real data they always do.</a:t>
             </a:r>
           </a:p>
         </p:txBody>
@@ -5578,49 +5575,67 @@
             </a:pPr>
             <a:r>
               <a:rPr/>
-              <a:t>From notebook 1, and this is the most transferable slide of the lesson.</a:t>
-            </a:r>
-          </a:p>
-          <a:p>
-            <a:pPr lvl="0" indent="0" marL="0">
-              <a:buNone/>
-            </a:pPr>
-          </a:p>
-          <a:p>
-            <a:pPr lvl="0" indent="0" marL="0">
-              <a:buNone/>
-            </a:pPr>
-            <a:r>
-              <a:rPr/>
-              <a:t>The x axis is how correlated each feature is with area; the y axis is how far its estimated coefficient landed from the truth. The three features uncorrelated with area - distance, age, garage - are recovered to within 1%. Bathrooms, at 0.49, is out by 9%. Bedrooms, at 0.77, is out by 17%.</a:t>
-            </a:r>
-          </a:p>
-          <a:p>
-            <a:pPr lvl="0" indent="0" marL="0">
-              <a:buNone/>
-            </a:pPr>
-          </a:p>
-          <a:p>
-            <a:pPr lvl="0" indent="0" marL="0">
-              <a:buNone/>
-            </a:pPr>
-            <a:r>
-              <a:rPr/>
-              <a:t>State the rule: a coefficient is only as trustworthy as its feature is independent. And on a real dataset the same wobble is there with nothing to reveal it - you would just have a number.</a:t>
-            </a:r>
-          </a:p>
-          <a:p>
-            <a:pPr lvl="0" indent="0" marL="0">
-              <a:buNone/>
-            </a:pPr>
-          </a:p>
-          <a:p>
-            <a:pPr lvl="0" indent="0" marL="0">
-              <a:buNone/>
-            </a:pPr>
-            <a:r>
-              <a:rPr/>
-              <a:t>Then the harder point, briefly: a coefficient is an association, not a causal effect. If houses near the centre are older and dearer, age and distance divide the effect between them however the sample suggests. Neither number tells you what would happen if you moved a house.</a:t>
+              <a:t>That last clause is doing enormous work and is almost always skipped over. Say it slowly, then make it concrete.</a:t>
+            </a:r>
+          </a:p>
+          <a:p>
+            <a:pPr lvl="0" indent="0" marL="0">
+              <a:buNone/>
+            </a:pPr>
+          </a:p>
+          <a:p>
+            <a:pPr lvl="0" indent="0" marL="0">
+              <a:buNone/>
+            </a:pPr>
+            <a:r>
+              <a:rPr/>
+              <a:t>The coefficient on </a:t>
+            </a:r>
+            <a:r>
+              <a:rPr>
+                <a:latin typeface="Courier"/>
+              </a:rPr>
+              <a:t>bedrooms</a:t>
+            </a:r>
+            <a:r>
+              <a:rPr/>
+              <a:t> is not “what a bedroom is worth”. It is what a bedroom is worth </a:t>
+            </a:r>
+            <a:r>
+              <a:rPr i="1"/>
+              <a:t>to a house whose floor area does not change</a:t>
+            </a:r>
+            <a:r>
+              <a:rPr/>
+              <a:t> - which is a strange object. A house that gains a bedroom without gaining any space has had its existing rooms subdivided, and that is a genuinely different proposition from an extra bedroom in an extra 15 square metres.</a:t>
+            </a:r>
+          </a:p>
+          <a:p>
+            <a:pPr lvl="0" indent="0" marL="0">
+              <a:buNone/>
+            </a:pPr>
+          </a:p>
+          <a:p>
+            <a:pPr lvl="0" indent="0" marL="0">
+              <a:buNone/>
+            </a:pPr>
+            <a:r>
+              <a:rPr/>
+              <a:t>Ask the room what the coefficient on bedrooms ought to be for the subdivision version. Plausibly near zero, or negative. The estimate we get, 7,503, is a blend of that and something else - which is the setup for the next slide.</a:t>
+            </a:r>
+          </a:p>
+          <a:p>
+            <a:pPr lvl="0" indent="0" marL="0">
+              <a:buNone/>
+            </a:pPr>
+          </a:p>
+          <a:p>
+            <a:pPr lvl="0" indent="0" marL="0">
+              <a:buNone/>
+            </a:pPr>
+            <a:r>
+              <a:rPr/>
+              <a:t>This is the reason two honest analysts fit the same data, report different coefficients, and are both right: they included different features, so their “held fixed” clauses differ. Handout section 7.1.</a:t>
             </a:r>
           </a:p>
         </p:txBody>
@@ -5702,21 +5717,49 @@
             </a:pPr>
             <a:r>
               <a:rPr/>
-              <a:t>30 minutes. The collinear section is the one to make sure everyone reaches - it is the argument they will use in their own projects when a stakeholder asks what the model says drives the outcome.</a:t>
-            </a:r>
-          </a:p>
-          <a:p>
-            <a:pPr lvl="0" indent="0" marL="0">
-              <a:buNone/>
-            </a:pPr>
-          </a:p>
-          <a:p>
-            <a:pPr lvl="0" indent="0" marL="0">
-              <a:buNone/>
-            </a:pPr>
-            <a:r>
-              <a:rPr/>
-              <a:t>The “try this” swaps Ridge for Lasso on the redundant columns. Ask them to predict which way lasso resolves it before running, then to explain why the two penalties disagree. It is a good check of whether the disc-and-diamond picture landed.</a:t>
+              <a:t>From notebook 1, and this is the most transferable slide of the lesson.</a:t>
+            </a:r>
+          </a:p>
+          <a:p>
+            <a:pPr lvl="0" indent="0" marL="0">
+              <a:buNone/>
+            </a:pPr>
+          </a:p>
+          <a:p>
+            <a:pPr lvl="0" indent="0" marL="0">
+              <a:buNone/>
+            </a:pPr>
+            <a:r>
+              <a:rPr/>
+              <a:t>The x axis is how correlated each feature is with area; the y axis is how far its estimated coefficient landed from the truth. The three features uncorrelated with area - distance, age, garage - are recovered to within 1%. Bathrooms, at 0.49, is out by 9%. Bedrooms, at 0.77, is out by 17%.</a:t>
+            </a:r>
+          </a:p>
+          <a:p>
+            <a:pPr lvl="0" indent="0" marL="0">
+              <a:buNone/>
+            </a:pPr>
+          </a:p>
+          <a:p>
+            <a:pPr lvl="0" indent="0" marL="0">
+              <a:buNone/>
+            </a:pPr>
+            <a:r>
+              <a:rPr/>
+              <a:t>State the rule: a coefficient is only as trustworthy as its feature is independent. And on a real dataset the same wobble is there with nothing to reveal it - you would just have a number.</a:t>
+            </a:r>
+          </a:p>
+          <a:p>
+            <a:pPr lvl="0" indent="0" marL="0">
+              <a:buNone/>
+            </a:pPr>
+          </a:p>
+          <a:p>
+            <a:pPr lvl="0" indent="0" marL="0">
+              <a:buNone/>
+            </a:pPr>
+            <a:r>
+              <a:rPr/>
+              <a:t>Then the harder point, briefly: a coefficient is an association, not a causal effect. If houses near the centre are older and dearer, age and distance divide the effect between them however the sample suggests. Neither number tells you what would happen if you moved a house.</a:t>
             </a:r>
           </a:p>
         </p:txBody>
@@ -5798,49 +5841,21 @@
             </a:pPr>
             <a:r>
               <a:rPr/>
-              <a:t>Draw the thread. Lesson 2 prepared data honestly; today we fitted something to it and found that fitting well and explaining well are different goals.</a:t>
-            </a:r>
-          </a:p>
-          <a:p>
-            <a:pPr lvl="0" indent="0" marL="0">
-              <a:buNone/>
-            </a:pPr>
-          </a:p>
-          <a:p>
-            <a:pPr lvl="0" indent="0" marL="0">
-              <a:buNone/>
-            </a:pPr>
-            <a:r>
-              <a:rPr/>
-              <a:t>The one sentence to leave them with: the model that fits your training data best is usually not the one you want.</a:t>
-            </a:r>
-          </a:p>
-          <a:p>
-            <a:pPr lvl="0" indent="0" marL="0">
-              <a:buNone/>
-            </a:pPr>
-          </a:p>
-          <a:p>
-            <a:pPr lvl="0" indent="0" marL="0">
-              <a:buNone/>
-            </a:pPr>
-            <a:r>
-              <a:rPr/>
-              <a:t>And the number to leave them with, repeated from before the break: a penalty of one hundredth took the largest coefficient from billions to 365 and the test error from 24,656 to 22.8. One number, chosen well, bought all of that.</a:t>
-            </a:r>
-          </a:p>
-          <a:p>
-            <a:pPr lvl="0" indent="0" marL="0">
-              <a:buNone/>
-            </a:pPr>
-          </a:p>
-          <a:p>
-            <a:pPr lvl="0" indent="0" marL="0">
-              <a:buNone/>
-            </a:pPr>
-            <a:r>
-              <a:rPr/>
-              <a:t>Preview lesson 4 in a sentence: same machinery, but the target becomes a category instead of a number - and that single change turns out to require a different cost function, for a reason that is one of the exam derivations.</a:t>
+              <a:t>30 minutes. The collinear section is the one to make sure everyone reaches - it is the argument they will use in their own projects when a stakeholder asks what the model says drives the outcome.</a:t>
+            </a:r>
+          </a:p>
+          <a:p>
+            <a:pPr lvl="0" indent="0" marL="0">
+              <a:buNone/>
+            </a:pPr>
+          </a:p>
+          <a:p>
+            <a:pPr lvl="0" indent="0" marL="0">
+              <a:buNone/>
+            </a:pPr>
+            <a:r>
+              <a:rPr/>
+              <a:t>The “try this” swaps Ridge for Lasso on the redundant columns. Ask them to predict which way lasso resolves it before running, then to explain why the two penalties disagree. It is a good check of whether the disc-and-diamond picture landed.</a:t>
             </a:r>
           </a:p>
         </p:txBody>
@@ -6032,49 +6047,49 @@
             </a:pPr>
             <a:r>
               <a:rPr/>
-              <a:t>Set it explicitly with the deadline. It uses a new dataset - bike sharing demand - so the exploration is theirs to do.</a:t>
-            </a:r>
-          </a:p>
-          <a:p>
-            <a:pPr lvl="0" indent="0" marL="0">
-              <a:buNone/>
-            </a:pPr>
-          </a:p>
-          <a:p>
-            <a:pPr lvl="0" indent="0" marL="0">
-              <a:buNone/>
-            </a:pPr>
-            <a:r>
-              <a:rPr/>
-              <a:t>Flag the two tasks that carry the most marks. Task 4 asks them to justify a choice of lambda without looking at the test set, which is genuinely awkward before lesson 5 and is meant to be: the point is to feel the need for cross-validation before being handed it. Task 6 asks which coefficients they trust and why, which is section 7 of the handout applied.</a:t>
-            </a:r>
-          </a:p>
-          <a:p>
-            <a:pPr lvl="0" indent="0" marL="0">
-              <a:buNone/>
-            </a:pPr>
-          </a:p>
-          <a:p>
-            <a:pPr lvl="0" indent="0" marL="0">
-              <a:buNone/>
-            </a:pPr>
-            <a:r>
-              <a:rPr/>
-              <a:t>As always: no marks for accuracy.</a:t>
-            </a:r>
-          </a:p>
-          <a:p>
-            <a:pPr lvl="0" indent="0" marL="0">
-              <a:buNone/>
-            </a:pPr>
-          </a:p>
-          <a:p>
-            <a:pPr lvl="0" indent="0" marL="0">
-              <a:buNone/>
-            </a:pPr>
-            <a:r>
-              <a:rPr/>
-              <a:t>Also remind them the project topic must be confirmed by lesson 4 - next week.</a:t>
+              <a:t>Draw the thread. Lesson 2 prepared data honestly; today we fitted something to it and found that fitting well and explaining well are different goals.</a:t>
+            </a:r>
+          </a:p>
+          <a:p>
+            <a:pPr lvl="0" indent="0" marL="0">
+              <a:buNone/>
+            </a:pPr>
+          </a:p>
+          <a:p>
+            <a:pPr lvl="0" indent="0" marL="0">
+              <a:buNone/>
+            </a:pPr>
+            <a:r>
+              <a:rPr/>
+              <a:t>The one sentence to leave them with: the model that fits your training data best is usually not the one you want.</a:t>
+            </a:r>
+          </a:p>
+          <a:p>
+            <a:pPr lvl="0" indent="0" marL="0">
+              <a:buNone/>
+            </a:pPr>
+          </a:p>
+          <a:p>
+            <a:pPr lvl="0" indent="0" marL="0">
+              <a:buNone/>
+            </a:pPr>
+            <a:r>
+              <a:rPr/>
+              <a:t>And the number to leave them with, repeated from before the break: a penalty of one hundredth took the largest coefficient from billions to 365 and the test error from 24,656 to 22.8. One number, chosen well, bought all of that.</a:t>
+            </a:r>
+          </a:p>
+          <a:p>
+            <a:pPr lvl="0" indent="0" marL="0">
+              <a:buNone/>
+            </a:pPr>
+          </a:p>
+          <a:p>
+            <a:pPr lvl="0" indent="0" marL="0">
+              <a:buNone/>
+            </a:pPr>
+            <a:r>
+              <a:rPr/>
+              <a:t>Preview lesson 4 in a sentence: same machinery, but the target becomes a category instead of a number - and that single change turns out to require a different cost function, for a reason that is one of the exam derivations.</a:t>
             </a:r>
           </a:p>
         </p:txBody>
@@ -6097,6 +6112,130 @@
             <a:fld id="{18BDFEC3-8487-43E8-A154-7C12CBC1FFF2}" type="slidenum">
               <a:rPr lang="en-US"/>
               <a:t>51</a:t>
+            </a:fld>
+            <a:endParaRPr lang="en-US"/>
+          </a:p>
+        </p:txBody>
+      </p:sp>
+    </p:spTree>
+  </p:cSld>
+</p:notes>
+</file>
+
+<file path=ppt/notesSlides/notesSlide51.xml><?xml version="1.0" encoding="utf-8"?>
+<p:notes xmlns:a="http://schemas.openxmlformats.org/drawingml/2006/main" xmlns:r="http://schemas.openxmlformats.org/officeDocument/2006/relationships" xmlns:p="http://schemas.openxmlformats.org/presentationml/2006/main">
+  <p:cSld>
+    <p:spTree>
+      <p:nvGrpSpPr>
+        <p:cNvPr id="1" name=""/>
+        <p:cNvGrpSpPr/>
+        <p:nvPr/>
+      </p:nvGrpSpPr>
+      <p:grpSpPr>
+        <a:xfrm>
+          <a:off x="0" y="0"/>
+          <a:ext cx="0" cy="0"/>
+          <a:chOff x="0" y="0"/>
+          <a:chExt cx="0" cy="0"/>
+        </a:xfrm>
+      </p:grpSpPr>
+      <p:sp>
+        <p:nvSpPr>
+          <p:cNvPr id="2" name="Slide Image Placeholder 1"/>
+          <p:cNvSpPr>
+            <a:spLocks noGrp="1" noRot="1" noChangeAspect="1"/>
+          </p:cNvSpPr>
+          <p:nvPr>
+            <p:ph type="sldImg"/>
+          </p:nvPr>
+        </p:nvSpPr>
+        <p:spPr/>
+      </p:sp>
+      <p:sp>
+        <p:nvSpPr>
+          <p:cNvPr id="3" name="Notes Placeholder 2"/>
+          <p:cNvSpPr>
+            <a:spLocks noGrp="1"/>
+          </p:cNvSpPr>
+          <p:nvPr>
+            <p:ph type="body" idx="1"/>
+          </p:nvPr>
+        </p:nvSpPr>
+        <p:spPr/>
+        <p:txBody>
+          <a:bodyPr/>
+          <a:lstStyle/>
+          <a:p>
+            <a:pPr lvl="0" indent="0" marL="0">
+              <a:buNone/>
+            </a:pPr>
+            <a:r>
+              <a:rPr/>
+              <a:t>Set it explicitly with the deadline. It uses a new dataset - bike sharing demand - so the exploration is theirs to do.</a:t>
+            </a:r>
+          </a:p>
+          <a:p>
+            <a:pPr lvl="0" indent="0" marL="0">
+              <a:buNone/>
+            </a:pPr>
+          </a:p>
+          <a:p>
+            <a:pPr lvl="0" indent="0" marL="0">
+              <a:buNone/>
+            </a:pPr>
+            <a:r>
+              <a:rPr/>
+              <a:t>Flag the two tasks that carry the most marks. Task 4 asks them to justify a choice of lambda without looking at the test set, which is genuinely awkward before lesson 5 and is meant to be: the point is to feel the need for cross-validation before being handed it. Task 6 asks which coefficients they trust and why, which is section 7 of the handout applied.</a:t>
+            </a:r>
+          </a:p>
+          <a:p>
+            <a:pPr lvl="0" indent="0" marL="0">
+              <a:buNone/>
+            </a:pPr>
+          </a:p>
+          <a:p>
+            <a:pPr lvl="0" indent="0" marL="0">
+              <a:buNone/>
+            </a:pPr>
+            <a:r>
+              <a:rPr/>
+              <a:t>As always: no marks for accuracy.</a:t>
+            </a:r>
+          </a:p>
+          <a:p>
+            <a:pPr lvl="0" indent="0" marL="0">
+              <a:buNone/>
+            </a:pPr>
+          </a:p>
+          <a:p>
+            <a:pPr lvl="0" indent="0" marL="0">
+              <a:buNone/>
+            </a:pPr>
+            <a:r>
+              <a:rPr/>
+              <a:t>Also remind them the project topic must be confirmed by lesson 4 - next week.</a:t>
+            </a:r>
+          </a:p>
+        </p:txBody>
+      </p:sp>
+      <p:sp>
+        <p:nvSpPr>
+          <p:cNvPr id="4" name="Slide Number Placeholder 3"/>
+          <p:cNvSpPr>
+            <a:spLocks noGrp="1"/>
+          </p:cNvSpPr>
+          <p:nvPr>
+            <p:ph type="sldNum" sz="quarter" idx="10"/>
+          </p:nvPr>
+        </p:nvSpPr>
+        <p:spPr/>
+        <p:txBody>
+          <a:bodyPr/>
+          <a:lstStyle/>
+          <a:p>
+            <a:fld id="{18BDFEC3-8487-43E8-A154-7C12CBC1FFF2}" type="slidenum">
+              <a:rPr lang="en-US"/>
+              <a:t>52</a:t>
             </a:fld>
             <a:endParaRPr lang="en-US"/>
           </a:p>
@@ -13667,6 +13806,179 @@
             </a:pPr>
             <a:r>
               <a:rPr/>
+              <a:t>The unpenalised fit leaves the picture</a:t>
+            </a:r>
+          </a:p>
+        </p:txBody>
+      </p:sp>
+      <p:pic>
+        <p:nvPicPr>
+          <p:cNvPr descr="ridge_degrees.png" id="0" name="Picture 1"/>
+          <p:cNvPicPr>
+            <a:picLocks noGrp="1" noChangeAspect="1"/>
+          </p:cNvPicPr>
+          <p:nvPr/>
+        </p:nvPicPr>
+        <p:blipFill>
+          <a:blip r:embed="rId3"/>
+          <a:stretch>
+            <a:fillRect/>
+          </a:stretch>
+        </p:blipFill>
+        <p:spPr bwMode="auto">
+          <a:xfrm>
+            <a:off x="457200" y="1703189"/>
+            <a:ext cx="8229600" cy="2286000"/>
+          </a:xfrm>
+          <a:prstGeom prst="rect">
+            <a:avLst/>
+          </a:prstGeom>
+          <a:noFill/>
+          <a:ln w="9525">
+            <a:noFill/>
+            <a:headEnd/>
+            <a:tailEnd/>
+          </a:ln>
+        </p:spPr>
+      </p:pic>
+    </p:spTree>
+  </p:cSld>
+</p:sld>
+</file>
+
+<file path=ppt/slides/slide4.xml><?xml version="1.0" encoding="utf-8"?>
+<p:sld xmlns:a="http://schemas.openxmlformats.org/drawingml/2006/main" xmlns:r="http://schemas.openxmlformats.org/officeDocument/2006/relationships" xmlns:p="http://schemas.openxmlformats.org/presentationml/2006/main">
+  <p:cSld>
+    <p:spTree>
+      <p:nvGrpSpPr>
+        <p:cNvPr id="1" name=""/>
+        <p:cNvGrpSpPr/>
+        <p:nvPr/>
+      </p:nvGrpSpPr>
+      <p:grpSpPr>
+        <a:xfrm>
+          <a:off x="0" y="0"/>
+          <a:ext cx="0" cy="0"/>
+          <a:chOff x="0" y="0"/>
+          <a:chExt cx="0" cy="0"/>
+        </a:xfrm>
+      </p:grpSpPr>
+      <p:sp>
+        <p:nvSpPr>
+          <p:cNvPr id="2" name="Title 1"/>
+          <p:cNvSpPr>
+            <a:spLocks noGrp="1"/>
+          </p:cNvSpPr>
+          <p:nvPr>
+            <p:ph type="title"/>
+          </p:nvPr>
+        </p:nvSpPr>
+        <p:spPr>
+          <a:xfrm>
+            <a:off x="457200" y="205979"/>
+            <a:ext cx="8229600" cy="857250"/>
+          </a:xfrm>
+        </p:spPr>
+        <p:txBody>
+          <a:bodyPr/>
+          <a:lstStyle/>
+          <a:p>
+            <a:pPr lvl="0" indent="0" marL="0">
+              <a:buNone/>
+            </a:pPr>
+            <a:r>
+              <a:rPr/>
+              <a:t>One dataset, all lesson</a:t>
+            </a:r>
+          </a:p>
+        </p:txBody>
+      </p:sp>
+      <p:sp>
+        <p:nvSpPr>
+          <p:cNvPr id="3" name="Content Placeholder 2"/>
+          <p:cNvSpPr>
+            <a:spLocks noGrp="1"/>
+          </p:cNvSpPr>
+          <p:nvPr>
+            <p:ph idx="1"/>
+          </p:nvPr>
+        </p:nvSpPr>
+        <p:spPr>
+          <a:xfrm>
+            <a:off x="457200" y="1200151"/>
+            <a:ext cx="8229600" cy="3394472"/>
+          </a:xfrm>
+        </p:spPr>
+        <p:txBody>
+          <a:bodyPr/>
+          <a:lstStyle/>
+          <a:p>
+            <a:pPr lvl="0" indent="0" marL="0">
+              <a:buNone/>
+            </a:pPr>
+            <a:r>
+              <a:rPr/>
+              <a:t>600 houses. Six measurements. A price.</a:t>
+            </a:r>
+          </a:p>
+          <a:p>
+            <a:pPr lvl="0" indent="0" marL="0">
+              <a:buNone/>
+            </a:pPr>
+            <a:r>
+              <a:rPr b="1"/>
+              <a:t>And we know the coefficients that generated it.</a:t>
+            </a:r>
+          </a:p>
+        </p:txBody>
+      </p:sp>
+    </p:spTree>
+  </p:cSld>
+</p:sld>
+</file>
+
+<file path=ppt/slides/slide40.xml><?xml version="1.0" encoding="utf-8"?>
+<p:sld xmlns:a="http://schemas.openxmlformats.org/drawingml/2006/main" xmlns:r="http://schemas.openxmlformats.org/officeDocument/2006/relationships" xmlns:p="http://schemas.openxmlformats.org/presentationml/2006/main">
+  <p:cSld>
+    <p:spTree>
+      <p:nvGrpSpPr>
+        <p:cNvPr id="1" name=""/>
+        <p:cNvGrpSpPr/>
+        <p:nvPr/>
+      </p:nvGrpSpPr>
+      <p:grpSpPr>
+        <a:xfrm>
+          <a:off x="0" y="0"/>
+          <a:ext cx="0" cy="0"/>
+          <a:chOff x="0" y="0"/>
+          <a:chExt cx="0" cy="0"/>
+        </a:xfrm>
+      </p:grpSpPr>
+      <p:sp>
+        <p:nvSpPr>
+          <p:cNvPr id="2" name="Title 1"/>
+          <p:cNvSpPr>
+            <a:spLocks noGrp="1"/>
+          </p:cNvSpPr>
+          <p:nvPr>
+            <p:ph type="title"/>
+          </p:nvPr>
+        </p:nvSpPr>
+        <p:spPr>
+          <a:xfrm>
+            <a:off x="457200" y="205979"/>
+            <a:ext cx="8229600" cy="857250"/>
+          </a:xfrm>
+        </p:spPr>
+        <p:txBody>
+          <a:bodyPr/>
+          <a:lstStyle/>
+          <a:p>
+            <a:pPr lvl="0" indent="0" marL="0">
+              <a:buNone/>
+            </a:pPr>
+            <a:r>
+              <a:rPr/>
               <a:t>Too flexible, too rigid</a:t>
             </a:r>
           </a:p>
@@ -13707,98 +14019,7 @@
 </p:sld>
 </file>
 
-<file path=ppt/slides/slide4.xml><?xml version="1.0" encoding="utf-8"?>
-<p:sld xmlns:a="http://schemas.openxmlformats.org/drawingml/2006/main" xmlns:r="http://schemas.openxmlformats.org/officeDocument/2006/relationships" xmlns:p="http://schemas.openxmlformats.org/presentationml/2006/main">
-  <p:cSld>
-    <p:spTree>
-      <p:nvGrpSpPr>
-        <p:cNvPr id="1" name=""/>
-        <p:cNvGrpSpPr/>
-        <p:nvPr/>
-      </p:nvGrpSpPr>
-      <p:grpSpPr>
-        <a:xfrm>
-          <a:off x="0" y="0"/>
-          <a:ext cx="0" cy="0"/>
-          <a:chOff x="0" y="0"/>
-          <a:chExt cx="0" cy="0"/>
-        </a:xfrm>
-      </p:grpSpPr>
-      <p:sp>
-        <p:nvSpPr>
-          <p:cNvPr id="2" name="Title 1"/>
-          <p:cNvSpPr>
-            <a:spLocks noGrp="1"/>
-          </p:cNvSpPr>
-          <p:nvPr>
-            <p:ph type="title"/>
-          </p:nvPr>
-        </p:nvSpPr>
-        <p:spPr>
-          <a:xfrm>
-            <a:off x="457200" y="205979"/>
-            <a:ext cx="8229600" cy="857250"/>
-          </a:xfrm>
-        </p:spPr>
-        <p:txBody>
-          <a:bodyPr/>
-          <a:lstStyle/>
-          <a:p>
-            <a:pPr lvl="0" indent="0" marL="0">
-              <a:buNone/>
-            </a:pPr>
-            <a:r>
-              <a:rPr/>
-              <a:t>One dataset, all lesson</a:t>
-            </a:r>
-          </a:p>
-        </p:txBody>
-      </p:sp>
-      <p:sp>
-        <p:nvSpPr>
-          <p:cNvPr id="3" name="Content Placeholder 2"/>
-          <p:cNvSpPr>
-            <a:spLocks noGrp="1"/>
-          </p:cNvSpPr>
-          <p:nvPr>
-            <p:ph idx="1"/>
-          </p:nvPr>
-        </p:nvSpPr>
-        <p:spPr>
-          <a:xfrm>
-            <a:off x="457200" y="1200151"/>
-            <a:ext cx="8229600" cy="3394472"/>
-          </a:xfrm>
-        </p:spPr>
-        <p:txBody>
-          <a:bodyPr/>
-          <a:lstStyle/>
-          <a:p>
-            <a:pPr lvl="0" indent="0" marL="0">
-              <a:buNone/>
-            </a:pPr>
-            <a:r>
-              <a:rPr/>
-              <a:t>600 houses. Six measurements. A price.</a:t>
-            </a:r>
-          </a:p>
-          <a:p>
-            <a:pPr lvl="0" indent="0" marL="0">
-              <a:buNone/>
-            </a:pPr>
-            <a:r>
-              <a:rPr b="1"/>
-              <a:t>And we know the coefficients that generated it.</a:t>
-            </a:r>
-          </a:p>
-        </p:txBody>
-      </p:sp>
-    </p:spTree>
-  </p:cSld>
-</p:sld>
-</file>
-
-<file path=ppt/slides/slide40.xml><?xml version="1.0" encoding="utf-8"?>
+<file path=ppt/slides/slide41.xml><?xml version="1.0" encoding="utf-8"?>
 <p:sld xmlns:a="http://schemas.openxmlformats.org/drawingml/2006/main" xmlns:r="http://schemas.openxmlformats.org/officeDocument/2006/relationships" xmlns:p="http://schemas.openxmlformats.org/presentationml/2006/main">
   <p:cSld>
     <p:spTree>
@@ -13880,7 +14101,7 @@
 </p:sld>
 </file>
 
-<file path=ppt/slides/slide41.xml><?xml version="1.0" encoding="utf-8"?>
+<file path=ppt/slides/slide42.xml><?xml version="1.0" encoding="utf-8"?>
 <p:sld xmlns:a="http://schemas.openxmlformats.org/drawingml/2006/main" xmlns:r="http://schemas.openxmlformats.org/officeDocument/2006/relationships" xmlns:p="http://schemas.openxmlformats.org/presentationml/2006/main">
   <p:cSld>
     <p:spTree>
@@ -13982,7 +14203,7 @@
 </p:sld>
 </file>
 
-<file path=ppt/slides/slide42.xml><?xml version="1.0" encoding="utf-8"?>
+<file path=ppt/slides/slide43.xml><?xml version="1.0" encoding="utf-8"?>
 <p:sld xmlns:a="http://schemas.openxmlformats.org/drawingml/2006/main" xmlns:r="http://schemas.openxmlformats.org/officeDocument/2006/relationships" xmlns:p="http://schemas.openxmlformats.org/presentationml/2006/main">
   <p:cSld>
     <p:spTree>
@@ -14064,7 +14285,7 @@
 </p:sld>
 </file>
 
-<file path=ppt/slides/slide43.xml><?xml version="1.0" encoding="utf-8"?>
+<file path=ppt/slides/slide44.xml><?xml version="1.0" encoding="utf-8"?>
 <p:sld xmlns:a="http://schemas.openxmlformats.org/drawingml/2006/main" xmlns:r="http://schemas.openxmlformats.org/officeDocument/2006/relationships" xmlns:p="http://schemas.openxmlformats.org/presentationml/2006/main">
   <p:cSld>
     <p:spTree>
@@ -14146,7 +14367,7 @@
 </p:sld>
 </file>
 
-<file path=ppt/slides/slide44.xml><?xml version="1.0" encoding="utf-8"?>
+<file path=ppt/slides/slide45.xml><?xml version="1.0" encoding="utf-8"?>
 <p:sld xmlns:a="http://schemas.openxmlformats.org/drawingml/2006/main" xmlns:r="http://schemas.openxmlformats.org/officeDocument/2006/relationships" xmlns:p="http://schemas.openxmlformats.org/presentationml/2006/main">
   <p:cSld>
     <p:spTree>
@@ -14430,7 +14651,7 @@
 </p:sld>
 </file>
 
-<file path=ppt/slides/slide45.xml><?xml version="1.0" encoding="utf-8"?>
+<file path=ppt/slides/slide46.xml><?xml version="1.0" encoding="utf-8"?>
 <p:sld xmlns:a="http://schemas.openxmlformats.org/drawingml/2006/main" xmlns:r="http://schemas.openxmlformats.org/officeDocument/2006/relationships" xmlns:p="http://schemas.openxmlformats.org/presentationml/2006/main">
   <p:cSld>
     <p:spTree>
@@ -14541,7 +14762,7 @@
 </p:sld>
 </file>
 
-<file path=ppt/slides/slide46.xml><?xml version="1.0" encoding="utf-8"?>
+<file path=ppt/slides/slide47.xml><?xml version="1.0" encoding="utf-8"?>
 <p:sld xmlns:a="http://schemas.openxmlformats.org/drawingml/2006/main" xmlns:r="http://schemas.openxmlformats.org/officeDocument/2006/relationships" xmlns:p="http://schemas.openxmlformats.org/presentationml/2006/main">
   <p:cSld>
     <p:spTree>
@@ -14860,7 +15081,7 @@
 </p:sld>
 </file>
 
-<file path=ppt/slides/slide47.xml><?xml version="1.0" encoding="utf-8"?>
+<file path=ppt/slides/slide48.xml><?xml version="1.0" encoding="utf-8"?>
 <p:sld xmlns:a="http://schemas.openxmlformats.org/drawingml/2006/main" xmlns:r="http://schemas.openxmlformats.org/officeDocument/2006/relationships" xmlns:p="http://schemas.openxmlformats.org/presentationml/2006/main">
   <p:cSld>
     <p:spTree>
@@ -14950,7 +15171,7 @@
 </p:sld>
 </file>
 
-<file path=ppt/slides/slide48.xml><?xml version="1.0" encoding="utf-8"?>
+<file path=ppt/slides/slide49.xml><?xml version="1.0" encoding="utf-8"?>
 <p:sld xmlns:a="http://schemas.openxmlformats.org/drawingml/2006/main" xmlns:r="http://schemas.openxmlformats.org/officeDocument/2006/relationships" xmlns:p="http://schemas.openxmlformats.org/presentationml/2006/main">
   <p:cSld>
     <p:spTree>
@@ -15027,88 +15248,6 @@
           </a:ln>
         </p:spPr>
       </p:pic>
-    </p:spTree>
-  </p:cSld>
-</p:sld>
-</file>
-
-<file path=ppt/slides/slide49.xml><?xml version="1.0" encoding="utf-8"?>
-<p:sld xmlns:a="http://schemas.openxmlformats.org/drawingml/2006/main" xmlns:r="http://schemas.openxmlformats.org/officeDocument/2006/relationships" xmlns:p="http://schemas.openxmlformats.org/presentationml/2006/main">
-  <p:cSld>
-    <p:spTree>
-      <p:nvGrpSpPr>
-        <p:cNvPr id="1" name=""/>
-        <p:cNvGrpSpPr/>
-        <p:nvPr/>
-      </p:nvGrpSpPr>
-      <p:grpSpPr>
-        <a:xfrm>
-          <a:off x="0" y="0"/>
-          <a:ext cx="0" cy="0"/>
-          <a:chOff x="0" y="0"/>
-          <a:chExt cx="0" cy="0"/>
-        </a:xfrm>
-      </p:grpSpPr>
-      <p:sp>
-        <p:nvSpPr>
-          <p:cNvPr id="2" name="Title 1"/>
-          <p:cNvSpPr>
-            <a:spLocks noGrp="1"/>
-          </p:cNvSpPr>
-          <p:nvPr>
-            <p:ph type="title"/>
-          </p:nvPr>
-        </p:nvSpPr>
-        <p:spPr>
-          <a:xfrm>
-            <a:off x="457200" y="205979"/>
-            <a:ext cx="8229600" cy="857250"/>
-          </a:xfrm>
-        </p:spPr>
-        <p:txBody>
-          <a:bodyPr/>
-          <a:lstStyle/>
-          <a:p>
-            <a:pPr lvl="0" indent="0" marL="0">
-              <a:buNone/>
-            </a:pPr>
-            <a:r>
-              <a:rPr/>
-              <a:t>Notebook 3, live</a:t>
-            </a:r>
-          </a:p>
-        </p:txBody>
-      </p:sp>
-      <p:sp>
-        <p:nvSpPr>
-          <p:cNvPr id="3" name="Content Placeholder 2"/>
-          <p:cNvSpPr>
-            <a:spLocks noGrp="1"/>
-          </p:cNvSpPr>
-          <p:nvPr>
-            <p:ph idx="1"/>
-          </p:nvPr>
-        </p:nvSpPr>
-        <p:spPr>
-          <a:xfrm>
-            <a:off x="457200" y="1200151"/>
-            <a:ext cx="8229600" cy="3394472"/>
-          </a:xfrm>
-        </p:spPr>
-        <p:txBody>
-          <a:bodyPr/>
-          <a:lstStyle/>
-          <a:p>
-            <a:pPr lvl="0" indent="0" marL="0">
-              <a:buNone/>
-            </a:pPr>
-            <a:r>
-              <a:rPr/>
-              <a:t>Ridge on the disaster, the regularisation paths, the collinear case.</a:t>
-            </a:r>
-          </a:p>
-        </p:txBody>
-      </p:sp>
     </p:spTree>
   </p:cSld>
 </p:sld>
@@ -15238,7 +15377,7 @@
             </a:pPr>
             <a:r>
               <a:rPr/>
-              <a:t>What we did today</a:t>
+              <a:t>Notebook 3, live</a:t>
             </a:r>
           </a:p>
         </p:txBody>
@@ -15263,49 +15402,12 @@
           <a:bodyPr/>
           <a:lstStyle/>
           <a:p>
-            <a:pPr lvl="0"/>
-            <a:r>
-              <a:rPr/>
-              <a:t>A model that claims a fixed amount per unit</a:t>
-            </a:r>
-          </a:p>
-          <a:p>
-            <a:pPr lvl="0"/>
-            <a:r>
-              <a:rPr/>
-              <a:t>An exact solution (a projection), and when it fails</a:t>
-            </a:r>
-          </a:p>
-          <a:p>
-            <a:pPr lvl="0"/>
-            <a:r>
-              <a:rPr/>
-              <a:t>An iterative one: walk downhill, mind your stride</a:t>
-            </a:r>
-          </a:p>
-          <a:p>
-            <a:pPr lvl="0"/>
-            <a:r>
-              <a:rPr/>
-              <a:t>Flexibility helps until it does not</a:t>
-            </a:r>
-          </a:p>
-          <a:p>
-            <a:pPr lvl="0"/>
-            <a:r>
-              <a:rPr/>
-              <a:t>Charging for size buys generalisation, and readable coefficients</a:t>
-            </a:r>
-          </a:p>
-          <a:p>
-            <a:pPr lvl="0"/>
-            <a:r>
-              <a:rPr b="1"/>
-              <a:t>365</a:t>
-            </a:r>
-            <a:r>
-              <a:rPr/>
-              <a:t> against billions: what a penalty of 0.01 costs, and buys</a:t>
+            <a:pPr lvl="0" indent="0" marL="0">
+              <a:buNone/>
+            </a:pPr>
+            <a:r>
+              <a:rPr/>
+              <a:t>Ridge on the disaster, the regularisation paths, the collinear case.</a:t>
             </a:r>
           </a:p>
         </p:txBody>
@@ -15316,6 +15418,125 @@
 </file>
 
 <file path=ppt/slides/slide51.xml><?xml version="1.0" encoding="utf-8"?>
+<p:sld xmlns:a="http://schemas.openxmlformats.org/drawingml/2006/main" xmlns:r="http://schemas.openxmlformats.org/officeDocument/2006/relationships" xmlns:p="http://schemas.openxmlformats.org/presentationml/2006/main">
+  <p:cSld>
+    <p:spTree>
+      <p:nvGrpSpPr>
+        <p:cNvPr id="1" name=""/>
+        <p:cNvGrpSpPr/>
+        <p:nvPr/>
+      </p:nvGrpSpPr>
+      <p:grpSpPr>
+        <a:xfrm>
+          <a:off x="0" y="0"/>
+          <a:ext cx="0" cy="0"/>
+          <a:chOff x="0" y="0"/>
+          <a:chExt cx="0" cy="0"/>
+        </a:xfrm>
+      </p:grpSpPr>
+      <p:sp>
+        <p:nvSpPr>
+          <p:cNvPr id="2" name="Title 1"/>
+          <p:cNvSpPr>
+            <a:spLocks noGrp="1"/>
+          </p:cNvSpPr>
+          <p:nvPr>
+            <p:ph type="title"/>
+          </p:nvPr>
+        </p:nvSpPr>
+        <p:spPr>
+          <a:xfrm>
+            <a:off x="457200" y="205979"/>
+            <a:ext cx="8229600" cy="857250"/>
+          </a:xfrm>
+        </p:spPr>
+        <p:txBody>
+          <a:bodyPr/>
+          <a:lstStyle/>
+          <a:p>
+            <a:pPr lvl="0" indent="0" marL="0">
+              <a:buNone/>
+            </a:pPr>
+            <a:r>
+              <a:rPr/>
+              <a:t>What we did today</a:t>
+            </a:r>
+          </a:p>
+        </p:txBody>
+      </p:sp>
+      <p:sp>
+        <p:nvSpPr>
+          <p:cNvPr id="3" name="Content Placeholder 2"/>
+          <p:cNvSpPr>
+            <a:spLocks noGrp="1"/>
+          </p:cNvSpPr>
+          <p:nvPr>
+            <p:ph idx="1"/>
+          </p:nvPr>
+        </p:nvSpPr>
+        <p:spPr>
+          <a:xfrm>
+            <a:off x="457200" y="1200151"/>
+            <a:ext cx="8229600" cy="3394472"/>
+          </a:xfrm>
+        </p:spPr>
+        <p:txBody>
+          <a:bodyPr/>
+          <a:lstStyle/>
+          <a:p>
+            <a:pPr lvl="0"/>
+            <a:r>
+              <a:rPr/>
+              <a:t>A model that claims a fixed amount per unit</a:t>
+            </a:r>
+          </a:p>
+          <a:p>
+            <a:pPr lvl="0"/>
+            <a:r>
+              <a:rPr/>
+              <a:t>An exact solution (a projection), and when it fails</a:t>
+            </a:r>
+          </a:p>
+          <a:p>
+            <a:pPr lvl="0"/>
+            <a:r>
+              <a:rPr/>
+              <a:t>An iterative one: walk downhill, mind your stride</a:t>
+            </a:r>
+          </a:p>
+          <a:p>
+            <a:pPr lvl="0"/>
+            <a:r>
+              <a:rPr/>
+              <a:t>Flexibility helps until it does not</a:t>
+            </a:r>
+          </a:p>
+          <a:p>
+            <a:pPr lvl="0"/>
+            <a:r>
+              <a:rPr/>
+              <a:t>Charging for size buys generalisation, and readable coefficients</a:t>
+            </a:r>
+          </a:p>
+          <a:p>
+            <a:pPr lvl="0"/>
+            <a:r>
+              <a:rPr b="1"/>
+              <a:t>365</a:t>
+            </a:r>
+            <a:r>
+              <a:rPr/>
+              <a:t> against billions: what a penalty of 0.01 costs, and buys</a:t>
+            </a:r>
+          </a:p>
+        </p:txBody>
+      </p:sp>
+    </p:spTree>
+  </p:cSld>
+</p:sld>
+</file>
+
+<file path=ppt/slides/slide52.xml><?xml version="1.0" encoding="utf-8"?>
 <p:sld xmlns:a="http://schemas.openxmlformats.org/drawingml/2006/main" xmlns:r="http://schemas.openxmlformats.org/officeDocument/2006/relationships" xmlns:p="http://schemas.openxmlformats.org/presentationml/2006/main">
   <p:cSld>
     <p:spTree>
